--- a/deliverables/presentation_soutenance_pfe_zero_shot_1h.pptx
+++ b/deliverables/presentation_soutenance_pfe_zero_shot_1h.pptx
@@ -2,38 +2,38 @@
 <file path=ppt/presentation.xml><?xml version="1.0" encoding="utf-8"?>
 <p:presentation xmlns:p="http://schemas.openxmlformats.org/presentationml/2006/main">
   <p:sldMasterIdLst>
-    <p:sldMasterId xmlns:r="http://schemas.openxmlformats.org/officeDocument/2006/relationships" id="2147483648" r:id="R19355cdf2cb44a25"/>
+    <p:sldMasterId xmlns:r="http://schemas.openxmlformats.org/officeDocument/2006/relationships" id="2147483648" r:id="Rbeb3403b613947d1"/>
   </p:sldMasterIdLst>
   <p:notesMasterIdLst>
-    <p:notesMasterId xmlns:r="http://schemas.openxmlformats.org/officeDocument/2006/relationships" r:id="R1a68aa9b1dd444b5"/>
+    <p:notesMasterId xmlns:r="http://schemas.openxmlformats.org/officeDocument/2006/relationships" r:id="Ra7149b515fbf49d5"/>
   </p:notesMasterIdLst>
   <p:sldIdLst>
-    <p:sldId xmlns:r="http://schemas.openxmlformats.org/officeDocument/2006/relationships" id="256" r:id="R8733907eb5fc4080"/>
-    <p:sldId xmlns:r="http://schemas.openxmlformats.org/officeDocument/2006/relationships" id="257" r:id="R679b40921fe54c58"/>
-    <p:sldId xmlns:r="http://schemas.openxmlformats.org/officeDocument/2006/relationships" id="258" r:id="R8392326a62434f49"/>
-    <p:sldId xmlns:r="http://schemas.openxmlformats.org/officeDocument/2006/relationships" id="259" r:id="Reb0635c6e3fc4030"/>
-    <p:sldId xmlns:r="http://schemas.openxmlformats.org/officeDocument/2006/relationships" id="260" r:id="R7f6ee6ac7d9c42fa"/>
-    <p:sldId xmlns:r="http://schemas.openxmlformats.org/officeDocument/2006/relationships" id="261" r:id="R9e103486109d4ab7"/>
-    <p:sldId xmlns:r="http://schemas.openxmlformats.org/officeDocument/2006/relationships" id="262" r:id="R32f6ce4c82a64929"/>
-    <p:sldId xmlns:r="http://schemas.openxmlformats.org/officeDocument/2006/relationships" id="263" r:id="R64e407bd49694521"/>
-    <p:sldId xmlns:r="http://schemas.openxmlformats.org/officeDocument/2006/relationships" id="264" r:id="R9441b82ef9bf4cfe"/>
-    <p:sldId xmlns:r="http://schemas.openxmlformats.org/officeDocument/2006/relationships" id="265" r:id="R826de587aee24ee6"/>
-    <p:sldId xmlns:r="http://schemas.openxmlformats.org/officeDocument/2006/relationships" id="266" r:id="R0c07b821abed461a"/>
-    <p:sldId xmlns:r="http://schemas.openxmlformats.org/officeDocument/2006/relationships" id="267" r:id="R21395d3d1aa6495e"/>
-    <p:sldId xmlns:r="http://schemas.openxmlformats.org/officeDocument/2006/relationships" id="268" r:id="R18b9a4fc03b24fc0"/>
-    <p:sldId xmlns:r="http://schemas.openxmlformats.org/officeDocument/2006/relationships" id="269" r:id="R3775312243934157"/>
-    <p:sldId xmlns:r="http://schemas.openxmlformats.org/officeDocument/2006/relationships" id="270" r:id="Rfc6a011b6c7c4931"/>
-    <p:sldId xmlns:r="http://schemas.openxmlformats.org/officeDocument/2006/relationships" id="271" r:id="Rf360617b0ce048ea"/>
-    <p:sldId xmlns:r="http://schemas.openxmlformats.org/officeDocument/2006/relationships" id="272" r:id="R6f216361aa904211"/>
-    <p:sldId xmlns:r="http://schemas.openxmlformats.org/officeDocument/2006/relationships" id="273" r:id="Rbb43b8b5baa24335"/>
-    <p:sldId xmlns:r="http://schemas.openxmlformats.org/officeDocument/2006/relationships" id="274" r:id="R4c73735ffdc241d2"/>
-    <p:sldId xmlns:r="http://schemas.openxmlformats.org/officeDocument/2006/relationships" id="275" r:id="Rd40fd82317bb42c8"/>
-    <p:sldId xmlns:r="http://schemas.openxmlformats.org/officeDocument/2006/relationships" id="276" r:id="R05c68fa08c724989"/>
-    <p:sldId xmlns:r="http://schemas.openxmlformats.org/officeDocument/2006/relationships" id="277" r:id="R11d65be17d3b4767"/>
-    <p:sldId xmlns:r="http://schemas.openxmlformats.org/officeDocument/2006/relationships" id="278" r:id="Rf4b8cbaf5273401d"/>
-    <p:sldId xmlns:r="http://schemas.openxmlformats.org/officeDocument/2006/relationships" id="279" r:id="R521c981afb1c43b5"/>
-    <p:sldId xmlns:r="http://schemas.openxmlformats.org/officeDocument/2006/relationships" id="280" r:id="R5c619744e7474267"/>
-    <p:sldId xmlns:r="http://schemas.openxmlformats.org/officeDocument/2006/relationships" id="281" r:id="Reff56eb3b6fb488a"/>
+    <p:sldId xmlns:r="http://schemas.openxmlformats.org/officeDocument/2006/relationships" id="256" r:id="R1f139bf8ab384772"/>
+    <p:sldId xmlns:r="http://schemas.openxmlformats.org/officeDocument/2006/relationships" id="257" r:id="R7f44bbde6171409c"/>
+    <p:sldId xmlns:r="http://schemas.openxmlformats.org/officeDocument/2006/relationships" id="258" r:id="R25ea0903895642a8"/>
+    <p:sldId xmlns:r="http://schemas.openxmlformats.org/officeDocument/2006/relationships" id="259" r:id="Rd0c5d66b6a4a49bc"/>
+    <p:sldId xmlns:r="http://schemas.openxmlformats.org/officeDocument/2006/relationships" id="260" r:id="Rfa1f70b91d4346fc"/>
+    <p:sldId xmlns:r="http://schemas.openxmlformats.org/officeDocument/2006/relationships" id="261" r:id="Rdde89635b40c4bd1"/>
+    <p:sldId xmlns:r="http://schemas.openxmlformats.org/officeDocument/2006/relationships" id="262" r:id="R94c77cd47ca14b6d"/>
+    <p:sldId xmlns:r="http://schemas.openxmlformats.org/officeDocument/2006/relationships" id="263" r:id="R0f0cf81744e54602"/>
+    <p:sldId xmlns:r="http://schemas.openxmlformats.org/officeDocument/2006/relationships" id="264" r:id="Rbe3708808be14775"/>
+    <p:sldId xmlns:r="http://schemas.openxmlformats.org/officeDocument/2006/relationships" id="265" r:id="R82af4dcaa3e9418d"/>
+    <p:sldId xmlns:r="http://schemas.openxmlformats.org/officeDocument/2006/relationships" id="266" r:id="R2b0ac6f368434f43"/>
+    <p:sldId xmlns:r="http://schemas.openxmlformats.org/officeDocument/2006/relationships" id="267" r:id="Ref41fa58724b4d93"/>
+    <p:sldId xmlns:r="http://schemas.openxmlformats.org/officeDocument/2006/relationships" id="268" r:id="Rb1cb3a8dada94cd0"/>
+    <p:sldId xmlns:r="http://schemas.openxmlformats.org/officeDocument/2006/relationships" id="269" r:id="R42c9a41187e34f74"/>
+    <p:sldId xmlns:r="http://schemas.openxmlformats.org/officeDocument/2006/relationships" id="270" r:id="Re9287e9e05234df8"/>
+    <p:sldId xmlns:r="http://schemas.openxmlformats.org/officeDocument/2006/relationships" id="271" r:id="R407dd57827004082"/>
+    <p:sldId xmlns:r="http://schemas.openxmlformats.org/officeDocument/2006/relationships" id="272" r:id="Re54a0a65d0a8431d"/>
+    <p:sldId xmlns:r="http://schemas.openxmlformats.org/officeDocument/2006/relationships" id="273" r:id="Rdc0a88655605451a"/>
+    <p:sldId xmlns:r="http://schemas.openxmlformats.org/officeDocument/2006/relationships" id="274" r:id="Rc602b02243964dad"/>
+    <p:sldId xmlns:r="http://schemas.openxmlformats.org/officeDocument/2006/relationships" id="275" r:id="Rf1f4db082cf64566"/>
+    <p:sldId xmlns:r="http://schemas.openxmlformats.org/officeDocument/2006/relationships" id="276" r:id="R6977d17575b541ff"/>
+    <p:sldId xmlns:r="http://schemas.openxmlformats.org/officeDocument/2006/relationships" id="277" r:id="R97011c217c4d4b1c"/>
+    <p:sldId xmlns:r="http://schemas.openxmlformats.org/officeDocument/2006/relationships" id="278" r:id="R6167f094b01e4e6f"/>
+    <p:sldId xmlns:r="http://schemas.openxmlformats.org/officeDocument/2006/relationships" id="279" r:id="R81b76fc5a11c4608"/>
+    <p:sldId xmlns:r="http://schemas.openxmlformats.org/officeDocument/2006/relationships" id="280" r:id="R76af94e284c249ab"/>
+    <p:sldId xmlns:r="http://schemas.openxmlformats.org/officeDocument/2006/relationships" id="281" r:id="R66ddc03d2b34488a"/>
   </p:sldIdLst>
   <p:sldSz cx="12192000" cy="6858000"/>
   <p:notesSz cx="6858000" cy="9144000"/>
@@ -2230,7 +2230,7 @@
   </p:cSld>
   <p:clrMap bg1="lt1" tx1="dk1" bg2="lt2" tx2="dk2" accent1="accent1" accent2="accent2" accent3="accent3" accent4="accent4" accent5="accent5" accent6="accent6" hlink="hlink" folHlink="folHlink"/>
   <p:sldLayoutIdLst>
-    <p:sldLayoutId xmlns:r="http://schemas.openxmlformats.org/officeDocument/2006/relationships" id="2147483649" r:id="R1811db45b63045fd"/>
+    <p:sldLayoutId xmlns:r="http://schemas.openxmlformats.org/officeDocument/2006/relationships" id="2147483649" r:id="Rdf02a69d49ef4e1c"/>
   </p:sldLayoutIdLst>
   <p:txStyles>
     <p:titleStyle>
@@ -2529,7 +2529,7 @@
           <p:cNvPr id="1" name="">
             <a:extLst xmlns:a="http://schemas.openxmlformats.org/drawingml/2006/main">
               <a:ext uri="{FF2B5EF4-FFF2-40B4-BE49-F238E27FC236}">
-                <a16:creationId xmlns:a16="http://schemas.microsoft.com/office/drawing/2014/main" id="{8DBCDDDF-DC95-4519-9095-9DF3ACB17ADB}"/>
+                <a16:creationId xmlns:a16="http://schemas.microsoft.com/office/drawing/2014/main" id="{33262BCD-BD07-4397-8833-FD170C83CADB}"/>
               </a:ext>
             </a:extLst>
           </p:cNvPr>
@@ -2562,7 +2562,7 @@
           <p:cNvPr id="2" name="">
             <a:extLst xmlns:a="http://schemas.openxmlformats.org/drawingml/2006/main">
               <a:ext uri="{FF2B5EF4-FFF2-40B4-BE49-F238E27FC236}">
-                <a16:creationId xmlns:a16="http://schemas.microsoft.com/office/drawing/2014/main" id="{F6F8BF57-4381-4806-AE72-6C38B47A1E13}"/>
+                <a16:creationId xmlns:a16="http://schemas.microsoft.com/office/drawing/2014/main" id="{EC1BEC28-B023-48F8-B447-8A7F4DA76F5B}"/>
               </a:ext>
             </a:extLst>
           </p:cNvPr>
@@ -2595,7 +2595,7 @@
           <p:cNvPr id="3" name="">
             <a:extLst xmlns:a="http://schemas.openxmlformats.org/drawingml/2006/main">
               <a:ext uri="{FF2B5EF4-FFF2-40B4-BE49-F238E27FC236}">
-                <a16:creationId xmlns:a16="http://schemas.microsoft.com/office/drawing/2014/main" id="{457AE888-9033-4900-BF47-16028CFC4562}"/>
+                <a16:creationId xmlns:a16="http://schemas.microsoft.com/office/drawing/2014/main" id="{E7FC6FAB-B79D-4834-8187-FC6F22438BE3}"/>
               </a:ext>
             </a:extLst>
           </p:cNvPr>
@@ -2628,7 +2628,7 @@
           <p:cNvPr id="4" name="">
             <a:extLst xmlns:a="http://schemas.openxmlformats.org/drawingml/2006/main">
               <a:ext uri="{FF2B5EF4-FFF2-40B4-BE49-F238E27FC236}">
-                <a16:creationId xmlns:a16="http://schemas.microsoft.com/office/drawing/2014/main" id="{35BCC0CA-7B16-4FA3-851C-619D0AE018FA}"/>
+                <a16:creationId xmlns:a16="http://schemas.microsoft.com/office/drawing/2014/main" id="{3616D227-EFB8-4B4D-AA97-F5A7D02F1EBF}"/>
               </a:ext>
             </a:extLst>
           </p:cNvPr>
@@ -2692,7 +2692,7 @@
           <p:cNvPr id="5" name="">
             <a:extLst xmlns:a="http://schemas.openxmlformats.org/drawingml/2006/main">
               <a:ext uri="{FF2B5EF4-FFF2-40B4-BE49-F238E27FC236}">
-                <a16:creationId xmlns:a16="http://schemas.microsoft.com/office/drawing/2014/main" id="{D084298C-3D43-46D7-B19C-B062C7F7F6E1}"/>
+                <a16:creationId xmlns:a16="http://schemas.microsoft.com/office/drawing/2014/main" id="{43536816-F340-4C5A-9CD0-7CA95AA4DBE9}"/>
               </a:ext>
             </a:extLst>
           </p:cNvPr>
@@ -2756,7 +2756,7 @@
           <p:cNvPr id="6" name="">
             <a:extLst xmlns:a="http://schemas.openxmlformats.org/drawingml/2006/main">
               <a:ext uri="{FF2B5EF4-FFF2-40B4-BE49-F238E27FC236}">
-                <a16:creationId xmlns:a16="http://schemas.microsoft.com/office/drawing/2014/main" id="{F191F1B0-B9E6-453E-BC34-08E0ADCEFA59}"/>
+                <a16:creationId xmlns:a16="http://schemas.microsoft.com/office/drawing/2014/main" id="{7BAD6C0C-06E9-4F6D-AB31-1F9B5BBFF2A5}"/>
               </a:ext>
             </a:extLst>
           </p:cNvPr>
@@ -2820,7 +2820,7 @@
           <p:cNvPr id="7" name="">
             <a:extLst xmlns:a="http://schemas.openxmlformats.org/drawingml/2006/main">
               <a:ext uri="{FF2B5EF4-FFF2-40B4-BE49-F238E27FC236}">
-                <a16:creationId xmlns:a16="http://schemas.microsoft.com/office/drawing/2014/main" id="{F1585B33-E5A6-4722-B5D5-F3FD697F8991}"/>
+                <a16:creationId xmlns:a16="http://schemas.microsoft.com/office/drawing/2014/main" id="{C8287C20-086E-4758-8B6D-F30E6AEADCE4}"/>
               </a:ext>
             </a:extLst>
           </p:cNvPr>
@@ -2853,7 +2853,7 @@
           <p:cNvPr id="8" name="">
             <a:extLst xmlns:a="http://schemas.openxmlformats.org/drawingml/2006/main">
               <a:ext uri="{FF2B5EF4-FFF2-40B4-BE49-F238E27FC236}">
-                <a16:creationId xmlns:a16="http://schemas.microsoft.com/office/drawing/2014/main" id="{4C8828C5-63E9-4160-8660-6934AFC27297}"/>
+                <a16:creationId xmlns:a16="http://schemas.microsoft.com/office/drawing/2014/main" id="{5E058DB3-D29E-4425-AE75-3018C9788FF3}"/>
               </a:ext>
             </a:extLst>
           </p:cNvPr>
@@ -2917,7 +2917,7 @@
           <p:cNvPr id="9" name="">
             <a:extLst xmlns:a="http://schemas.openxmlformats.org/drawingml/2006/main">
               <a:ext uri="{FF2B5EF4-FFF2-40B4-BE49-F238E27FC236}">
-                <a16:creationId xmlns:a16="http://schemas.microsoft.com/office/drawing/2014/main" id="{09B1326C-8BC6-469B-B97F-D85B50D8BA65}"/>
+                <a16:creationId xmlns:a16="http://schemas.microsoft.com/office/drawing/2014/main" id="{B8C2378C-2735-448C-AB9F-891683D4DC88}"/>
               </a:ext>
             </a:extLst>
           </p:cNvPr>
@@ -2981,7 +2981,7 @@
           <p:cNvPr id="10" name="">
             <a:extLst xmlns:a="http://schemas.openxmlformats.org/drawingml/2006/main">
               <a:ext uri="{FF2B5EF4-FFF2-40B4-BE49-F238E27FC236}">
-                <a16:creationId xmlns:a16="http://schemas.microsoft.com/office/drawing/2014/main" id="{6DE271A1-6448-428F-AEE2-7ACE96BB9CE7}"/>
+                <a16:creationId xmlns:a16="http://schemas.microsoft.com/office/drawing/2014/main" id="{1C9CA46C-5CBD-4075-AC85-0EFAD263B684}"/>
               </a:ext>
             </a:extLst>
           </p:cNvPr>
@@ -3014,7 +3014,7 @@
           <p:cNvPr id="11" name="">
             <a:extLst xmlns:a="http://schemas.openxmlformats.org/drawingml/2006/main">
               <a:ext uri="{FF2B5EF4-FFF2-40B4-BE49-F238E27FC236}">
-                <a16:creationId xmlns:a16="http://schemas.microsoft.com/office/drawing/2014/main" id="{C8383968-DE83-4F78-9467-0CB73411E10D}"/>
+                <a16:creationId xmlns:a16="http://schemas.microsoft.com/office/drawing/2014/main" id="{3DB56415-6F9F-4ED5-B1C2-FF92F40AD4D4}"/>
               </a:ext>
             </a:extLst>
           </p:cNvPr>
@@ -3078,7 +3078,7 @@
           <p:cNvPr id="12" name="">
             <a:extLst xmlns:a="http://schemas.openxmlformats.org/drawingml/2006/main">
               <a:ext uri="{FF2B5EF4-FFF2-40B4-BE49-F238E27FC236}">
-                <a16:creationId xmlns:a16="http://schemas.microsoft.com/office/drawing/2014/main" id="{2826FA20-79BB-45E0-81F4-8CD42B545A9D}"/>
+                <a16:creationId xmlns:a16="http://schemas.microsoft.com/office/drawing/2014/main" id="{AF3AACDD-58DF-48C4-9FED-FEF46169C2D3}"/>
               </a:ext>
             </a:extLst>
           </p:cNvPr>
@@ -3142,7 +3142,7 @@
           <p:cNvPr id="13" name="">
             <a:extLst xmlns:a="http://schemas.openxmlformats.org/drawingml/2006/main">
               <a:ext uri="{FF2B5EF4-FFF2-40B4-BE49-F238E27FC236}">
-                <a16:creationId xmlns:a16="http://schemas.microsoft.com/office/drawing/2014/main" id="{62CA1D87-7419-4D48-9063-BC73E852BBA5}"/>
+                <a16:creationId xmlns:a16="http://schemas.microsoft.com/office/drawing/2014/main" id="{E791F8CC-F801-44C0-82B2-6E2374360880}"/>
               </a:ext>
             </a:extLst>
           </p:cNvPr>
@@ -3175,7 +3175,7 @@
           <p:cNvPr id="14" name="">
             <a:extLst xmlns:a="http://schemas.openxmlformats.org/drawingml/2006/main">
               <a:ext uri="{FF2B5EF4-FFF2-40B4-BE49-F238E27FC236}">
-                <a16:creationId xmlns:a16="http://schemas.microsoft.com/office/drawing/2014/main" id="{C6043577-C66B-4719-8283-9E59C4BD7073}"/>
+                <a16:creationId xmlns:a16="http://schemas.microsoft.com/office/drawing/2014/main" id="{A7CCC0C6-2E52-4B60-AAC0-1B28CD0006B4}"/>
               </a:ext>
             </a:extLst>
           </p:cNvPr>
@@ -3239,7 +3239,7 @@
           <p:cNvPr id="15" name="">
             <a:extLst xmlns:a="http://schemas.openxmlformats.org/drawingml/2006/main">
               <a:ext uri="{FF2B5EF4-FFF2-40B4-BE49-F238E27FC236}">
-                <a16:creationId xmlns:a16="http://schemas.microsoft.com/office/drawing/2014/main" id="{6F5CE5CE-E451-4797-9C61-0ACC17A3909B}"/>
+                <a16:creationId xmlns:a16="http://schemas.microsoft.com/office/drawing/2014/main" id="{995C54FE-34A1-4CA4-80F7-EB88CBF00364}"/>
               </a:ext>
             </a:extLst>
           </p:cNvPr>
@@ -3303,7 +3303,7 @@
           <p:cNvPr id="16" name="">
             <a:extLst xmlns:a="http://schemas.openxmlformats.org/drawingml/2006/main">
               <a:ext uri="{FF2B5EF4-FFF2-40B4-BE49-F238E27FC236}">
-                <a16:creationId xmlns:a16="http://schemas.microsoft.com/office/drawing/2014/main" id="{835C21D2-AC2C-41A8-A5A1-9BF62FDA4FFF}"/>
+                <a16:creationId xmlns:a16="http://schemas.microsoft.com/office/drawing/2014/main" id="{CCE87329-1725-4322-A772-55150A6F0CB8}"/>
               </a:ext>
             </a:extLst>
           </p:cNvPr>
@@ -3336,7 +3336,7 @@
           <p:cNvPr id="17" name="">
             <a:extLst xmlns:a="http://schemas.openxmlformats.org/drawingml/2006/main">
               <a:ext uri="{FF2B5EF4-FFF2-40B4-BE49-F238E27FC236}">
-                <a16:creationId xmlns:a16="http://schemas.microsoft.com/office/drawing/2014/main" id="{AAF30E31-928A-4967-B7E7-856B33E8A1B2}"/>
+                <a16:creationId xmlns:a16="http://schemas.microsoft.com/office/drawing/2014/main" id="{7DB4E326-2C6C-4D43-8F1D-602F3C1C800D}"/>
               </a:ext>
             </a:extLst>
           </p:cNvPr>
@@ -3400,7 +3400,7 @@
           <p:cNvPr id="18" name="">
             <a:extLst xmlns:a="http://schemas.openxmlformats.org/drawingml/2006/main">
               <a:ext uri="{FF2B5EF4-FFF2-40B4-BE49-F238E27FC236}">
-                <a16:creationId xmlns:a16="http://schemas.microsoft.com/office/drawing/2014/main" id="{21E31475-6355-487E-84A5-FBFBAF27995F}"/>
+                <a16:creationId xmlns:a16="http://schemas.microsoft.com/office/drawing/2014/main" id="{297A8D07-5090-4C90-B276-9D11C0056395}"/>
               </a:ext>
             </a:extLst>
           </p:cNvPr>
@@ -3464,7 +3464,7 @@
           <p:cNvPr id="19" name="">
             <a:extLst xmlns:a="http://schemas.openxmlformats.org/drawingml/2006/main">
               <a:ext uri="{FF2B5EF4-FFF2-40B4-BE49-F238E27FC236}">
-                <a16:creationId xmlns:a16="http://schemas.microsoft.com/office/drawing/2014/main" id="{D25C510B-ACAF-4CDF-B7E7-419BAECD9D79}"/>
+                <a16:creationId xmlns:a16="http://schemas.microsoft.com/office/drawing/2014/main" id="{0775BBA9-C459-43D1-AED8-6F77896E73B9}"/>
               </a:ext>
             </a:extLst>
           </p:cNvPr>
@@ -3528,7 +3528,7 @@
           <p:cNvPr id="20" name="">
             <a:extLst xmlns:a="http://schemas.openxmlformats.org/drawingml/2006/main">
               <a:ext uri="{FF2B5EF4-FFF2-40B4-BE49-F238E27FC236}">
-                <a16:creationId xmlns:a16="http://schemas.microsoft.com/office/drawing/2014/main" id="{8C4CED1F-B1B0-475E-9BC7-E7862C33A3F9}"/>
+                <a16:creationId xmlns:a16="http://schemas.microsoft.com/office/drawing/2014/main" id="{1A9E9A31-C0D6-401C-A6F1-E4CBE4711C4A}"/>
               </a:ext>
             </a:extLst>
           </p:cNvPr>
@@ -3592,7 +3592,7 @@
           <p:cNvPr id="21" name="">
             <a:extLst xmlns:a="http://schemas.openxmlformats.org/drawingml/2006/main">
               <a:ext uri="{FF2B5EF4-FFF2-40B4-BE49-F238E27FC236}">
-                <a16:creationId xmlns:a16="http://schemas.microsoft.com/office/drawing/2014/main" id="{3FA91390-07E1-47EC-9150-08B53BA3CD8D}"/>
+                <a16:creationId xmlns:a16="http://schemas.microsoft.com/office/drawing/2014/main" id="{F7F6D94A-89FA-4B2D-A152-1B0CBFBE8B63}"/>
               </a:ext>
             </a:extLst>
           </p:cNvPr>
@@ -3654,7 +3654,7 @@
     </p:spTree>
     <p:extLst>
       <p:ext uri="{BB962C8B-B14F-4D97-AF65-F5344CB8AC3E}">
-        <p14:creationId xmlns:p14="http://schemas.microsoft.com/office/powerpoint/2010/main" val="2073926158"/>
+        <p14:creationId xmlns:p14="http://schemas.microsoft.com/office/powerpoint/2010/main" val="1735863862"/>
       </p:ext>
     </p:extLst>
   </p:cSld>
@@ -3678,7 +3678,7 @@
           <p:cNvPr id="1" name="">
             <a:extLst xmlns:a="http://schemas.openxmlformats.org/drawingml/2006/main">
               <a:ext uri="{FF2B5EF4-FFF2-40B4-BE49-F238E27FC236}">
-                <a16:creationId xmlns:a16="http://schemas.microsoft.com/office/drawing/2014/main" id="{A3CE5532-22DD-49F9-BD01-F43E43D62E86}"/>
+                <a16:creationId xmlns:a16="http://schemas.microsoft.com/office/drawing/2014/main" id="{B3E7F055-B2E3-4000-B2B3-3C17E296E523}"/>
               </a:ext>
             </a:extLst>
           </p:cNvPr>
@@ -3711,7 +3711,7 @@
           <p:cNvPr id="2" name="">
             <a:extLst xmlns:a="http://schemas.openxmlformats.org/drawingml/2006/main">
               <a:ext uri="{FF2B5EF4-FFF2-40B4-BE49-F238E27FC236}">
-                <a16:creationId xmlns:a16="http://schemas.microsoft.com/office/drawing/2014/main" id="{0EFEA451-DA94-41EF-AC8C-ECE4D583A274}"/>
+                <a16:creationId xmlns:a16="http://schemas.microsoft.com/office/drawing/2014/main" id="{B76284D4-E538-477F-9545-A2CA035F4B35}"/>
               </a:ext>
             </a:extLst>
           </p:cNvPr>
@@ -3744,7 +3744,7 @@
           <p:cNvPr id="3" name="">
             <a:extLst xmlns:a="http://schemas.openxmlformats.org/drawingml/2006/main">
               <a:ext uri="{FF2B5EF4-FFF2-40B4-BE49-F238E27FC236}">
-                <a16:creationId xmlns:a16="http://schemas.microsoft.com/office/drawing/2014/main" id="{778879D5-8B0F-4C36-9CD5-7D5507469224}"/>
+                <a16:creationId xmlns:a16="http://schemas.microsoft.com/office/drawing/2014/main" id="{1128F23E-652E-4295-9EE5-8A918313E70A}"/>
               </a:ext>
             </a:extLst>
           </p:cNvPr>
@@ -3808,7 +3808,7 @@
           <p:cNvPr id="4" name="">
             <a:extLst xmlns:a="http://schemas.openxmlformats.org/drawingml/2006/main">
               <a:ext uri="{FF2B5EF4-FFF2-40B4-BE49-F238E27FC236}">
-                <a16:creationId xmlns:a16="http://schemas.microsoft.com/office/drawing/2014/main" id="{88285B3F-C687-478A-887A-137C7AE08D3D}"/>
+                <a16:creationId xmlns:a16="http://schemas.microsoft.com/office/drawing/2014/main" id="{27CE801E-C704-46F5-B408-27E62615CE82}"/>
               </a:ext>
             </a:extLst>
           </p:cNvPr>
@@ -3872,7 +3872,7 @@
           <p:cNvPr id="5" name="">
             <a:extLst xmlns:a="http://schemas.openxmlformats.org/drawingml/2006/main">
               <a:ext uri="{FF2B5EF4-FFF2-40B4-BE49-F238E27FC236}">
-                <a16:creationId xmlns:a16="http://schemas.microsoft.com/office/drawing/2014/main" id="{4CF9EBE9-999F-4230-A952-7206216655BC}"/>
+                <a16:creationId xmlns:a16="http://schemas.microsoft.com/office/drawing/2014/main" id="{AF243A86-B438-4983-BCBA-B5A80FE8A3DA}"/>
               </a:ext>
             </a:extLst>
           </p:cNvPr>
@@ -3936,7 +3936,7 @@
           <p:cNvPr id="6" name="">
             <a:extLst xmlns:a="http://schemas.openxmlformats.org/drawingml/2006/main">
               <a:ext uri="{FF2B5EF4-FFF2-40B4-BE49-F238E27FC236}">
-                <a16:creationId xmlns:a16="http://schemas.microsoft.com/office/drawing/2014/main" id="{186D8D2D-FDBB-4F47-906B-818CC766EE8B}"/>
+                <a16:creationId xmlns:a16="http://schemas.microsoft.com/office/drawing/2014/main" id="{E057C447-5F4F-45E9-A61A-84AF08A4677E}"/>
               </a:ext>
             </a:extLst>
           </p:cNvPr>
@@ -3969,7 +3969,7 @@
           <p:cNvPr id="7" name="">
             <a:extLst xmlns:a="http://schemas.openxmlformats.org/drawingml/2006/main">
               <a:ext uri="{FF2B5EF4-FFF2-40B4-BE49-F238E27FC236}">
-                <a16:creationId xmlns:a16="http://schemas.microsoft.com/office/drawing/2014/main" id="{4D9471D9-CC18-40A5-B9FD-9B3E60E2BB43}"/>
+                <a16:creationId xmlns:a16="http://schemas.microsoft.com/office/drawing/2014/main" id="{01BA9574-CA14-45E1-A69F-3BCB53F89C12}"/>
               </a:ext>
             </a:extLst>
           </p:cNvPr>
@@ -4033,7 +4033,7 @@
           <p:cNvPr id="8" name="">
             <a:extLst xmlns:a="http://schemas.openxmlformats.org/drawingml/2006/main">
               <a:ext uri="{FF2B5EF4-FFF2-40B4-BE49-F238E27FC236}">
-                <a16:creationId xmlns:a16="http://schemas.microsoft.com/office/drawing/2014/main" id="{1307C2C2-2D19-4F14-BB60-61F6AB087D41}"/>
+                <a16:creationId xmlns:a16="http://schemas.microsoft.com/office/drawing/2014/main" id="{4B0A668E-3FBC-44DA-9133-6D262F66C9EE}"/>
               </a:ext>
             </a:extLst>
           </p:cNvPr>
@@ -4066,7 +4066,7 @@
           <p:cNvPr id="9" name="">
             <a:extLst xmlns:a="http://schemas.openxmlformats.org/drawingml/2006/main">
               <a:ext uri="{FF2B5EF4-FFF2-40B4-BE49-F238E27FC236}">
-                <a16:creationId xmlns:a16="http://schemas.microsoft.com/office/drawing/2014/main" id="{FA83B8DF-BD67-48F9-B7B0-4E9D182CF4F2}"/>
+                <a16:creationId xmlns:a16="http://schemas.microsoft.com/office/drawing/2014/main" id="{09226845-F65A-42CA-B2A2-73C43D4917ED}"/>
               </a:ext>
             </a:extLst>
           </p:cNvPr>
@@ -4130,7 +4130,7 @@
           <p:cNvPr id="10" name="">
             <a:extLst xmlns:a="http://schemas.openxmlformats.org/drawingml/2006/main">
               <a:ext uri="{FF2B5EF4-FFF2-40B4-BE49-F238E27FC236}">
-                <a16:creationId xmlns:a16="http://schemas.microsoft.com/office/drawing/2014/main" id="{832C3130-B19D-4DD7-B131-56A5CB99CE4C}"/>
+                <a16:creationId xmlns:a16="http://schemas.microsoft.com/office/drawing/2014/main" id="{A5C5AE3B-BBAA-41ED-A828-25D15C63B6A9}"/>
               </a:ext>
             </a:extLst>
           </p:cNvPr>
@@ -4163,7 +4163,7 @@
           <p:cNvPr id="11" name="">
             <a:extLst xmlns:a="http://schemas.openxmlformats.org/drawingml/2006/main">
               <a:ext uri="{FF2B5EF4-FFF2-40B4-BE49-F238E27FC236}">
-                <a16:creationId xmlns:a16="http://schemas.microsoft.com/office/drawing/2014/main" id="{A059A09F-3305-46AF-B253-A2782CAE27F6}"/>
+                <a16:creationId xmlns:a16="http://schemas.microsoft.com/office/drawing/2014/main" id="{12555B8E-2DF6-4992-976C-C38AE10469B4}"/>
               </a:ext>
             </a:extLst>
           </p:cNvPr>
@@ -4227,7 +4227,7 @@
           <p:cNvPr id="12" name="">
             <a:extLst xmlns:a="http://schemas.openxmlformats.org/drawingml/2006/main">
               <a:ext uri="{FF2B5EF4-FFF2-40B4-BE49-F238E27FC236}">
-                <a16:creationId xmlns:a16="http://schemas.microsoft.com/office/drawing/2014/main" id="{8DED484E-C768-4589-9B96-9FDA0C10BEC6}"/>
+                <a16:creationId xmlns:a16="http://schemas.microsoft.com/office/drawing/2014/main" id="{7206737A-22EC-4A69-B39A-BD607E2EE563}"/>
               </a:ext>
             </a:extLst>
           </p:cNvPr>
@@ -4260,7 +4260,7 @@
           <p:cNvPr id="13" name="">
             <a:extLst xmlns:a="http://schemas.openxmlformats.org/drawingml/2006/main">
               <a:ext uri="{FF2B5EF4-FFF2-40B4-BE49-F238E27FC236}">
-                <a16:creationId xmlns:a16="http://schemas.microsoft.com/office/drawing/2014/main" id="{29694F0C-854E-4C6C-898A-EBE0343BDD34}"/>
+                <a16:creationId xmlns:a16="http://schemas.microsoft.com/office/drawing/2014/main" id="{B6D6D79C-390B-4B22-BB71-11718BF511B2}"/>
               </a:ext>
             </a:extLst>
           </p:cNvPr>
@@ -4324,7 +4324,7 @@
           <p:cNvPr id="14" name="">
             <a:extLst xmlns:a="http://schemas.openxmlformats.org/drawingml/2006/main">
               <a:ext uri="{FF2B5EF4-FFF2-40B4-BE49-F238E27FC236}">
-                <a16:creationId xmlns:a16="http://schemas.microsoft.com/office/drawing/2014/main" id="{4AC129F2-F659-47E0-BA37-D6E978BABF00}"/>
+                <a16:creationId xmlns:a16="http://schemas.microsoft.com/office/drawing/2014/main" id="{AD29BDE4-6456-4A18-A0F3-31DAC8E2F116}"/>
               </a:ext>
             </a:extLst>
           </p:cNvPr>
@@ -4357,7 +4357,7 @@
           <p:cNvPr id="15" name="">
             <a:extLst xmlns:a="http://schemas.openxmlformats.org/drawingml/2006/main">
               <a:ext uri="{FF2B5EF4-FFF2-40B4-BE49-F238E27FC236}">
-                <a16:creationId xmlns:a16="http://schemas.microsoft.com/office/drawing/2014/main" id="{F03C4F72-DC14-4345-9238-B259617AFA25}"/>
+                <a16:creationId xmlns:a16="http://schemas.microsoft.com/office/drawing/2014/main" id="{8BD99F9A-74E7-4FDC-9897-EEC9E66EE340}"/>
               </a:ext>
             </a:extLst>
           </p:cNvPr>
@@ -4421,7 +4421,7 @@
           <p:cNvPr id="16" name="">
             <a:extLst xmlns:a="http://schemas.openxmlformats.org/drawingml/2006/main">
               <a:ext uri="{FF2B5EF4-FFF2-40B4-BE49-F238E27FC236}">
-                <a16:creationId xmlns:a16="http://schemas.microsoft.com/office/drawing/2014/main" id="{0E23896B-02D7-4C3C-BF2D-D778CCE12EA8}"/>
+                <a16:creationId xmlns:a16="http://schemas.microsoft.com/office/drawing/2014/main" id="{8E0B1FF2-0A90-4B5D-B9F8-F5176EF6B8FF}"/>
               </a:ext>
             </a:extLst>
           </p:cNvPr>
@@ -4454,7 +4454,7 @@
           <p:cNvPr id="17" name="">
             <a:extLst xmlns:a="http://schemas.openxmlformats.org/drawingml/2006/main">
               <a:ext uri="{FF2B5EF4-FFF2-40B4-BE49-F238E27FC236}">
-                <a16:creationId xmlns:a16="http://schemas.microsoft.com/office/drawing/2014/main" id="{4EBB6DB6-21E0-4560-85C7-17AA6F7D9F19}"/>
+                <a16:creationId xmlns:a16="http://schemas.microsoft.com/office/drawing/2014/main" id="{4E4290F3-F2AE-4130-B171-0A8E2D7D8817}"/>
               </a:ext>
             </a:extLst>
           </p:cNvPr>
@@ -4518,7 +4518,7 @@
           <p:cNvPr id="18" name="">
             <a:extLst xmlns:a="http://schemas.openxmlformats.org/drawingml/2006/main">
               <a:ext uri="{FF2B5EF4-FFF2-40B4-BE49-F238E27FC236}">
-                <a16:creationId xmlns:a16="http://schemas.microsoft.com/office/drawing/2014/main" id="{072F1BD6-AFA4-4AF6-AE53-E8AFA7634021}"/>
+                <a16:creationId xmlns:a16="http://schemas.microsoft.com/office/drawing/2014/main" id="{842E2E25-BF23-420D-8E9B-7F9CAAAD2263}"/>
               </a:ext>
             </a:extLst>
           </p:cNvPr>
@@ -4551,7 +4551,7 @@
           <p:cNvPr id="19" name="">
             <a:extLst xmlns:a="http://schemas.openxmlformats.org/drawingml/2006/main">
               <a:ext uri="{FF2B5EF4-FFF2-40B4-BE49-F238E27FC236}">
-                <a16:creationId xmlns:a16="http://schemas.microsoft.com/office/drawing/2014/main" id="{2E4869E3-26A3-4FB4-960C-DC1F7E837C46}"/>
+                <a16:creationId xmlns:a16="http://schemas.microsoft.com/office/drawing/2014/main" id="{B7884EA8-A998-424A-94E1-21A0AF4478D3}"/>
               </a:ext>
             </a:extLst>
           </p:cNvPr>
@@ -4615,7 +4615,7 @@
           <p:cNvPr id="20" name="">
             <a:extLst xmlns:a="http://schemas.openxmlformats.org/drawingml/2006/main">
               <a:ext uri="{FF2B5EF4-FFF2-40B4-BE49-F238E27FC236}">
-                <a16:creationId xmlns:a16="http://schemas.microsoft.com/office/drawing/2014/main" id="{08961356-F31B-4525-8770-9D2D3F624A75}"/>
+                <a16:creationId xmlns:a16="http://schemas.microsoft.com/office/drawing/2014/main" id="{E4F0EC00-E3CF-46A4-8D29-1EF320A40C31}"/>
               </a:ext>
             </a:extLst>
           </p:cNvPr>
@@ -4648,7 +4648,7 @@
           <p:cNvPr id="21" name="">
             <a:extLst xmlns:a="http://schemas.openxmlformats.org/drawingml/2006/main">
               <a:ext uri="{FF2B5EF4-FFF2-40B4-BE49-F238E27FC236}">
-                <a16:creationId xmlns:a16="http://schemas.microsoft.com/office/drawing/2014/main" id="{66FF69B4-5826-480F-9443-0A9111C92D63}"/>
+                <a16:creationId xmlns:a16="http://schemas.microsoft.com/office/drawing/2014/main" id="{92C2107B-3772-4B06-9AAB-37599BE277E7}"/>
               </a:ext>
             </a:extLst>
           </p:cNvPr>
@@ -4712,7 +4712,7 @@
           <p:cNvPr id="22" name="">
             <a:extLst xmlns:a="http://schemas.openxmlformats.org/drawingml/2006/main">
               <a:ext uri="{FF2B5EF4-FFF2-40B4-BE49-F238E27FC236}">
-                <a16:creationId xmlns:a16="http://schemas.microsoft.com/office/drawing/2014/main" id="{59A70214-7E56-4D68-B744-43777CE01CC6}"/>
+                <a16:creationId xmlns:a16="http://schemas.microsoft.com/office/drawing/2014/main" id="{287853AC-854A-4633-8D1A-5263D6EA6D3D}"/>
               </a:ext>
             </a:extLst>
           </p:cNvPr>
@@ -4745,7 +4745,7 @@
           <p:cNvPr id="23" name="">
             <a:extLst xmlns:a="http://schemas.openxmlformats.org/drawingml/2006/main">
               <a:ext uri="{FF2B5EF4-FFF2-40B4-BE49-F238E27FC236}">
-                <a16:creationId xmlns:a16="http://schemas.microsoft.com/office/drawing/2014/main" id="{0CC4EA86-EE59-4093-8915-ECDE88494356}"/>
+                <a16:creationId xmlns:a16="http://schemas.microsoft.com/office/drawing/2014/main" id="{74D5CF41-F739-4475-8471-7FD1F2B37E0D}"/>
               </a:ext>
             </a:extLst>
           </p:cNvPr>
@@ -4809,7 +4809,7 @@
           <p:cNvPr id="24" name="">
             <a:extLst xmlns:a="http://schemas.openxmlformats.org/drawingml/2006/main">
               <a:ext uri="{FF2B5EF4-FFF2-40B4-BE49-F238E27FC236}">
-                <a16:creationId xmlns:a16="http://schemas.microsoft.com/office/drawing/2014/main" id="{03D55DE5-5F51-4EB8-ADDE-ADDBF01C847B}"/>
+                <a16:creationId xmlns:a16="http://schemas.microsoft.com/office/drawing/2014/main" id="{F3920368-ACE0-46BA-AA94-F9F7630B37A9}"/>
               </a:ext>
             </a:extLst>
           </p:cNvPr>
@@ -4842,7 +4842,7 @@
           <p:cNvPr id="25" name="">
             <a:extLst xmlns:a="http://schemas.openxmlformats.org/drawingml/2006/main">
               <a:ext uri="{FF2B5EF4-FFF2-40B4-BE49-F238E27FC236}">
-                <a16:creationId xmlns:a16="http://schemas.microsoft.com/office/drawing/2014/main" id="{611DCDA6-4F42-4585-B3A5-80CC1A853005}"/>
+                <a16:creationId xmlns:a16="http://schemas.microsoft.com/office/drawing/2014/main" id="{783A3D5E-FB21-4D62-9345-941797E279A8}"/>
               </a:ext>
             </a:extLst>
           </p:cNvPr>
@@ -4906,7 +4906,7 @@
           <p:cNvPr id="26" name="">
             <a:extLst xmlns:a="http://schemas.openxmlformats.org/drawingml/2006/main">
               <a:ext uri="{FF2B5EF4-FFF2-40B4-BE49-F238E27FC236}">
-                <a16:creationId xmlns:a16="http://schemas.microsoft.com/office/drawing/2014/main" id="{81D5F64A-4BF5-4AAD-BF2A-1902946381FB}"/>
+                <a16:creationId xmlns:a16="http://schemas.microsoft.com/office/drawing/2014/main" id="{47E702C0-400A-4E1A-9B69-AE65270ECFEF}"/>
               </a:ext>
             </a:extLst>
           </p:cNvPr>
@@ -4939,7 +4939,7 @@
           <p:cNvPr id="27" name="">
             <a:extLst xmlns:a="http://schemas.openxmlformats.org/drawingml/2006/main">
               <a:ext uri="{FF2B5EF4-FFF2-40B4-BE49-F238E27FC236}">
-                <a16:creationId xmlns:a16="http://schemas.microsoft.com/office/drawing/2014/main" id="{743598BF-F1A2-4042-BFE2-4DCBFEB76157}"/>
+                <a16:creationId xmlns:a16="http://schemas.microsoft.com/office/drawing/2014/main" id="{5E9A459E-0B71-4484-A3A4-99D446D009FA}"/>
               </a:ext>
             </a:extLst>
           </p:cNvPr>
@@ -5003,7 +5003,7 @@
           <p:cNvPr id="28" name="">
             <a:extLst xmlns:a="http://schemas.openxmlformats.org/drawingml/2006/main">
               <a:ext uri="{FF2B5EF4-FFF2-40B4-BE49-F238E27FC236}">
-                <a16:creationId xmlns:a16="http://schemas.microsoft.com/office/drawing/2014/main" id="{ECD2672A-DB94-40E8-9BF3-E195024C49F9}"/>
+                <a16:creationId xmlns:a16="http://schemas.microsoft.com/office/drawing/2014/main" id="{8C9D5D75-6158-403D-869E-F848307CB77F}"/>
               </a:ext>
             </a:extLst>
           </p:cNvPr>
@@ -5036,7 +5036,7 @@
           <p:cNvPr id="29" name="">
             <a:extLst xmlns:a="http://schemas.openxmlformats.org/drawingml/2006/main">
               <a:ext uri="{FF2B5EF4-FFF2-40B4-BE49-F238E27FC236}">
-                <a16:creationId xmlns:a16="http://schemas.microsoft.com/office/drawing/2014/main" id="{8085A402-B374-40DF-8D14-3B30E88708F4}"/>
+                <a16:creationId xmlns:a16="http://schemas.microsoft.com/office/drawing/2014/main" id="{F71A9F09-5DA3-40D2-8BBE-C6BA61ED9CAC}"/>
               </a:ext>
             </a:extLst>
           </p:cNvPr>
@@ -5100,7 +5100,7 @@
           <p:cNvPr id="30" name="">
             <a:extLst xmlns:a="http://schemas.openxmlformats.org/drawingml/2006/main">
               <a:ext uri="{FF2B5EF4-FFF2-40B4-BE49-F238E27FC236}">
-                <a16:creationId xmlns:a16="http://schemas.microsoft.com/office/drawing/2014/main" id="{87ADA6A7-A2F3-4CC4-A726-E7482BB6EA99}"/>
+                <a16:creationId xmlns:a16="http://schemas.microsoft.com/office/drawing/2014/main" id="{E4FC0CD8-3736-49FB-B0B6-2ECE1F64730D}"/>
               </a:ext>
             </a:extLst>
           </p:cNvPr>
@@ -5133,7 +5133,7 @@
           <p:cNvPr id="31" name="">
             <a:extLst xmlns:a="http://schemas.openxmlformats.org/drawingml/2006/main">
               <a:ext uri="{FF2B5EF4-FFF2-40B4-BE49-F238E27FC236}">
-                <a16:creationId xmlns:a16="http://schemas.microsoft.com/office/drawing/2014/main" id="{104BB112-68B9-46EA-B3DC-573757D50C24}"/>
+                <a16:creationId xmlns:a16="http://schemas.microsoft.com/office/drawing/2014/main" id="{3B6D45B9-2C23-4AA5-8319-C00AB931773B}"/>
               </a:ext>
             </a:extLst>
           </p:cNvPr>
@@ -5197,7 +5197,7 @@
           <p:cNvPr id="32" name="">
             <a:extLst xmlns:a="http://schemas.openxmlformats.org/drawingml/2006/main">
               <a:ext uri="{FF2B5EF4-FFF2-40B4-BE49-F238E27FC236}">
-                <a16:creationId xmlns:a16="http://schemas.microsoft.com/office/drawing/2014/main" id="{530F6D77-0CA4-4707-9E45-9FC0B1934C49}"/>
+                <a16:creationId xmlns:a16="http://schemas.microsoft.com/office/drawing/2014/main" id="{1A254801-302C-4D03-B985-C21B80DFCE85}"/>
               </a:ext>
             </a:extLst>
           </p:cNvPr>
@@ -5230,7 +5230,7 @@
           <p:cNvPr id="33" name="">
             <a:extLst xmlns:a="http://schemas.openxmlformats.org/drawingml/2006/main">
               <a:ext uri="{FF2B5EF4-FFF2-40B4-BE49-F238E27FC236}">
-                <a16:creationId xmlns:a16="http://schemas.microsoft.com/office/drawing/2014/main" id="{C1278B5B-AAF0-45EB-84D8-9F9B07129049}"/>
+                <a16:creationId xmlns:a16="http://schemas.microsoft.com/office/drawing/2014/main" id="{41A7324C-442E-4643-B8EC-80E36C462501}"/>
               </a:ext>
             </a:extLst>
           </p:cNvPr>
@@ -5294,7 +5294,7 @@
           <p:cNvPr id="34" name="">
             <a:extLst xmlns:a="http://schemas.openxmlformats.org/drawingml/2006/main">
               <a:ext uri="{FF2B5EF4-FFF2-40B4-BE49-F238E27FC236}">
-                <a16:creationId xmlns:a16="http://schemas.microsoft.com/office/drawing/2014/main" id="{C9C5F4C2-9B67-48B0-A2A9-24AD006632D0}"/>
+                <a16:creationId xmlns:a16="http://schemas.microsoft.com/office/drawing/2014/main" id="{928C0701-BE2C-42A0-9A9D-DF5D6227C19E}"/>
               </a:ext>
             </a:extLst>
           </p:cNvPr>
@@ -5327,7 +5327,7 @@
           <p:cNvPr id="35" name="">
             <a:extLst xmlns:a="http://schemas.openxmlformats.org/drawingml/2006/main">
               <a:ext uri="{FF2B5EF4-FFF2-40B4-BE49-F238E27FC236}">
-                <a16:creationId xmlns:a16="http://schemas.microsoft.com/office/drawing/2014/main" id="{AC9E4DBB-9D6A-4291-8F5D-57E04AFFD175}"/>
+                <a16:creationId xmlns:a16="http://schemas.microsoft.com/office/drawing/2014/main" id="{4B00E93A-1C2E-416C-84F8-9C3E55A5A03F}"/>
               </a:ext>
             </a:extLst>
           </p:cNvPr>
@@ -5391,7 +5391,7 @@
           <p:cNvPr id="36" name="">
             <a:extLst xmlns:a="http://schemas.openxmlformats.org/drawingml/2006/main">
               <a:ext uri="{FF2B5EF4-FFF2-40B4-BE49-F238E27FC236}">
-                <a16:creationId xmlns:a16="http://schemas.microsoft.com/office/drawing/2014/main" id="{D73508C7-2792-4143-ACFD-0FB881B9C180}"/>
+                <a16:creationId xmlns:a16="http://schemas.microsoft.com/office/drawing/2014/main" id="{94388459-5A3D-4056-B2A7-D4239D942F9C}"/>
               </a:ext>
             </a:extLst>
           </p:cNvPr>
@@ -5455,7 +5455,7 @@
           <p:cNvPr id="37" name="">
             <a:extLst xmlns:a="http://schemas.openxmlformats.org/drawingml/2006/main">
               <a:ext uri="{FF2B5EF4-FFF2-40B4-BE49-F238E27FC236}">
-                <a16:creationId xmlns:a16="http://schemas.microsoft.com/office/drawing/2014/main" id="{405DD515-EDB1-4D34-AF63-3A257ECE09AD}"/>
+                <a16:creationId xmlns:a16="http://schemas.microsoft.com/office/drawing/2014/main" id="{033807F4-B67A-4102-8FFC-80A7AC678196}"/>
               </a:ext>
             </a:extLst>
           </p:cNvPr>
@@ -5517,7 +5517,7 @@
     </p:spTree>
     <p:extLst>
       <p:ext uri="{BB962C8B-B14F-4D97-AF65-F5344CB8AC3E}">
-        <p14:creationId xmlns:p14="http://schemas.microsoft.com/office/powerpoint/2010/main" val="1325935601"/>
+        <p14:creationId xmlns:p14="http://schemas.microsoft.com/office/powerpoint/2010/main" val="1003793145"/>
       </p:ext>
     </p:extLst>
   </p:cSld>
@@ -5541,7 +5541,7 @@
           <p:cNvPr id="1" name="">
             <a:extLst xmlns:a="http://schemas.openxmlformats.org/drawingml/2006/main">
               <a:ext uri="{FF2B5EF4-FFF2-40B4-BE49-F238E27FC236}">
-                <a16:creationId xmlns:a16="http://schemas.microsoft.com/office/drawing/2014/main" id="{67EFD9C7-4A9A-4B7A-8785-4CA1E84F9F6A}"/>
+                <a16:creationId xmlns:a16="http://schemas.microsoft.com/office/drawing/2014/main" id="{04D4256C-25A0-4AB8-BE5B-694179451E2E}"/>
               </a:ext>
             </a:extLst>
           </p:cNvPr>
@@ -5574,7 +5574,7 @@
           <p:cNvPr id="2" name="">
             <a:extLst xmlns:a="http://schemas.openxmlformats.org/drawingml/2006/main">
               <a:ext uri="{FF2B5EF4-FFF2-40B4-BE49-F238E27FC236}">
-                <a16:creationId xmlns:a16="http://schemas.microsoft.com/office/drawing/2014/main" id="{4D2EB8ED-A90B-4729-AE42-21EF21842ACF}"/>
+                <a16:creationId xmlns:a16="http://schemas.microsoft.com/office/drawing/2014/main" id="{C962EDB0-7D5F-4EBC-A404-1AA13788CA85}"/>
               </a:ext>
             </a:extLst>
           </p:cNvPr>
@@ -5607,7 +5607,7 @@
           <p:cNvPr id="3" name="">
             <a:extLst xmlns:a="http://schemas.openxmlformats.org/drawingml/2006/main">
               <a:ext uri="{FF2B5EF4-FFF2-40B4-BE49-F238E27FC236}">
-                <a16:creationId xmlns:a16="http://schemas.microsoft.com/office/drawing/2014/main" id="{36BBF863-AFDF-4B6E-AC35-586DF31A316C}"/>
+                <a16:creationId xmlns:a16="http://schemas.microsoft.com/office/drawing/2014/main" id="{D9836A98-0B14-4D0D-BEAF-6CF74980A75D}"/>
               </a:ext>
             </a:extLst>
           </p:cNvPr>
@@ -5671,7 +5671,7 @@
           <p:cNvPr id="4" name="">
             <a:extLst xmlns:a="http://schemas.openxmlformats.org/drawingml/2006/main">
               <a:ext uri="{FF2B5EF4-FFF2-40B4-BE49-F238E27FC236}">
-                <a16:creationId xmlns:a16="http://schemas.microsoft.com/office/drawing/2014/main" id="{F4453B61-2D90-435F-BF38-662DCA983802}"/>
+                <a16:creationId xmlns:a16="http://schemas.microsoft.com/office/drawing/2014/main" id="{185804C8-C6D0-4D3C-8E87-7965BFEECF99}"/>
               </a:ext>
             </a:extLst>
           </p:cNvPr>
@@ -5735,7 +5735,7 @@
           <p:cNvPr id="5" name="">
             <a:extLst xmlns:a="http://schemas.openxmlformats.org/drawingml/2006/main">
               <a:ext uri="{FF2B5EF4-FFF2-40B4-BE49-F238E27FC236}">
-                <a16:creationId xmlns:a16="http://schemas.microsoft.com/office/drawing/2014/main" id="{DD84831B-B809-42F6-9412-862E1DDFB044}"/>
+                <a16:creationId xmlns:a16="http://schemas.microsoft.com/office/drawing/2014/main" id="{B30A7CC6-A6A9-4D9E-B98A-F7290037A02D}"/>
               </a:ext>
             </a:extLst>
           </p:cNvPr>
@@ -5799,7 +5799,7 @@
           <p:cNvPr id="6" name="">
             <a:extLst xmlns:a="http://schemas.openxmlformats.org/drawingml/2006/main">
               <a:ext uri="{FF2B5EF4-FFF2-40B4-BE49-F238E27FC236}">
-                <a16:creationId xmlns:a16="http://schemas.microsoft.com/office/drawing/2014/main" id="{81A7EA86-73D6-44C7-BC77-44D1A6FA0FD4}"/>
+                <a16:creationId xmlns:a16="http://schemas.microsoft.com/office/drawing/2014/main" id="{C62C3702-1EFA-4181-A2BC-3F3DF08DBB17}"/>
               </a:ext>
             </a:extLst>
           </p:cNvPr>
@@ -5832,7 +5832,7 @@
           <p:cNvPr id="7" name="">
             <a:extLst xmlns:a="http://schemas.openxmlformats.org/drawingml/2006/main">
               <a:ext uri="{FF2B5EF4-FFF2-40B4-BE49-F238E27FC236}">
-                <a16:creationId xmlns:a16="http://schemas.microsoft.com/office/drawing/2014/main" id="{D5FB6907-9684-421B-B13E-A4CD5B8EBDFD}"/>
+                <a16:creationId xmlns:a16="http://schemas.microsoft.com/office/drawing/2014/main" id="{1E1595F6-2699-42FC-87FC-39FB5EA3B05A}"/>
               </a:ext>
             </a:extLst>
           </p:cNvPr>
@@ -5896,7 +5896,7 @@
           <p:cNvPr id="8" name="">
             <a:extLst xmlns:a="http://schemas.openxmlformats.org/drawingml/2006/main">
               <a:ext uri="{FF2B5EF4-FFF2-40B4-BE49-F238E27FC236}">
-                <a16:creationId xmlns:a16="http://schemas.microsoft.com/office/drawing/2014/main" id="{E0C5D999-7607-44AE-9804-6BD775B8A9EA}"/>
+                <a16:creationId xmlns:a16="http://schemas.microsoft.com/office/drawing/2014/main" id="{F38753F1-FE75-4AEA-B315-3F2306F7FF04}"/>
               </a:ext>
             </a:extLst>
           </p:cNvPr>
@@ -5929,7 +5929,7 @@
           <p:cNvPr id="9" name="">
             <a:extLst xmlns:a="http://schemas.openxmlformats.org/drawingml/2006/main">
               <a:ext uri="{FF2B5EF4-FFF2-40B4-BE49-F238E27FC236}">
-                <a16:creationId xmlns:a16="http://schemas.microsoft.com/office/drawing/2014/main" id="{CD926321-0973-440A-BF75-82B6382195C0}"/>
+                <a16:creationId xmlns:a16="http://schemas.microsoft.com/office/drawing/2014/main" id="{D6EE5E23-82B7-49D1-BCC1-ED7AC571C2A8}"/>
               </a:ext>
             </a:extLst>
           </p:cNvPr>
@@ -5993,7 +5993,7 @@
           <p:cNvPr id="10" name="">
             <a:extLst xmlns:a="http://schemas.openxmlformats.org/drawingml/2006/main">
               <a:ext uri="{FF2B5EF4-FFF2-40B4-BE49-F238E27FC236}">
-                <a16:creationId xmlns:a16="http://schemas.microsoft.com/office/drawing/2014/main" id="{846FCF4C-1D6C-4061-A09A-9B443062D583}"/>
+                <a16:creationId xmlns:a16="http://schemas.microsoft.com/office/drawing/2014/main" id="{48D5638D-DEA9-4F10-8161-7A2AB1019878}"/>
               </a:ext>
             </a:extLst>
           </p:cNvPr>
@@ -6026,7 +6026,7 @@
           <p:cNvPr id="11" name="">
             <a:extLst xmlns:a="http://schemas.openxmlformats.org/drawingml/2006/main">
               <a:ext uri="{FF2B5EF4-FFF2-40B4-BE49-F238E27FC236}">
-                <a16:creationId xmlns:a16="http://schemas.microsoft.com/office/drawing/2014/main" id="{BB88876F-8B43-42D8-BE78-668724C9E1DE}"/>
+                <a16:creationId xmlns:a16="http://schemas.microsoft.com/office/drawing/2014/main" id="{6008E4FE-DF8D-4F38-84A7-F48D7460D598}"/>
               </a:ext>
             </a:extLst>
           </p:cNvPr>
@@ -6090,7 +6090,7 @@
           <p:cNvPr id="12" name="">
             <a:extLst xmlns:a="http://schemas.openxmlformats.org/drawingml/2006/main">
               <a:ext uri="{FF2B5EF4-FFF2-40B4-BE49-F238E27FC236}">
-                <a16:creationId xmlns:a16="http://schemas.microsoft.com/office/drawing/2014/main" id="{95CD3B18-9A07-453D-89E8-B4C971DFCA98}"/>
+                <a16:creationId xmlns:a16="http://schemas.microsoft.com/office/drawing/2014/main" id="{79BFF93C-6C16-44D5-9F8C-EE401D46759F}"/>
               </a:ext>
             </a:extLst>
           </p:cNvPr>
@@ -6123,7 +6123,7 @@
           <p:cNvPr id="13" name="">
             <a:extLst xmlns:a="http://schemas.openxmlformats.org/drawingml/2006/main">
               <a:ext uri="{FF2B5EF4-FFF2-40B4-BE49-F238E27FC236}">
-                <a16:creationId xmlns:a16="http://schemas.microsoft.com/office/drawing/2014/main" id="{E6B88BB4-9687-4083-A0F2-2BA6F406DAE2}"/>
+                <a16:creationId xmlns:a16="http://schemas.microsoft.com/office/drawing/2014/main" id="{6892617A-5729-460A-8B87-9C6C52A52425}"/>
               </a:ext>
             </a:extLst>
           </p:cNvPr>
@@ -6187,7 +6187,7 @@
           <p:cNvPr id="14" name="">
             <a:extLst xmlns:a="http://schemas.openxmlformats.org/drawingml/2006/main">
               <a:ext uri="{FF2B5EF4-FFF2-40B4-BE49-F238E27FC236}">
-                <a16:creationId xmlns:a16="http://schemas.microsoft.com/office/drawing/2014/main" id="{5E6D2C5D-8373-4BA1-B9FC-22E557126BBB}"/>
+                <a16:creationId xmlns:a16="http://schemas.microsoft.com/office/drawing/2014/main" id="{E3959752-DFDC-4655-B5FA-944C4CAE7768}"/>
               </a:ext>
             </a:extLst>
           </p:cNvPr>
@@ -6220,7 +6220,7 @@
           <p:cNvPr id="15" name="">
             <a:extLst xmlns:a="http://schemas.openxmlformats.org/drawingml/2006/main">
               <a:ext uri="{FF2B5EF4-FFF2-40B4-BE49-F238E27FC236}">
-                <a16:creationId xmlns:a16="http://schemas.microsoft.com/office/drawing/2014/main" id="{E533D89A-4980-4B6E-89F4-265484030491}"/>
+                <a16:creationId xmlns:a16="http://schemas.microsoft.com/office/drawing/2014/main" id="{1D9EC08F-9FF5-4A58-A843-7B293CA66033}"/>
               </a:ext>
             </a:extLst>
           </p:cNvPr>
@@ -6284,7 +6284,7 @@
           <p:cNvPr id="16" name="">
             <a:extLst xmlns:a="http://schemas.openxmlformats.org/drawingml/2006/main">
               <a:ext uri="{FF2B5EF4-FFF2-40B4-BE49-F238E27FC236}">
-                <a16:creationId xmlns:a16="http://schemas.microsoft.com/office/drawing/2014/main" id="{2C5EFA6E-BFD8-4B44-B406-0BEC6C5AAAD1}"/>
+                <a16:creationId xmlns:a16="http://schemas.microsoft.com/office/drawing/2014/main" id="{E62C6095-9A80-446A-A5FD-A68877C49818}"/>
               </a:ext>
             </a:extLst>
           </p:cNvPr>
@@ -6317,7 +6317,7 @@
           <p:cNvPr id="17" name="">
             <a:extLst xmlns:a="http://schemas.openxmlformats.org/drawingml/2006/main">
               <a:ext uri="{FF2B5EF4-FFF2-40B4-BE49-F238E27FC236}">
-                <a16:creationId xmlns:a16="http://schemas.microsoft.com/office/drawing/2014/main" id="{2F24BD94-FD1F-40BA-A513-293A72E1CFFB}"/>
+                <a16:creationId xmlns:a16="http://schemas.microsoft.com/office/drawing/2014/main" id="{8358845A-4DCD-4B65-9B5D-E945F87B69D3}"/>
               </a:ext>
             </a:extLst>
           </p:cNvPr>
@@ -6381,7 +6381,7 @@
           <p:cNvPr id="18" name="">
             <a:extLst xmlns:a="http://schemas.openxmlformats.org/drawingml/2006/main">
               <a:ext uri="{FF2B5EF4-FFF2-40B4-BE49-F238E27FC236}">
-                <a16:creationId xmlns:a16="http://schemas.microsoft.com/office/drawing/2014/main" id="{30D64847-F45A-41C6-92F7-C7B59C841572}"/>
+                <a16:creationId xmlns:a16="http://schemas.microsoft.com/office/drawing/2014/main" id="{0FAEABE4-EBDF-4EDF-8414-5D7873A33853}"/>
               </a:ext>
             </a:extLst>
           </p:cNvPr>
@@ -6414,7 +6414,7 @@
           <p:cNvPr id="19" name="">
             <a:extLst xmlns:a="http://schemas.openxmlformats.org/drawingml/2006/main">
               <a:ext uri="{FF2B5EF4-FFF2-40B4-BE49-F238E27FC236}">
-                <a16:creationId xmlns:a16="http://schemas.microsoft.com/office/drawing/2014/main" id="{84CAE737-9CBC-408A-9A39-1236E967DFB7}"/>
+                <a16:creationId xmlns:a16="http://schemas.microsoft.com/office/drawing/2014/main" id="{8966C3D9-1D7E-40F4-AA1A-3B5C1E6BCB9A}"/>
               </a:ext>
             </a:extLst>
           </p:cNvPr>
@@ -6478,7 +6478,7 @@
           <p:cNvPr id="20" name="">
             <a:extLst xmlns:a="http://schemas.openxmlformats.org/drawingml/2006/main">
               <a:ext uri="{FF2B5EF4-FFF2-40B4-BE49-F238E27FC236}">
-                <a16:creationId xmlns:a16="http://schemas.microsoft.com/office/drawing/2014/main" id="{6FB21802-86F9-4293-918B-8C8FBF9928B7}"/>
+                <a16:creationId xmlns:a16="http://schemas.microsoft.com/office/drawing/2014/main" id="{FB1463AD-1761-481A-85A8-CA83F2A38129}"/>
               </a:ext>
             </a:extLst>
           </p:cNvPr>
@@ -6511,7 +6511,7 @@
           <p:cNvPr id="21" name="">
             <a:extLst xmlns:a="http://schemas.openxmlformats.org/drawingml/2006/main">
               <a:ext uri="{FF2B5EF4-FFF2-40B4-BE49-F238E27FC236}">
-                <a16:creationId xmlns:a16="http://schemas.microsoft.com/office/drawing/2014/main" id="{592A61CC-D486-45B8-90F3-A8D34592DC1C}"/>
+                <a16:creationId xmlns:a16="http://schemas.microsoft.com/office/drawing/2014/main" id="{B03A24BB-22A8-4980-8C68-B8183FFAB8D1}"/>
               </a:ext>
             </a:extLst>
           </p:cNvPr>
@@ -6575,7 +6575,7 @@
           <p:cNvPr id="22" name="">
             <a:extLst xmlns:a="http://schemas.openxmlformats.org/drawingml/2006/main">
               <a:ext uri="{FF2B5EF4-FFF2-40B4-BE49-F238E27FC236}">
-                <a16:creationId xmlns:a16="http://schemas.microsoft.com/office/drawing/2014/main" id="{D754CD94-271E-4044-B87E-2E475CBB85E4}"/>
+                <a16:creationId xmlns:a16="http://schemas.microsoft.com/office/drawing/2014/main" id="{D86C6810-ECB5-48B2-A786-A55A09F77E9C}"/>
               </a:ext>
             </a:extLst>
           </p:cNvPr>
@@ -6608,7 +6608,7 @@
           <p:cNvPr id="23" name="">
             <a:extLst xmlns:a="http://schemas.openxmlformats.org/drawingml/2006/main">
               <a:ext uri="{FF2B5EF4-FFF2-40B4-BE49-F238E27FC236}">
-                <a16:creationId xmlns:a16="http://schemas.microsoft.com/office/drawing/2014/main" id="{C3714BD7-D0F9-46F4-BFC0-63641AEEEF91}"/>
+                <a16:creationId xmlns:a16="http://schemas.microsoft.com/office/drawing/2014/main" id="{891A5D0F-C629-4B74-ABCB-DF81F558837F}"/>
               </a:ext>
             </a:extLst>
           </p:cNvPr>
@@ -6672,7 +6672,7 @@
           <p:cNvPr id="24" name="">
             <a:extLst xmlns:a="http://schemas.openxmlformats.org/drawingml/2006/main">
               <a:ext uri="{FF2B5EF4-FFF2-40B4-BE49-F238E27FC236}">
-                <a16:creationId xmlns:a16="http://schemas.microsoft.com/office/drawing/2014/main" id="{F14800A1-8CEF-4460-AD12-CC36B557F72F}"/>
+                <a16:creationId xmlns:a16="http://schemas.microsoft.com/office/drawing/2014/main" id="{07D06C7A-0D92-42BB-9005-85907B6B1FF5}"/>
               </a:ext>
             </a:extLst>
           </p:cNvPr>
@@ -6705,7 +6705,7 @@
           <p:cNvPr id="25" name="">
             <a:extLst xmlns:a="http://schemas.openxmlformats.org/drawingml/2006/main">
               <a:ext uri="{FF2B5EF4-FFF2-40B4-BE49-F238E27FC236}">
-                <a16:creationId xmlns:a16="http://schemas.microsoft.com/office/drawing/2014/main" id="{854124D5-B111-4817-AC1F-EF968039B8B2}"/>
+                <a16:creationId xmlns:a16="http://schemas.microsoft.com/office/drawing/2014/main" id="{4ED93218-BF17-4BDC-BA9C-74DB01A6B037}"/>
               </a:ext>
             </a:extLst>
           </p:cNvPr>
@@ -6769,7 +6769,7 @@
           <p:cNvPr id="26" name="">
             <a:extLst xmlns:a="http://schemas.openxmlformats.org/drawingml/2006/main">
               <a:ext uri="{FF2B5EF4-FFF2-40B4-BE49-F238E27FC236}">
-                <a16:creationId xmlns:a16="http://schemas.microsoft.com/office/drawing/2014/main" id="{3E31CD2E-ED87-4ECE-94B8-15F06FCDBB13}"/>
+                <a16:creationId xmlns:a16="http://schemas.microsoft.com/office/drawing/2014/main" id="{0539681E-189D-4F65-B735-36CADE57ACFE}"/>
               </a:ext>
             </a:extLst>
           </p:cNvPr>
@@ -6833,7 +6833,7 @@
           <p:cNvPr id="27" name="">
             <a:extLst xmlns:a="http://schemas.openxmlformats.org/drawingml/2006/main">
               <a:ext uri="{FF2B5EF4-FFF2-40B4-BE49-F238E27FC236}">
-                <a16:creationId xmlns:a16="http://schemas.microsoft.com/office/drawing/2014/main" id="{337B164C-5541-4852-9853-EBD759887AED}"/>
+                <a16:creationId xmlns:a16="http://schemas.microsoft.com/office/drawing/2014/main" id="{B37A2DC8-393E-493F-BF88-213D5E670BFE}"/>
               </a:ext>
             </a:extLst>
           </p:cNvPr>
@@ -6895,7 +6895,7 @@
     </p:spTree>
     <p:extLst>
       <p:ext uri="{BB962C8B-B14F-4D97-AF65-F5344CB8AC3E}">
-        <p14:creationId xmlns:p14="http://schemas.microsoft.com/office/powerpoint/2010/main" val="318806912"/>
+        <p14:creationId xmlns:p14="http://schemas.microsoft.com/office/powerpoint/2010/main" val="1107267231"/>
       </p:ext>
     </p:extLst>
   </p:cSld>
@@ -6919,7 +6919,7 @@
           <p:cNvPr id="1" name="">
             <a:extLst xmlns:a="http://schemas.openxmlformats.org/drawingml/2006/main">
               <a:ext uri="{FF2B5EF4-FFF2-40B4-BE49-F238E27FC236}">
-                <a16:creationId xmlns:a16="http://schemas.microsoft.com/office/drawing/2014/main" id="{88E7FF06-CD9C-4C15-8341-98B8C5EA3955}"/>
+                <a16:creationId xmlns:a16="http://schemas.microsoft.com/office/drawing/2014/main" id="{0F903E76-300C-4B2F-B4BE-274E6EB32AAA}"/>
               </a:ext>
             </a:extLst>
           </p:cNvPr>
@@ -6952,7 +6952,7 @@
           <p:cNvPr id="2" name="">
             <a:extLst xmlns:a="http://schemas.openxmlformats.org/drawingml/2006/main">
               <a:ext uri="{FF2B5EF4-FFF2-40B4-BE49-F238E27FC236}">
-                <a16:creationId xmlns:a16="http://schemas.microsoft.com/office/drawing/2014/main" id="{515E89D5-C352-46AB-AD77-3DD3C53D2265}"/>
+                <a16:creationId xmlns:a16="http://schemas.microsoft.com/office/drawing/2014/main" id="{1219F60A-EDD8-4960-91A3-116103E255F8}"/>
               </a:ext>
             </a:extLst>
           </p:cNvPr>
@@ -6985,7 +6985,7 @@
           <p:cNvPr id="3" name="">
             <a:extLst xmlns:a="http://schemas.openxmlformats.org/drawingml/2006/main">
               <a:ext uri="{FF2B5EF4-FFF2-40B4-BE49-F238E27FC236}">
-                <a16:creationId xmlns:a16="http://schemas.microsoft.com/office/drawing/2014/main" id="{8FC2CD5E-1956-483E-BF7A-9E8DE4B1CDAE}"/>
+                <a16:creationId xmlns:a16="http://schemas.microsoft.com/office/drawing/2014/main" id="{FCC0A888-3E30-43AE-A871-9E0B7CDD0EC1}"/>
               </a:ext>
             </a:extLst>
           </p:cNvPr>
@@ -7049,7 +7049,7 @@
           <p:cNvPr id="4" name="">
             <a:extLst xmlns:a="http://schemas.openxmlformats.org/drawingml/2006/main">
               <a:ext uri="{FF2B5EF4-FFF2-40B4-BE49-F238E27FC236}">
-                <a16:creationId xmlns:a16="http://schemas.microsoft.com/office/drawing/2014/main" id="{9EB5FD7A-7871-431D-8F0E-F73CF1679D2E}"/>
+                <a16:creationId xmlns:a16="http://schemas.microsoft.com/office/drawing/2014/main" id="{94C576BE-BA8D-4D03-81A4-970036D0077A}"/>
               </a:ext>
             </a:extLst>
           </p:cNvPr>
@@ -7113,7 +7113,7 @@
           <p:cNvPr id="5" name="">
             <a:extLst xmlns:a="http://schemas.openxmlformats.org/drawingml/2006/main">
               <a:ext uri="{FF2B5EF4-FFF2-40B4-BE49-F238E27FC236}">
-                <a16:creationId xmlns:a16="http://schemas.microsoft.com/office/drawing/2014/main" id="{866586A2-3917-4BF7-81B0-9161C4BA2A1C}"/>
+                <a16:creationId xmlns:a16="http://schemas.microsoft.com/office/drawing/2014/main" id="{26DA593F-4CC6-44D6-83AE-1BE5EF5D9806}"/>
               </a:ext>
             </a:extLst>
           </p:cNvPr>
@@ -7177,7 +7177,7 @@
           <p:cNvPr id="6" name="">
             <a:extLst xmlns:a="http://schemas.openxmlformats.org/drawingml/2006/main">
               <a:ext uri="{FF2B5EF4-FFF2-40B4-BE49-F238E27FC236}">
-                <a16:creationId xmlns:a16="http://schemas.microsoft.com/office/drawing/2014/main" id="{2C8FF808-D85D-4A04-B2D3-5C7EA7F6D14A}"/>
+                <a16:creationId xmlns:a16="http://schemas.microsoft.com/office/drawing/2014/main" id="{068DD036-9AA6-441D-A3A5-25CB55C6C867}"/>
               </a:ext>
             </a:extLst>
           </p:cNvPr>
@@ -7210,7 +7210,7 @@
           <p:cNvPr id="7" name="">
             <a:extLst xmlns:a="http://schemas.openxmlformats.org/drawingml/2006/main">
               <a:ext uri="{FF2B5EF4-FFF2-40B4-BE49-F238E27FC236}">
-                <a16:creationId xmlns:a16="http://schemas.microsoft.com/office/drawing/2014/main" id="{5B382EF3-587F-4015-8B25-3178B1210279}"/>
+                <a16:creationId xmlns:a16="http://schemas.microsoft.com/office/drawing/2014/main" id="{7E7A91E5-6B30-4EBD-8B88-6C32618A52F9}"/>
               </a:ext>
             </a:extLst>
           </p:cNvPr>
@@ -7274,7 +7274,7 @@
           <p:cNvPr id="8" name="">
             <a:extLst xmlns:a="http://schemas.openxmlformats.org/drawingml/2006/main">
               <a:ext uri="{FF2B5EF4-FFF2-40B4-BE49-F238E27FC236}">
-                <a16:creationId xmlns:a16="http://schemas.microsoft.com/office/drawing/2014/main" id="{985A9158-4733-4712-9CCE-4CC9C1361348}"/>
+                <a16:creationId xmlns:a16="http://schemas.microsoft.com/office/drawing/2014/main" id="{9B35612C-4C5C-47FB-8E52-583043C8AF23}"/>
               </a:ext>
             </a:extLst>
           </p:cNvPr>
@@ -7307,7 +7307,7 @@
           <p:cNvPr id="9" name="">
             <a:extLst xmlns:a="http://schemas.openxmlformats.org/drawingml/2006/main">
               <a:ext uri="{FF2B5EF4-FFF2-40B4-BE49-F238E27FC236}">
-                <a16:creationId xmlns:a16="http://schemas.microsoft.com/office/drawing/2014/main" id="{48955358-BB37-4BE1-9CE9-ACF0FDB9DBCC}"/>
+                <a16:creationId xmlns:a16="http://schemas.microsoft.com/office/drawing/2014/main" id="{ADA86337-73E0-4099-B56E-5B1B31F4024A}"/>
               </a:ext>
             </a:extLst>
           </p:cNvPr>
@@ -7371,7 +7371,7 @@
           <p:cNvPr id="10" name="">
             <a:extLst xmlns:a="http://schemas.openxmlformats.org/drawingml/2006/main">
               <a:ext uri="{FF2B5EF4-FFF2-40B4-BE49-F238E27FC236}">
-                <a16:creationId xmlns:a16="http://schemas.microsoft.com/office/drawing/2014/main" id="{87F59FD9-CEBB-4824-882B-F35D221275DC}"/>
+                <a16:creationId xmlns:a16="http://schemas.microsoft.com/office/drawing/2014/main" id="{8901BB6C-E8DB-4283-8A69-49A62AA1B938}"/>
               </a:ext>
             </a:extLst>
           </p:cNvPr>
@@ -7404,7 +7404,7 @@
           <p:cNvPr id="11" name="">
             <a:extLst xmlns:a="http://schemas.openxmlformats.org/drawingml/2006/main">
               <a:ext uri="{FF2B5EF4-FFF2-40B4-BE49-F238E27FC236}">
-                <a16:creationId xmlns:a16="http://schemas.microsoft.com/office/drawing/2014/main" id="{6D71BB19-C1D4-4F8F-933E-9C6DEEE516CD}"/>
+                <a16:creationId xmlns:a16="http://schemas.microsoft.com/office/drawing/2014/main" id="{D5E46FE1-62EF-493F-9F3D-E57CC9DC7BB5}"/>
               </a:ext>
             </a:extLst>
           </p:cNvPr>
@@ -7468,7 +7468,7 @@
           <p:cNvPr id="12" name="">
             <a:extLst xmlns:a="http://schemas.openxmlformats.org/drawingml/2006/main">
               <a:ext uri="{FF2B5EF4-FFF2-40B4-BE49-F238E27FC236}">
-                <a16:creationId xmlns:a16="http://schemas.microsoft.com/office/drawing/2014/main" id="{B4CD1625-6F99-4740-9133-013110F39B96}"/>
+                <a16:creationId xmlns:a16="http://schemas.microsoft.com/office/drawing/2014/main" id="{5E6A4264-FAF2-4394-933D-C59ED9875134}"/>
               </a:ext>
             </a:extLst>
           </p:cNvPr>
@@ -7501,7 +7501,7 @@
           <p:cNvPr id="13" name="">
             <a:extLst xmlns:a="http://schemas.openxmlformats.org/drawingml/2006/main">
               <a:ext uri="{FF2B5EF4-FFF2-40B4-BE49-F238E27FC236}">
-                <a16:creationId xmlns:a16="http://schemas.microsoft.com/office/drawing/2014/main" id="{D8F528C2-0C02-420E-AB88-ECA4184984A4}"/>
+                <a16:creationId xmlns:a16="http://schemas.microsoft.com/office/drawing/2014/main" id="{69684BCF-CC9E-42E9-A612-3BF7108B757B}"/>
               </a:ext>
             </a:extLst>
           </p:cNvPr>
@@ -7565,7 +7565,7 @@
           <p:cNvPr id="14" name="">
             <a:extLst xmlns:a="http://schemas.openxmlformats.org/drawingml/2006/main">
               <a:ext uri="{FF2B5EF4-FFF2-40B4-BE49-F238E27FC236}">
-                <a16:creationId xmlns:a16="http://schemas.microsoft.com/office/drawing/2014/main" id="{6E2B44AE-9D31-47D9-88AB-E9AE3031288F}"/>
+                <a16:creationId xmlns:a16="http://schemas.microsoft.com/office/drawing/2014/main" id="{600BA4CF-A614-4CAC-98A8-08C1CDF1F175}"/>
               </a:ext>
             </a:extLst>
           </p:cNvPr>
@@ -7598,7 +7598,7 @@
           <p:cNvPr id="15" name="">
             <a:extLst xmlns:a="http://schemas.openxmlformats.org/drawingml/2006/main">
               <a:ext uri="{FF2B5EF4-FFF2-40B4-BE49-F238E27FC236}">
-                <a16:creationId xmlns:a16="http://schemas.microsoft.com/office/drawing/2014/main" id="{8D67CA57-E00F-4A03-945A-AA547683273B}"/>
+                <a16:creationId xmlns:a16="http://schemas.microsoft.com/office/drawing/2014/main" id="{C380535B-F0C1-42FF-8F6B-5E77CDA59E61}"/>
               </a:ext>
             </a:extLst>
           </p:cNvPr>
@@ -7662,7 +7662,7 @@
           <p:cNvPr id="16" name="">
             <a:extLst xmlns:a="http://schemas.openxmlformats.org/drawingml/2006/main">
               <a:ext uri="{FF2B5EF4-FFF2-40B4-BE49-F238E27FC236}">
-                <a16:creationId xmlns:a16="http://schemas.microsoft.com/office/drawing/2014/main" id="{6144466B-1D02-43FD-AE36-851F7D0D85A2}"/>
+                <a16:creationId xmlns:a16="http://schemas.microsoft.com/office/drawing/2014/main" id="{4399993A-C24F-4DCF-9A38-D03CBE2AE915}"/>
               </a:ext>
             </a:extLst>
           </p:cNvPr>
@@ -7695,7 +7695,7 @@
           <p:cNvPr id="17" name="">
             <a:extLst xmlns:a="http://schemas.openxmlformats.org/drawingml/2006/main">
               <a:ext uri="{FF2B5EF4-FFF2-40B4-BE49-F238E27FC236}">
-                <a16:creationId xmlns:a16="http://schemas.microsoft.com/office/drawing/2014/main" id="{51227529-8517-4CDC-A20D-BCCDEAF3131E}"/>
+                <a16:creationId xmlns:a16="http://schemas.microsoft.com/office/drawing/2014/main" id="{E1273F7E-0862-429F-A600-7952AD999378}"/>
               </a:ext>
             </a:extLst>
           </p:cNvPr>
@@ -7759,7 +7759,7 @@
           <p:cNvPr id="18" name="">
             <a:extLst xmlns:a="http://schemas.openxmlformats.org/drawingml/2006/main">
               <a:ext uri="{FF2B5EF4-FFF2-40B4-BE49-F238E27FC236}">
-                <a16:creationId xmlns:a16="http://schemas.microsoft.com/office/drawing/2014/main" id="{2EDCDFF6-5A53-4E81-8163-5A9AD72EA78C}"/>
+                <a16:creationId xmlns:a16="http://schemas.microsoft.com/office/drawing/2014/main" id="{7D61F662-49C5-4744-9656-A48BA9DBA699}"/>
               </a:ext>
             </a:extLst>
           </p:cNvPr>
@@ -7792,7 +7792,7 @@
           <p:cNvPr id="19" name="">
             <a:extLst xmlns:a="http://schemas.openxmlformats.org/drawingml/2006/main">
               <a:ext uri="{FF2B5EF4-FFF2-40B4-BE49-F238E27FC236}">
-                <a16:creationId xmlns:a16="http://schemas.microsoft.com/office/drawing/2014/main" id="{11089F71-116E-4E0B-A7DF-5101AFF9A361}"/>
+                <a16:creationId xmlns:a16="http://schemas.microsoft.com/office/drawing/2014/main" id="{5A0703CA-F087-4B97-AA87-6AE8861427F2}"/>
               </a:ext>
             </a:extLst>
           </p:cNvPr>
@@ -7856,7 +7856,7 @@
           <p:cNvPr id="20" name="">
             <a:extLst xmlns:a="http://schemas.openxmlformats.org/drawingml/2006/main">
               <a:ext uri="{FF2B5EF4-FFF2-40B4-BE49-F238E27FC236}">
-                <a16:creationId xmlns:a16="http://schemas.microsoft.com/office/drawing/2014/main" id="{19671C23-17FA-4458-8197-EC28A971B261}"/>
+                <a16:creationId xmlns:a16="http://schemas.microsoft.com/office/drawing/2014/main" id="{AB0AC7DB-5B82-43F3-BC6B-B85AC1C53113}"/>
               </a:ext>
             </a:extLst>
           </p:cNvPr>
@@ -7889,7 +7889,7 @@
           <p:cNvPr id="21" name="">
             <a:extLst xmlns:a="http://schemas.openxmlformats.org/drawingml/2006/main">
               <a:ext uri="{FF2B5EF4-FFF2-40B4-BE49-F238E27FC236}">
-                <a16:creationId xmlns:a16="http://schemas.microsoft.com/office/drawing/2014/main" id="{9C66BB06-E208-4A76-B75F-12C534BC1157}"/>
+                <a16:creationId xmlns:a16="http://schemas.microsoft.com/office/drawing/2014/main" id="{5A033CDA-E8BE-4811-92B6-7BF74D0AE039}"/>
               </a:ext>
             </a:extLst>
           </p:cNvPr>
@@ -7953,7 +7953,7 @@
           <p:cNvPr id="22" name="">
             <a:extLst xmlns:a="http://schemas.openxmlformats.org/drawingml/2006/main">
               <a:ext uri="{FF2B5EF4-FFF2-40B4-BE49-F238E27FC236}">
-                <a16:creationId xmlns:a16="http://schemas.microsoft.com/office/drawing/2014/main" id="{309F33FA-DB38-48FC-BF3C-9394678C116E}"/>
+                <a16:creationId xmlns:a16="http://schemas.microsoft.com/office/drawing/2014/main" id="{93469310-E313-4D5C-8BEB-B70B8F0679FC}"/>
               </a:ext>
             </a:extLst>
           </p:cNvPr>
@@ -7986,7 +7986,7 @@
           <p:cNvPr id="23" name="">
             <a:extLst xmlns:a="http://schemas.openxmlformats.org/drawingml/2006/main">
               <a:ext uri="{FF2B5EF4-FFF2-40B4-BE49-F238E27FC236}">
-                <a16:creationId xmlns:a16="http://schemas.microsoft.com/office/drawing/2014/main" id="{77E98BEF-40E4-43C6-A1CA-832EDD21651C}"/>
+                <a16:creationId xmlns:a16="http://schemas.microsoft.com/office/drawing/2014/main" id="{3E01BD81-6C1F-4649-9795-E96B9B51C39F}"/>
               </a:ext>
             </a:extLst>
           </p:cNvPr>
@@ -8050,7 +8050,7 @@
           <p:cNvPr id="24" name="">
             <a:extLst xmlns:a="http://schemas.openxmlformats.org/drawingml/2006/main">
               <a:ext uri="{FF2B5EF4-FFF2-40B4-BE49-F238E27FC236}">
-                <a16:creationId xmlns:a16="http://schemas.microsoft.com/office/drawing/2014/main" id="{E693B640-4597-4AE7-97D8-B3B3E19C49A7}"/>
+                <a16:creationId xmlns:a16="http://schemas.microsoft.com/office/drawing/2014/main" id="{77EE3067-6552-453C-AE99-A404783F5E40}"/>
               </a:ext>
             </a:extLst>
           </p:cNvPr>
@@ -8083,7 +8083,7 @@
           <p:cNvPr id="25" name="">
             <a:extLst xmlns:a="http://schemas.openxmlformats.org/drawingml/2006/main">
               <a:ext uri="{FF2B5EF4-FFF2-40B4-BE49-F238E27FC236}">
-                <a16:creationId xmlns:a16="http://schemas.microsoft.com/office/drawing/2014/main" id="{FA480BE2-18F8-40F3-9C54-68C0946725D1}"/>
+                <a16:creationId xmlns:a16="http://schemas.microsoft.com/office/drawing/2014/main" id="{EABA9CE8-9493-4FDD-9ACC-B0F8EABA065C}"/>
               </a:ext>
             </a:extLst>
           </p:cNvPr>
@@ -8147,7 +8147,7 @@
           <p:cNvPr id="26" name="">
             <a:extLst xmlns:a="http://schemas.openxmlformats.org/drawingml/2006/main">
               <a:ext uri="{FF2B5EF4-FFF2-40B4-BE49-F238E27FC236}">
-                <a16:creationId xmlns:a16="http://schemas.microsoft.com/office/drawing/2014/main" id="{F5B21F1B-BF85-480F-8B68-CA1812ECB9FC}"/>
+                <a16:creationId xmlns:a16="http://schemas.microsoft.com/office/drawing/2014/main" id="{FBB4EC93-CF0F-40EF-93C7-FE01433079F4}"/>
               </a:ext>
             </a:extLst>
           </p:cNvPr>
@@ -8180,7 +8180,7 @@
           <p:cNvPr id="27" name="">
             <a:extLst xmlns:a="http://schemas.openxmlformats.org/drawingml/2006/main">
               <a:ext uri="{FF2B5EF4-FFF2-40B4-BE49-F238E27FC236}">
-                <a16:creationId xmlns:a16="http://schemas.microsoft.com/office/drawing/2014/main" id="{AA290019-F1C7-48A5-93D3-C5D3AE432CFC}"/>
+                <a16:creationId xmlns:a16="http://schemas.microsoft.com/office/drawing/2014/main" id="{A1D6ECCA-94B3-42AE-9490-A1DB423F516A}"/>
               </a:ext>
             </a:extLst>
           </p:cNvPr>
@@ -8244,7 +8244,7 @@
           <p:cNvPr id="28" name="">
             <a:extLst xmlns:a="http://schemas.openxmlformats.org/drawingml/2006/main">
               <a:ext uri="{FF2B5EF4-FFF2-40B4-BE49-F238E27FC236}">
-                <a16:creationId xmlns:a16="http://schemas.microsoft.com/office/drawing/2014/main" id="{6D590946-EE28-4B5A-9077-51EF0E99F9AA}"/>
+                <a16:creationId xmlns:a16="http://schemas.microsoft.com/office/drawing/2014/main" id="{5EB0F43A-416D-4966-8392-483733534E22}"/>
               </a:ext>
             </a:extLst>
           </p:cNvPr>
@@ -8277,7 +8277,7 @@
           <p:cNvPr id="29" name="">
             <a:extLst xmlns:a="http://schemas.openxmlformats.org/drawingml/2006/main">
               <a:ext uri="{FF2B5EF4-FFF2-40B4-BE49-F238E27FC236}">
-                <a16:creationId xmlns:a16="http://schemas.microsoft.com/office/drawing/2014/main" id="{B6E1173A-A53D-4D6A-90F2-EF04B0F80755}"/>
+                <a16:creationId xmlns:a16="http://schemas.microsoft.com/office/drawing/2014/main" id="{015D1C1C-28CF-4F5B-8CCE-29392F215C63}"/>
               </a:ext>
             </a:extLst>
           </p:cNvPr>
@@ -8341,7 +8341,7 @@
           <p:cNvPr id="30" name="">
             <a:extLst xmlns:a="http://schemas.openxmlformats.org/drawingml/2006/main">
               <a:ext uri="{FF2B5EF4-FFF2-40B4-BE49-F238E27FC236}">
-                <a16:creationId xmlns:a16="http://schemas.microsoft.com/office/drawing/2014/main" id="{40158CEC-FCCB-40A2-8A9B-98421AF8EB2D}"/>
+                <a16:creationId xmlns:a16="http://schemas.microsoft.com/office/drawing/2014/main" id="{E43B70C6-78D4-43D8-BBCB-C518AAC973E6}"/>
               </a:ext>
             </a:extLst>
           </p:cNvPr>
@@ -8405,7 +8405,7 @@
           <p:cNvPr id="31" name="">
             <a:extLst xmlns:a="http://schemas.openxmlformats.org/drawingml/2006/main">
               <a:ext uri="{FF2B5EF4-FFF2-40B4-BE49-F238E27FC236}">
-                <a16:creationId xmlns:a16="http://schemas.microsoft.com/office/drawing/2014/main" id="{CC2DC908-51AC-46AD-AB5C-F31DE24DD787}"/>
+                <a16:creationId xmlns:a16="http://schemas.microsoft.com/office/drawing/2014/main" id="{CEEF5C01-8F93-4D36-8738-228D4996A7CF}"/>
               </a:ext>
             </a:extLst>
           </p:cNvPr>
@@ -8469,7 +8469,7 @@
           <p:cNvPr id="32" name="">
             <a:extLst xmlns:a="http://schemas.openxmlformats.org/drawingml/2006/main">
               <a:ext uri="{FF2B5EF4-FFF2-40B4-BE49-F238E27FC236}">
-                <a16:creationId xmlns:a16="http://schemas.microsoft.com/office/drawing/2014/main" id="{A374E0F4-B489-4552-B1DC-889C17442463}"/>
+                <a16:creationId xmlns:a16="http://schemas.microsoft.com/office/drawing/2014/main" id="{0030495B-B385-4D55-BD7F-20C5CB4F7E45}"/>
               </a:ext>
             </a:extLst>
           </p:cNvPr>
@@ -8531,7 +8531,7 @@
     </p:spTree>
     <p:extLst>
       <p:ext uri="{BB962C8B-B14F-4D97-AF65-F5344CB8AC3E}">
-        <p14:creationId xmlns:p14="http://schemas.microsoft.com/office/powerpoint/2010/main" val="2103398977"/>
+        <p14:creationId xmlns:p14="http://schemas.microsoft.com/office/powerpoint/2010/main" val="8207604"/>
       </p:ext>
     </p:extLst>
   </p:cSld>
@@ -8555,7 +8555,7 @@
           <p:cNvPr id="1" name="">
             <a:extLst xmlns:a="http://schemas.openxmlformats.org/drawingml/2006/main">
               <a:ext uri="{FF2B5EF4-FFF2-40B4-BE49-F238E27FC236}">
-                <a16:creationId xmlns:a16="http://schemas.microsoft.com/office/drawing/2014/main" id="{B2243623-746C-4CF1-8F06-10937331995B}"/>
+                <a16:creationId xmlns:a16="http://schemas.microsoft.com/office/drawing/2014/main" id="{E6254CFD-7A2A-47E6-9796-3B4B1164E48A}"/>
               </a:ext>
             </a:extLst>
           </p:cNvPr>
@@ -8588,7 +8588,7 @@
           <p:cNvPr id="2" name="">
             <a:extLst xmlns:a="http://schemas.openxmlformats.org/drawingml/2006/main">
               <a:ext uri="{FF2B5EF4-FFF2-40B4-BE49-F238E27FC236}">
-                <a16:creationId xmlns:a16="http://schemas.microsoft.com/office/drawing/2014/main" id="{DC9EF91C-63C1-4A02-BED3-287C98A03E36}"/>
+                <a16:creationId xmlns:a16="http://schemas.microsoft.com/office/drawing/2014/main" id="{8D22B43D-842C-46C1-BD0A-B56E02028B22}"/>
               </a:ext>
             </a:extLst>
           </p:cNvPr>
@@ -8621,7 +8621,7 @@
           <p:cNvPr id="3" name="">
             <a:extLst xmlns:a="http://schemas.openxmlformats.org/drawingml/2006/main">
               <a:ext uri="{FF2B5EF4-FFF2-40B4-BE49-F238E27FC236}">
-                <a16:creationId xmlns:a16="http://schemas.microsoft.com/office/drawing/2014/main" id="{931733A3-B864-4B7A-9BDB-D4D19A62A0EF}"/>
+                <a16:creationId xmlns:a16="http://schemas.microsoft.com/office/drawing/2014/main" id="{A47C366B-95D6-482E-B873-285E69A0D08D}"/>
               </a:ext>
             </a:extLst>
           </p:cNvPr>
@@ -8685,7 +8685,7 @@
           <p:cNvPr id="4" name="">
             <a:extLst xmlns:a="http://schemas.openxmlformats.org/drawingml/2006/main">
               <a:ext uri="{FF2B5EF4-FFF2-40B4-BE49-F238E27FC236}">
-                <a16:creationId xmlns:a16="http://schemas.microsoft.com/office/drawing/2014/main" id="{D22C47F6-6E83-4D4D-8525-5A49F69186FB}"/>
+                <a16:creationId xmlns:a16="http://schemas.microsoft.com/office/drawing/2014/main" id="{35F679A9-A502-4EF8-A15C-A5DB2072F31D}"/>
               </a:ext>
             </a:extLst>
           </p:cNvPr>
@@ -8749,7 +8749,7 @@
           <p:cNvPr id="5" name="">
             <a:extLst xmlns:a="http://schemas.openxmlformats.org/drawingml/2006/main">
               <a:ext uri="{FF2B5EF4-FFF2-40B4-BE49-F238E27FC236}">
-                <a16:creationId xmlns:a16="http://schemas.microsoft.com/office/drawing/2014/main" id="{B939DC26-07B8-4DE8-9C1E-ACFC9ED66373}"/>
+                <a16:creationId xmlns:a16="http://schemas.microsoft.com/office/drawing/2014/main" id="{2D88C002-5ECC-4EAC-A10E-ED1664E0E061}"/>
               </a:ext>
             </a:extLst>
           </p:cNvPr>
@@ -8813,7 +8813,7 @@
           <p:cNvPr id="6" name="">
             <a:extLst xmlns:a="http://schemas.openxmlformats.org/drawingml/2006/main">
               <a:ext uri="{FF2B5EF4-FFF2-40B4-BE49-F238E27FC236}">
-                <a16:creationId xmlns:a16="http://schemas.microsoft.com/office/drawing/2014/main" id="{4B600AF3-3F7A-410D-AA33-A4C03014D89B}"/>
+                <a16:creationId xmlns:a16="http://schemas.microsoft.com/office/drawing/2014/main" id="{193DB712-EBBC-473B-BB0C-B3AF8BD10347}"/>
               </a:ext>
             </a:extLst>
           </p:cNvPr>
@@ -8846,7 +8846,7 @@
           <p:cNvPr id="7" name="">
             <a:extLst xmlns:a="http://schemas.openxmlformats.org/drawingml/2006/main">
               <a:ext uri="{FF2B5EF4-FFF2-40B4-BE49-F238E27FC236}">
-                <a16:creationId xmlns:a16="http://schemas.microsoft.com/office/drawing/2014/main" id="{4BB34C17-3CBF-4AB5-B5A2-2E1BB305C317}"/>
+                <a16:creationId xmlns:a16="http://schemas.microsoft.com/office/drawing/2014/main" id="{2AE36DDD-0E0E-42BC-8FEA-9FF75960D7B8}"/>
               </a:ext>
             </a:extLst>
           </p:cNvPr>
@@ -8910,7 +8910,7 @@
           <p:cNvPr id="8" name="">
             <a:extLst xmlns:a="http://schemas.openxmlformats.org/drawingml/2006/main">
               <a:ext uri="{FF2B5EF4-FFF2-40B4-BE49-F238E27FC236}">
-                <a16:creationId xmlns:a16="http://schemas.microsoft.com/office/drawing/2014/main" id="{5886B81F-4886-4EF7-BA7E-C17CC61C907C}"/>
+                <a16:creationId xmlns:a16="http://schemas.microsoft.com/office/drawing/2014/main" id="{3AA5D0EC-E0D0-4F71-BE68-0DB8DFFD3D35}"/>
               </a:ext>
             </a:extLst>
           </p:cNvPr>
@@ -8943,7 +8943,7 @@
           <p:cNvPr id="9" name="">
             <a:extLst xmlns:a="http://schemas.openxmlformats.org/drawingml/2006/main">
               <a:ext uri="{FF2B5EF4-FFF2-40B4-BE49-F238E27FC236}">
-                <a16:creationId xmlns:a16="http://schemas.microsoft.com/office/drawing/2014/main" id="{BDF10A99-95AC-4CC5-AFA5-FDB5344086B1}"/>
+                <a16:creationId xmlns:a16="http://schemas.microsoft.com/office/drawing/2014/main" id="{0172C2CB-887F-4CF9-B27A-3D0FC55C85AB}"/>
               </a:ext>
             </a:extLst>
           </p:cNvPr>
@@ -9007,7 +9007,7 @@
           <p:cNvPr id="10" name="">
             <a:extLst xmlns:a="http://schemas.openxmlformats.org/drawingml/2006/main">
               <a:ext uri="{FF2B5EF4-FFF2-40B4-BE49-F238E27FC236}">
-                <a16:creationId xmlns:a16="http://schemas.microsoft.com/office/drawing/2014/main" id="{8B3C5AE1-16E6-46B0-8CA6-20D5066F8C24}"/>
+                <a16:creationId xmlns:a16="http://schemas.microsoft.com/office/drawing/2014/main" id="{BC47A156-14CA-4FB4-9763-06FC5081531A}"/>
               </a:ext>
             </a:extLst>
           </p:cNvPr>
@@ -9040,7 +9040,7 @@
           <p:cNvPr id="11" name="">
             <a:extLst xmlns:a="http://schemas.openxmlformats.org/drawingml/2006/main">
               <a:ext uri="{FF2B5EF4-FFF2-40B4-BE49-F238E27FC236}">
-                <a16:creationId xmlns:a16="http://schemas.microsoft.com/office/drawing/2014/main" id="{D3CF39A2-11EE-4F7B-8372-331E5F9264D3}"/>
+                <a16:creationId xmlns:a16="http://schemas.microsoft.com/office/drawing/2014/main" id="{92F02584-16EF-49FD-B80B-05BCBCB0BB5B}"/>
               </a:ext>
             </a:extLst>
           </p:cNvPr>
@@ -9104,7 +9104,7 @@
           <p:cNvPr id="12" name="">
             <a:extLst xmlns:a="http://schemas.openxmlformats.org/drawingml/2006/main">
               <a:ext uri="{FF2B5EF4-FFF2-40B4-BE49-F238E27FC236}">
-                <a16:creationId xmlns:a16="http://schemas.microsoft.com/office/drawing/2014/main" id="{AA9EA9BB-700B-46F4-873A-BF66FD859FF8}"/>
+                <a16:creationId xmlns:a16="http://schemas.microsoft.com/office/drawing/2014/main" id="{F1645069-C2D8-46BF-90B3-284F47D6A387}"/>
               </a:ext>
             </a:extLst>
           </p:cNvPr>
@@ -9137,7 +9137,7 @@
           <p:cNvPr id="13" name="">
             <a:extLst xmlns:a="http://schemas.openxmlformats.org/drawingml/2006/main">
               <a:ext uri="{FF2B5EF4-FFF2-40B4-BE49-F238E27FC236}">
-                <a16:creationId xmlns:a16="http://schemas.microsoft.com/office/drawing/2014/main" id="{D757E1BF-DF06-43E1-B71F-EF368E1AE9B7}"/>
+                <a16:creationId xmlns:a16="http://schemas.microsoft.com/office/drawing/2014/main" id="{8D6E122A-97D1-49D0-B51C-D5A5D3589FC1}"/>
               </a:ext>
             </a:extLst>
           </p:cNvPr>
@@ -9201,7 +9201,7 @@
           <p:cNvPr id="14" name="">
             <a:extLst xmlns:a="http://schemas.openxmlformats.org/drawingml/2006/main">
               <a:ext uri="{FF2B5EF4-FFF2-40B4-BE49-F238E27FC236}">
-                <a16:creationId xmlns:a16="http://schemas.microsoft.com/office/drawing/2014/main" id="{017F453B-70D6-43B8-A56C-E218FC26FE2D}"/>
+                <a16:creationId xmlns:a16="http://schemas.microsoft.com/office/drawing/2014/main" id="{879F5857-4FC5-4787-8A63-608227294184}"/>
               </a:ext>
             </a:extLst>
           </p:cNvPr>
@@ -9234,7 +9234,7 @@
           <p:cNvPr id="15" name="">
             <a:extLst xmlns:a="http://schemas.openxmlformats.org/drawingml/2006/main">
               <a:ext uri="{FF2B5EF4-FFF2-40B4-BE49-F238E27FC236}">
-                <a16:creationId xmlns:a16="http://schemas.microsoft.com/office/drawing/2014/main" id="{904BB2B5-8579-4B27-88AF-9A6845DF08B1}"/>
+                <a16:creationId xmlns:a16="http://schemas.microsoft.com/office/drawing/2014/main" id="{980B8ABD-30B2-45E6-BA6F-B1FE07D9CE2C}"/>
               </a:ext>
             </a:extLst>
           </p:cNvPr>
@@ -9298,7 +9298,7 @@
           <p:cNvPr id="16" name="">
             <a:extLst xmlns:a="http://schemas.openxmlformats.org/drawingml/2006/main">
               <a:ext uri="{FF2B5EF4-FFF2-40B4-BE49-F238E27FC236}">
-                <a16:creationId xmlns:a16="http://schemas.microsoft.com/office/drawing/2014/main" id="{38B32E80-4505-4F6F-8BF6-CA47F76AA3E5}"/>
+                <a16:creationId xmlns:a16="http://schemas.microsoft.com/office/drawing/2014/main" id="{55317CAC-A2B6-463B-AD74-84873BD77E15}"/>
               </a:ext>
             </a:extLst>
           </p:cNvPr>
@@ -9331,7 +9331,7 @@
           <p:cNvPr id="17" name="">
             <a:extLst xmlns:a="http://schemas.openxmlformats.org/drawingml/2006/main">
               <a:ext uri="{FF2B5EF4-FFF2-40B4-BE49-F238E27FC236}">
-                <a16:creationId xmlns:a16="http://schemas.microsoft.com/office/drawing/2014/main" id="{2C1FD6D2-53B3-4BF1-9166-9E8BDA407FAE}"/>
+                <a16:creationId xmlns:a16="http://schemas.microsoft.com/office/drawing/2014/main" id="{3AA33B7D-A888-47EE-B5A1-7A731AE4B507}"/>
               </a:ext>
             </a:extLst>
           </p:cNvPr>
@@ -9395,7 +9395,7 @@
           <p:cNvPr id="18" name="">
             <a:extLst xmlns:a="http://schemas.openxmlformats.org/drawingml/2006/main">
               <a:ext uri="{FF2B5EF4-FFF2-40B4-BE49-F238E27FC236}">
-                <a16:creationId xmlns:a16="http://schemas.microsoft.com/office/drawing/2014/main" id="{5EFE4ED9-5B6B-48E0-BE29-8C026FE55640}"/>
+                <a16:creationId xmlns:a16="http://schemas.microsoft.com/office/drawing/2014/main" id="{51C7557F-48B2-40E4-9E33-3E19FEC3CAC8}"/>
               </a:ext>
             </a:extLst>
           </p:cNvPr>
@@ -9428,7 +9428,7 @@
           <p:cNvPr id="19" name="">
             <a:extLst xmlns:a="http://schemas.openxmlformats.org/drawingml/2006/main">
               <a:ext uri="{FF2B5EF4-FFF2-40B4-BE49-F238E27FC236}">
-                <a16:creationId xmlns:a16="http://schemas.microsoft.com/office/drawing/2014/main" id="{451A1AB0-7FA5-4C55-96AD-2AB11895927E}"/>
+                <a16:creationId xmlns:a16="http://schemas.microsoft.com/office/drawing/2014/main" id="{457EB04A-CBC6-434C-8124-CE4BB2C126F1}"/>
               </a:ext>
             </a:extLst>
           </p:cNvPr>
@@ -9492,7 +9492,7 @@
           <p:cNvPr id="20" name="">
             <a:extLst xmlns:a="http://schemas.openxmlformats.org/drawingml/2006/main">
               <a:ext uri="{FF2B5EF4-FFF2-40B4-BE49-F238E27FC236}">
-                <a16:creationId xmlns:a16="http://schemas.microsoft.com/office/drawing/2014/main" id="{4F83B4FD-FBA3-4B2E-BCCA-D47B9103CD76}"/>
+                <a16:creationId xmlns:a16="http://schemas.microsoft.com/office/drawing/2014/main" id="{5B408C99-1FB5-439E-AC26-EC6CF23E0E28}"/>
               </a:ext>
             </a:extLst>
           </p:cNvPr>
@@ -9525,7 +9525,7 @@
           <p:cNvPr id="21" name="">
             <a:extLst xmlns:a="http://schemas.openxmlformats.org/drawingml/2006/main">
               <a:ext uri="{FF2B5EF4-FFF2-40B4-BE49-F238E27FC236}">
-                <a16:creationId xmlns:a16="http://schemas.microsoft.com/office/drawing/2014/main" id="{39425B49-6DCC-4EAE-B3A7-7D0D4E291B95}"/>
+                <a16:creationId xmlns:a16="http://schemas.microsoft.com/office/drawing/2014/main" id="{945C3362-55C6-46E3-9BD5-06C00BEAF9AA}"/>
               </a:ext>
             </a:extLst>
           </p:cNvPr>
@@ -9589,7 +9589,7 @@
           <p:cNvPr id="22" name="">
             <a:extLst xmlns:a="http://schemas.openxmlformats.org/drawingml/2006/main">
               <a:ext uri="{FF2B5EF4-FFF2-40B4-BE49-F238E27FC236}">
-                <a16:creationId xmlns:a16="http://schemas.microsoft.com/office/drawing/2014/main" id="{73E2148E-0206-4BF1-9062-727282997BD4}"/>
+                <a16:creationId xmlns:a16="http://schemas.microsoft.com/office/drawing/2014/main" id="{8D760E0D-6778-4262-A2ED-B5FA5CC1C185}"/>
               </a:ext>
             </a:extLst>
           </p:cNvPr>
@@ -9622,7 +9622,7 @@
           <p:cNvPr id="23" name="">
             <a:extLst xmlns:a="http://schemas.openxmlformats.org/drawingml/2006/main">
               <a:ext uri="{FF2B5EF4-FFF2-40B4-BE49-F238E27FC236}">
-                <a16:creationId xmlns:a16="http://schemas.microsoft.com/office/drawing/2014/main" id="{CA856A82-54BC-4BA5-B681-F0C6C2B16F9A}"/>
+                <a16:creationId xmlns:a16="http://schemas.microsoft.com/office/drawing/2014/main" id="{2C5BE6F5-5E8D-421E-8C5B-49862D927700}"/>
               </a:ext>
             </a:extLst>
           </p:cNvPr>
@@ -9686,7 +9686,7 @@
           <p:cNvPr id="24" name="">
             <a:extLst xmlns:a="http://schemas.openxmlformats.org/drawingml/2006/main">
               <a:ext uri="{FF2B5EF4-FFF2-40B4-BE49-F238E27FC236}">
-                <a16:creationId xmlns:a16="http://schemas.microsoft.com/office/drawing/2014/main" id="{C68A0CB5-2987-47E5-A264-6CC4CFD3B9FF}"/>
+                <a16:creationId xmlns:a16="http://schemas.microsoft.com/office/drawing/2014/main" id="{197A5E29-6E34-4D6D-9F2E-7F5BAA99C70F}"/>
               </a:ext>
             </a:extLst>
           </p:cNvPr>
@@ -9719,7 +9719,7 @@
           <p:cNvPr id="25" name="">
             <a:extLst xmlns:a="http://schemas.openxmlformats.org/drawingml/2006/main">
               <a:ext uri="{FF2B5EF4-FFF2-40B4-BE49-F238E27FC236}">
-                <a16:creationId xmlns:a16="http://schemas.microsoft.com/office/drawing/2014/main" id="{144550C0-B56D-48EA-84A9-132FC7E33BE9}"/>
+                <a16:creationId xmlns:a16="http://schemas.microsoft.com/office/drawing/2014/main" id="{8171EAA8-0E0F-4236-99BA-BD356FB8AC0B}"/>
               </a:ext>
             </a:extLst>
           </p:cNvPr>
@@ -9783,7 +9783,7 @@
           <p:cNvPr id="26" name="">
             <a:extLst xmlns:a="http://schemas.openxmlformats.org/drawingml/2006/main">
               <a:ext uri="{FF2B5EF4-FFF2-40B4-BE49-F238E27FC236}">
-                <a16:creationId xmlns:a16="http://schemas.microsoft.com/office/drawing/2014/main" id="{F02BC6E9-6851-4F76-92D8-D04F55399764}"/>
+                <a16:creationId xmlns:a16="http://schemas.microsoft.com/office/drawing/2014/main" id="{B8CCED34-BB63-459A-858F-4A12B36F7B28}"/>
               </a:ext>
             </a:extLst>
           </p:cNvPr>
@@ -9816,7 +9816,7 @@
           <p:cNvPr id="27" name="">
             <a:extLst xmlns:a="http://schemas.openxmlformats.org/drawingml/2006/main">
               <a:ext uri="{FF2B5EF4-FFF2-40B4-BE49-F238E27FC236}">
-                <a16:creationId xmlns:a16="http://schemas.microsoft.com/office/drawing/2014/main" id="{FA6432BF-B369-4A29-98EF-DC03DBFFCE4D}"/>
+                <a16:creationId xmlns:a16="http://schemas.microsoft.com/office/drawing/2014/main" id="{02B9001E-F3D4-4784-92E5-8FC8058DCBCF}"/>
               </a:ext>
             </a:extLst>
           </p:cNvPr>
@@ -9880,7 +9880,7 @@
           <p:cNvPr id="28" name="">
             <a:extLst xmlns:a="http://schemas.openxmlformats.org/drawingml/2006/main">
               <a:ext uri="{FF2B5EF4-FFF2-40B4-BE49-F238E27FC236}">
-                <a16:creationId xmlns:a16="http://schemas.microsoft.com/office/drawing/2014/main" id="{7E810579-A73A-4E0D-85AD-FA32C29E268A}"/>
+                <a16:creationId xmlns:a16="http://schemas.microsoft.com/office/drawing/2014/main" id="{C211BE42-E0A8-47C8-B55E-F2F8682DC5DD}"/>
               </a:ext>
             </a:extLst>
           </p:cNvPr>
@@ -9913,7 +9913,7 @@
           <p:cNvPr id="29" name="">
             <a:extLst xmlns:a="http://schemas.openxmlformats.org/drawingml/2006/main">
               <a:ext uri="{FF2B5EF4-FFF2-40B4-BE49-F238E27FC236}">
-                <a16:creationId xmlns:a16="http://schemas.microsoft.com/office/drawing/2014/main" id="{BAE4A379-EF7D-4F69-A10E-83E52E170E68}"/>
+                <a16:creationId xmlns:a16="http://schemas.microsoft.com/office/drawing/2014/main" id="{7F8056D6-C1C7-4004-98F3-3DC8F28C38BC}"/>
               </a:ext>
             </a:extLst>
           </p:cNvPr>
@@ -9977,7 +9977,7 @@
           <p:cNvPr id="30" name="">
             <a:extLst xmlns:a="http://schemas.openxmlformats.org/drawingml/2006/main">
               <a:ext uri="{FF2B5EF4-FFF2-40B4-BE49-F238E27FC236}">
-                <a16:creationId xmlns:a16="http://schemas.microsoft.com/office/drawing/2014/main" id="{1C3F8345-A3D0-4578-A007-5B5B58348017}"/>
+                <a16:creationId xmlns:a16="http://schemas.microsoft.com/office/drawing/2014/main" id="{AE237E2A-C325-4185-8E09-5EB391C2BA8D}"/>
               </a:ext>
             </a:extLst>
           </p:cNvPr>
@@ -10010,7 +10010,7 @@
           <p:cNvPr id="31" name="">
             <a:extLst xmlns:a="http://schemas.openxmlformats.org/drawingml/2006/main">
               <a:ext uri="{FF2B5EF4-FFF2-40B4-BE49-F238E27FC236}">
-                <a16:creationId xmlns:a16="http://schemas.microsoft.com/office/drawing/2014/main" id="{17FDB1F0-59E5-40EB-9C10-E142BEE5D773}"/>
+                <a16:creationId xmlns:a16="http://schemas.microsoft.com/office/drawing/2014/main" id="{16B7DE4B-7788-4BC3-B7A8-5B0FBF6404AE}"/>
               </a:ext>
             </a:extLst>
           </p:cNvPr>
@@ -10074,7 +10074,7 @@
           <p:cNvPr id="32" name="">
             <a:extLst xmlns:a="http://schemas.openxmlformats.org/drawingml/2006/main">
               <a:ext uri="{FF2B5EF4-FFF2-40B4-BE49-F238E27FC236}">
-                <a16:creationId xmlns:a16="http://schemas.microsoft.com/office/drawing/2014/main" id="{B9272FA5-B995-4A9E-8DD7-1035E1454034}"/>
+                <a16:creationId xmlns:a16="http://schemas.microsoft.com/office/drawing/2014/main" id="{E4780D4E-C189-4A7A-BAEF-8F28259B4D19}"/>
               </a:ext>
             </a:extLst>
           </p:cNvPr>
@@ -10107,7 +10107,7 @@
           <p:cNvPr id="33" name="">
             <a:extLst xmlns:a="http://schemas.openxmlformats.org/drawingml/2006/main">
               <a:ext uri="{FF2B5EF4-FFF2-40B4-BE49-F238E27FC236}">
-                <a16:creationId xmlns:a16="http://schemas.microsoft.com/office/drawing/2014/main" id="{6E15CF93-C785-4B51-BDE1-630302D36A4F}"/>
+                <a16:creationId xmlns:a16="http://schemas.microsoft.com/office/drawing/2014/main" id="{11D0A053-9FD1-4A46-8FB2-6D1C4629FED0}"/>
               </a:ext>
             </a:extLst>
           </p:cNvPr>
@@ -10171,7 +10171,7 @@
           <p:cNvPr id="34" name="">
             <a:extLst xmlns:a="http://schemas.openxmlformats.org/drawingml/2006/main">
               <a:ext uri="{FF2B5EF4-FFF2-40B4-BE49-F238E27FC236}">
-                <a16:creationId xmlns:a16="http://schemas.microsoft.com/office/drawing/2014/main" id="{69AE49DD-1DA4-4C03-A511-68E622FC211D}"/>
+                <a16:creationId xmlns:a16="http://schemas.microsoft.com/office/drawing/2014/main" id="{0415D14F-F4DD-49F2-89CA-73253411A594}"/>
               </a:ext>
             </a:extLst>
           </p:cNvPr>
@@ -10235,7 +10235,7 @@
           <p:cNvPr id="35" name="">
             <a:extLst xmlns:a="http://schemas.openxmlformats.org/drawingml/2006/main">
               <a:ext uri="{FF2B5EF4-FFF2-40B4-BE49-F238E27FC236}">
-                <a16:creationId xmlns:a16="http://schemas.microsoft.com/office/drawing/2014/main" id="{7616A641-B630-49D2-AAD0-BD8EB4B613EB}"/>
+                <a16:creationId xmlns:a16="http://schemas.microsoft.com/office/drawing/2014/main" id="{134DEE09-A1C2-4A9B-94DB-7A9476973BEA}"/>
               </a:ext>
             </a:extLst>
           </p:cNvPr>
@@ -10297,7 +10297,7 @@
     </p:spTree>
     <p:extLst>
       <p:ext uri="{BB962C8B-B14F-4D97-AF65-F5344CB8AC3E}">
-        <p14:creationId xmlns:p14="http://schemas.microsoft.com/office/powerpoint/2010/main" val="761294726"/>
+        <p14:creationId xmlns:p14="http://schemas.microsoft.com/office/powerpoint/2010/main" val="1337571099"/>
       </p:ext>
     </p:extLst>
   </p:cSld>
@@ -10321,7 +10321,7 @@
           <p:cNvPr id="1" name="">
             <a:extLst xmlns:a="http://schemas.openxmlformats.org/drawingml/2006/main">
               <a:ext uri="{FF2B5EF4-FFF2-40B4-BE49-F238E27FC236}">
-                <a16:creationId xmlns:a16="http://schemas.microsoft.com/office/drawing/2014/main" id="{A81D00E7-2212-4250-B489-FF5454931E3F}"/>
+                <a16:creationId xmlns:a16="http://schemas.microsoft.com/office/drawing/2014/main" id="{0B652C93-D998-440A-95F0-1F22CE496ECC}"/>
               </a:ext>
             </a:extLst>
           </p:cNvPr>
@@ -10354,7 +10354,7 @@
           <p:cNvPr id="2" name="">
             <a:extLst xmlns:a="http://schemas.openxmlformats.org/drawingml/2006/main">
               <a:ext uri="{FF2B5EF4-FFF2-40B4-BE49-F238E27FC236}">
-                <a16:creationId xmlns:a16="http://schemas.microsoft.com/office/drawing/2014/main" id="{62EA4B76-0BD6-4D2B-BF86-BC74178786B6}"/>
+                <a16:creationId xmlns:a16="http://schemas.microsoft.com/office/drawing/2014/main" id="{47F630A6-E3AF-4282-8CD1-0C15DCD09E69}"/>
               </a:ext>
             </a:extLst>
           </p:cNvPr>
@@ -10387,7 +10387,7 @@
           <p:cNvPr id="3" name="">
             <a:extLst xmlns:a="http://schemas.openxmlformats.org/drawingml/2006/main">
               <a:ext uri="{FF2B5EF4-FFF2-40B4-BE49-F238E27FC236}">
-                <a16:creationId xmlns:a16="http://schemas.microsoft.com/office/drawing/2014/main" id="{C0AB13B6-958C-45F4-8711-EE7ABB9D9D26}"/>
+                <a16:creationId xmlns:a16="http://schemas.microsoft.com/office/drawing/2014/main" id="{1AF5A337-5A17-45F5-8DD5-675DF20D77FD}"/>
               </a:ext>
             </a:extLst>
           </p:cNvPr>
@@ -10451,7 +10451,7 @@
           <p:cNvPr id="4" name="">
             <a:extLst xmlns:a="http://schemas.openxmlformats.org/drawingml/2006/main">
               <a:ext uri="{FF2B5EF4-FFF2-40B4-BE49-F238E27FC236}">
-                <a16:creationId xmlns:a16="http://schemas.microsoft.com/office/drawing/2014/main" id="{A9538B2E-8659-403D-B16D-E1AE13138998}"/>
+                <a16:creationId xmlns:a16="http://schemas.microsoft.com/office/drawing/2014/main" id="{C802BF10-0A45-4AC0-A450-6C2906E7A6A5}"/>
               </a:ext>
             </a:extLst>
           </p:cNvPr>
@@ -10515,7 +10515,7 @@
           <p:cNvPr id="5" name="">
             <a:extLst xmlns:a="http://schemas.openxmlformats.org/drawingml/2006/main">
               <a:ext uri="{FF2B5EF4-FFF2-40B4-BE49-F238E27FC236}">
-                <a16:creationId xmlns:a16="http://schemas.microsoft.com/office/drawing/2014/main" id="{B9B093CB-6F3B-446D-A5A8-C7EE36799C66}"/>
+                <a16:creationId xmlns:a16="http://schemas.microsoft.com/office/drawing/2014/main" id="{2DAFF0F5-E0A2-4433-BD12-E2A2E12A8C14}"/>
               </a:ext>
             </a:extLst>
           </p:cNvPr>
@@ -10579,7 +10579,7 @@
           <p:cNvPr id="6" name="">
             <a:extLst xmlns:a="http://schemas.openxmlformats.org/drawingml/2006/main">
               <a:ext uri="{FF2B5EF4-FFF2-40B4-BE49-F238E27FC236}">
-                <a16:creationId xmlns:a16="http://schemas.microsoft.com/office/drawing/2014/main" id="{145D8688-4CB7-40D4-9796-3F3357A7E00B}"/>
+                <a16:creationId xmlns:a16="http://schemas.microsoft.com/office/drawing/2014/main" id="{DA80E416-73A0-433D-9603-317A7BB44CCD}"/>
               </a:ext>
             </a:extLst>
           </p:cNvPr>
@@ -10612,7 +10612,7 @@
           <p:cNvPr id="7" name="">
             <a:extLst xmlns:a="http://schemas.openxmlformats.org/drawingml/2006/main">
               <a:ext uri="{FF2B5EF4-FFF2-40B4-BE49-F238E27FC236}">
-                <a16:creationId xmlns:a16="http://schemas.microsoft.com/office/drawing/2014/main" id="{ACEC339A-6623-4049-B862-D2B8BB17E14F}"/>
+                <a16:creationId xmlns:a16="http://schemas.microsoft.com/office/drawing/2014/main" id="{BC572690-D739-4AF9-8BCE-04A83058AA82}"/>
               </a:ext>
             </a:extLst>
           </p:cNvPr>
@@ -10676,7 +10676,7 @@
           <p:cNvPr id="8" name="">
             <a:extLst xmlns:a="http://schemas.openxmlformats.org/drawingml/2006/main">
               <a:ext uri="{FF2B5EF4-FFF2-40B4-BE49-F238E27FC236}">
-                <a16:creationId xmlns:a16="http://schemas.microsoft.com/office/drawing/2014/main" id="{478A17F7-9C28-48B8-ABFB-39B2B9164010}"/>
+                <a16:creationId xmlns:a16="http://schemas.microsoft.com/office/drawing/2014/main" id="{8F9681CF-4E56-462E-BC3F-C30D9563F4C3}"/>
               </a:ext>
             </a:extLst>
           </p:cNvPr>
@@ -10709,7 +10709,7 @@
           <p:cNvPr id="9" name="">
             <a:extLst xmlns:a="http://schemas.openxmlformats.org/drawingml/2006/main">
               <a:ext uri="{FF2B5EF4-FFF2-40B4-BE49-F238E27FC236}">
-                <a16:creationId xmlns:a16="http://schemas.microsoft.com/office/drawing/2014/main" id="{4EFA7CDB-1111-4AAA-8821-AF6B0B7C85F1}"/>
+                <a16:creationId xmlns:a16="http://schemas.microsoft.com/office/drawing/2014/main" id="{841AB4AA-53CF-4E5E-8544-312471866AFB}"/>
               </a:ext>
             </a:extLst>
           </p:cNvPr>
@@ -10773,7 +10773,7 @@
           <p:cNvPr id="10" name="">
             <a:extLst xmlns:a="http://schemas.openxmlformats.org/drawingml/2006/main">
               <a:ext uri="{FF2B5EF4-FFF2-40B4-BE49-F238E27FC236}">
-                <a16:creationId xmlns:a16="http://schemas.microsoft.com/office/drawing/2014/main" id="{52F27E83-8E70-4F52-BD78-1DF0A57CC233}"/>
+                <a16:creationId xmlns:a16="http://schemas.microsoft.com/office/drawing/2014/main" id="{56C78AE9-BA4A-450F-8D1F-FEE449D54F76}"/>
               </a:ext>
             </a:extLst>
           </p:cNvPr>
@@ -10806,7 +10806,7 @@
           <p:cNvPr id="11" name="">
             <a:extLst xmlns:a="http://schemas.openxmlformats.org/drawingml/2006/main">
               <a:ext uri="{FF2B5EF4-FFF2-40B4-BE49-F238E27FC236}">
-                <a16:creationId xmlns:a16="http://schemas.microsoft.com/office/drawing/2014/main" id="{0F5EFE74-B813-462F-A92A-F12FDC88630D}"/>
+                <a16:creationId xmlns:a16="http://schemas.microsoft.com/office/drawing/2014/main" id="{71AEA2E4-BEF9-4175-BF4C-B7C369725212}"/>
               </a:ext>
             </a:extLst>
           </p:cNvPr>
@@ -10870,7 +10870,7 @@
           <p:cNvPr id="12" name="">
             <a:extLst xmlns:a="http://schemas.openxmlformats.org/drawingml/2006/main">
               <a:ext uri="{FF2B5EF4-FFF2-40B4-BE49-F238E27FC236}">
-                <a16:creationId xmlns:a16="http://schemas.microsoft.com/office/drawing/2014/main" id="{19C4E2F0-55D3-4469-9DF3-C6305332A8E0}"/>
+                <a16:creationId xmlns:a16="http://schemas.microsoft.com/office/drawing/2014/main" id="{61D7E4E5-F959-4E30-9046-58EDDA6B2D12}"/>
               </a:ext>
             </a:extLst>
           </p:cNvPr>
@@ -10903,7 +10903,7 @@
           <p:cNvPr id="13" name="">
             <a:extLst xmlns:a="http://schemas.openxmlformats.org/drawingml/2006/main">
               <a:ext uri="{FF2B5EF4-FFF2-40B4-BE49-F238E27FC236}">
-                <a16:creationId xmlns:a16="http://schemas.microsoft.com/office/drawing/2014/main" id="{4FB03BD9-4757-4F56-BCAE-2A1A08B23460}"/>
+                <a16:creationId xmlns:a16="http://schemas.microsoft.com/office/drawing/2014/main" id="{EDD9574B-0991-43BB-AD70-B8CE8CBD9FF3}"/>
               </a:ext>
             </a:extLst>
           </p:cNvPr>
@@ -10967,7 +10967,7 @@
           <p:cNvPr id="14" name="">
             <a:extLst xmlns:a="http://schemas.openxmlformats.org/drawingml/2006/main">
               <a:ext uri="{FF2B5EF4-FFF2-40B4-BE49-F238E27FC236}">
-                <a16:creationId xmlns:a16="http://schemas.microsoft.com/office/drawing/2014/main" id="{48D81705-A742-41B3-8A2F-8E6B67AABB1C}"/>
+                <a16:creationId xmlns:a16="http://schemas.microsoft.com/office/drawing/2014/main" id="{914D4F06-AD0D-4D37-8D11-6AE12D669B79}"/>
               </a:ext>
             </a:extLst>
           </p:cNvPr>
@@ -11000,7 +11000,7 @@
           <p:cNvPr id="15" name="">
             <a:extLst xmlns:a="http://schemas.openxmlformats.org/drawingml/2006/main">
               <a:ext uri="{FF2B5EF4-FFF2-40B4-BE49-F238E27FC236}">
-                <a16:creationId xmlns:a16="http://schemas.microsoft.com/office/drawing/2014/main" id="{3248CAFA-3AA3-43F6-8178-DD80323F7FB0}"/>
+                <a16:creationId xmlns:a16="http://schemas.microsoft.com/office/drawing/2014/main" id="{E9135FED-4174-4502-876F-D481F528C129}"/>
               </a:ext>
             </a:extLst>
           </p:cNvPr>
@@ -11064,7 +11064,7 @@
           <p:cNvPr id="16" name="">
             <a:extLst xmlns:a="http://schemas.openxmlformats.org/drawingml/2006/main">
               <a:ext uri="{FF2B5EF4-FFF2-40B4-BE49-F238E27FC236}">
-                <a16:creationId xmlns:a16="http://schemas.microsoft.com/office/drawing/2014/main" id="{DB73CABF-C431-4D22-8995-F5E68F9DA829}"/>
+                <a16:creationId xmlns:a16="http://schemas.microsoft.com/office/drawing/2014/main" id="{135457E4-1C5B-4CCD-A09C-E83798DB142E}"/>
               </a:ext>
             </a:extLst>
           </p:cNvPr>
@@ -11097,7 +11097,7 @@
           <p:cNvPr id="17" name="">
             <a:extLst xmlns:a="http://schemas.openxmlformats.org/drawingml/2006/main">
               <a:ext uri="{FF2B5EF4-FFF2-40B4-BE49-F238E27FC236}">
-                <a16:creationId xmlns:a16="http://schemas.microsoft.com/office/drawing/2014/main" id="{A54C3BCB-A5FD-4742-A464-57ACBBB6CA43}"/>
+                <a16:creationId xmlns:a16="http://schemas.microsoft.com/office/drawing/2014/main" id="{BE54F8FC-DD4C-4FCC-8C4D-625BABF2A5B6}"/>
               </a:ext>
             </a:extLst>
           </p:cNvPr>
@@ -11161,7 +11161,7 @@
           <p:cNvPr id="18" name="">
             <a:extLst xmlns:a="http://schemas.openxmlformats.org/drawingml/2006/main">
               <a:ext uri="{FF2B5EF4-FFF2-40B4-BE49-F238E27FC236}">
-                <a16:creationId xmlns:a16="http://schemas.microsoft.com/office/drawing/2014/main" id="{63DE2E81-8131-422B-A7AD-87190BF85973}"/>
+                <a16:creationId xmlns:a16="http://schemas.microsoft.com/office/drawing/2014/main" id="{B41EB57B-5E6F-45B8-956A-CD4E02695DFA}"/>
               </a:ext>
             </a:extLst>
           </p:cNvPr>
@@ -11194,7 +11194,7 @@
           <p:cNvPr id="19" name="">
             <a:extLst xmlns:a="http://schemas.openxmlformats.org/drawingml/2006/main">
               <a:ext uri="{FF2B5EF4-FFF2-40B4-BE49-F238E27FC236}">
-                <a16:creationId xmlns:a16="http://schemas.microsoft.com/office/drawing/2014/main" id="{2A74CBB8-C100-43DC-87B4-086926A7172F}"/>
+                <a16:creationId xmlns:a16="http://schemas.microsoft.com/office/drawing/2014/main" id="{AF290EE6-CDA0-4403-AD67-BFD944CA14B4}"/>
               </a:ext>
             </a:extLst>
           </p:cNvPr>
@@ -11258,7 +11258,7 @@
           <p:cNvPr id="20" name="">
             <a:extLst xmlns:a="http://schemas.openxmlformats.org/drawingml/2006/main">
               <a:ext uri="{FF2B5EF4-FFF2-40B4-BE49-F238E27FC236}">
-                <a16:creationId xmlns:a16="http://schemas.microsoft.com/office/drawing/2014/main" id="{E0FBD498-6129-405F-900A-178FA462DBB3}"/>
+                <a16:creationId xmlns:a16="http://schemas.microsoft.com/office/drawing/2014/main" id="{8769C0AD-9780-4615-8237-FC85F2188420}"/>
               </a:ext>
             </a:extLst>
           </p:cNvPr>
@@ -11291,7 +11291,7 @@
           <p:cNvPr id="21" name="">
             <a:extLst xmlns:a="http://schemas.openxmlformats.org/drawingml/2006/main">
               <a:ext uri="{FF2B5EF4-FFF2-40B4-BE49-F238E27FC236}">
-                <a16:creationId xmlns:a16="http://schemas.microsoft.com/office/drawing/2014/main" id="{1092D64C-9355-4FBC-B984-F6A18987AB3C}"/>
+                <a16:creationId xmlns:a16="http://schemas.microsoft.com/office/drawing/2014/main" id="{7539E46C-3610-4D7A-9CF7-C622710CC695}"/>
               </a:ext>
             </a:extLst>
           </p:cNvPr>
@@ -11355,7 +11355,7 @@
           <p:cNvPr id="22" name="">
             <a:extLst xmlns:a="http://schemas.openxmlformats.org/drawingml/2006/main">
               <a:ext uri="{FF2B5EF4-FFF2-40B4-BE49-F238E27FC236}">
-                <a16:creationId xmlns:a16="http://schemas.microsoft.com/office/drawing/2014/main" id="{281F71A3-51D2-4E92-A48A-432994F95DD8}"/>
+                <a16:creationId xmlns:a16="http://schemas.microsoft.com/office/drawing/2014/main" id="{0833F764-E155-46AE-8DE4-D1C043FDD4B7}"/>
               </a:ext>
             </a:extLst>
           </p:cNvPr>
@@ -11388,7 +11388,7 @@
           <p:cNvPr id="23" name="">
             <a:extLst xmlns:a="http://schemas.openxmlformats.org/drawingml/2006/main">
               <a:ext uri="{FF2B5EF4-FFF2-40B4-BE49-F238E27FC236}">
-                <a16:creationId xmlns:a16="http://schemas.microsoft.com/office/drawing/2014/main" id="{79798F4C-8B8A-4869-B738-1E8E3E9E4DA2}"/>
+                <a16:creationId xmlns:a16="http://schemas.microsoft.com/office/drawing/2014/main" id="{809D413D-8847-44AC-8E44-0C4DA1699309}"/>
               </a:ext>
             </a:extLst>
           </p:cNvPr>
@@ -11452,7 +11452,7 @@
           <p:cNvPr id="24" name="">
             <a:extLst xmlns:a="http://schemas.openxmlformats.org/drawingml/2006/main">
               <a:ext uri="{FF2B5EF4-FFF2-40B4-BE49-F238E27FC236}">
-                <a16:creationId xmlns:a16="http://schemas.microsoft.com/office/drawing/2014/main" id="{BC4DBB89-78BB-4F4D-8183-B3598E602452}"/>
+                <a16:creationId xmlns:a16="http://schemas.microsoft.com/office/drawing/2014/main" id="{9358241F-5813-42FB-8F6E-4FF297CAE6BE}"/>
               </a:ext>
             </a:extLst>
           </p:cNvPr>
@@ -11485,7 +11485,7 @@
           <p:cNvPr id="25" name="">
             <a:extLst xmlns:a="http://schemas.openxmlformats.org/drawingml/2006/main">
               <a:ext uri="{FF2B5EF4-FFF2-40B4-BE49-F238E27FC236}">
-                <a16:creationId xmlns:a16="http://schemas.microsoft.com/office/drawing/2014/main" id="{53776B47-9A45-452B-AA60-2CE4B83831C5}"/>
+                <a16:creationId xmlns:a16="http://schemas.microsoft.com/office/drawing/2014/main" id="{8872C8BE-7A39-480F-A84C-BD03B09806D4}"/>
               </a:ext>
             </a:extLst>
           </p:cNvPr>
@@ -11549,7 +11549,7 @@
           <p:cNvPr id="26" name="">
             <a:extLst xmlns:a="http://schemas.openxmlformats.org/drawingml/2006/main">
               <a:ext uri="{FF2B5EF4-FFF2-40B4-BE49-F238E27FC236}">
-                <a16:creationId xmlns:a16="http://schemas.microsoft.com/office/drawing/2014/main" id="{2B8378ED-1718-4731-AA52-875600025C27}"/>
+                <a16:creationId xmlns:a16="http://schemas.microsoft.com/office/drawing/2014/main" id="{5751E0F9-68CF-4DD0-B510-29A7E636E8E1}"/>
               </a:ext>
             </a:extLst>
           </p:cNvPr>
@@ -11582,7 +11582,7 @@
           <p:cNvPr id="27" name="">
             <a:extLst xmlns:a="http://schemas.openxmlformats.org/drawingml/2006/main">
               <a:ext uri="{FF2B5EF4-FFF2-40B4-BE49-F238E27FC236}">
-                <a16:creationId xmlns:a16="http://schemas.microsoft.com/office/drawing/2014/main" id="{389B1CB0-93DF-45C4-B7E3-54725483388C}"/>
+                <a16:creationId xmlns:a16="http://schemas.microsoft.com/office/drawing/2014/main" id="{83CEC6FB-0C37-4541-BC9F-D77E4C35B4A6}"/>
               </a:ext>
             </a:extLst>
           </p:cNvPr>
@@ -11646,7 +11646,7 @@
           <p:cNvPr id="28" name="">
             <a:extLst xmlns:a="http://schemas.openxmlformats.org/drawingml/2006/main">
               <a:ext uri="{FF2B5EF4-FFF2-40B4-BE49-F238E27FC236}">
-                <a16:creationId xmlns:a16="http://schemas.microsoft.com/office/drawing/2014/main" id="{1F26BC53-5E47-445A-AC55-B94E12A2C18E}"/>
+                <a16:creationId xmlns:a16="http://schemas.microsoft.com/office/drawing/2014/main" id="{D0165648-123F-4AF1-9EBE-F0FA5EB0F715}"/>
               </a:ext>
             </a:extLst>
           </p:cNvPr>
@@ -11679,7 +11679,7 @@
           <p:cNvPr id="29" name="">
             <a:extLst xmlns:a="http://schemas.openxmlformats.org/drawingml/2006/main">
               <a:ext uri="{FF2B5EF4-FFF2-40B4-BE49-F238E27FC236}">
-                <a16:creationId xmlns:a16="http://schemas.microsoft.com/office/drawing/2014/main" id="{8238FA1F-8A60-41F4-AE35-2D7C060DB2E8}"/>
+                <a16:creationId xmlns:a16="http://schemas.microsoft.com/office/drawing/2014/main" id="{08886383-AD20-4355-977B-5C0FCEA847DD}"/>
               </a:ext>
             </a:extLst>
           </p:cNvPr>
@@ -11743,7 +11743,7 @@
           <p:cNvPr id="30" name="">
             <a:extLst xmlns:a="http://schemas.openxmlformats.org/drawingml/2006/main">
               <a:ext uri="{FF2B5EF4-FFF2-40B4-BE49-F238E27FC236}">
-                <a16:creationId xmlns:a16="http://schemas.microsoft.com/office/drawing/2014/main" id="{A937C7A3-2546-44D2-A484-F391CB0FE0DE}"/>
+                <a16:creationId xmlns:a16="http://schemas.microsoft.com/office/drawing/2014/main" id="{E68D55F8-0A76-4D1A-911C-01F952A2CA5D}"/>
               </a:ext>
             </a:extLst>
           </p:cNvPr>
@@ -11776,7 +11776,7 @@
           <p:cNvPr id="31" name="">
             <a:extLst xmlns:a="http://schemas.openxmlformats.org/drawingml/2006/main">
               <a:ext uri="{FF2B5EF4-FFF2-40B4-BE49-F238E27FC236}">
-                <a16:creationId xmlns:a16="http://schemas.microsoft.com/office/drawing/2014/main" id="{F62E7050-9B52-43EA-AB0D-77166A84943E}"/>
+                <a16:creationId xmlns:a16="http://schemas.microsoft.com/office/drawing/2014/main" id="{CA8DFD9E-03B2-4841-8167-3FB535E2665C}"/>
               </a:ext>
             </a:extLst>
           </p:cNvPr>
@@ -11840,7 +11840,7 @@
           <p:cNvPr id="32" name="">
             <a:extLst xmlns:a="http://schemas.openxmlformats.org/drawingml/2006/main">
               <a:ext uri="{FF2B5EF4-FFF2-40B4-BE49-F238E27FC236}">
-                <a16:creationId xmlns:a16="http://schemas.microsoft.com/office/drawing/2014/main" id="{AE8451AE-DCD3-48A2-9994-5967EA7EC877}"/>
+                <a16:creationId xmlns:a16="http://schemas.microsoft.com/office/drawing/2014/main" id="{41F0C8CC-C16F-43B5-A1A0-FFDB0C876D82}"/>
               </a:ext>
             </a:extLst>
           </p:cNvPr>
@@ -11873,7 +11873,7 @@
           <p:cNvPr id="33" name="">
             <a:extLst xmlns:a="http://schemas.openxmlformats.org/drawingml/2006/main">
               <a:ext uri="{FF2B5EF4-FFF2-40B4-BE49-F238E27FC236}">
-                <a16:creationId xmlns:a16="http://schemas.microsoft.com/office/drawing/2014/main" id="{051A0026-1962-457E-A152-B1254068266B}"/>
+                <a16:creationId xmlns:a16="http://schemas.microsoft.com/office/drawing/2014/main" id="{4AEB2EF8-72E0-4ED8-B849-DD42A087BEA8}"/>
               </a:ext>
             </a:extLst>
           </p:cNvPr>
@@ -11937,7 +11937,7 @@
           <p:cNvPr id="34" name="">
             <a:extLst xmlns:a="http://schemas.openxmlformats.org/drawingml/2006/main">
               <a:ext uri="{FF2B5EF4-FFF2-40B4-BE49-F238E27FC236}">
-                <a16:creationId xmlns:a16="http://schemas.microsoft.com/office/drawing/2014/main" id="{48877271-E115-4844-BCA3-1460F27A965B}"/>
+                <a16:creationId xmlns:a16="http://schemas.microsoft.com/office/drawing/2014/main" id="{8BB3AB09-4337-40E0-B244-718C63BEA120}"/>
               </a:ext>
             </a:extLst>
           </p:cNvPr>
@@ -11970,7 +11970,7 @@
           <p:cNvPr id="35" name="">
             <a:extLst xmlns:a="http://schemas.openxmlformats.org/drawingml/2006/main">
               <a:ext uri="{FF2B5EF4-FFF2-40B4-BE49-F238E27FC236}">
-                <a16:creationId xmlns:a16="http://schemas.microsoft.com/office/drawing/2014/main" id="{3C438617-14D4-4C9F-B7DF-3923600288E3}"/>
+                <a16:creationId xmlns:a16="http://schemas.microsoft.com/office/drawing/2014/main" id="{63B28C54-4680-417F-A7D5-CA4175E519D8}"/>
               </a:ext>
             </a:extLst>
           </p:cNvPr>
@@ -12034,7 +12034,7 @@
           <p:cNvPr id="36" name="">
             <a:extLst xmlns:a="http://schemas.openxmlformats.org/drawingml/2006/main">
               <a:ext uri="{FF2B5EF4-FFF2-40B4-BE49-F238E27FC236}">
-                <a16:creationId xmlns:a16="http://schemas.microsoft.com/office/drawing/2014/main" id="{52F8A8A7-9E43-4993-9785-51578A935A75}"/>
+                <a16:creationId xmlns:a16="http://schemas.microsoft.com/office/drawing/2014/main" id="{B3357B2B-E578-4ACB-BC97-D3A8ADB999D0}"/>
               </a:ext>
             </a:extLst>
           </p:cNvPr>
@@ -12067,7 +12067,7 @@
           <p:cNvPr id="37" name="">
             <a:extLst xmlns:a="http://schemas.openxmlformats.org/drawingml/2006/main">
               <a:ext uri="{FF2B5EF4-FFF2-40B4-BE49-F238E27FC236}">
-                <a16:creationId xmlns:a16="http://schemas.microsoft.com/office/drawing/2014/main" id="{B8EAEA21-7755-4F68-968B-80AA476424F1}"/>
+                <a16:creationId xmlns:a16="http://schemas.microsoft.com/office/drawing/2014/main" id="{61A93C56-48B9-495B-A0F2-AB8F1C4FA734}"/>
               </a:ext>
             </a:extLst>
           </p:cNvPr>
@@ -12131,7 +12131,7 @@
           <p:cNvPr id="38" name="">
             <a:extLst xmlns:a="http://schemas.openxmlformats.org/drawingml/2006/main">
               <a:ext uri="{FF2B5EF4-FFF2-40B4-BE49-F238E27FC236}">
-                <a16:creationId xmlns:a16="http://schemas.microsoft.com/office/drawing/2014/main" id="{33129F4A-DCFE-4B05-9883-E15B62C37404}"/>
+                <a16:creationId xmlns:a16="http://schemas.microsoft.com/office/drawing/2014/main" id="{8E8E998B-20EA-476D-A6EC-023166F6CE3A}"/>
               </a:ext>
             </a:extLst>
           </p:cNvPr>
@@ -12164,7 +12164,7 @@
           <p:cNvPr id="39" name="">
             <a:extLst xmlns:a="http://schemas.openxmlformats.org/drawingml/2006/main">
               <a:ext uri="{FF2B5EF4-FFF2-40B4-BE49-F238E27FC236}">
-                <a16:creationId xmlns:a16="http://schemas.microsoft.com/office/drawing/2014/main" id="{4558BF64-1A50-4BC2-8526-780C93E40A0B}"/>
+                <a16:creationId xmlns:a16="http://schemas.microsoft.com/office/drawing/2014/main" id="{EBD26956-B580-4C33-9DE3-469E50317B57}"/>
               </a:ext>
             </a:extLst>
           </p:cNvPr>
@@ -12228,7 +12228,7 @@
           <p:cNvPr id="40" name="">
             <a:extLst xmlns:a="http://schemas.openxmlformats.org/drawingml/2006/main">
               <a:ext uri="{FF2B5EF4-FFF2-40B4-BE49-F238E27FC236}">
-                <a16:creationId xmlns:a16="http://schemas.microsoft.com/office/drawing/2014/main" id="{90D87F16-D676-4C3F-A63A-7A47F990AF9B}"/>
+                <a16:creationId xmlns:a16="http://schemas.microsoft.com/office/drawing/2014/main" id="{C061CE4F-9D6B-4199-8240-7020DD676628}"/>
               </a:ext>
             </a:extLst>
           </p:cNvPr>
@@ -12292,7 +12292,7 @@
           <p:cNvPr id="41" name="">
             <a:extLst xmlns:a="http://schemas.openxmlformats.org/drawingml/2006/main">
               <a:ext uri="{FF2B5EF4-FFF2-40B4-BE49-F238E27FC236}">
-                <a16:creationId xmlns:a16="http://schemas.microsoft.com/office/drawing/2014/main" id="{0F96F826-6A64-446D-B6E6-5118892E3874}"/>
+                <a16:creationId xmlns:a16="http://schemas.microsoft.com/office/drawing/2014/main" id="{7C794FD3-4795-44A2-955F-13F3C6AE81AA}"/>
               </a:ext>
             </a:extLst>
           </p:cNvPr>
@@ -12354,7 +12354,7 @@
     </p:spTree>
     <p:extLst>
       <p:ext uri="{BB962C8B-B14F-4D97-AF65-F5344CB8AC3E}">
-        <p14:creationId xmlns:p14="http://schemas.microsoft.com/office/powerpoint/2010/main" val="1644679523"/>
+        <p14:creationId xmlns:p14="http://schemas.microsoft.com/office/powerpoint/2010/main" val="263126144"/>
       </p:ext>
     </p:extLst>
   </p:cSld>
@@ -12378,7 +12378,7 @@
           <p:cNvPr id="1" name="">
             <a:extLst xmlns:a="http://schemas.openxmlformats.org/drawingml/2006/main">
               <a:ext uri="{FF2B5EF4-FFF2-40B4-BE49-F238E27FC236}">
-                <a16:creationId xmlns:a16="http://schemas.microsoft.com/office/drawing/2014/main" id="{63D1CE2A-2E7F-47B1-B347-B0060E45A133}"/>
+                <a16:creationId xmlns:a16="http://schemas.microsoft.com/office/drawing/2014/main" id="{0D90F4EA-0B77-4796-BEFD-A9A09FB8DA68}"/>
               </a:ext>
             </a:extLst>
           </p:cNvPr>
@@ -12411,7 +12411,7 @@
           <p:cNvPr id="2" name="">
             <a:extLst xmlns:a="http://schemas.openxmlformats.org/drawingml/2006/main">
               <a:ext uri="{FF2B5EF4-FFF2-40B4-BE49-F238E27FC236}">
-                <a16:creationId xmlns:a16="http://schemas.microsoft.com/office/drawing/2014/main" id="{FD0A3B7D-B623-402C-AF36-5084D403E5E9}"/>
+                <a16:creationId xmlns:a16="http://schemas.microsoft.com/office/drawing/2014/main" id="{BF4C624E-4181-483B-9178-748EFA7B0652}"/>
               </a:ext>
             </a:extLst>
           </p:cNvPr>
@@ -12444,7 +12444,7 @@
           <p:cNvPr id="3" name="">
             <a:extLst xmlns:a="http://schemas.openxmlformats.org/drawingml/2006/main">
               <a:ext uri="{FF2B5EF4-FFF2-40B4-BE49-F238E27FC236}">
-                <a16:creationId xmlns:a16="http://schemas.microsoft.com/office/drawing/2014/main" id="{69DCAFB7-FA1D-4D30-80E8-DF4020B350F7}"/>
+                <a16:creationId xmlns:a16="http://schemas.microsoft.com/office/drawing/2014/main" id="{AFB7FECD-C932-4260-88EE-62FF8A32E02A}"/>
               </a:ext>
             </a:extLst>
           </p:cNvPr>
@@ -12508,7 +12508,7 @@
           <p:cNvPr id="4" name="">
             <a:extLst xmlns:a="http://schemas.openxmlformats.org/drawingml/2006/main">
               <a:ext uri="{FF2B5EF4-FFF2-40B4-BE49-F238E27FC236}">
-                <a16:creationId xmlns:a16="http://schemas.microsoft.com/office/drawing/2014/main" id="{87E1DAA1-8FD5-4012-B447-8CCD63E068CA}"/>
+                <a16:creationId xmlns:a16="http://schemas.microsoft.com/office/drawing/2014/main" id="{E0137E33-8348-4035-B0B7-A25DA60B216F}"/>
               </a:ext>
             </a:extLst>
           </p:cNvPr>
@@ -12572,7 +12572,7 @@
           <p:cNvPr id="5" name="">
             <a:extLst xmlns:a="http://schemas.openxmlformats.org/drawingml/2006/main">
               <a:ext uri="{FF2B5EF4-FFF2-40B4-BE49-F238E27FC236}">
-                <a16:creationId xmlns:a16="http://schemas.microsoft.com/office/drawing/2014/main" id="{FEC6D121-C931-4FF3-A2E5-2B8251D23450}"/>
+                <a16:creationId xmlns:a16="http://schemas.microsoft.com/office/drawing/2014/main" id="{B11B8BF3-2AD2-41DF-A3CF-1D9AFAA70188}"/>
               </a:ext>
             </a:extLst>
           </p:cNvPr>
@@ -12636,7 +12636,7 @@
           <p:cNvPr id="6" name="">
             <a:extLst xmlns:a="http://schemas.openxmlformats.org/drawingml/2006/main">
               <a:ext uri="{FF2B5EF4-FFF2-40B4-BE49-F238E27FC236}">
-                <a16:creationId xmlns:a16="http://schemas.microsoft.com/office/drawing/2014/main" id="{3CDA9D90-5CB2-4833-A749-8CACC348EDA4}"/>
+                <a16:creationId xmlns:a16="http://schemas.microsoft.com/office/drawing/2014/main" id="{026E207B-87BE-4C3B-AAF4-09325C5E715A}"/>
               </a:ext>
             </a:extLst>
           </p:cNvPr>
@@ -12669,7 +12669,7 @@
           <p:cNvPr id="7" name="">
             <a:extLst xmlns:a="http://schemas.openxmlformats.org/drawingml/2006/main">
               <a:ext uri="{FF2B5EF4-FFF2-40B4-BE49-F238E27FC236}">
-                <a16:creationId xmlns:a16="http://schemas.microsoft.com/office/drawing/2014/main" id="{E5ED6E0D-2DDF-4268-AD5B-867ED24AA51C}"/>
+                <a16:creationId xmlns:a16="http://schemas.microsoft.com/office/drawing/2014/main" id="{B383012A-2413-4522-88D1-87E6D23EB31A}"/>
               </a:ext>
             </a:extLst>
           </p:cNvPr>
@@ -12733,7 +12733,7 @@
           <p:cNvPr id="8" name="">
             <a:extLst xmlns:a="http://schemas.openxmlformats.org/drawingml/2006/main">
               <a:ext uri="{FF2B5EF4-FFF2-40B4-BE49-F238E27FC236}">
-                <a16:creationId xmlns:a16="http://schemas.microsoft.com/office/drawing/2014/main" id="{0E20C81F-BB58-4DAB-84C6-94C87994E070}"/>
+                <a16:creationId xmlns:a16="http://schemas.microsoft.com/office/drawing/2014/main" id="{E0C3310F-A826-4B5B-BE1F-D6F105E07AE6}"/>
               </a:ext>
             </a:extLst>
           </p:cNvPr>
@@ -12766,7 +12766,7 @@
           <p:cNvPr id="9" name="">
             <a:extLst xmlns:a="http://schemas.openxmlformats.org/drawingml/2006/main">
               <a:ext uri="{FF2B5EF4-FFF2-40B4-BE49-F238E27FC236}">
-                <a16:creationId xmlns:a16="http://schemas.microsoft.com/office/drawing/2014/main" id="{15D89AF8-6509-4802-8863-F6C255E12A3C}"/>
+                <a16:creationId xmlns:a16="http://schemas.microsoft.com/office/drawing/2014/main" id="{2B641B38-156C-4070-97D3-243BBA81DFA7}"/>
               </a:ext>
             </a:extLst>
           </p:cNvPr>
@@ -12830,7 +12830,7 @@
           <p:cNvPr id="10" name="">
             <a:extLst xmlns:a="http://schemas.openxmlformats.org/drawingml/2006/main">
               <a:ext uri="{FF2B5EF4-FFF2-40B4-BE49-F238E27FC236}">
-                <a16:creationId xmlns:a16="http://schemas.microsoft.com/office/drawing/2014/main" id="{2C386E23-8414-49BC-A65D-9330C2428044}"/>
+                <a16:creationId xmlns:a16="http://schemas.microsoft.com/office/drawing/2014/main" id="{09423EF7-79AD-4AD9-82B9-D4900613B96A}"/>
               </a:ext>
             </a:extLst>
           </p:cNvPr>
@@ -12863,7 +12863,7 @@
           <p:cNvPr id="11" name="">
             <a:extLst xmlns:a="http://schemas.openxmlformats.org/drawingml/2006/main">
               <a:ext uri="{FF2B5EF4-FFF2-40B4-BE49-F238E27FC236}">
-                <a16:creationId xmlns:a16="http://schemas.microsoft.com/office/drawing/2014/main" id="{655B08E4-A6DC-41CE-B573-FD5865F4EC3E}"/>
+                <a16:creationId xmlns:a16="http://schemas.microsoft.com/office/drawing/2014/main" id="{1A23E27F-8EC2-4DCF-98B6-8BB7BB35D215}"/>
               </a:ext>
             </a:extLst>
           </p:cNvPr>
@@ -12927,7 +12927,7 @@
           <p:cNvPr id="12" name="">
             <a:extLst xmlns:a="http://schemas.openxmlformats.org/drawingml/2006/main">
               <a:ext uri="{FF2B5EF4-FFF2-40B4-BE49-F238E27FC236}">
-                <a16:creationId xmlns:a16="http://schemas.microsoft.com/office/drawing/2014/main" id="{CDFFB8F9-6979-4451-8E92-6916FC4EA7AF}"/>
+                <a16:creationId xmlns:a16="http://schemas.microsoft.com/office/drawing/2014/main" id="{6C564EC2-285B-4164-BE30-C3ECC5E81AE6}"/>
               </a:ext>
             </a:extLst>
           </p:cNvPr>
@@ -12960,7 +12960,7 @@
           <p:cNvPr id="13" name="">
             <a:extLst xmlns:a="http://schemas.openxmlformats.org/drawingml/2006/main">
               <a:ext uri="{FF2B5EF4-FFF2-40B4-BE49-F238E27FC236}">
-                <a16:creationId xmlns:a16="http://schemas.microsoft.com/office/drawing/2014/main" id="{1997DF7E-7CC3-42AF-8136-A27BF17E5186}"/>
+                <a16:creationId xmlns:a16="http://schemas.microsoft.com/office/drawing/2014/main" id="{320247A1-2AA1-4D13-8D33-31B583744B33}"/>
               </a:ext>
             </a:extLst>
           </p:cNvPr>
@@ -13024,7 +13024,7 @@
           <p:cNvPr id="14" name="">
             <a:extLst xmlns:a="http://schemas.openxmlformats.org/drawingml/2006/main">
               <a:ext uri="{FF2B5EF4-FFF2-40B4-BE49-F238E27FC236}">
-                <a16:creationId xmlns:a16="http://schemas.microsoft.com/office/drawing/2014/main" id="{4AA659BD-C724-486A-9720-5B1EFF4ECB0E}"/>
+                <a16:creationId xmlns:a16="http://schemas.microsoft.com/office/drawing/2014/main" id="{A4AD6941-8E3D-4C80-A8FC-C6CA19FDD719}"/>
               </a:ext>
             </a:extLst>
           </p:cNvPr>
@@ -13057,7 +13057,7 @@
           <p:cNvPr id="15" name="">
             <a:extLst xmlns:a="http://schemas.openxmlformats.org/drawingml/2006/main">
               <a:ext uri="{FF2B5EF4-FFF2-40B4-BE49-F238E27FC236}">
-                <a16:creationId xmlns:a16="http://schemas.microsoft.com/office/drawing/2014/main" id="{70CC4C40-4AFA-4BED-AAF2-B5A1FB646B26}"/>
+                <a16:creationId xmlns:a16="http://schemas.microsoft.com/office/drawing/2014/main" id="{B14F0835-40AB-4086-B043-CEFB9A6AA482}"/>
               </a:ext>
             </a:extLst>
           </p:cNvPr>
@@ -13121,7 +13121,7 @@
           <p:cNvPr id="16" name="">
             <a:extLst xmlns:a="http://schemas.openxmlformats.org/drawingml/2006/main">
               <a:ext uri="{FF2B5EF4-FFF2-40B4-BE49-F238E27FC236}">
-                <a16:creationId xmlns:a16="http://schemas.microsoft.com/office/drawing/2014/main" id="{790321BB-1E81-4629-AD7B-EF78348D0BA8}"/>
+                <a16:creationId xmlns:a16="http://schemas.microsoft.com/office/drawing/2014/main" id="{E96A7DAF-D9FA-4335-B88C-5BAB61036B18}"/>
               </a:ext>
             </a:extLst>
           </p:cNvPr>
@@ -13154,7 +13154,7 @@
           <p:cNvPr id="17" name="">
             <a:extLst xmlns:a="http://schemas.openxmlformats.org/drawingml/2006/main">
               <a:ext uri="{FF2B5EF4-FFF2-40B4-BE49-F238E27FC236}">
-                <a16:creationId xmlns:a16="http://schemas.microsoft.com/office/drawing/2014/main" id="{ABB757A5-4299-4982-AB89-FBBA130513FC}"/>
+                <a16:creationId xmlns:a16="http://schemas.microsoft.com/office/drawing/2014/main" id="{94B209F1-5154-4CC8-89AF-C29524BFBA20}"/>
               </a:ext>
             </a:extLst>
           </p:cNvPr>
@@ -13218,7 +13218,7 @@
           <p:cNvPr id="18" name="">
             <a:extLst xmlns:a="http://schemas.openxmlformats.org/drawingml/2006/main">
               <a:ext uri="{FF2B5EF4-FFF2-40B4-BE49-F238E27FC236}">
-                <a16:creationId xmlns:a16="http://schemas.microsoft.com/office/drawing/2014/main" id="{B8AEB87F-DE47-4C0A-9DA3-7205C49B7FB2}"/>
+                <a16:creationId xmlns:a16="http://schemas.microsoft.com/office/drawing/2014/main" id="{5EC934E1-B67C-496C-8415-AEBEA456DF53}"/>
               </a:ext>
             </a:extLst>
           </p:cNvPr>
@@ -13251,7 +13251,7 @@
           <p:cNvPr id="19" name="">
             <a:extLst xmlns:a="http://schemas.openxmlformats.org/drawingml/2006/main">
               <a:ext uri="{FF2B5EF4-FFF2-40B4-BE49-F238E27FC236}">
-                <a16:creationId xmlns:a16="http://schemas.microsoft.com/office/drawing/2014/main" id="{00EF3B19-6925-4260-B70A-366D1CDAB815}"/>
+                <a16:creationId xmlns:a16="http://schemas.microsoft.com/office/drawing/2014/main" id="{72F7E458-D168-4D95-AFDE-A4814C078371}"/>
               </a:ext>
             </a:extLst>
           </p:cNvPr>
@@ -13315,7 +13315,7 @@
           <p:cNvPr id="20" name="">
             <a:extLst xmlns:a="http://schemas.openxmlformats.org/drawingml/2006/main">
               <a:ext uri="{FF2B5EF4-FFF2-40B4-BE49-F238E27FC236}">
-                <a16:creationId xmlns:a16="http://schemas.microsoft.com/office/drawing/2014/main" id="{70216836-5A33-4809-8D8B-BEAD3FCADBC0}"/>
+                <a16:creationId xmlns:a16="http://schemas.microsoft.com/office/drawing/2014/main" id="{A159BDBE-97F5-46B7-82D1-45BE2D375550}"/>
               </a:ext>
             </a:extLst>
           </p:cNvPr>
@@ -13348,7 +13348,7 @@
           <p:cNvPr id="21" name="">
             <a:extLst xmlns:a="http://schemas.openxmlformats.org/drawingml/2006/main">
               <a:ext uri="{FF2B5EF4-FFF2-40B4-BE49-F238E27FC236}">
-                <a16:creationId xmlns:a16="http://schemas.microsoft.com/office/drawing/2014/main" id="{827A517C-99F4-4C3B-B3CC-E1AA2F98D64C}"/>
+                <a16:creationId xmlns:a16="http://schemas.microsoft.com/office/drawing/2014/main" id="{F49F9052-2F32-47AF-BC99-4E240C1B5D58}"/>
               </a:ext>
             </a:extLst>
           </p:cNvPr>
@@ -13412,7 +13412,7 @@
           <p:cNvPr id="22" name="">
             <a:extLst xmlns:a="http://schemas.openxmlformats.org/drawingml/2006/main">
               <a:ext uri="{FF2B5EF4-FFF2-40B4-BE49-F238E27FC236}">
-                <a16:creationId xmlns:a16="http://schemas.microsoft.com/office/drawing/2014/main" id="{55E3B0B4-B44F-4D2C-BD7B-EA2A9222F3B8}"/>
+                <a16:creationId xmlns:a16="http://schemas.microsoft.com/office/drawing/2014/main" id="{9B809BC6-E923-49B8-BF9E-933168BB9ADB}"/>
               </a:ext>
             </a:extLst>
           </p:cNvPr>
@@ -13445,7 +13445,7 @@
           <p:cNvPr id="23" name="">
             <a:extLst xmlns:a="http://schemas.openxmlformats.org/drawingml/2006/main">
               <a:ext uri="{FF2B5EF4-FFF2-40B4-BE49-F238E27FC236}">
-                <a16:creationId xmlns:a16="http://schemas.microsoft.com/office/drawing/2014/main" id="{4E98A025-4D9D-41E5-9B76-CEF12240F755}"/>
+                <a16:creationId xmlns:a16="http://schemas.microsoft.com/office/drawing/2014/main" id="{AE0522AC-1C80-46FE-ABCC-A7CD95823CD8}"/>
               </a:ext>
             </a:extLst>
           </p:cNvPr>
@@ -13509,7 +13509,7 @@
           <p:cNvPr id="24" name="">
             <a:extLst xmlns:a="http://schemas.openxmlformats.org/drawingml/2006/main">
               <a:ext uri="{FF2B5EF4-FFF2-40B4-BE49-F238E27FC236}">
-                <a16:creationId xmlns:a16="http://schemas.microsoft.com/office/drawing/2014/main" id="{381D27B8-5D3E-4BF0-9C08-3E56581570CD}"/>
+                <a16:creationId xmlns:a16="http://schemas.microsoft.com/office/drawing/2014/main" id="{53ACD63E-52CF-4447-A72F-73BC624EC772}"/>
               </a:ext>
             </a:extLst>
           </p:cNvPr>
@@ -13542,7 +13542,7 @@
           <p:cNvPr id="25" name="">
             <a:extLst xmlns:a="http://schemas.openxmlformats.org/drawingml/2006/main">
               <a:ext uri="{FF2B5EF4-FFF2-40B4-BE49-F238E27FC236}">
-                <a16:creationId xmlns:a16="http://schemas.microsoft.com/office/drawing/2014/main" id="{C64408CB-23C4-4593-890C-0AD82D908042}"/>
+                <a16:creationId xmlns:a16="http://schemas.microsoft.com/office/drawing/2014/main" id="{DC4BC9C1-EBD8-419A-96EB-27BEA97D725D}"/>
               </a:ext>
             </a:extLst>
           </p:cNvPr>
@@ -13606,7 +13606,7 @@
           <p:cNvPr id="26" name="">
             <a:extLst xmlns:a="http://schemas.openxmlformats.org/drawingml/2006/main">
               <a:ext uri="{FF2B5EF4-FFF2-40B4-BE49-F238E27FC236}">
-                <a16:creationId xmlns:a16="http://schemas.microsoft.com/office/drawing/2014/main" id="{323D5D03-47F4-44F7-A8A6-2C5493D9F3DB}"/>
+                <a16:creationId xmlns:a16="http://schemas.microsoft.com/office/drawing/2014/main" id="{768E6E27-5CC8-436A-ACCF-881513FAA550}"/>
               </a:ext>
             </a:extLst>
           </p:cNvPr>
@@ -13670,7 +13670,7 @@
           <p:cNvPr id="27" name="">
             <a:extLst xmlns:a="http://schemas.openxmlformats.org/drawingml/2006/main">
               <a:ext uri="{FF2B5EF4-FFF2-40B4-BE49-F238E27FC236}">
-                <a16:creationId xmlns:a16="http://schemas.microsoft.com/office/drawing/2014/main" id="{1B87532C-076A-40E9-BCD3-AB34D10AFD8E}"/>
+                <a16:creationId xmlns:a16="http://schemas.microsoft.com/office/drawing/2014/main" id="{2297EF2E-92CF-4DF4-845B-319567C43E73}"/>
               </a:ext>
             </a:extLst>
           </p:cNvPr>
@@ -13732,7 +13732,7 @@
     </p:spTree>
     <p:extLst>
       <p:ext uri="{BB962C8B-B14F-4D97-AF65-F5344CB8AC3E}">
-        <p14:creationId xmlns:p14="http://schemas.microsoft.com/office/powerpoint/2010/main" val="903193844"/>
+        <p14:creationId xmlns:p14="http://schemas.microsoft.com/office/powerpoint/2010/main" val="1439933482"/>
       </p:ext>
     </p:extLst>
   </p:cSld>
@@ -13756,7 +13756,7 @@
           <p:cNvPr id="1" name="">
             <a:extLst xmlns:a="http://schemas.openxmlformats.org/drawingml/2006/main">
               <a:ext uri="{FF2B5EF4-FFF2-40B4-BE49-F238E27FC236}">
-                <a16:creationId xmlns:a16="http://schemas.microsoft.com/office/drawing/2014/main" id="{5F52DABD-0483-49BB-8754-5C78E2A99967}"/>
+                <a16:creationId xmlns:a16="http://schemas.microsoft.com/office/drawing/2014/main" id="{1368CBBE-FAD1-4F42-9CDC-A80EE25F6AB9}"/>
               </a:ext>
             </a:extLst>
           </p:cNvPr>
@@ -13789,7 +13789,7 @@
           <p:cNvPr id="2" name="">
             <a:extLst xmlns:a="http://schemas.openxmlformats.org/drawingml/2006/main">
               <a:ext uri="{FF2B5EF4-FFF2-40B4-BE49-F238E27FC236}">
-                <a16:creationId xmlns:a16="http://schemas.microsoft.com/office/drawing/2014/main" id="{F83791F6-4BCC-4275-84D1-B87BAE6BB46A}"/>
+                <a16:creationId xmlns:a16="http://schemas.microsoft.com/office/drawing/2014/main" id="{C5EDCF49-6F71-4168-B64A-AC45C63D94A5}"/>
               </a:ext>
             </a:extLst>
           </p:cNvPr>
@@ -13822,7 +13822,7 @@
           <p:cNvPr id="3" name="">
             <a:extLst xmlns:a="http://schemas.openxmlformats.org/drawingml/2006/main">
               <a:ext uri="{FF2B5EF4-FFF2-40B4-BE49-F238E27FC236}">
-                <a16:creationId xmlns:a16="http://schemas.microsoft.com/office/drawing/2014/main" id="{A6879978-89C3-45EF-85D4-F0DC7C5C5247}"/>
+                <a16:creationId xmlns:a16="http://schemas.microsoft.com/office/drawing/2014/main" id="{6B8CBFBC-B313-4270-9811-BE3D6C0CA843}"/>
               </a:ext>
             </a:extLst>
           </p:cNvPr>
@@ -13886,7 +13886,7 @@
           <p:cNvPr id="4" name="">
             <a:extLst xmlns:a="http://schemas.openxmlformats.org/drawingml/2006/main">
               <a:ext uri="{FF2B5EF4-FFF2-40B4-BE49-F238E27FC236}">
-                <a16:creationId xmlns:a16="http://schemas.microsoft.com/office/drawing/2014/main" id="{351FEADF-8B7A-4964-8B48-D1DFEF646D56}"/>
+                <a16:creationId xmlns:a16="http://schemas.microsoft.com/office/drawing/2014/main" id="{DC098AC3-07C7-4B29-8B12-B275DFDED13E}"/>
               </a:ext>
             </a:extLst>
           </p:cNvPr>
@@ -13950,7 +13950,7 @@
           <p:cNvPr id="5" name="">
             <a:extLst xmlns:a="http://schemas.openxmlformats.org/drawingml/2006/main">
               <a:ext uri="{FF2B5EF4-FFF2-40B4-BE49-F238E27FC236}">
-                <a16:creationId xmlns:a16="http://schemas.microsoft.com/office/drawing/2014/main" id="{71865BF1-3290-4A78-B67B-BE9164BBF998}"/>
+                <a16:creationId xmlns:a16="http://schemas.microsoft.com/office/drawing/2014/main" id="{39D185E8-EF45-40FC-B0FC-9A60CD739A3A}"/>
               </a:ext>
             </a:extLst>
           </p:cNvPr>
@@ -14014,7 +14014,7 @@
           <p:cNvPr id="6" name="">
             <a:extLst xmlns:a="http://schemas.openxmlformats.org/drawingml/2006/main">
               <a:ext uri="{FF2B5EF4-FFF2-40B4-BE49-F238E27FC236}">
-                <a16:creationId xmlns:a16="http://schemas.microsoft.com/office/drawing/2014/main" id="{CC875919-864C-405F-B376-EC408CFEE4A9}"/>
+                <a16:creationId xmlns:a16="http://schemas.microsoft.com/office/drawing/2014/main" id="{F22E5C2F-3CB7-49B9-97AE-38CCFCA41DC9}"/>
               </a:ext>
             </a:extLst>
           </p:cNvPr>
@@ -14047,7 +14047,7 @@
           <p:cNvPr id="7" name="">
             <a:extLst xmlns:a="http://schemas.openxmlformats.org/drawingml/2006/main">
               <a:ext uri="{FF2B5EF4-FFF2-40B4-BE49-F238E27FC236}">
-                <a16:creationId xmlns:a16="http://schemas.microsoft.com/office/drawing/2014/main" id="{6D265BEF-9405-4371-8074-361F88B7866A}"/>
+                <a16:creationId xmlns:a16="http://schemas.microsoft.com/office/drawing/2014/main" id="{519C026B-8C5C-440D-8E9C-D3B37109CDA8}"/>
               </a:ext>
             </a:extLst>
           </p:cNvPr>
@@ -14111,7 +14111,7 @@
           <p:cNvPr id="8" name="">
             <a:extLst xmlns:a="http://schemas.openxmlformats.org/drawingml/2006/main">
               <a:ext uri="{FF2B5EF4-FFF2-40B4-BE49-F238E27FC236}">
-                <a16:creationId xmlns:a16="http://schemas.microsoft.com/office/drawing/2014/main" id="{8707D351-B566-4C9A-9443-23A8B7D46816}"/>
+                <a16:creationId xmlns:a16="http://schemas.microsoft.com/office/drawing/2014/main" id="{E7566C46-7CE7-4E27-85DE-5677F7010AA9}"/>
               </a:ext>
             </a:extLst>
           </p:cNvPr>
@@ -14175,7 +14175,7 @@
           <p:cNvPr id="9" name="">
             <a:extLst xmlns:a="http://schemas.openxmlformats.org/drawingml/2006/main">
               <a:ext uri="{FF2B5EF4-FFF2-40B4-BE49-F238E27FC236}">
-                <a16:creationId xmlns:a16="http://schemas.microsoft.com/office/drawing/2014/main" id="{58BABA4F-AE64-4342-93B7-BE6D982B8699}"/>
+                <a16:creationId xmlns:a16="http://schemas.microsoft.com/office/drawing/2014/main" id="{4B1860C8-1119-4621-A33C-D99905FDF543}"/>
               </a:ext>
             </a:extLst>
           </p:cNvPr>
@@ -14208,7 +14208,7 @@
           <p:cNvPr id="10" name="">
             <a:extLst xmlns:a="http://schemas.openxmlformats.org/drawingml/2006/main">
               <a:ext uri="{FF2B5EF4-FFF2-40B4-BE49-F238E27FC236}">
-                <a16:creationId xmlns:a16="http://schemas.microsoft.com/office/drawing/2014/main" id="{756EF34F-63E2-4CC3-879D-999A905C51C2}"/>
+                <a16:creationId xmlns:a16="http://schemas.microsoft.com/office/drawing/2014/main" id="{0FB1164F-B422-4EF4-B28D-1784449E7838}"/>
               </a:ext>
             </a:extLst>
           </p:cNvPr>
@@ -14272,7 +14272,7 @@
           <p:cNvPr id="11" name="">
             <a:extLst xmlns:a="http://schemas.openxmlformats.org/drawingml/2006/main">
               <a:ext uri="{FF2B5EF4-FFF2-40B4-BE49-F238E27FC236}">
-                <a16:creationId xmlns:a16="http://schemas.microsoft.com/office/drawing/2014/main" id="{892A887F-EB75-49F8-BA11-47D8E3684CA9}"/>
+                <a16:creationId xmlns:a16="http://schemas.microsoft.com/office/drawing/2014/main" id="{F8CB74E6-9FD0-44EF-B165-C09D65D320B4}"/>
               </a:ext>
             </a:extLst>
           </p:cNvPr>
@@ -14336,7 +14336,7 @@
           <p:cNvPr id="12" name="">
             <a:extLst xmlns:a="http://schemas.openxmlformats.org/drawingml/2006/main">
               <a:ext uri="{FF2B5EF4-FFF2-40B4-BE49-F238E27FC236}">
-                <a16:creationId xmlns:a16="http://schemas.microsoft.com/office/drawing/2014/main" id="{99FBBD6A-D2B3-43BE-BCCD-C460C05D072C}"/>
+                <a16:creationId xmlns:a16="http://schemas.microsoft.com/office/drawing/2014/main" id="{1B59FCF5-571B-4D90-90B5-DFA4C45A3DF1}"/>
               </a:ext>
             </a:extLst>
           </p:cNvPr>
@@ -14369,7 +14369,7 @@
           <p:cNvPr id="13" name="">
             <a:extLst xmlns:a="http://schemas.openxmlformats.org/drawingml/2006/main">
               <a:ext uri="{FF2B5EF4-FFF2-40B4-BE49-F238E27FC236}">
-                <a16:creationId xmlns:a16="http://schemas.microsoft.com/office/drawing/2014/main" id="{E20C5F00-D29B-4F14-8996-CDD7F78A907B}"/>
+                <a16:creationId xmlns:a16="http://schemas.microsoft.com/office/drawing/2014/main" id="{1330D211-CEDD-4BFF-BB5F-F5A2EBDD8AA8}"/>
               </a:ext>
             </a:extLst>
           </p:cNvPr>
@@ -14433,7 +14433,7 @@
           <p:cNvPr id="14" name="">
             <a:extLst xmlns:a="http://schemas.openxmlformats.org/drawingml/2006/main">
               <a:ext uri="{FF2B5EF4-FFF2-40B4-BE49-F238E27FC236}">
-                <a16:creationId xmlns:a16="http://schemas.microsoft.com/office/drawing/2014/main" id="{4B1E6851-5857-42AA-8A55-BCC0124824D5}"/>
+                <a16:creationId xmlns:a16="http://schemas.microsoft.com/office/drawing/2014/main" id="{A267A955-BE4B-4354-9439-56D824834237}"/>
               </a:ext>
             </a:extLst>
           </p:cNvPr>
@@ -14497,7 +14497,7 @@
           <p:cNvPr id="15" name="">
             <a:extLst xmlns:a="http://schemas.openxmlformats.org/drawingml/2006/main">
               <a:ext uri="{FF2B5EF4-FFF2-40B4-BE49-F238E27FC236}">
-                <a16:creationId xmlns:a16="http://schemas.microsoft.com/office/drawing/2014/main" id="{4EA39CF7-224D-48CB-8C31-30F5C9CD6B79}"/>
+                <a16:creationId xmlns:a16="http://schemas.microsoft.com/office/drawing/2014/main" id="{D96F8B34-A8E8-4203-A85A-E7FCC1678FDB}"/>
               </a:ext>
             </a:extLst>
           </p:cNvPr>
@@ -14530,7 +14530,7 @@
           <p:cNvPr id="16" name="">
             <a:extLst xmlns:a="http://schemas.openxmlformats.org/drawingml/2006/main">
               <a:ext uri="{FF2B5EF4-FFF2-40B4-BE49-F238E27FC236}">
-                <a16:creationId xmlns:a16="http://schemas.microsoft.com/office/drawing/2014/main" id="{1DAAF104-BC8C-4893-99D2-F11089139499}"/>
+                <a16:creationId xmlns:a16="http://schemas.microsoft.com/office/drawing/2014/main" id="{D86A82AE-14D8-427B-885D-8866EA2D5A4D}"/>
               </a:ext>
             </a:extLst>
           </p:cNvPr>
@@ -14594,7 +14594,7 @@
           <p:cNvPr id="17" name="">
             <a:extLst xmlns:a="http://schemas.openxmlformats.org/drawingml/2006/main">
               <a:ext uri="{FF2B5EF4-FFF2-40B4-BE49-F238E27FC236}">
-                <a16:creationId xmlns:a16="http://schemas.microsoft.com/office/drawing/2014/main" id="{7AB0F21F-DB57-45F2-B2AC-E54D789C098C}"/>
+                <a16:creationId xmlns:a16="http://schemas.microsoft.com/office/drawing/2014/main" id="{6A5A2C47-6DE7-4450-857D-61418F64F4E2}"/>
               </a:ext>
             </a:extLst>
           </p:cNvPr>
@@ -14658,7 +14658,7 @@
           <p:cNvPr id="18" name="">
             <a:extLst xmlns:a="http://schemas.openxmlformats.org/drawingml/2006/main">
               <a:ext uri="{FF2B5EF4-FFF2-40B4-BE49-F238E27FC236}">
-                <a16:creationId xmlns:a16="http://schemas.microsoft.com/office/drawing/2014/main" id="{9A9BA8AE-217F-4FC0-B0D9-81E367959870}"/>
+                <a16:creationId xmlns:a16="http://schemas.microsoft.com/office/drawing/2014/main" id="{1955BB4F-9590-4EE3-A329-B51C741BAE5F}"/>
               </a:ext>
             </a:extLst>
           </p:cNvPr>
@@ -14691,7 +14691,7 @@
           <p:cNvPr id="19" name="">
             <a:extLst xmlns:a="http://schemas.openxmlformats.org/drawingml/2006/main">
               <a:ext uri="{FF2B5EF4-FFF2-40B4-BE49-F238E27FC236}">
-                <a16:creationId xmlns:a16="http://schemas.microsoft.com/office/drawing/2014/main" id="{AE0DFDE8-E559-4153-910D-838876A122F8}"/>
+                <a16:creationId xmlns:a16="http://schemas.microsoft.com/office/drawing/2014/main" id="{B57D9AC3-BE83-415A-B650-433AC6AA1CC5}"/>
               </a:ext>
             </a:extLst>
           </p:cNvPr>
@@ -14755,7 +14755,7 @@
           <p:cNvPr id="20" name="">
             <a:extLst xmlns:a="http://schemas.openxmlformats.org/drawingml/2006/main">
               <a:ext uri="{FF2B5EF4-FFF2-40B4-BE49-F238E27FC236}">
-                <a16:creationId xmlns:a16="http://schemas.microsoft.com/office/drawing/2014/main" id="{D8540297-6833-49EE-9178-3DE71A9BC290}"/>
+                <a16:creationId xmlns:a16="http://schemas.microsoft.com/office/drawing/2014/main" id="{08E33471-0410-4A2D-BACB-9E638E4D4A4C}"/>
               </a:ext>
             </a:extLst>
           </p:cNvPr>
@@ -14819,7 +14819,7 @@
           <p:cNvPr id="21" name="">
             <a:extLst xmlns:a="http://schemas.openxmlformats.org/drawingml/2006/main">
               <a:ext uri="{FF2B5EF4-FFF2-40B4-BE49-F238E27FC236}">
-                <a16:creationId xmlns:a16="http://schemas.microsoft.com/office/drawing/2014/main" id="{3F645302-5B02-4D9D-9F57-BFA51431CF36}"/>
+                <a16:creationId xmlns:a16="http://schemas.microsoft.com/office/drawing/2014/main" id="{D04D92CE-13C9-4BC9-9AC0-551DF4181FE2}"/>
               </a:ext>
             </a:extLst>
           </p:cNvPr>
@@ -14852,7 +14852,7 @@
           <p:cNvPr id="22" name="">
             <a:extLst xmlns:a="http://schemas.openxmlformats.org/drawingml/2006/main">
               <a:ext uri="{FF2B5EF4-FFF2-40B4-BE49-F238E27FC236}">
-                <a16:creationId xmlns:a16="http://schemas.microsoft.com/office/drawing/2014/main" id="{3279B032-F883-4476-96F3-77DED4EA51E6}"/>
+                <a16:creationId xmlns:a16="http://schemas.microsoft.com/office/drawing/2014/main" id="{A4BF79B7-AB04-4697-B346-20C20EDA1187}"/>
               </a:ext>
             </a:extLst>
           </p:cNvPr>
@@ -14916,7 +14916,7 @@
           <p:cNvPr id="23" name="">
             <a:extLst xmlns:a="http://schemas.openxmlformats.org/drawingml/2006/main">
               <a:ext uri="{FF2B5EF4-FFF2-40B4-BE49-F238E27FC236}">
-                <a16:creationId xmlns:a16="http://schemas.microsoft.com/office/drawing/2014/main" id="{867BB986-5503-4D6F-BFE0-3660FA98DCAF}"/>
+                <a16:creationId xmlns:a16="http://schemas.microsoft.com/office/drawing/2014/main" id="{8099046F-E0CE-4FFE-AFEA-2BC2924F2588}"/>
               </a:ext>
             </a:extLst>
           </p:cNvPr>
@@ -14949,7 +14949,7 @@
           <p:cNvPr id="24" name="">
             <a:extLst xmlns:a="http://schemas.openxmlformats.org/drawingml/2006/main">
               <a:ext uri="{FF2B5EF4-FFF2-40B4-BE49-F238E27FC236}">
-                <a16:creationId xmlns:a16="http://schemas.microsoft.com/office/drawing/2014/main" id="{55E95759-F86D-4052-88F4-69D60ED21513}"/>
+                <a16:creationId xmlns:a16="http://schemas.microsoft.com/office/drawing/2014/main" id="{543DCF42-BA9A-4E5E-8196-F4D81757AEEA}"/>
               </a:ext>
             </a:extLst>
           </p:cNvPr>
@@ -15013,7 +15013,7 @@
           <p:cNvPr id="25" name="">
             <a:extLst xmlns:a="http://schemas.openxmlformats.org/drawingml/2006/main">
               <a:ext uri="{FF2B5EF4-FFF2-40B4-BE49-F238E27FC236}">
-                <a16:creationId xmlns:a16="http://schemas.microsoft.com/office/drawing/2014/main" id="{BE80BC10-79EB-402F-8E4F-B6759A34122A}"/>
+                <a16:creationId xmlns:a16="http://schemas.microsoft.com/office/drawing/2014/main" id="{A84C2EC8-6A87-4C36-972D-49C61F2DB092}"/>
               </a:ext>
             </a:extLst>
           </p:cNvPr>
@@ -15046,7 +15046,7 @@
           <p:cNvPr id="26" name="">
             <a:extLst xmlns:a="http://schemas.openxmlformats.org/drawingml/2006/main">
               <a:ext uri="{FF2B5EF4-FFF2-40B4-BE49-F238E27FC236}">
-                <a16:creationId xmlns:a16="http://schemas.microsoft.com/office/drawing/2014/main" id="{676914C1-0C12-40A9-AAAD-0FE5746CC8B2}"/>
+                <a16:creationId xmlns:a16="http://schemas.microsoft.com/office/drawing/2014/main" id="{0ECFBB6E-7F3D-4F8F-9CF4-EECE0CB978EE}"/>
               </a:ext>
             </a:extLst>
           </p:cNvPr>
@@ -15110,7 +15110,7 @@
           <p:cNvPr id="27" name="">
             <a:extLst xmlns:a="http://schemas.openxmlformats.org/drawingml/2006/main">
               <a:ext uri="{FF2B5EF4-FFF2-40B4-BE49-F238E27FC236}">
-                <a16:creationId xmlns:a16="http://schemas.microsoft.com/office/drawing/2014/main" id="{DB314D3D-F648-4013-9542-DB3F28DB6EA2}"/>
+                <a16:creationId xmlns:a16="http://schemas.microsoft.com/office/drawing/2014/main" id="{19AB3962-93B8-4495-A724-396AE8B72A36}"/>
               </a:ext>
             </a:extLst>
           </p:cNvPr>
@@ -15143,7 +15143,7 @@
           <p:cNvPr id="28" name="">
             <a:extLst xmlns:a="http://schemas.openxmlformats.org/drawingml/2006/main">
               <a:ext uri="{FF2B5EF4-FFF2-40B4-BE49-F238E27FC236}">
-                <a16:creationId xmlns:a16="http://schemas.microsoft.com/office/drawing/2014/main" id="{3B634545-B45F-4D2E-AE59-BB39172DC526}"/>
+                <a16:creationId xmlns:a16="http://schemas.microsoft.com/office/drawing/2014/main" id="{1B99057C-8F18-4A31-B7E2-63A50A20854E}"/>
               </a:ext>
             </a:extLst>
           </p:cNvPr>
@@ -15207,7 +15207,7 @@
           <p:cNvPr id="29" name="">
             <a:extLst xmlns:a="http://schemas.openxmlformats.org/drawingml/2006/main">
               <a:ext uri="{FF2B5EF4-FFF2-40B4-BE49-F238E27FC236}">
-                <a16:creationId xmlns:a16="http://schemas.microsoft.com/office/drawing/2014/main" id="{F6FD4374-7F50-446F-BDF7-33A7C964B7F6}"/>
+                <a16:creationId xmlns:a16="http://schemas.microsoft.com/office/drawing/2014/main" id="{63786106-6E6D-4DA6-AF70-DC803FB778D9}"/>
               </a:ext>
             </a:extLst>
           </p:cNvPr>
@@ -15240,7 +15240,7 @@
           <p:cNvPr id="30" name="">
             <a:extLst xmlns:a="http://schemas.openxmlformats.org/drawingml/2006/main">
               <a:ext uri="{FF2B5EF4-FFF2-40B4-BE49-F238E27FC236}">
-                <a16:creationId xmlns:a16="http://schemas.microsoft.com/office/drawing/2014/main" id="{2FD3C7C2-9E5D-46DC-9621-298EB0E54EE0}"/>
+                <a16:creationId xmlns:a16="http://schemas.microsoft.com/office/drawing/2014/main" id="{B435E1D5-AC60-415B-B9A9-1669DF4A9868}"/>
               </a:ext>
             </a:extLst>
           </p:cNvPr>
@@ -15304,7 +15304,7 @@
           <p:cNvPr id="31" name="">
             <a:extLst xmlns:a="http://schemas.openxmlformats.org/drawingml/2006/main">
               <a:ext uri="{FF2B5EF4-FFF2-40B4-BE49-F238E27FC236}">
-                <a16:creationId xmlns:a16="http://schemas.microsoft.com/office/drawing/2014/main" id="{5C535BCB-EA04-4F17-8AF8-1DE093ECB626}"/>
+                <a16:creationId xmlns:a16="http://schemas.microsoft.com/office/drawing/2014/main" id="{9B3F7991-3C4A-4229-B9DE-D67F32195685}"/>
               </a:ext>
             </a:extLst>
           </p:cNvPr>
@@ -15337,7 +15337,7 @@
           <p:cNvPr id="32" name="">
             <a:extLst xmlns:a="http://schemas.openxmlformats.org/drawingml/2006/main">
               <a:ext uri="{FF2B5EF4-FFF2-40B4-BE49-F238E27FC236}">
-                <a16:creationId xmlns:a16="http://schemas.microsoft.com/office/drawing/2014/main" id="{671EECBD-6088-42B6-9F07-B3F264492D21}"/>
+                <a16:creationId xmlns:a16="http://schemas.microsoft.com/office/drawing/2014/main" id="{D20780D9-9C9A-4A47-91F9-D1AB179013B1}"/>
               </a:ext>
             </a:extLst>
           </p:cNvPr>
@@ -15401,7 +15401,7 @@
           <p:cNvPr id="33" name="">
             <a:extLst xmlns:a="http://schemas.openxmlformats.org/drawingml/2006/main">
               <a:ext uri="{FF2B5EF4-FFF2-40B4-BE49-F238E27FC236}">
-                <a16:creationId xmlns:a16="http://schemas.microsoft.com/office/drawing/2014/main" id="{AA4BC06A-D1CE-4710-A8BC-4D1EEB3C5FA1}"/>
+                <a16:creationId xmlns:a16="http://schemas.microsoft.com/office/drawing/2014/main" id="{053727BD-B773-4809-AACF-B30329465FAE}"/>
               </a:ext>
             </a:extLst>
           </p:cNvPr>
@@ -15434,7 +15434,7 @@
           <p:cNvPr id="34" name="">
             <a:extLst xmlns:a="http://schemas.openxmlformats.org/drawingml/2006/main">
               <a:ext uri="{FF2B5EF4-FFF2-40B4-BE49-F238E27FC236}">
-                <a16:creationId xmlns:a16="http://schemas.microsoft.com/office/drawing/2014/main" id="{9167FA39-857C-4FF3-9D25-E3B51B4E4237}"/>
+                <a16:creationId xmlns:a16="http://schemas.microsoft.com/office/drawing/2014/main" id="{27AD5ED5-E7C8-4C21-A41E-7115F173EE67}"/>
               </a:ext>
             </a:extLst>
           </p:cNvPr>
@@ -15498,7 +15498,7 @@
           <p:cNvPr id="35" name="">
             <a:extLst xmlns:a="http://schemas.openxmlformats.org/drawingml/2006/main">
               <a:ext uri="{FF2B5EF4-FFF2-40B4-BE49-F238E27FC236}">
-                <a16:creationId xmlns:a16="http://schemas.microsoft.com/office/drawing/2014/main" id="{16C5780A-7555-4735-97D5-2CD126F9F05E}"/>
+                <a16:creationId xmlns:a16="http://schemas.microsoft.com/office/drawing/2014/main" id="{FDE33A2C-4789-4EF3-A63D-E69E4B9A3AFE}"/>
               </a:ext>
             </a:extLst>
           </p:cNvPr>
@@ -15531,7 +15531,7 @@
           <p:cNvPr id="36" name="">
             <a:extLst xmlns:a="http://schemas.openxmlformats.org/drawingml/2006/main">
               <a:ext uri="{FF2B5EF4-FFF2-40B4-BE49-F238E27FC236}">
-                <a16:creationId xmlns:a16="http://schemas.microsoft.com/office/drawing/2014/main" id="{7831E5A1-4A7D-4C16-8ED5-7C1E42E227C4}"/>
+                <a16:creationId xmlns:a16="http://schemas.microsoft.com/office/drawing/2014/main" id="{A78ED902-8D93-4E6B-9713-96C1D3303363}"/>
               </a:ext>
             </a:extLst>
           </p:cNvPr>
@@ -15595,7 +15595,7 @@
           <p:cNvPr id="37" name="">
             <a:extLst xmlns:a="http://schemas.openxmlformats.org/drawingml/2006/main">
               <a:ext uri="{FF2B5EF4-FFF2-40B4-BE49-F238E27FC236}">
-                <a16:creationId xmlns:a16="http://schemas.microsoft.com/office/drawing/2014/main" id="{59A083CC-EF2F-4FB7-8015-694F00FC0159}"/>
+                <a16:creationId xmlns:a16="http://schemas.microsoft.com/office/drawing/2014/main" id="{F25452ED-82CF-47E7-A076-6DA8C416A844}"/>
               </a:ext>
             </a:extLst>
           </p:cNvPr>
@@ -15659,7 +15659,7 @@
           <p:cNvPr id="38" name="">
             <a:extLst xmlns:a="http://schemas.openxmlformats.org/drawingml/2006/main">
               <a:ext uri="{FF2B5EF4-FFF2-40B4-BE49-F238E27FC236}">
-                <a16:creationId xmlns:a16="http://schemas.microsoft.com/office/drawing/2014/main" id="{963C7996-DA4F-4220-86E1-4FD5C3D51780}"/>
+                <a16:creationId xmlns:a16="http://schemas.microsoft.com/office/drawing/2014/main" id="{9F57D77A-8141-448F-BD71-6D776A76A42B}"/>
               </a:ext>
             </a:extLst>
           </p:cNvPr>
@@ -15721,7 +15721,7 @@
     </p:spTree>
     <p:extLst>
       <p:ext uri="{BB962C8B-B14F-4D97-AF65-F5344CB8AC3E}">
-        <p14:creationId xmlns:p14="http://schemas.microsoft.com/office/powerpoint/2010/main" val="1257758530"/>
+        <p14:creationId xmlns:p14="http://schemas.microsoft.com/office/powerpoint/2010/main" val="1753032477"/>
       </p:ext>
     </p:extLst>
   </p:cSld>
@@ -15745,7 +15745,7 @@
           <p:cNvPr id="1" name="">
             <a:extLst xmlns:a="http://schemas.openxmlformats.org/drawingml/2006/main">
               <a:ext uri="{FF2B5EF4-FFF2-40B4-BE49-F238E27FC236}">
-                <a16:creationId xmlns:a16="http://schemas.microsoft.com/office/drawing/2014/main" id="{D14D0BB7-C826-495B-9CF7-184D3176A6FF}"/>
+                <a16:creationId xmlns:a16="http://schemas.microsoft.com/office/drawing/2014/main" id="{010E3098-2677-42AD-A8E5-F198DB74690D}"/>
               </a:ext>
             </a:extLst>
           </p:cNvPr>
@@ -15778,7 +15778,7 @@
           <p:cNvPr id="2" name="">
             <a:extLst xmlns:a="http://schemas.openxmlformats.org/drawingml/2006/main">
               <a:ext uri="{FF2B5EF4-FFF2-40B4-BE49-F238E27FC236}">
-                <a16:creationId xmlns:a16="http://schemas.microsoft.com/office/drawing/2014/main" id="{80A19801-092B-4173-B42C-BFF8E988E067}"/>
+                <a16:creationId xmlns:a16="http://schemas.microsoft.com/office/drawing/2014/main" id="{FDF186C6-F7F5-4C70-905C-B8E86C6DFBBE}"/>
               </a:ext>
             </a:extLst>
           </p:cNvPr>
@@ -15811,7 +15811,7 @@
           <p:cNvPr id="3" name="">
             <a:extLst xmlns:a="http://schemas.openxmlformats.org/drawingml/2006/main">
               <a:ext uri="{FF2B5EF4-FFF2-40B4-BE49-F238E27FC236}">
-                <a16:creationId xmlns:a16="http://schemas.microsoft.com/office/drawing/2014/main" id="{839738F6-AB73-488A-81F5-C36A2725F797}"/>
+                <a16:creationId xmlns:a16="http://schemas.microsoft.com/office/drawing/2014/main" id="{427FBBC4-DD29-435C-8695-138C7CC34557}"/>
               </a:ext>
             </a:extLst>
           </p:cNvPr>
@@ -15875,7 +15875,7 @@
           <p:cNvPr id="4" name="">
             <a:extLst xmlns:a="http://schemas.openxmlformats.org/drawingml/2006/main">
               <a:ext uri="{FF2B5EF4-FFF2-40B4-BE49-F238E27FC236}">
-                <a16:creationId xmlns:a16="http://schemas.microsoft.com/office/drawing/2014/main" id="{2154A084-56F7-42DC-8431-621B4E6F8BCC}"/>
+                <a16:creationId xmlns:a16="http://schemas.microsoft.com/office/drawing/2014/main" id="{10ABAA48-5B2F-46B8-BA65-B74D02E23BC7}"/>
               </a:ext>
             </a:extLst>
           </p:cNvPr>
@@ -15939,7 +15939,7 @@
           <p:cNvPr id="5" name="">
             <a:extLst xmlns:a="http://schemas.openxmlformats.org/drawingml/2006/main">
               <a:ext uri="{FF2B5EF4-FFF2-40B4-BE49-F238E27FC236}">
-                <a16:creationId xmlns:a16="http://schemas.microsoft.com/office/drawing/2014/main" id="{281CF055-4034-445B-BBA2-6EC023F8FFA3}"/>
+                <a16:creationId xmlns:a16="http://schemas.microsoft.com/office/drawing/2014/main" id="{8E9F8867-E9DB-488F-9ABE-D177A900A817}"/>
               </a:ext>
             </a:extLst>
           </p:cNvPr>
@@ -16003,7 +16003,7 @@
           <p:cNvPr id="6" name="">
             <a:extLst xmlns:a="http://schemas.openxmlformats.org/drawingml/2006/main">
               <a:ext uri="{FF2B5EF4-FFF2-40B4-BE49-F238E27FC236}">
-                <a16:creationId xmlns:a16="http://schemas.microsoft.com/office/drawing/2014/main" id="{498CC44F-458A-4E89-B232-FBE787C067C3}"/>
+                <a16:creationId xmlns:a16="http://schemas.microsoft.com/office/drawing/2014/main" id="{934E1F1F-A44D-4378-BA47-9E3D23628B36}"/>
               </a:ext>
             </a:extLst>
           </p:cNvPr>
@@ -16040,7 +16040,7 @@
           <p:nvPr/>
         </p:nvPicPr>
         <p:blipFill>
-          <a:blip xmlns:r="http://schemas.openxmlformats.org/officeDocument/2006/relationships" xmlns:a="http://schemas.openxmlformats.org/drawingml/2006/main" r:embed="R70c385dae8344e37"/>
+          <a:blip xmlns:r="http://schemas.openxmlformats.org/officeDocument/2006/relationships" xmlns:a="http://schemas.openxmlformats.org/drawingml/2006/main" r:embed="Reacab9c4285142b0"/>
           <a:stretch xmlns:a="http://schemas.openxmlformats.org/drawingml/2006/main"/>
         </p:blipFill>
         <p:spPr>
@@ -16058,7 +16058,7 @@
           <p:cNvPr id="8" name="">
             <a:extLst xmlns:a="http://schemas.openxmlformats.org/drawingml/2006/main">
               <a:ext uri="{FF2B5EF4-FFF2-40B4-BE49-F238E27FC236}">
-                <a16:creationId xmlns:a16="http://schemas.microsoft.com/office/drawing/2014/main" id="{F5B0A811-59B5-4648-9B01-290FDA013C14}"/>
+                <a16:creationId xmlns:a16="http://schemas.microsoft.com/office/drawing/2014/main" id="{FBED0365-FA66-4EB5-9A12-60E2AC202836}"/>
               </a:ext>
             </a:extLst>
           </p:cNvPr>
@@ -16122,7 +16122,7 @@
           <p:cNvPr id="9" name="">
             <a:extLst xmlns:a="http://schemas.openxmlformats.org/drawingml/2006/main">
               <a:ext uri="{FF2B5EF4-FFF2-40B4-BE49-F238E27FC236}">
-                <a16:creationId xmlns:a16="http://schemas.microsoft.com/office/drawing/2014/main" id="{97EBEE61-FCB6-40EC-B403-6E39088823EA}"/>
+                <a16:creationId xmlns:a16="http://schemas.microsoft.com/office/drawing/2014/main" id="{8B2E97C9-45EC-47DB-8D1F-EA8A2F64A799}"/>
               </a:ext>
             </a:extLst>
           </p:cNvPr>
@@ -16159,7 +16159,7 @@
           <p:nvPr/>
         </p:nvPicPr>
         <p:blipFill>
-          <a:blip xmlns:r="http://schemas.openxmlformats.org/officeDocument/2006/relationships" xmlns:a="http://schemas.openxmlformats.org/drawingml/2006/main" r:embed="R7f276fe1237a49bb"/>
+          <a:blip xmlns:r="http://schemas.openxmlformats.org/officeDocument/2006/relationships" xmlns:a="http://schemas.openxmlformats.org/drawingml/2006/main" r:embed="R95ff515041094c92"/>
           <a:stretch xmlns:a="http://schemas.openxmlformats.org/drawingml/2006/main"/>
         </p:blipFill>
         <p:spPr>
@@ -16177,7 +16177,7 @@
           <p:cNvPr id="11" name="">
             <a:extLst xmlns:a="http://schemas.openxmlformats.org/drawingml/2006/main">
               <a:ext uri="{FF2B5EF4-FFF2-40B4-BE49-F238E27FC236}">
-                <a16:creationId xmlns:a16="http://schemas.microsoft.com/office/drawing/2014/main" id="{5F56B937-4400-4AC3-9960-ACCEE05AC019}"/>
+                <a16:creationId xmlns:a16="http://schemas.microsoft.com/office/drawing/2014/main" id="{F2D2C10A-2B0F-4690-BECE-794276A885FB}"/>
               </a:ext>
             </a:extLst>
           </p:cNvPr>
@@ -16241,7 +16241,7 @@
           <p:cNvPr id="12" name="">
             <a:extLst xmlns:a="http://schemas.openxmlformats.org/drawingml/2006/main">
               <a:ext uri="{FF2B5EF4-FFF2-40B4-BE49-F238E27FC236}">
-                <a16:creationId xmlns:a16="http://schemas.microsoft.com/office/drawing/2014/main" id="{581BF802-9066-44EF-AE4F-FBF5E000FC85}"/>
+                <a16:creationId xmlns:a16="http://schemas.microsoft.com/office/drawing/2014/main" id="{2BFEC1F3-BDFB-4B49-97CB-540F9C219525}"/>
               </a:ext>
             </a:extLst>
           </p:cNvPr>
@@ -16278,7 +16278,7 @@
           <p:nvPr/>
         </p:nvPicPr>
         <p:blipFill>
-          <a:blip xmlns:r="http://schemas.openxmlformats.org/officeDocument/2006/relationships" xmlns:a="http://schemas.openxmlformats.org/drawingml/2006/main" r:embed="Rf4bcf3d0e7494b94"/>
+          <a:blip xmlns:r="http://schemas.openxmlformats.org/officeDocument/2006/relationships" xmlns:a="http://schemas.openxmlformats.org/drawingml/2006/main" r:embed="R7cb9a5d3d4ed449a"/>
           <a:stretch xmlns:a="http://schemas.openxmlformats.org/drawingml/2006/main"/>
         </p:blipFill>
         <p:spPr>
@@ -16296,7 +16296,7 @@
           <p:cNvPr id="14" name="">
             <a:extLst xmlns:a="http://schemas.openxmlformats.org/drawingml/2006/main">
               <a:ext uri="{FF2B5EF4-FFF2-40B4-BE49-F238E27FC236}">
-                <a16:creationId xmlns:a16="http://schemas.microsoft.com/office/drawing/2014/main" id="{32E4BD3E-4CC3-401E-A8B2-C935856CE793}"/>
+                <a16:creationId xmlns:a16="http://schemas.microsoft.com/office/drawing/2014/main" id="{12FECD80-5E3E-405B-809C-3E31021991D7}"/>
               </a:ext>
             </a:extLst>
           </p:cNvPr>
@@ -16360,7 +16360,7 @@
           <p:cNvPr id="15" name="">
             <a:extLst xmlns:a="http://schemas.openxmlformats.org/drawingml/2006/main">
               <a:ext uri="{FF2B5EF4-FFF2-40B4-BE49-F238E27FC236}">
-                <a16:creationId xmlns:a16="http://schemas.microsoft.com/office/drawing/2014/main" id="{357D8301-B521-4320-A935-35FE8250FBD6}"/>
+                <a16:creationId xmlns:a16="http://schemas.microsoft.com/office/drawing/2014/main" id="{5CC32F06-EA79-4623-AC4D-6778AD30A49F}"/>
               </a:ext>
             </a:extLst>
           </p:cNvPr>
@@ -16424,7 +16424,7 @@
           <p:cNvPr id="16" name="">
             <a:extLst xmlns:a="http://schemas.openxmlformats.org/drawingml/2006/main">
               <a:ext uri="{FF2B5EF4-FFF2-40B4-BE49-F238E27FC236}">
-                <a16:creationId xmlns:a16="http://schemas.microsoft.com/office/drawing/2014/main" id="{3533AF3D-F5BB-4D22-8BAB-CA99FAF59E80}"/>
+                <a16:creationId xmlns:a16="http://schemas.microsoft.com/office/drawing/2014/main" id="{E500DBF6-3F80-480C-A10F-45888453E2C8}"/>
               </a:ext>
             </a:extLst>
           </p:cNvPr>
@@ -16488,7 +16488,7 @@
           <p:cNvPr id="17" name="">
             <a:extLst xmlns:a="http://schemas.openxmlformats.org/drawingml/2006/main">
               <a:ext uri="{FF2B5EF4-FFF2-40B4-BE49-F238E27FC236}">
-                <a16:creationId xmlns:a16="http://schemas.microsoft.com/office/drawing/2014/main" id="{59590465-1A75-4620-A026-FE1345977E58}"/>
+                <a16:creationId xmlns:a16="http://schemas.microsoft.com/office/drawing/2014/main" id="{1C776470-DD96-4D52-B4EB-7148244EB14E}"/>
               </a:ext>
             </a:extLst>
           </p:cNvPr>
@@ -16550,7 +16550,7 @@
     </p:spTree>
     <p:extLst>
       <p:ext uri="{BB962C8B-B14F-4D97-AF65-F5344CB8AC3E}">
-        <p14:creationId xmlns:p14="http://schemas.microsoft.com/office/powerpoint/2010/main" val="2033625697"/>
+        <p14:creationId xmlns:p14="http://schemas.microsoft.com/office/powerpoint/2010/main" val="394972407"/>
       </p:ext>
     </p:extLst>
   </p:cSld>
@@ -16574,7 +16574,7 @@
           <p:cNvPr id="1" name="">
             <a:extLst xmlns:a="http://schemas.openxmlformats.org/drawingml/2006/main">
               <a:ext uri="{FF2B5EF4-FFF2-40B4-BE49-F238E27FC236}">
-                <a16:creationId xmlns:a16="http://schemas.microsoft.com/office/drawing/2014/main" id="{DDD2E65D-827C-4457-BE1E-DBABD1BB6914}"/>
+                <a16:creationId xmlns:a16="http://schemas.microsoft.com/office/drawing/2014/main" id="{A2AD1919-F01E-4863-9211-5B9DD612B360}"/>
               </a:ext>
             </a:extLst>
           </p:cNvPr>
@@ -16607,7 +16607,7 @@
           <p:cNvPr id="2" name="">
             <a:extLst xmlns:a="http://schemas.openxmlformats.org/drawingml/2006/main">
               <a:ext uri="{FF2B5EF4-FFF2-40B4-BE49-F238E27FC236}">
-                <a16:creationId xmlns:a16="http://schemas.microsoft.com/office/drawing/2014/main" id="{CA275053-D6E1-4C78-9EA3-4C62B58CF48A}"/>
+                <a16:creationId xmlns:a16="http://schemas.microsoft.com/office/drawing/2014/main" id="{CB75549A-2D04-4484-B3EF-7AD708DFB266}"/>
               </a:ext>
             </a:extLst>
           </p:cNvPr>
@@ -16640,7 +16640,7 @@
           <p:cNvPr id="3" name="">
             <a:extLst xmlns:a="http://schemas.openxmlformats.org/drawingml/2006/main">
               <a:ext uri="{FF2B5EF4-FFF2-40B4-BE49-F238E27FC236}">
-                <a16:creationId xmlns:a16="http://schemas.microsoft.com/office/drawing/2014/main" id="{E0B64643-21CC-4B3B-9709-11CC1BAD9D7B}"/>
+                <a16:creationId xmlns:a16="http://schemas.microsoft.com/office/drawing/2014/main" id="{8DCF45B7-63ED-41D1-B303-2FB3808BC102}"/>
               </a:ext>
             </a:extLst>
           </p:cNvPr>
@@ -16704,7 +16704,7 @@
           <p:cNvPr id="4" name="">
             <a:extLst xmlns:a="http://schemas.openxmlformats.org/drawingml/2006/main">
               <a:ext uri="{FF2B5EF4-FFF2-40B4-BE49-F238E27FC236}">
-                <a16:creationId xmlns:a16="http://schemas.microsoft.com/office/drawing/2014/main" id="{C21A7286-CC9A-4F0D-8E04-47FC11C11EF5}"/>
+                <a16:creationId xmlns:a16="http://schemas.microsoft.com/office/drawing/2014/main" id="{43F47088-7326-42C9-84D4-FB16D7824F2D}"/>
               </a:ext>
             </a:extLst>
           </p:cNvPr>
@@ -16768,7 +16768,7 @@
           <p:cNvPr id="5" name="">
             <a:extLst xmlns:a="http://schemas.openxmlformats.org/drawingml/2006/main">
               <a:ext uri="{FF2B5EF4-FFF2-40B4-BE49-F238E27FC236}">
-                <a16:creationId xmlns:a16="http://schemas.microsoft.com/office/drawing/2014/main" id="{B91A553D-9A94-4CF6-9E45-16A410490036}"/>
+                <a16:creationId xmlns:a16="http://schemas.microsoft.com/office/drawing/2014/main" id="{9A34F6D3-E1DF-430D-93EE-EE6E8A9E4910}"/>
               </a:ext>
             </a:extLst>
           </p:cNvPr>
@@ -16832,7 +16832,7 @@
           <p:cNvPr id="6" name="">
             <a:extLst xmlns:a="http://schemas.openxmlformats.org/drawingml/2006/main">
               <a:ext uri="{FF2B5EF4-FFF2-40B4-BE49-F238E27FC236}">
-                <a16:creationId xmlns:a16="http://schemas.microsoft.com/office/drawing/2014/main" id="{7360BF22-C5B4-4BFE-839F-D8F2A8AE9972}"/>
+                <a16:creationId xmlns:a16="http://schemas.microsoft.com/office/drawing/2014/main" id="{3180EFB9-1564-423F-A17B-B057E9BF67CA}"/>
               </a:ext>
             </a:extLst>
           </p:cNvPr>
@@ -16869,7 +16869,7 @@
           <p:nvPr/>
         </p:nvPicPr>
         <p:blipFill>
-          <a:blip xmlns:r="http://schemas.openxmlformats.org/officeDocument/2006/relationships" xmlns:a="http://schemas.openxmlformats.org/drawingml/2006/main" r:embed="Ra7934733593d465c"/>
+          <a:blip xmlns:r="http://schemas.openxmlformats.org/officeDocument/2006/relationships" xmlns:a="http://schemas.openxmlformats.org/drawingml/2006/main" r:embed="R8ba9973d6fcf4e09"/>
           <a:stretch xmlns:a="http://schemas.openxmlformats.org/drawingml/2006/main"/>
         </p:blipFill>
         <p:spPr>
@@ -16887,7 +16887,7 @@
           <p:cNvPr id="8" name="">
             <a:extLst xmlns:a="http://schemas.openxmlformats.org/drawingml/2006/main">
               <a:ext uri="{FF2B5EF4-FFF2-40B4-BE49-F238E27FC236}">
-                <a16:creationId xmlns:a16="http://schemas.microsoft.com/office/drawing/2014/main" id="{7A9C9D8A-2D83-4E7A-873B-AE68637C64EC}"/>
+                <a16:creationId xmlns:a16="http://schemas.microsoft.com/office/drawing/2014/main" id="{ECF91392-C8A7-4736-BDE7-A29F4187C2E6}"/>
               </a:ext>
             </a:extLst>
           </p:cNvPr>
@@ -16951,7 +16951,7 @@
           <p:cNvPr id="9" name="">
             <a:extLst xmlns:a="http://schemas.openxmlformats.org/drawingml/2006/main">
               <a:ext uri="{FF2B5EF4-FFF2-40B4-BE49-F238E27FC236}">
-                <a16:creationId xmlns:a16="http://schemas.microsoft.com/office/drawing/2014/main" id="{D7F57AFC-02E1-46A8-8B4F-56EFF21C2247}"/>
+                <a16:creationId xmlns:a16="http://schemas.microsoft.com/office/drawing/2014/main" id="{DD219106-5F83-4F3D-8C64-5DC3F40DDB8D}"/>
               </a:ext>
             </a:extLst>
           </p:cNvPr>
@@ -16988,7 +16988,7 @@
           <p:nvPr/>
         </p:nvPicPr>
         <p:blipFill>
-          <a:blip xmlns:r="http://schemas.openxmlformats.org/officeDocument/2006/relationships" xmlns:a="http://schemas.openxmlformats.org/drawingml/2006/main" r:embed="R3fe606937f1b4b13"/>
+          <a:blip xmlns:r="http://schemas.openxmlformats.org/officeDocument/2006/relationships" xmlns:a="http://schemas.openxmlformats.org/drawingml/2006/main" r:embed="R04ecce0480684bdc"/>
           <a:stretch xmlns:a="http://schemas.openxmlformats.org/drawingml/2006/main"/>
         </p:blipFill>
         <p:spPr>
@@ -17006,7 +17006,7 @@
           <p:cNvPr id="11" name="">
             <a:extLst xmlns:a="http://schemas.openxmlformats.org/drawingml/2006/main">
               <a:ext uri="{FF2B5EF4-FFF2-40B4-BE49-F238E27FC236}">
-                <a16:creationId xmlns:a16="http://schemas.microsoft.com/office/drawing/2014/main" id="{381ED86F-597E-486B-B53A-140F2D022813}"/>
+                <a16:creationId xmlns:a16="http://schemas.microsoft.com/office/drawing/2014/main" id="{760520CE-3669-40AD-91CA-4BBEDF365C75}"/>
               </a:ext>
             </a:extLst>
           </p:cNvPr>
@@ -17070,7 +17070,7 @@
           <p:cNvPr id="12" name="">
             <a:extLst xmlns:a="http://schemas.openxmlformats.org/drawingml/2006/main">
               <a:ext uri="{FF2B5EF4-FFF2-40B4-BE49-F238E27FC236}">
-                <a16:creationId xmlns:a16="http://schemas.microsoft.com/office/drawing/2014/main" id="{55B85DC0-CDFF-4337-BFE6-4A2067E1B2E7}"/>
+                <a16:creationId xmlns:a16="http://schemas.microsoft.com/office/drawing/2014/main" id="{2A92A006-CD7B-4F64-970E-B988D8139B4D}"/>
               </a:ext>
             </a:extLst>
           </p:cNvPr>
@@ -17107,7 +17107,7 @@
           <p:nvPr/>
         </p:nvPicPr>
         <p:blipFill>
-          <a:blip xmlns:r="http://schemas.openxmlformats.org/officeDocument/2006/relationships" xmlns:a="http://schemas.openxmlformats.org/drawingml/2006/main" r:embed="R0e65926308834949"/>
+          <a:blip xmlns:r="http://schemas.openxmlformats.org/officeDocument/2006/relationships" xmlns:a="http://schemas.openxmlformats.org/drawingml/2006/main" r:embed="R31eb665c40d747c4"/>
           <a:stretch xmlns:a="http://schemas.openxmlformats.org/drawingml/2006/main"/>
         </p:blipFill>
         <p:spPr>
@@ -17125,7 +17125,7 @@
           <p:cNvPr id="14" name="">
             <a:extLst xmlns:a="http://schemas.openxmlformats.org/drawingml/2006/main">
               <a:ext uri="{FF2B5EF4-FFF2-40B4-BE49-F238E27FC236}">
-                <a16:creationId xmlns:a16="http://schemas.microsoft.com/office/drawing/2014/main" id="{D27819CF-8A9D-43AD-9949-8689C655BBC8}"/>
+                <a16:creationId xmlns:a16="http://schemas.microsoft.com/office/drawing/2014/main" id="{8D400D0F-9D1A-4066-A0E6-7E6BE2A3ECEF}"/>
               </a:ext>
             </a:extLst>
           </p:cNvPr>
@@ -17189,7 +17189,7 @@
           <p:cNvPr id="15" name="">
             <a:extLst xmlns:a="http://schemas.openxmlformats.org/drawingml/2006/main">
               <a:ext uri="{FF2B5EF4-FFF2-40B4-BE49-F238E27FC236}">
-                <a16:creationId xmlns:a16="http://schemas.microsoft.com/office/drawing/2014/main" id="{0B4CD825-F770-47CE-A0C6-ED603AE53CDF}"/>
+                <a16:creationId xmlns:a16="http://schemas.microsoft.com/office/drawing/2014/main" id="{7F86EE81-8CD2-486D-A660-E00B2C821BB6}"/>
               </a:ext>
             </a:extLst>
           </p:cNvPr>
@@ -17226,7 +17226,7 @@
           <p:nvPr/>
         </p:nvPicPr>
         <p:blipFill>
-          <a:blip xmlns:r="http://schemas.openxmlformats.org/officeDocument/2006/relationships" xmlns:a="http://schemas.openxmlformats.org/drawingml/2006/main" r:embed="Rd6d3d3d782364983"/>
+          <a:blip xmlns:r="http://schemas.openxmlformats.org/officeDocument/2006/relationships" xmlns:a="http://schemas.openxmlformats.org/drawingml/2006/main" r:embed="R61ba314f6f904379"/>
           <a:stretch xmlns:a="http://schemas.openxmlformats.org/drawingml/2006/main"/>
         </p:blipFill>
         <p:spPr>
@@ -17244,7 +17244,7 @@
           <p:cNvPr id="17" name="">
             <a:extLst xmlns:a="http://schemas.openxmlformats.org/drawingml/2006/main">
               <a:ext uri="{FF2B5EF4-FFF2-40B4-BE49-F238E27FC236}">
-                <a16:creationId xmlns:a16="http://schemas.microsoft.com/office/drawing/2014/main" id="{4B8F328B-5929-4075-9937-7A7F1726334B}"/>
+                <a16:creationId xmlns:a16="http://schemas.microsoft.com/office/drawing/2014/main" id="{758F2DFF-F8D3-4C6A-893C-DF1D8403666A}"/>
               </a:ext>
             </a:extLst>
           </p:cNvPr>
@@ -17308,7 +17308,7 @@
           <p:cNvPr id="18" name="">
             <a:extLst xmlns:a="http://schemas.openxmlformats.org/drawingml/2006/main">
               <a:ext uri="{FF2B5EF4-FFF2-40B4-BE49-F238E27FC236}">
-                <a16:creationId xmlns:a16="http://schemas.microsoft.com/office/drawing/2014/main" id="{E51475E8-128F-40E6-A68F-7DA234D23445}"/>
+                <a16:creationId xmlns:a16="http://schemas.microsoft.com/office/drawing/2014/main" id="{7DAAC5A7-2366-4A05-B70A-3FBEC70A01B0}"/>
               </a:ext>
             </a:extLst>
           </p:cNvPr>
@@ -17341,7 +17341,7 @@
           <p:cNvPr id="19" name="">
             <a:extLst xmlns:a="http://schemas.openxmlformats.org/drawingml/2006/main">
               <a:ext uri="{FF2B5EF4-FFF2-40B4-BE49-F238E27FC236}">
-                <a16:creationId xmlns:a16="http://schemas.microsoft.com/office/drawing/2014/main" id="{F64C96EE-857F-49F1-931F-F43B8F99FF82}"/>
+                <a16:creationId xmlns:a16="http://schemas.microsoft.com/office/drawing/2014/main" id="{3E8375E3-6762-4F35-B964-B9A0D1D31DDC}"/>
               </a:ext>
             </a:extLst>
           </p:cNvPr>
@@ -17405,7 +17405,7 @@
           <p:cNvPr id="20" name="">
             <a:extLst xmlns:a="http://schemas.openxmlformats.org/drawingml/2006/main">
               <a:ext uri="{FF2B5EF4-FFF2-40B4-BE49-F238E27FC236}">
-                <a16:creationId xmlns:a16="http://schemas.microsoft.com/office/drawing/2014/main" id="{F6677151-6017-4F80-AAE6-0359BBB5E3C6}"/>
+                <a16:creationId xmlns:a16="http://schemas.microsoft.com/office/drawing/2014/main" id="{D0AC4A76-2FC9-40FA-9909-319CE7E599A4}"/>
               </a:ext>
             </a:extLst>
           </p:cNvPr>
@@ -17438,7 +17438,7 @@
           <p:cNvPr id="21" name="">
             <a:extLst xmlns:a="http://schemas.openxmlformats.org/drawingml/2006/main">
               <a:ext uri="{FF2B5EF4-FFF2-40B4-BE49-F238E27FC236}">
-                <a16:creationId xmlns:a16="http://schemas.microsoft.com/office/drawing/2014/main" id="{0CEF0417-7057-437F-B57F-4A6BC72F1D16}"/>
+                <a16:creationId xmlns:a16="http://schemas.microsoft.com/office/drawing/2014/main" id="{2C7FCEB5-CF35-4C28-A924-B0D93DEC5F2D}"/>
               </a:ext>
             </a:extLst>
           </p:cNvPr>
@@ -17502,7 +17502,7 @@
           <p:cNvPr id="22" name="">
             <a:extLst xmlns:a="http://schemas.openxmlformats.org/drawingml/2006/main">
               <a:ext uri="{FF2B5EF4-FFF2-40B4-BE49-F238E27FC236}">
-                <a16:creationId xmlns:a16="http://schemas.microsoft.com/office/drawing/2014/main" id="{793DF604-5CD7-4825-9EA3-800B5B839995}"/>
+                <a16:creationId xmlns:a16="http://schemas.microsoft.com/office/drawing/2014/main" id="{7BEB039A-E153-4AA3-9706-9CF1BB77160A}"/>
               </a:ext>
             </a:extLst>
           </p:cNvPr>
@@ -17535,7 +17535,7 @@
           <p:cNvPr id="23" name="">
             <a:extLst xmlns:a="http://schemas.openxmlformats.org/drawingml/2006/main">
               <a:ext uri="{FF2B5EF4-FFF2-40B4-BE49-F238E27FC236}">
-                <a16:creationId xmlns:a16="http://schemas.microsoft.com/office/drawing/2014/main" id="{315CF7B9-9888-49AB-92AC-B859C0756B3F}"/>
+                <a16:creationId xmlns:a16="http://schemas.microsoft.com/office/drawing/2014/main" id="{B97EDE1C-42BA-4ACD-920E-83600779D937}"/>
               </a:ext>
             </a:extLst>
           </p:cNvPr>
@@ -17599,7 +17599,7 @@
           <p:cNvPr id="24" name="">
             <a:extLst xmlns:a="http://schemas.openxmlformats.org/drawingml/2006/main">
               <a:ext uri="{FF2B5EF4-FFF2-40B4-BE49-F238E27FC236}">
-                <a16:creationId xmlns:a16="http://schemas.microsoft.com/office/drawing/2014/main" id="{916DE3D1-D28B-40FC-8F08-28336EFB313C}"/>
+                <a16:creationId xmlns:a16="http://schemas.microsoft.com/office/drawing/2014/main" id="{3CCC990B-6ABD-4334-8794-F024D71ABD1B}"/>
               </a:ext>
             </a:extLst>
           </p:cNvPr>
@@ -17632,7 +17632,7 @@
           <p:cNvPr id="25" name="">
             <a:extLst xmlns:a="http://schemas.openxmlformats.org/drawingml/2006/main">
               <a:ext uri="{FF2B5EF4-FFF2-40B4-BE49-F238E27FC236}">
-                <a16:creationId xmlns:a16="http://schemas.microsoft.com/office/drawing/2014/main" id="{63C4A18F-EB06-4BBA-87A7-D01E1D5AD281}"/>
+                <a16:creationId xmlns:a16="http://schemas.microsoft.com/office/drawing/2014/main" id="{F949C56B-6E67-432F-A041-7235E1DCD5C0}"/>
               </a:ext>
             </a:extLst>
           </p:cNvPr>
@@ -17696,7 +17696,7 @@
           <p:cNvPr id="26" name="">
             <a:extLst xmlns:a="http://schemas.openxmlformats.org/drawingml/2006/main">
               <a:ext uri="{FF2B5EF4-FFF2-40B4-BE49-F238E27FC236}">
-                <a16:creationId xmlns:a16="http://schemas.microsoft.com/office/drawing/2014/main" id="{900750B2-8FDF-4CF4-8405-06158A30B2BB}"/>
+                <a16:creationId xmlns:a16="http://schemas.microsoft.com/office/drawing/2014/main" id="{38E5856A-7133-4F3F-8B07-43FA8F533722}"/>
               </a:ext>
             </a:extLst>
           </p:cNvPr>
@@ -17760,7 +17760,7 @@
           <p:cNvPr id="27" name="">
             <a:extLst xmlns:a="http://schemas.openxmlformats.org/drawingml/2006/main">
               <a:ext uri="{FF2B5EF4-FFF2-40B4-BE49-F238E27FC236}">
-                <a16:creationId xmlns:a16="http://schemas.microsoft.com/office/drawing/2014/main" id="{D5F47241-AA97-4B1A-9E57-D3B2902EA0AC}"/>
+                <a16:creationId xmlns:a16="http://schemas.microsoft.com/office/drawing/2014/main" id="{B9FA6183-F30C-4163-99F4-DA284082A4FA}"/>
               </a:ext>
             </a:extLst>
           </p:cNvPr>
@@ -17822,7 +17822,7 @@
     </p:spTree>
     <p:extLst>
       <p:ext uri="{BB962C8B-B14F-4D97-AF65-F5344CB8AC3E}">
-        <p14:creationId xmlns:p14="http://schemas.microsoft.com/office/powerpoint/2010/main" val="1711201451"/>
+        <p14:creationId xmlns:p14="http://schemas.microsoft.com/office/powerpoint/2010/main" val="788542625"/>
       </p:ext>
     </p:extLst>
   </p:cSld>
@@ -17846,7 +17846,7 @@
           <p:cNvPr id="1" name="">
             <a:extLst xmlns:a="http://schemas.openxmlformats.org/drawingml/2006/main">
               <a:ext uri="{FF2B5EF4-FFF2-40B4-BE49-F238E27FC236}">
-                <a16:creationId xmlns:a16="http://schemas.microsoft.com/office/drawing/2014/main" id="{99F7500B-6C69-4A27-BE0F-A047E1BBA65C}"/>
+                <a16:creationId xmlns:a16="http://schemas.microsoft.com/office/drawing/2014/main" id="{3385B19C-59B0-4118-99CB-67FC579DDCF0}"/>
               </a:ext>
             </a:extLst>
           </p:cNvPr>
@@ -17879,7 +17879,7 @@
           <p:cNvPr id="2" name="">
             <a:extLst xmlns:a="http://schemas.openxmlformats.org/drawingml/2006/main">
               <a:ext uri="{FF2B5EF4-FFF2-40B4-BE49-F238E27FC236}">
-                <a16:creationId xmlns:a16="http://schemas.microsoft.com/office/drawing/2014/main" id="{0563DF54-F63F-4438-BDF0-DD3C05D92662}"/>
+                <a16:creationId xmlns:a16="http://schemas.microsoft.com/office/drawing/2014/main" id="{ACE6F937-C066-4A75-A1C5-49F6532969C6}"/>
               </a:ext>
             </a:extLst>
           </p:cNvPr>
@@ -17912,7 +17912,7 @@
           <p:cNvPr id="3" name="">
             <a:extLst xmlns:a="http://schemas.openxmlformats.org/drawingml/2006/main">
               <a:ext uri="{FF2B5EF4-FFF2-40B4-BE49-F238E27FC236}">
-                <a16:creationId xmlns:a16="http://schemas.microsoft.com/office/drawing/2014/main" id="{BD74C9A1-8AE6-4C1A-9A09-F454F7B07FE5}"/>
+                <a16:creationId xmlns:a16="http://schemas.microsoft.com/office/drawing/2014/main" id="{4FD2A602-B767-412E-8DE2-2096BB514B04}"/>
               </a:ext>
             </a:extLst>
           </p:cNvPr>
@@ -17976,7 +17976,7 @@
           <p:cNvPr id="4" name="">
             <a:extLst xmlns:a="http://schemas.openxmlformats.org/drawingml/2006/main">
               <a:ext uri="{FF2B5EF4-FFF2-40B4-BE49-F238E27FC236}">
-                <a16:creationId xmlns:a16="http://schemas.microsoft.com/office/drawing/2014/main" id="{755B2039-992B-4E9C-A6A8-1DA2CE0051C2}"/>
+                <a16:creationId xmlns:a16="http://schemas.microsoft.com/office/drawing/2014/main" id="{C146FC59-6904-40EC-97C2-C68A1BB63B64}"/>
               </a:ext>
             </a:extLst>
           </p:cNvPr>
@@ -18040,7 +18040,7 @@
           <p:cNvPr id="5" name="">
             <a:extLst xmlns:a="http://schemas.openxmlformats.org/drawingml/2006/main">
               <a:ext uri="{FF2B5EF4-FFF2-40B4-BE49-F238E27FC236}">
-                <a16:creationId xmlns:a16="http://schemas.microsoft.com/office/drawing/2014/main" id="{3A80FDA2-FA18-4E01-8EE1-76F0766E9A2C}"/>
+                <a16:creationId xmlns:a16="http://schemas.microsoft.com/office/drawing/2014/main" id="{B4AB2147-B508-4C2F-9935-1670BF102FBF}"/>
               </a:ext>
             </a:extLst>
           </p:cNvPr>
@@ -18104,7 +18104,7 @@
           <p:cNvPr id="6" name="">
             <a:extLst xmlns:a="http://schemas.openxmlformats.org/drawingml/2006/main">
               <a:ext uri="{FF2B5EF4-FFF2-40B4-BE49-F238E27FC236}">
-                <a16:creationId xmlns:a16="http://schemas.microsoft.com/office/drawing/2014/main" id="{B6150835-987E-481D-B08F-F0354F55E831}"/>
+                <a16:creationId xmlns:a16="http://schemas.microsoft.com/office/drawing/2014/main" id="{E2612E05-8AE4-42E7-B04F-970903615509}"/>
               </a:ext>
             </a:extLst>
           </p:cNvPr>
@@ -18137,7 +18137,7 @@
           <p:cNvPr id="7" name="">
             <a:extLst xmlns:a="http://schemas.openxmlformats.org/drawingml/2006/main">
               <a:ext uri="{FF2B5EF4-FFF2-40B4-BE49-F238E27FC236}">
-                <a16:creationId xmlns:a16="http://schemas.microsoft.com/office/drawing/2014/main" id="{C6F1ED5E-D591-4E90-88AE-EC0AA79ABAF9}"/>
+                <a16:creationId xmlns:a16="http://schemas.microsoft.com/office/drawing/2014/main" id="{83066C9D-D5C3-410A-85CD-ACCEF8241BB7}"/>
               </a:ext>
             </a:extLst>
           </p:cNvPr>
@@ -18201,7 +18201,7 @@
           <p:cNvPr id="8" name="">
             <a:extLst xmlns:a="http://schemas.openxmlformats.org/drawingml/2006/main">
               <a:ext uri="{FF2B5EF4-FFF2-40B4-BE49-F238E27FC236}">
-                <a16:creationId xmlns:a16="http://schemas.microsoft.com/office/drawing/2014/main" id="{BEF6A67B-D843-4C28-805B-3D63317467BE}"/>
+                <a16:creationId xmlns:a16="http://schemas.microsoft.com/office/drawing/2014/main" id="{23C52837-9654-4B7F-B810-569BA015DBA6}"/>
               </a:ext>
             </a:extLst>
           </p:cNvPr>
@@ -18234,7 +18234,7 @@
           <p:cNvPr id="9" name="">
             <a:extLst xmlns:a="http://schemas.openxmlformats.org/drawingml/2006/main">
               <a:ext uri="{FF2B5EF4-FFF2-40B4-BE49-F238E27FC236}">
-                <a16:creationId xmlns:a16="http://schemas.microsoft.com/office/drawing/2014/main" id="{23DA412A-F679-4211-8698-1BB4F2CBA80C}"/>
+                <a16:creationId xmlns:a16="http://schemas.microsoft.com/office/drawing/2014/main" id="{B2F083A8-E026-4172-B350-4362819FA751}"/>
               </a:ext>
             </a:extLst>
           </p:cNvPr>
@@ -18298,7 +18298,7 @@
           <p:cNvPr id="10" name="">
             <a:extLst xmlns:a="http://schemas.openxmlformats.org/drawingml/2006/main">
               <a:ext uri="{FF2B5EF4-FFF2-40B4-BE49-F238E27FC236}">
-                <a16:creationId xmlns:a16="http://schemas.microsoft.com/office/drawing/2014/main" id="{C772A0BA-EB79-4831-BFF1-4C112F88443A}"/>
+                <a16:creationId xmlns:a16="http://schemas.microsoft.com/office/drawing/2014/main" id="{4FDA66BC-6C88-4008-97CE-C57F77284737}"/>
               </a:ext>
             </a:extLst>
           </p:cNvPr>
@@ -18331,7 +18331,7 @@
           <p:cNvPr id="11" name="">
             <a:extLst xmlns:a="http://schemas.openxmlformats.org/drawingml/2006/main">
               <a:ext uri="{FF2B5EF4-FFF2-40B4-BE49-F238E27FC236}">
-                <a16:creationId xmlns:a16="http://schemas.microsoft.com/office/drawing/2014/main" id="{3BBB6566-822A-41BF-9121-E59D8104FDD3}"/>
+                <a16:creationId xmlns:a16="http://schemas.microsoft.com/office/drawing/2014/main" id="{DA369538-5F35-4B83-A5D6-611CE01C658D}"/>
               </a:ext>
             </a:extLst>
           </p:cNvPr>
@@ -18395,7 +18395,7 @@
           <p:cNvPr id="12" name="">
             <a:extLst xmlns:a="http://schemas.openxmlformats.org/drawingml/2006/main">
               <a:ext uri="{FF2B5EF4-FFF2-40B4-BE49-F238E27FC236}">
-                <a16:creationId xmlns:a16="http://schemas.microsoft.com/office/drawing/2014/main" id="{D4F0B7E2-668A-43C1-A63A-C6545DE69902}"/>
+                <a16:creationId xmlns:a16="http://schemas.microsoft.com/office/drawing/2014/main" id="{CD2B9982-F2EB-499F-B38B-D91BABDB3FDF}"/>
               </a:ext>
             </a:extLst>
           </p:cNvPr>
@@ -18428,7 +18428,7 @@
           <p:cNvPr id="13" name="">
             <a:extLst xmlns:a="http://schemas.openxmlformats.org/drawingml/2006/main">
               <a:ext uri="{FF2B5EF4-FFF2-40B4-BE49-F238E27FC236}">
-                <a16:creationId xmlns:a16="http://schemas.microsoft.com/office/drawing/2014/main" id="{1CBE8E44-4EDE-426D-B47D-6CCF7C044753}"/>
+                <a16:creationId xmlns:a16="http://schemas.microsoft.com/office/drawing/2014/main" id="{B0430E63-E008-4211-B2CB-B7B518179067}"/>
               </a:ext>
             </a:extLst>
           </p:cNvPr>
@@ -18492,7 +18492,7 @@
           <p:cNvPr id="14" name="">
             <a:extLst xmlns:a="http://schemas.openxmlformats.org/drawingml/2006/main">
               <a:ext uri="{FF2B5EF4-FFF2-40B4-BE49-F238E27FC236}">
-                <a16:creationId xmlns:a16="http://schemas.microsoft.com/office/drawing/2014/main" id="{CAB53A9D-58D7-444C-9EE6-30EEC8817175}"/>
+                <a16:creationId xmlns:a16="http://schemas.microsoft.com/office/drawing/2014/main" id="{9E44DE1D-F5B4-4952-B853-FF857197D7C2}"/>
               </a:ext>
             </a:extLst>
           </p:cNvPr>
@@ -18525,7 +18525,7 @@
           <p:cNvPr id="15" name="">
             <a:extLst xmlns:a="http://schemas.openxmlformats.org/drawingml/2006/main">
               <a:ext uri="{FF2B5EF4-FFF2-40B4-BE49-F238E27FC236}">
-                <a16:creationId xmlns:a16="http://schemas.microsoft.com/office/drawing/2014/main" id="{4B8CAD2A-B881-4DCB-A132-64A5C4915300}"/>
+                <a16:creationId xmlns:a16="http://schemas.microsoft.com/office/drawing/2014/main" id="{4FF7F6B3-E60A-42AE-B7B8-313F2C9BB6B4}"/>
               </a:ext>
             </a:extLst>
           </p:cNvPr>
@@ -18589,7 +18589,7 @@
           <p:cNvPr id="16" name="">
             <a:extLst xmlns:a="http://schemas.openxmlformats.org/drawingml/2006/main">
               <a:ext uri="{FF2B5EF4-FFF2-40B4-BE49-F238E27FC236}">
-                <a16:creationId xmlns:a16="http://schemas.microsoft.com/office/drawing/2014/main" id="{695D5008-F328-4F51-B777-C3C9DD63AC14}"/>
+                <a16:creationId xmlns:a16="http://schemas.microsoft.com/office/drawing/2014/main" id="{A5DB2A1C-8BD4-4B91-A099-44F4ABD87558}"/>
               </a:ext>
             </a:extLst>
           </p:cNvPr>
@@ -18622,7 +18622,7 @@
           <p:cNvPr id="17" name="">
             <a:extLst xmlns:a="http://schemas.openxmlformats.org/drawingml/2006/main">
               <a:ext uri="{FF2B5EF4-FFF2-40B4-BE49-F238E27FC236}">
-                <a16:creationId xmlns:a16="http://schemas.microsoft.com/office/drawing/2014/main" id="{B0E614D9-BE42-4D6C-9CB8-409FF337C881}"/>
+                <a16:creationId xmlns:a16="http://schemas.microsoft.com/office/drawing/2014/main" id="{8653BF35-9984-4EA2-BD9E-E1FA35EAD0B1}"/>
               </a:ext>
             </a:extLst>
           </p:cNvPr>
@@ -18686,7 +18686,7 @@
           <p:cNvPr id="18" name="">
             <a:extLst xmlns:a="http://schemas.openxmlformats.org/drawingml/2006/main">
               <a:ext uri="{FF2B5EF4-FFF2-40B4-BE49-F238E27FC236}">
-                <a16:creationId xmlns:a16="http://schemas.microsoft.com/office/drawing/2014/main" id="{FCB8B055-29DD-4305-8F73-9F2FD00488E9}"/>
+                <a16:creationId xmlns:a16="http://schemas.microsoft.com/office/drawing/2014/main" id="{B33D6837-03BA-49B1-9D94-3C0A6064060E}"/>
               </a:ext>
             </a:extLst>
           </p:cNvPr>
@@ -18719,7 +18719,7 @@
           <p:cNvPr id="19" name="">
             <a:extLst xmlns:a="http://schemas.openxmlformats.org/drawingml/2006/main">
               <a:ext uri="{FF2B5EF4-FFF2-40B4-BE49-F238E27FC236}">
-                <a16:creationId xmlns:a16="http://schemas.microsoft.com/office/drawing/2014/main" id="{AB8F1008-F069-4295-B34F-60E93F091C59}"/>
+                <a16:creationId xmlns:a16="http://schemas.microsoft.com/office/drawing/2014/main" id="{0A195E41-3B06-4E94-B731-2C9027A4CDBF}"/>
               </a:ext>
             </a:extLst>
           </p:cNvPr>
@@ -18783,7 +18783,7 @@
           <p:cNvPr id="20" name="">
             <a:extLst xmlns:a="http://schemas.openxmlformats.org/drawingml/2006/main">
               <a:ext uri="{FF2B5EF4-FFF2-40B4-BE49-F238E27FC236}">
-                <a16:creationId xmlns:a16="http://schemas.microsoft.com/office/drawing/2014/main" id="{87E1077D-4E8F-47A2-9D2E-60D29ED48CF0}"/>
+                <a16:creationId xmlns:a16="http://schemas.microsoft.com/office/drawing/2014/main" id="{33BBEC05-31B5-4F9B-A2E7-4BBA796DBE1D}"/>
               </a:ext>
             </a:extLst>
           </p:cNvPr>
@@ -18816,7 +18816,7 @@
           <p:cNvPr id="21" name="">
             <a:extLst xmlns:a="http://schemas.openxmlformats.org/drawingml/2006/main">
               <a:ext uri="{FF2B5EF4-FFF2-40B4-BE49-F238E27FC236}">
-                <a16:creationId xmlns:a16="http://schemas.microsoft.com/office/drawing/2014/main" id="{E2576D2A-DD68-429C-B423-684DB0EBB15D}"/>
+                <a16:creationId xmlns:a16="http://schemas.microsoft.com/office/drawing/2014/main" id="{A6A22B65-90DA-4560-B0EF-20A6DC03DE90}"/>
               </a:ext>
             </a:extLst>
           </p:cNvPr>
@@ -18880,7 +18880,7 @@
           <p:cNvPr id="22" name="">
             <a:extLst xmlns:a="http://schemas.openxmlformats.org/drawingml/2006/main">
               <a:ext uri="{FF2B5EF4-FFF2-40B4-BE49-F238E27FC236}">
-                <a16:creationId xmlns:a16="http://schemas.microsoft.com/office/drawing/2014/main" id="{169FC9B2-A32B-4ACB-8595-E92A0D734A1F}"/>
+                <a16:creationId xmlns:a16="http://schemas.microsoft.com/office/drawing/2014/main" id="{800E2A21-67A7-4169-9578-A469AC707D8C}"/>
               </a:ext>
             </a:extLst>
           </p:cNvPr>
@@ -18913,7 +18913,7 @@
           <p:cNvPr id="23" name="">
             <a:extLst xmlns:a="http://schemas.openxmlformats.org/drawingml/2006/main">
               <a:ext uri="{FF2B5EF4-FFF2-40B4-BE49-F238E27FC236}">
-                <a16:creationId xmlns:a16="http://schemas.microsoft.com/office/drawing/2014/main" id="{376E54B9-2338-4CCF-8BF4-3678EB3BBD6A}"/>
+                <a16:creationId xmlns:a16="http://schemas.microsoft.com/office/drawing/2014/main" id="{6AE04EA9-A060-4BED-A140-8F4B0C303189}"/>
               </a:ext>
             </a:extLst>
           </p:cNvPr>
@@ -18977,7 +18977,7 @@
           <p:cNvPr id="24" name="">
             <a:extLst xmlns:a="http://schemas.openxmlformats.org/drawingml/2006/main">
               <a:ext uri="{FF2B5EF4-FFF2-40B4-BE49-F238E27FC236}">
-                <a16:creationId xmlns:a16="http://schemas.microsoft.com/office/drawing/2014/main" id="{00BE11BD-90CA-4066-AC06-C9CE603551D1}"/>
+                <a16:creationId xmlns:a16="http://schemas.microsoft.com/office/drawing/2014/main" id="{ADA53EAC-E52F-47E3-BFDA-FC612E5F4C7F}"/>
               </a:ext>
             </a:extLst>
           </p:cNvPr>
@@ -19010,7 +19010,7 @@
           <p:cNvPr id="25" name="">
             <a:extLst xmlns:a="http://schemas.openxmlformats.org/drawingml/2006/main">
               <a:ext uri="{FF2B5EF4-FFF2-40B4-BE49-F238E27FC236}">
-                <a16:creationId xmlns:a16="http://schemas.microsoft.com/office/drawing/2014/main" id="{C625DE69-9083-416F-9A49-7F0882D5FCA2}"/>
+                <a16:creationId xmlns:a16="http://schemas.microsoft.com/office/drawing/2014/main" id="{63C34328-8D43-41BE-8FF9-55614C50F0A2}"/>
               </a:ext>
             </a:extLst>
           </p:cNvPr>
@@ -19074,7 +19074,7 @@
           <p:cNvPr id="26" name="">
             <a:extLst xmlns:a="http://schemas.openxmlformats.org/drawingml/2006/main">
               <a:ext uri="{FF2B5EF4-FFF2-40B4-BE49-F238E27FC236}">
-                <a16:creationId xmlns:a16="http://schemas.microsoft.com/office/drawing/2014/main" id="{83EE0E39-0FC7-43DB-A837-2421285873E2}"/>
+                <a16:creationId xmlns:a16="http://schemas.microsoft.com/office/drawing/2014/main" id="{4EABB147-1FF9-4103-9FBF-4F99D4801603}"/>
               </a:ext>
             </a:extLst>
           </p:cNvPr>
@@ -19107,7 +19107,7 @@
           <p:cNvPr id="27" name="">
             <a:extLst xmlns:a="http://schemas.openxmlformats.org/drawingml/2006/main">
               <a:ext uri="{FF2B5EF4-FFF2-40B4-BE49-F238E27FC236}">
-                <a16:creationId xmlns:a16="http://schemas.microsoft.com/office/drawing/2014/main" id="{8169C013-19D3-42F1-9FB0-11CC1ADC7A30}"/>
+                <a16:creationId xmlns:a16="http://schemas.microsoft.com/office/drawing/2014/main" id="{DB7AE439-65A8-4512-BE28-F1B0D734A0F2}"/>
               </a:ext>
             </a:extLst>
           </p:cNvPr>
@@ -19171,7 +19171,7 @@
           <p:cNvPr id="28" name="">
             <a:extLst xmlns:a="http://schemas.openxmlformats.org/drawingml/2006/main">
               <a:ext uri="{FF2B5EF4-FFF2-40B4-BE49-F238E27FC236}">
-                <a16:creationId xmlns:a16="http://schemas.microsoft.com/office/drawing/2014/main" id="{1CECDBB3-4A82-4FA7-9115-D07D695140B4}"/>
+                <a16:creationId xmlns:a16="http://schemas.microsoft.com/office/drawing/2014/main" id="{02F7A119-D5EA-4077-8760-5035E0487BD2}"/>
               </a:ext>
             </a:extLst>
           </p:cNvPr>
@@ -19204,7 +19204,7 @@
           <p:cNvPr id="29" name="">
             <a:extLst xmlns:a="http://schemas.openxmlformats.org/drawingml/2006/main">
               <a:ext uri="{FF2B5EF4-FFF2-40B4-BE49-F238E27FC236}">
-                <a16:creationId xmlns:a16="http://schemas.microsoft.com/office/drawing/2014/main" id="{1874B19D-06F5-43BE-B1FB-F92C72A41D98}"/>
+                <a16:creationId xmlns:a16="http://schemas.microsoft.com/office/drawing/2014/main" id="{6E34CA92-AD09-466F-BE72-21129A1CD8E4}"/>
               </a:ext>
             </a:extLst>
           </p:cNvPr>
@@ -19268,7 +19268,7 @@
           <p:cNvPr id="30" name="">
             <a:extLst xmlns:a="http://schemas.openxmlformats.org/drawingml/2006/main">
               <a:ext uri="{FF2B5EF4-FFF2-40B4-BE49-F238E27FC236}">
-                <a16:creationId xmlns:a16="http://schemas.microsoft.com/office/drawing/2014/main" id="{5F3DD554-D824-4059-BC73-FDA5C8E6AFD4}"/>
+                <a16:creationId xmlns:a16="http://schemas.microsoft.com/office/drawing/2014/main" id="{0A7E7325-C22D-411B-974A-89D329271B3E}"/>
               </a:ext>
             </a:extLst>
           </p:cNvPr>
@@ -19332,7 +19332,7 @@
           <p:cNvPr id="31" name="">
             <a:extLst xmlns:a="http://schemas.openxmlformats.org/drawingml/2006/main">
               <a:ext uri="{FF2B5EF4-FFF2-40B4-BE49-F238E27FC236}">
-                <a16:creationId xmlns:a16="http://schemas.microsoft.com/office/drawing/2014/main" id="{EEF75F7B-A243-4EA2-B4F7-66A738CD26F9}"/>
+                <a16:creationId xmlns:a16="http://schemas.microsoft.com/office/drawing/2014/main" id="{E3AF66CE-6B17-45C5-91CD-3C4F455F0F27}"/>
               </a:ext>
             </a:extLst>
           </p:cNvPr>
@@ -19394,7 +19394,7 @@
     </p:spTree>
     <p:extLst>
       <p:ext uri="{BB962C8B-B14F-4D97-AF65-F5344CB8AC3E}">
-        <p14:creationId xmlns:p14="http://schemas.microsoft.com/office/powerpoint/2010/main" val="1363489434"/>
+        <p14:creationId xmlns:p14="http://schemas.microsoft.com/office/powerpoint/2010/main" val="1697194938"/>
       </p:ext>
     </p:extLst>
   </p:cSld>
@@ -19418,7 +19418,7 @@
           <p:cNvPr id="1" name="">
             <a:extLst xmlns:a="http://schemas.openxmlformats.org/drawingml/2006/main">
               <a:ext uri="{FF2B5EF4-FFF2-40B4-BE49-F238E27FC236}">
-                <a16:creationId xmlns:a16="http://schemas.microsoft.com/office/drawing/2014/main" id="{08C2AF86-A64C-49FE-A4FC-71FB65881D87}"/>
+                <a16:creationId xmlns:a16="http://schemas.microsoft.com/office/drawing/2014/main" id="{A3193122-31A9-4058-BFBA-E4C2C6CC968B}"/>
               </a:ext>
             </a:extLst>
           </p:cNvPr>
@@ -19451,7 +19451,7 @@
           <p:cNvPr id="2" name="">
             <a:extLst xmlns:a="http://schemas.openxmlformats.org/drawingml/2006/main">
               <a:ext uri="{FF2B5EF4-FFF2-40B4-BE49-F238E27FC236}">
-                <a16:creationId xmlns:a16="http://schemas.microsoft.com/office/drawing/2014/main" id="{21A78413-55B8-44CB-84E6-0674D2F4E751}"/>
+                <a16:creationId xmlns:a16="http://schemas.microsoft.com/office/drawing/2014/main" id="{D342F9DD-08F3-4723-B539-3177B4F02A2D}"/>
               </a:ext>
             </a:extLst>
           </p:cNvPr>
@@ -19484,7 +19484,7 @@
           <p:cNvPr id="3" name="">
             <a:extLst xmlns:a="http://schemas.openxmlformats.org/drawingml/2006/main">
               <a:ext uri="{FF2B5EF4-FFF2-40B4-BE49-F238E27FC236}">
-                <a16:creationId xmlns:a16="http://schemas.microsoft.com/office/drawing/2014/main" id="{CAA87B63-A1DC-4518-A862-05541E39D073}"/>
+                <a16:creationId xmlns:a16="http://schemas.microsoft.com/office/drawing/2014/main" id="{1F11B3FC-74FF-44FC-BAAF-CBB4B0123ACA}"/>
               </a:ext>
             </a:extLst>
           </p:cNvPr>
@@ -19548,7 +19548,7 @@
           <p:cNvPr id="4" name="">
             <a:extLst xmlns:a="http://schemas.openxmlformats.org/drawingml/2006/main">
               <a:ext uri="{FF2B5EF4-FFF2-40B4-BE49-F238E27FC236}">
-                <a16:creationId xmlns:a16="http://schemas.microsoft.com/office/drawing/2014/main" id="{EF861F4E-522B-45DD-AD13-F01784D41A79}"/>
+                <a16:creationId xmlns:a16="http://schemas.microsoft.com/office/drawing/2014/main" id="{11DB6CBA-0538-41F5-B78B-C47FC52F2241}"/>
               </a:ext>
             </a:extLst>
           </p:cNvPr>
@@ -19612,7 +19612,7 @@
           <p:cNvPr id="5" name="">
             <a:extLst xmlns:a="http://schemas.openxmlformats.org/drawingml/2006/main">
               <a:ext uri="{FF2B5EF4-FFF2-40B4-BE49-F238E27FC236}">
-                <a16:creationId xmlns:a16="http://schemas.microsoft.com/office/drawing/2014/main" id="{906F2E02-7B97-4CC3-AB95-40C3266C6EEC}"/>
+                <a16:creationId xmlns:a16="http://schemas.microsoft.com/office/drawing/2014/main" id="{6BEFF32C-2D8B-4503-BF70-914FB1933799}"/>
               </a:ext>
             </a:extLst>
           </p:cNvPr>
@@ -19676,7 +19676,7 @@
           <p:cNvPr id="6" name="">
             <a:extLst xmlns:a="http://schemas.openxmlformats.org/drawingml/2006/main">
               <a:ext uri="{FF2B5EF4-FFF2-40B4-BE49-F238E27FC236}">
-                <a16:creationId xmlns:a16="http://schemas.microsoft.com/office/drawing/2014/main" id="{3FD501F0-4CC4-4220-A802-D945ED7D93C7}"/>
+                <a16:creationId xmlns:a16="http://schemas.microsoft.com/office/drawing/2014/main" id="{2A0C4596-4AE4-4BB1-987A-019CBF3535EB}"/>
               </a:ext>
             </a:extLst>
           </p:cNvPr>
@@ -19709,7 +19709,7 @@
           <p:cNvPr id="7" name="">
             <a:extLst xmlns:a="http://schemas.openxmlformats.org/drawingml/2006/main">
               <a:ext uri="{FF2B5EF4-FFF2-40B4-BE49-F238E27FC236}">
-                <a16:creationId xmlns:a16="http://schemas.microsoft.com/office/drawing/2014/main" id="{3069C013-856D-4171-8BCC-8C95CF60DC17}"/>
+                <a16:creationId xmlns:a16="http://schemas.microsoft.com/office/drawing/2014/main" id="{35A93B96-BAD2-4FB7-9926-255E91A1725D}"/>
               </a:ext>
             </a:extLst>
           </p:cNvPr>
@@ -19773,7 +19773,7 @@
           <p:cNvPr id="8" name="">
             <a:extLst xmlns:a="http://schemas.openxmlformats.org/drawingml/2006/main">
               <a:ext uri="{FF2B5EF4-FFF2-40B4-BE49-F238E27FC236}">
-                <a16:creationId xmlns:a16="http://schemas.microsoft.com/office/drawing/2014/main" id="{2A307E5B-3759-47E0-93DB-93132494A317}"/>
+                <a16:creationId xmlns:a16="http://schemas.microsoft.com/office/drawing/2014/main" id="{8D4017FD-4188-4CBE-A950-E0E1DCDAA088}"/>
               </a:ext>
             </a:extLst>
           </p:cNvPr>
@@ -19806,7 +19806,7 @@
           <p:cNvPr id="9" name="">
             <a:extLst xmlns:a="http://schemas.openxmlformats.org/drawingml/2006/main">
               <a:ext uri="{FF2B5EF4-FFF2-40B4-BE49-F238E27FC236}">
-                <a16:creationId xmlns:a16="http://schemas.microsoft.com/office/drawing/2014/main" id="{96ADE6B0-7735-4B2D-9359-930C1970EDB4}"/>
+                <a16:creationId xmlns:a16="http://schemas.microsoft.com/office/drawing/2014/main" id="{61BAC162-EBF5-4B99-8DB3-A273FD6F3614}"/>
               </a:ext>
             </a:extLst>
           </p:cNvPr>
@@ -19870,7 +19870,7 @@
           <p:cNvPr id="10" name="">
             <a:extLst xmlns:a="http://schemas.openxmlformats.org/drawingml/2006/main">
               <a:ext uri="{FF2B5EF4-FFF2-40B4-BE49-F238E27FC236}">
-                <a16:creationId xmlns:a16="http://schemas.microsoft.com/office/drawing/2014/main" id="{0C6B3CB0-E321-4F8F-84B0-E5DECDC0EF4D}"/>
+                <a16:creationId xmlns:a16="http://schemas.microsoft.com/office/drawing/2014/main" id="{0E6E93B9-8C57-429B-8AFF-0C53DCA17EFD}"/>
               </a:ext>
             </a:extLst>
           </p:cNvPr>
@@ -19903,7 +19903,7 @@
           <p:cNvPr id="11" name="">
             <a:extLst xmlns:a="http://schemas.openxmlformats.org/drawingml/2006/main">
               <a:ext uri="{FF2B5EF4-FFF2-40B4-BE49-F238E27FC236}">
-                <a16:creationId xmlns:a16="http://schemas.microsoft.com/office/drawing/2014/main" id="{EA3480BF-F651-435B-B7AE-1DB074648D16}"/>
+                <a16:creationId xmlns:a16="http://schemas.microsoft.com/office/drawing/2014/main" id="{1A717808-E911-4F2D-824C-C8435C85B318}"/>
               </a:ext>
             </a:extLst>
           </p:cNvPr>
@@ -19967,7 +19967,7 @@
           <p:cNvPr id="12" name="">
             <a:extLst xmlns:a="http://schemas.openxmlformats.org/drawingml/2006/main">
               <a:ext uri="{FF2B5EF4-FFF2-40B4-BE49-F238E27FC236}">
-                <a16:creationId xmlns:a16="http://schemas.microsoft.com/office/drawing/2014/main" id="{98738489-1DC5-4725-88D4-7B07B6286694}"/>
+                <a16:creationId xmlns:a16="http://schemas.microsoft.com/office/drawing/2014/main" id="{9540EBD6-0DA5-47C1-B8FF-D92A3C5269CF}"/>
               </a:ext>
             </a:extLst>
           </p:cNvPr>
@@ -20000,7 +20000,7 @@
           <p:cNvPr id="13" name="">
             <a:extLst xmlns:a="http://schemas.openxmlformats.org/drawingml/2006/main">
               <a:ext uri="{FF2B5EF4-FFF2-40B4-BE49-F238E27FC236}">
-                <a16:creationId xmlns:a16="http://schemas.microsoft.com/office/drawing/2014/main" id="{2630F98E-8EF3-4443-AA8B-551116331823}"/>
+                <a16:creationId xmlns:a16="http://schemas.microsoft.com/office/drawing/2014/main" id="{0C7D7CE5-68DB-4AE8-8DFD-4EB07668C499}"/>
               </a:ext>
             </a:extLst>
           </p:cNvPr>
@@ -20064,7 +20064,7 @@
           <p:cNvPr id="14" name="">
             <a:extLst xmlns:a="http://schemas.openxmlformats.org/drawingml/2006/main">
               <a:ext uri="{FF2B5EF4-FFF2-40B4-BE49-F238E27FC236}">
-                <a16:creationId xmlns:a16="http://schemas.microsoft.com/office/drawing/2014/main" id="{0FAEF79E-9A2D-455F-8B36-D7F0C56ACB60}"/>
+                <a16:creationId xmlns:a16="http://schemas.microsoft.com/office/drawing/2014/main" id="{969A77DC-39B9-47E5-88FA-444AC3B8DCB2}"/>
               </a:ext>
             </a:extLst>
           </p:cNvPr>
@@ -20097,7 +20097,7 @@
           <p:cNvPr id="15" name="">
             <a:extLst xmlns:a="http://schemas.openxmlformats.org/drawingml/2006/main">
               <a:ext uri="{FF2B5EF4-FFF2-40B4-BE49-F238E27FC236}">
-                <a16:creationId xmlns:a16="http://schemas.microsoft.com/office/drawing/2014/main" id="{204722C7-5FFB-4A31-8924-2E177A7335FE}"/>
+                <a16:creationId xmlns:a16="http://schemas.microsoft.com/office/drawing/2014/main" id="{9A185453-64E6-4BA4-8BC6-4FBB17368EB7}"/>
               </a:ext>
             </a:extLst>
           </p:cNvPr>
@@ -20161,7 +20161,7 @@
           <p:cNvPr id="16" name="">
             <a:extLst xmlns:a="http://schemas.openxmlformats.org/drawingml/2006/main">
               <a:ext uri="{FF2B5EF4-FFF2-40B4-BE49-F238E27FC236}">
-                <a16:creationId xmlns:a16="http://schemas.microsoft.com/office/drawing/2014/main" id="{D3332FF5-D612-4ECD-9903-5DBD1A5333B1}"/>
+                <a16:creationId xmlns:a16="http://schemas.microsoft.com/office/drawing/2014/main" id="{8A96EBAC-343B-4A71-91E2-F57DDE27A52D}"/>
               </a:ext>
             </a:extLst>
           </p:cNvPr>
@@ -20194,7 +20194,7 @@
           <p:cNvPr id="17" name="">
             <a:extLst xmlns:a="http://schemas.openxmlformats.org/drawingml/2006/main">
               <a:ext uri="{FF2B5EF4-FFF2-40B4-BE49-F238E27FC236}">
-                <a16:creationId xmlns:a16="http://schemas.microsoft.com/office/drawing/2014/main" id="{1AE0888E-B776-438B-880A-2DF7CC853076}"/>
+                <a16:creationId xmlns:a16="http://schemas.microsoft.com/office/drawing/2014/main" id="{D525BD17-E324-44DB-9433-27775E23D665}"/>
               </a:ext>
             </a:extLst>
           </p:cNvPr>
@@ -20258,7 +20258,7 @@
           <p:cNvPr id="18" name="">
             <a:extLst xmlns:a="http://schemas.openxmlformats.org/drawingml/2006/main">
               <a:ext uri="{FF2B5EF4-FFF2-40B4-BE49-F238E27FC236}">
-                <a16:creationId xmlns:a16="http://schemas.microsoft.com/office/drawing/2014/main" id="{E965F3E7-3D9C-4CD9-BEEA-574764106EB7}"/>
+                <a16:creationId xmlns:a16="http://schemas.microsoft.com/office/drawing/2014/main" id="{923E4775-928E-4C0E-93AA-C966B2026156}"/>
               </a:ext>
             </a:extLst>
           </p:cNvPr>
@@ -20291,7 +20291,7 @@
           <p:cNvPr id="19" name="">
             <a:extLst xmlns:a="http://schemas.openxmlformats.org/drawingml/2006/main">
               <a:ext uri="{FF2B5EF4-FFF2-40B4-BE49-F238E27FC236}">
-                <a16:creationId xmlns:a16="http://schemas.microsoft.com/office/drawing/2014/main" id="{022023DB-ED88-4A34-BC25-B36BAA4947D1}"/>
+                <a16:creationId xmlns:a16="http://schemas.microsoft.com/office/drawing/2014/main" id="{29494F66-23EF-4F24-AF0B-F48B61B43DCE}"/>
               </a:ext>
             </a:extLst>
           </p:cNvPr>
@@ -20355,7 +20355,7 @@
           <p:cNvPr id="20" name="">
             <a:extLst xmlns:a="http://schemas.openxmlformats.org/drawingml/2006/main">
               <a:ext uri="{FF2B5EF4-FFF2-40B4-BE49-F238E27FC236}">
-                <a16:creationId xmlns:a16="http://schemas.microsoft.com/office/drawing/2014/main" id="{1DF5CA3D-493E-4A53-ACFB-B7C8C5DEED73}"/>
+                <a16:creationId xmlns:a16="http://schemas.microsoft.com/office/drawing/2014/main" id="{115096BF-2C7F-4665-BA9D-0A95EF8F11E7}"/>
               </a:ext>
             </a:extLst>
           </p:cNvPr>
@@ -20388,7 +20388,7 @@
           <p:cNvPr id="21" name="">
             <a:extLst xmlns:a="http://schemas.openxmlformats.org/drawingml/2006/main">
               <a:ext uri="{FF2B5EF4-FFF2-40B4-BE49-F238E27FC236}">
-                <a16:creationId xmlns:a16="http://schemas.microsoft.com/office/drawing/2014/main" id="{8905A80F-561D-41D0-9235-C86BBAADB531}"/>
+                <a16:creationId xmlns:a16="http://schemas.microsoft.com/office/drawing/2014/main" id="{888271ED-937A-4A74-BF9C-661CD287C669}"/>
               </a:ext>
             </a:extLst>
           </p:cNvPr>
@@ -20452,7 +20452,7 @@
           <p:cNvPr id="22" name="">
             <a:extLst xmlns:a="http://schemas.openxmlformats.org/drawingml/2006/main">
               <a:ext uri="{FF2B5EF4-FFF2-40B4-BE49-F238E27FC236}">
-                <a16:creationId xmlns:a16="http://schemas.microsoft.com/office/drawing/2014/main" id="{FB220979-7DAD-4CF6-A879-A6C17F1BC67C}"/>
+                <a16:creationId xmlns:a16="http://schemas.microsoft.com/office/drawing/2014/main" id="{6DF98DAD-8726-4F7A-883C-DD89D41ABBCE}"/>
               </a:ext>
             </a:extLst>
           </p:cNvPr>
@@ -20485,7 +20485,7 @@
           <p:cNvPr id="23" name="">
             <a:extLst xmlns:a="http://schemas.openxmlformats.org/drawingml/2006/main">
               <a:ext uri="{FF2B5EF4-FFF2-40B4-BE49-F238E27FC236}">
-                <a16:creationId xmlns:a16="http://schemas.microsoft.com/office/drawing/2014/main" id="{1181BDB3-4721-43AE-9A7A-4B81C995B11E}"/>
+                <a16:creationId xmlns:a16="http://schemas.microsoft.com/office/drawing/2014/main" id="{47F6E050-5BDA-411E-AD6C-12A4F25401A4}"/>
               </a:ext>
             </a:extLst>
           </p:cNvPr>
@@ -20549,7 +20549,7 @@
           <p:cNvPr id="24" name="">
             <a:extLst xmlns:a="http://schemas.openxmlformats.org/drawingml/2006/main">
               <a:ext uri="{FF2B5EF4-FFF2-40B4-BE49-F238E27FC236}">
-                <a16:creationId xmlns:a16="http://schemas.microsoft.com/office/drawing/2014/main" id="{DA06C74F-DD91-4D9D-B373-49E22D497DC8}"/>
+                <a16:creationId xmlns:a16="http://schemas.microsoft.com/office/drawing/2014/main" id="{C97663D2-AB2C-4A94-B7F3-EAA6A4B95E64}"/>
               </a:ext>
             </a:extLst>
           </p:cNvPr>
@@ -20582,7 +20582,7 @@
           <p:cNvPr id="25" name="">
             <a:extLst xmlns:a="http://schemas.openxmlformats.org/drawingml/2006/main">
               <a:ext uri="{FF2B5EF4-FFF2-40B4-BE49-F238E27FC236}">
-                <a16:creationId xmlns:a16="http://schemas.microsoft.com/office/drawing/2014/main" id="{F120C1C9-2534-45DA-A015-1D6027B8A06B}"/>
+                <a16:creationId xmlns:a16="http://schemas.microsoft.com/office/drawing/2014/main" id="{B1D080F1-EBAE-40AA-B170-82B8D659B26B}"/>
               </a:ext>
             </a:extLst>
           </p:cNvPr>
@@ -20646,7 +20646,7 @@
           <p:cNvPr id="26" name="">
             <a:extLst xmlns:a="http://schemas.openxmlformats.org/drawingml/2006/main">
               <a:ext uri="{FF2B5EF4-FFF2-40B4-BE49-F238E27FC236}">
-                <a16:creationId xmlns:a16="http://schemas.microsoft.com/office/drawing/2014/main" id="{49E11641-0816-4282-A7D9-C82DE5ABEAB6}"/>
+                <a16:creationId xmlns:a16="http://schemas.microsoft.com/office/drawing/2014/main" id="{E4ACDC4E-8D49-402C-AAF1-374E120723FE}"/>
               </a:ext>
             </a:extLst>
           </p:cNvPr>
@@ -20679,7 +20679,7 @@
           <p:cNvPr id="27" name="">
             <a:extLst xmlns:a="http://schemas.openxmlformats.org/drawingml/2006/main">
               <a:ext uri="{FF2B5EF4-FFF2-40B4-BE49-F238E27FC236}">
-                <a16:creationId xmlns:a16="http://schemas.microsoft.com/office/drawing/2014/main" id="{B4D23432-B242-4DCF-AC1D-46F713ECFDA0}"/>
+                <a16:creationId xmlns:a16="http://schemas.microsoft.com/office/drawing/2014/main" id="{288C4F45-99E5-47DE-B9F4-5FB5DBFD4DE4}"/>
               </a:ext>
             </a:extLst>
           </p:cNvPr>
@@ -20743,7 +20743,7 @@
           <p:cNvPr id="28" name="">
             <a:extLst xmlns:a="http://schemas.openxmlformats.org/drawingml/2006/main">
               <a:ext uri="{FF2B5EF4-FFF2-40B4-BE49-F238E27FC236}">
-                <a16:creationId xmlns:a16="http://schemas.microsoft.com/office/drawing/2014/main" id="{ED805B99-A790-4924-80CB-F88135E3D703}"/>
+                <a16:creationId xmlns:a16="http://schemas.microsoft.com/office/drawing/2014/main" id="{906673FE-8117-49F7-8861-35EDD6026F6D}"/>
               </a:ext>
             </a:extLst>
           </p:cNvPr>
@@ -20776,7 +20776,7 @@
           <p:cNvPr id="29" name="">
             <a:extLst xmlns:a="http://schemas.openxmlformats.org/drawingml/2006/main">
               <a:ext uri="{FF2B5EF4-FFF2-40B4-BE49-F238E27FC236}">
-                <a16:creationId xmlns:a16="http://schemas.microsoft.com/office/drawing/2014/main" id="{541558A6-1738-4212-A971-68F967BF2959}"/>
+                <a16:creationId xmlns:a16="http://schemas.microsoft.com/office/drawing/2014/main" id="{9676AC23-E143-48D5-B0E8-62C675EA9B07}"/>
               </a:ext>
             </a:extLst>
           </p:cNvPr>
@@ -20840,7 +20840,7 @@
           <p:cNvPr id="30" name="">
             <a:extLst xmlns:a="http://schemas.openxmlformats.org/drawingml/2006/main">
               <a:ext uri="{FF2B5EF4-FFF2-40B4-BE49-F238E27FC236}">
-                <a16:creationId xmlns:a16="http://schemas.microsoft.com/office/drawing/2014/main" id="{938298F7-A043-4E75-97A9-950CD06C881C}"/>
+                <a16:creationId xmlns:a16="http://schemas.microsoft.com/office/drawing/2014/main" id="{261252C2-F0AF-4638-9AD9-AA85BE89B70A}"/>
               </a:ext>
             </a:extLst>
           </p:cNvPr>
@@ -20873,7 +20873,7 @@
           <p:cNvPr id="31" name="">
             <a:extLst xmlns:a="http://schemas.openxmlformats.org/drawingml/2006/main">
               <a:ext uri="{FF2B5EF4-FFF2-40B4-BE49-F238E27FC236}">
-                <a16:creationId xmlns:a16="http://schemas.microsoft.com/office/drawing/2014/main" id="{D5ADA50C-3541-419E-A48C-C38361FC8B0D}"/>
+                <a16:creationId xmlns:a16="http://schemas.microsoft.com/office/drawing/2014/main" id="{8D74AFF4-8A9B-41D0-8BCC-2163BB3F8654}"/>
               </a:ext>
             </a:extLst>
           </p:cNvPr>
@@ -20937,7 +20937,7 @@
           <p:cNvPr id="32" name="">
             <a:extLst xmlns:a="http://schemas.openxmlformats.org/drawingml/2006/main">
               <a:ext uri="{FF2B5EF4-FFF2-40B4-BE49-F238E27FC236}">
-                <a16:creationId xmlns:a16="http://schemas.microsoft.com/office/drawing/2014/main" id="{DB7289B8-E377-4998-8C7E-F4352DA587FF}"/>
+                <a16:creationId xmlns:a16="http://schemas.microsoft.com/office/drawing/2014/main" id="{1FEB8654-0518-4CB3-AB19-4BA3C2C1413B}"/>
               </a:ext>
             </a:extLst>
           </p:cNvPr>
@@ -20970,7 +20970,7 @@
           <p:cNvPr id="33" name="">
             <a:extLst xmlns:a="http://schemas.openxmlformats.org/drawingml/2006/main">
               <a:ext uri="{FF2B5EF4-FFF2-40B4-BE49-F238E27FC236}">
-                <a16:creationId xmlns:a16="http://schemas.microsoft.com/office/drawing/2014/main" id="{EE605DD4-5503-412B-A4FF-929534B9A6B6}"/>
+                <a16:creationId xmlns:a16="http://schemas.microsoft.com/office/drawing/2014/main" id="{00EAAF65-8640-4E60-BE6E-5EED41A3281A}"/>
               </a:ext>
             </a:extLst>
           </p:cNvPr>
@@ -21034,7 +21034,7 @@
           <p:cNvPr id="34" name="">
             <a:extLst xmlns:a="http://schemas.openxmlformats.org/drawingml/2006/main">
               <a:ext uri="{FF2B5EF4-FFF2-40B4-BE49-F238E27FC236}">
-                <a16:creationId xmlns:a16="http://schemas.microsoft.com/office/drawing/2014/main" id="{BB8FD4CF-D97A-4BA8-8982-1C4591923703}"/>
+                <a16:creationId xmlns:a16="http://schemas.microsoft.com/office/drawing/2014/main" id="{FB797D39-4B54-4C68-AE9A-7EE416C5FC50}"/>
               </a:ext>
             </a:extLst>
           </p:cNvPr>
@@ -21067,7 +21067,7 @@
           <p:cNvPr id="35" name="">
             <a:extLst xmlns:a="http://schemas.openxmlformats.org/drawingml/2006/main">
               <a:ext uri="{FF2B5EF4-FFF2-40B4-BE49-F238E27FC236}">
-                <a16:creationId xmlns:a16="http://schemas.microsoft.com/office/drawing/2014/main" id="{D3AF544A-D1BA-4076-9367-CF3875442254}"/>
+                <a16:creationId xmlns:a16="http://schemas.microsoft.com/office/drawing/2014/main" id="{6CC57223-1E85-4191-9925-7A42561CF899}"/>
               </a:ext>
             </a:extLst>
           </p:cNvPr>
@@ -21131,7 +21131,7 @@
           <p:cNvPr id="36" name="">
             <a:extLst xmlns:a="http://schemas.openxmlformats.org/drawingml/2006/main">
               <a:ext uri="{FF2B5EF4-FFF2-40B4-BE49-F238E27FC236}">
-                <a16:creationId xmlns:a16="http://schemas.microsoft.com/office/drawing/2014/main" id="{8DEEB3BF-4CC4-4BAF-932A-7C5DAFFF4E09}"/>
+                <a16:creationId xmlns:a16="http://schemas.microsoft.com/office/drawing/2014/main" id="{F495F9E1-8526-4629-B664-FFCB1FCC76D0}"/>
               </a:ext>
             </a:extLst>
           </p:cNvPr>
@@ -21195,7 +21195,7 @@
           <p:cNvPr id="37" name="">
             <a:extLst xmlns:a="http://schemas.openxmlformats.org/drawingml/2006/main">
               <a:ext uri="{FF2B5EF4-FFF2-40B4-BE49-F238E27FC236}">
-                <a16:creationId xmlns:a16="http://schemas.microsoft.com/office/drawing/2014/main" id="{F05A68F1-B518-48DF-BE0F-1DB6CAA6F4A3}"/>
+                <a16:creationId xmlns:a16="http://schemas.microsoft.com/office/drawing/2014/main" id="{FC862649-88CF-4AED-B75B-FFDC4084A35F}"/>
               </a:ext>
             </a:extLst>
           </p:cNvPr>
@@ -21257,7 +21257,7 @@
     </p:spTree>
     <p:extLst>
       <p:ext uri="{BB962C8B-B14F-4D97-AF65-F5344CB8AC3E}">
-        <p14:creationId xmlns:p14="http://schemas.microsoft.com/office/powerpoint/2010/main" val="712180695"/>
+        <p14:creationId xmlns:p14="http://schemas.microsoft.com/office/powerpoint/2010/main" val="37698586"/>
       </p:ext>
     </p:extLst>
   </p:cSld>
@@ -21281,7 +21281,7 @@
           <p:cNvPr id="1" name="">
             <a:extLst xmlns:a="http://schemas.openxmlformats.org/drawingml/2006/main">
               <a:ext uri="{FF2B5EF4-FFF2-40B4-BE49-F238E27FC236}">
-                <a16:creationId xmlns:a16="http://schemas.microsoft.com/office/drawing/2014/main" id="{6A7C0E27-6CFA-4D0E-A9B1-1E5CFFDC3608}"/>
+                <a16:creationId xmlns:a16="http://schemas.microsoft.com/office/drawing/2014/main" id="{57E1781A-806D-439A-B025-12BB23CEBE9F}"/>
               </a:ext>
             </a:extLst>
           </p:cNvPr>
@@ -21314,7 +21314,7 @@
           <p:cNvPr id="2" name="">
             <a:extLst xmlns:a="http://schemas.openxmlformats.org/drawingml/2006/main">
               <a:ext uri="{FF2B5EF4-FFF2-40B4-BE49-F238E27FC236}">
-                <a16:creationId xmlns:a16="http://schemas.microsoft.com/office/drawing/2014/main" id="{11C334A0-6DC4-4173-9F50-170F6598D7DF}"/>
+                <a16:creationId xmlns:a16="http://schemas.microsoft.com/office/drawing/2014/main" id="{D52517B5-32D6-4FB0-950A-1F5196BF47A2}"/>
               </a:ext>
             </a:extLst>
           </p:cNvPr>
@@ -21347,7 +21347,7 @@
           <p:cNvPr id="3" name="">
             <a:extLst xmlns:a="http://schemas.openxmlformats.org/drawingml/2006/main">
               <a:ext uri="{FF2B5EF4-FFF2-40B4-BE49-F238E27FC236}">
-                <a16:creationId xmlns:a16="http://schemas.microsoft.com/office/drawing/2014/main" id="{E698BF92-BC3D-43B6-95AB-5ACE2BAE410E}"/>
+                <a16:creationId xmlns:a16="http://schemas.microsoft.com/office/drawing/2014/main" id="{9B3590D3-916F-41D5-B46A-405DA4FDBFB1}"/>
               </a:ext>
             </a:extLst>
           </p:cNvPr>
@@ -21411,7 +21411,7 @@
           <p:cNvPr id="4" name="">
             <a:extLst xmlns:a="http://schemas.openxmlformats.org/drawingml/2006/main">
               <a:ext uri="{FF2B5EF4-FFF2-40B4-BE49-F238E27FC236}">
-                <a16:creationId xmlns:a16="http://schemas.microsoft.com/office/drawing/2014/main" id="{FA027BD5-BD10-4DBD-B890-4AFBE49A3E59}"/>
+                <a16:creationId xmlns:a16="http://schemas.microsoft.com/office/drawing/2014/main" id="{5B79EE9F-1F5F-410D-A890-0F0020278BBC}"/>
               </a:ext>
             </a:extLst>
           </p:cNvPr>
@@ -21475,7 +21475,7 @@
           <p:cNvPr id="5" name="">
             <a:extLst xmlns:a="http://schemas.openxmlformats.org/drawingml/2006/main">
               <a:ext uri="{FF2B5EF4-FFF2-40B4-BE49-F238E27FC236}">
-                <a16:creationId xmlns:a16="http://schemas.microsoft.com/office/drawing/2014/main" id="{B956BCCF-5245-4F52-A8AA-C1EA65AE7ECF}"/>
+                <a16:creationId xmlns:a16="http://schemas.microsoft.com/office/drawing/2014/main" id="{75E8E3A4-9010-44B8-9617-CA5D23BD7E60}"/>
               </a:ext>
             </a:extLst>
           </p:cNvPr>
@@ -21539,7 +21539,7 @@
           <p:cNvPr id="6" name="">
             <a:extLst xmlns:a="http://schemas.openxmlformats.org/drawingml/2006/main">
               <a:ext uri="{FF2B5EF4-FFF2-40B4-BE49-F238E27FC236}">
-                <a16:creationId xmlns:a16="http://schemas.microsoft.com/office/drawing/2014/main" id="{B0E09B28-428C-4E21-BDAC-D44DEA56AAD1}"/>
+                <a16:creationId xmlns:a16="http://schemas.microsoft.com/office/drawing/2014/main" id="{F267ECC8-EEF1-4642-8B2C-E5510741E5B3}"/>
               </a:ext>
             </a:extLst>
           </p:cNvPr>
@@ -21603,7 +21603,7 @@
           <p:cNvPr id="7" name="">
             <a:extLst xmlns:a="http://schemas.openxmlformats.org/drawingml/2006/main">
               <a:ext uri="{FF2B5EF4-FFF2-40B4-BE49-F238E27FC236}">
-                <a16:creationId xmlns:a16="http://schemas.microsoft.com/office/drawing/2014/main" id="{2F94B400-CAFF-41B3-98C5-6E78973004BF}"/>
+                <a16:creationId xmlns:a16="http://schemas.microsoft.com/office/drawing/2014/main" id="{80C9F78B-7D3F-4B38-BFBB-021A3C502F57}"/>
               </a:ext>
             </a:extLst>
           </p:cNvPr>
@@ -21636,7 +21636,7 @@
           <p:cNvPr id="8" name="">
             <a:extLst xmlns:a="http://schemas.openxmlformats.org/drawingml/2006/main">
               <a:ext uri="{FF2B5EF4-FFF2-40B4-BE49-F238E27FC236}">
-                <a16:creationId xmlns:a16="http://schemas.microsoft.com/office/drawing/2014/main" id="{6DB04815-C1F9-4151-8A6E-958776A7FE9E}"/>
+                <a16:creationId xmlns:a16="http://schemas.microsoft.com/office/drawing/2014/main" id="{3DC96038-4EDB-4587-A3D0-6D5027F1C1D6}"/>
               </a:ext>
             </a:extLst>
           </p:cNvPr>
@@ -21669,7 +21669,7 @@
           <p:cNvPr id="9" name="">
             <a:extLst xmlns:a="http://schemas.openxmlformats.org/drawingml/2006/main">
               <a:ext uri="{FF2B5EF4-FFF2-40B4-BE49-F238E27FC236}">
-                <a16:creationId xmlns:a16="http://schemas.microsoft.com/office/drawing/2014/main" id="{3B9FF826-4849-47F4-AE35-53079CA70258}"/>
+                <a16:creationId xmlns:a16="http://schemas.microsoft.com/office/drawing/2014/main" id="{6F6ADFE8-C68B-4F46-AC54-AB0F4EBCB977}"/>
               </a:ext>
             </a:extLst>
           </p:cNvPr>
@@ -21733,7 +21733,7 @@
           <p:cNvPr id="10" name="">
             <a:extLst xmlns:a="http://schemas.openxmlformats.org/drawingml/2006/main">
               <a:ext uri="{FF2B5EF4-FFF2-40B4-BE49-F238E27FC236}">
-                <a16:creationId xmlns:a16="http://schemas.microsoft.com/office/drawing/2014/main" id="{8E4592AE-48DB-4146-990A-50E242BA5AB6}"/>
+                <a16:creationId xmlns:a16="http://schemas.microsoft.com/office/drawing/2014/main" id="{49132E5E-044D-450D-BE4E-28B8EF33B57B}"/>
               </a:ext>
             </a:extLst>
           </p:cNvPr>
@@ -21797,7 +21797,7 @@
           <p:cNvPr id="11" name="">
             <a:extLst xmlns:a="http://schemas.openxmlformats.org/drawingml/2006/main">
               <a:ext uri="{FF2B5EF4-FFF2-40B4-BE49-F238E27FC236}">
-                <a16:creationId xmlns:a16="http://schemas.microsoft.com/office/drawing/2014/main" id="{C68CD6B2-E76E-4BA8-A9BA-4C6267C26E05}"/>
+                <a16:creationId xmlns:a16="http://schemas.microsoft.com/office/drawing/2014/main" id="{AA210DD4-6C4C-4C67-8695-F19505E66CFD}"/>
               </a:ext>
             </a:extLst>
           </p:cNvPr>
@@ -21861,7 +21861,7 @@
           <p:cNvPr id="12" name="">
             <a:extLst xmlns:a="http://schemas.openxmlformats.org/drawingml/2006/main">
               <a:ext uri="{FF2B5EF4-FFF2-40B4-BE49-F238E27FC236}">
-                <a16:creationId xmlns:a16="http://schemas.microsoft.com/office/drawing/2014/main" id="{AA9E44F4-6CD4-4528-A247-9993100E3E9A}"/>
+                <a16:creationId xmlns:a16="http://schemas.microsoft.com/office/drawing/2014/main" id="{C1F3DBF6-A1B2-43F3-B7DF-E5B63D62451B}"/>
               </a:ext>
             </a:extLst>
           </p:cNvPr>
@@ -21894,7 +21894,7 @@
           <p:cNvPr id="13" name="">
             <a:extLst xmlns:a="http://schemas.openxmlformats.org/drawingml/2006/main">
               <a:ext uri="{FF2B5EF4-FFF2-40B4-BE49-F238E27FC236}">
-                <a16:creationId xmlns:a16="http://schemas.microsoft.com/office/drawing/2014/main" id="{826A5126-5141-4DDD-A062-616E745AB9C2}"/>
+                <a16:creationId xmlns:a16="http://schemas.microsoft.com/office/drawing/2014/main" id="{65E91EBE-23C7-450F-83DA-846D2BE1B1DD}"/>
               </a:ext>
             </a:extLst>
           </p:cNvPr>
@@ -21927,7 +21927,7 @@
           <p:cNvPr id="14" name="">
             <a:extLst xmlns:a="http://schemas.openxmlformats.org/drawingml/2006/main">
               <a:ext uri="{FF2B5EF4-FFF2-40B4-BE49-F238E27FC236}">
-                <a16:creationId xmlns:a16="http://schemas.microsoft.com/office/drawing/2014/main" id="{F632D978-0B0E-420A-9C98-1BB4DB2E1759}"/>
+                <a16:creationId xmlns:a16="http://schemas.microsoft.com/office/drawing/2014/main" id="{9A30D237-737A-407A-A569-CF4C01E79D23}"/>
               </a:ext>
             </a:extLst>
           </p:cNvPr>
@@ -21991,7 +21991,7 @@
           <p:cNvPr id="15" name="">
             <a:extLst xmlns:a="http://schemas.openxmlformats.org/drawingml/2006/main">
               <a:ext uri="{FF2B5EF4-FFF2-40B4-BE49-F238E27FC236}">
-                <a16:creationId xmlns:a16="http://schemas.microsoft.com/office/drawing/2014/main" id="{692FE72C-3FA9-47D0-8E34-2A050D70D1FD}"/>
+                <a16:creationId xmlns:a16="http://schemas.microsoft.com/office/drawing/2014/main" id="{DA3FB6F2-110C-4072-93FB-3FAB247A7F6A}"/>
               </a:ext>
             </a:extLst>
           </p:cNvPr>
@@ -22055,7 +22055,7 @@
           <p:cNvPr id="16" name="">
             <a:extLst xmlns:a="http://schemas.openxmlformats.org/drawingml/2006/main">
               <a:ext uri="{FF2B5EF4-FFF2-40B4-BE49-F238E27FC236}">
-                <a16:creationId xmlns:a16="http://schemas.microsoft.com/office/drawing/2014/main" id="{C0F238C4-B11C-455A-AAC4-E0A275A20335}"/>
+                <a16:creationId xmlns:a16="http://schemas.microsoft.com/office/drawing/2014/main" id="{20712B85-3CA6-4B8B-A913-860265F351A6}"/>
               </a:ext>
             </a:extLst>
           </p:cNvPr>
@@ -22119,7 +22119,7 @@
           <p:cNvPr id="17" name="">
             <a:extLst xmlns:a="http://schemas.openxmlformats.org/drawingml/2006/main">
               <a:ext uri="{FF2B5EF4-FFF2-40B4-BE49-F238E27FC236}">
-                <a16:creationId xmlns:a16="http://schemas.microsoft.com/office/drawing/2014/main" id="{C5CA6624-CAAB-4EC0-AC09-35E5DEC355B0}"/>
+                <a16:creationId xmlns:a16="http://schemas.microsoft.com/office/drawing/2014/main" id="{41797B81-FA7D-4CDD-BE3E-754148CBEB13}"/>
               </a:ext>
             </a:extLst>
           </p:cNvPr>
@@ -22152,7 +22152,7 @@
           <p:cNvPr id="18" name="">
             <a:extLst xmlns:a="http://schemas.openxmlformats.org/drawingml/2006/main">
               <a:ext uri="{FF2B5EF4-FFF2-40B4-BE49-F238E27FC236}">
-                <a16:creationId xmlns:a16="http://schemas.microsoft.com/office/drawing/2014/main" id="{133C1432-937B-42D9-9E5C-F195145243F7}"/>
+                <a16:creationId xmlns:a16="http://schemas.microsoft.com/office/drawing/2014/main" id="{2F5EB76A-506C-4829-B21E-CEBF300CE346}"/>
               </a:ext>
             </a:extLst>
           </p:cNvPr>
@@ -22185,7 +22185,7 @@
           <p:cNvPr id="19" name="">
             <a:extLst xmlns:a="http://schemas.openxmlformats.org/drawingml/2006/main">
               <a:ext uri="{FF2B5EF4-FFF2-40B4-BE49-F238E27FC236}">
-                <a16:creationId xmlns:a16="http://schemas.microsoft.com/office/drawing/2014/main" id="{A976C635-03B4-4E32-9C11-2FD2AC7F3A1C}"/>
+                <a16:creationId xmlns:a16="http://schemas.microsoft.com/office/drawing/2014/main" id="{42A3C3C4-FFDA-4BEF-8AFA-F6CCD6A8BCE0}"/>
               </a:ext>
             </a:extLst>
           </p:cNvPr>
@@ -22249,7 +22249,7 @@
           <p:cNvPr id="20" name="">
             <a:extLst xmlns:a="http://schemas.openxmlformats.org/drawingml/2006/main">
               <a:ext uri="{FF2B5EF4-FFF2-40B4-BE49-F238E27FC236}">
-                <a16:creationId xmlns:a16="http://schemas.microsoft.com/office/drawing/2014/main" id="{C024A7E4-8D22-47BD-B76A-680168FAE270}"/>
+                <a16:creationId xmlns:a16="http://schemas.microsoft.com/office/drawing/2014/main" id="{CFE2EAD4-121E-4F3B-A540-C1780917D7C3}"/>
               </a:ext>
             </a:extLst>
           </p:cNvPr>
@@ -22313,7 +22313,7 @@
           <p:cNvPr id="21" name="">
             <a:extLst xmlns:a="http://schemas.openxmlformats.org/drawingml/2006/main">
               <a:ext uri="{FF2B5EF4-FFF2-40B4-BE49-F238E27FC236}">
-                <a16:creationId xmlns:a16="http://schemas.microsoft.com/office/drawing/2014/main" id="{D200A801-8C1F-4188-939F-C0599CE35702}"/>
+                <a16:creationId xmlns:a16="http://schemas.microsoft.com/office/drawing/2014/main" id="{ED15E36F-E462-4F9B-8073-D30CD65EAE47}"/>
               </a:ext>
             </a:extLst>
           </p:cNvPr>
@@ -22377,7 +22377,7 @@
           <p:cNvPr id="22" name="">
             <a:extLst xmlns:a="http://schemas.openxmlformats.org/drawingml/2006/main">
               <a:ext uri="{FF2B5EF4-FFF2-40B4-BE49-F238E27FC236}">
-                <a16:creationId xmlns:a16="http://schemas.microsoft.com/office/drawing/2014/main" id="{E9F94835-EE63-4345-8442-D1AC9DA64A82}"/>
+                <a16:creationId xmlns:a16="http://schemas.microsoft.com/office/drawing/2014/main" id="{0021A5B7-5193-4928-AD80-AD884CDD6A67}"/>
               </a:ext>
             </a:extLst>
           </p:cNvPr>
@@ -22410,7 +22410,7 @@
           <p:cNvPr id="23" name="">
             <a:extLst xmlns:a="http://schemas.openxmlformats.org/drawingml/2006/main">
               <a:ext uri="{FF2B5EF4-FFF2-40B4-BE49-F238E27FC236}">
-                <a16:creationId xmlns:a16="http://schemas.microsoft.com/office/drawing/2014/main" id="{2150B25D-E54B-4EE6-9F52-59E43A710BE1}"/>
+                <a16:creationId xmlns:a16="http://schemas.microsoft.com/office/drawing/2014/main" id="{8005299D-71D1-470D-8667-2333519190C0}"/>
               </a:ext>
             </a:extLst>
           </p:cNvPr>
@@ -22443,7 +22443,7 @@
           <p:cNvPr id="24" name="">
             <a:extLst xmlns:a="http://schemas.openxmlformats.org/drawingml/2006/main">
               <a:ext uri="{FF2B5EF4-FFF2-40B4-BE49-F238E27FC236}">
-                <a16:creationId xmlns:a16="http://schemas.microsoft.com/office/drawing/2014/main" id="{835A10CF-66C6-4620-844B-D746D71B28A6}"/>
+                <a16:creationId xmlns:a16="http://schemas.microsoft.com/office/drawing/2014/main" id="{E9E3ACF0-F875-430E-B39E-F7B05A5CE240}"/>
               </a:ext>
             </a:extLst>
           </p:cNvPr>
@@ -22507,7 +22507,7 @@
           <p:cNvPr id="25" name="">
             <a:extLst xmlns:a="http://schemas.openxmlformats.org/drawingml/2006/main">
               <a:ext uri="{FF2B5EF4-FFF2-40B4-BE49-F238E27FC236}">
-                <a16:creationId xmlns:a16="http://schemas.microsoft.com/office/drawing/2014/main" id="{A6A6D51A-F6CE-4D3E-830A-1CB9E1CC46FB}"/>
+                <a16:creationId xmlns:a16="http://schemas.microsoft.com/office/drawing/2014/main" id="{908728F6-2A42-4E75-83A6-CEBE5C20BE64}"/>
               </a:ext>
             </a:extLst>
           </p:cNvPr>
@@ -22571,7 +22571,7 @@
           <p:cNvPr id="26" name="">
             <a:extLst xmlns:a="http://schemas.openxmlformats.org/drawingml/2006/main">
               <a:ext uri="{FF2B5EF4-FFF2-40B4-BE49-F238E27FC236}">
-                <a16:creationId xmlns:a16="http://schemas.microsoft.com/office/drawing/2014/main" id="{2D9F5EB5-E1DE-4F10-949A-861897106B0C}"/>
+                <a16:creationId xmlns:a16="http://schemas.microsoft.com/office/drawing/2014/main" id="{1FAE6401-B02D-4F4F-910B-90CF711DC293}"/>
               </a:ext>
             </a:extLst>
           </p:cNvPr>
@@ -22635,7 +22635,7 @@
           <p:cNvPr id="27" name="">
             <a:extLst xmlns:a="http://schemas.openxmlformats.org/drawingml/2006/main">
               <a:ext uri="{FF2B5EF4-FFF2-40B4-BE49-F238E27FC236}">
-                <a16:creationId xmlns:a16="http://schemas.microsoft.com/office/drawing/2014/main" id="{3887BA97-A4E4-4EED-A195-9968FB71559B}"/>
+                <a16:creationId xmlns:a16="http://schemas.microsoft.com/office/drawing/2014/main" id="{6BA33B3F-8957-4A08-AF4F-FD4B40B48AD7}"/>
               </a:ext>
             </a:extLst>
           </p:cNvPr>
@@ -22668,7 +22668,7 @@
           <p:cNvPr id="28" name="">
             <a:extLst xmlns:a="http://schemas.openxmlformats.org/drawingml/2006/main">
               <a:ext uri="{FF2B5EF4-FFF2-40B4-BE49-F238E27FC236}">
-                <a16:creationId xmlns:a16="http://schemas.microsoft.com/office/drawing/2014/main" id="{45C2B72E-50FF-4729-B2B0-E8B29CA51408}"/>
+                <a16:creationId xmlns:a16="http://schemas.microsoft.com/office/drawing/2014/main" id="{D6C768F3-1408-4D28-B83D-5BB6A9A1C961}"/>
               </a:ext>
             </a:extLst>
           </p:cNvPr>
@@ -22701,7 +22701,7 @@
           <p:cNvPr id="29" name="">
             <a:extLst xmlns:a="http://schemas.openxmlformats.org/drawingml/2006/main">
               <a:ext uri="{FF2B5EF4-FFF2-40B4-BE49-F238E27FC236}">
-                <a16:creationId xmlns:a16="http://schemas.microsoft.com/office/drawing/2014/main" id="{C55C2EEA-C9AD-4BC1-99C3-FFF1E81E2075}"/>
+                <a16:creationId xmlns:a16="http://schemas.microsoft.com/office/drawing/2014/main" id="{B7FC2693-15BC-4B64-9538-8A83C7E2AF43}"/>
               </a:ext>
             </a:extLst>
           </p:cNvPr>
@@ -22765,7 +22765,7 @@
           <p:cNvPr id="30" name="">
             <a:extLst xmlns:a="http://schemas.openxmlformats.org/drawingml/2006/main">
               <a:ext uri="{FF2B5EF4-FFF2-40B4-BE49-F238E27FC236}">
-                <a16:creationId xmlns:a16="http://schemas.microsoft.com/office/drawing/2014/main" id="{F368B932-6BF6-42C3-9A63-489CBD5DA6D9}"/>
+                <a16:creationId xmlns:a16="http://schemas.microsoft.com/office/drawing/2014/main" id="{C5B47EBA-8FCE-4D5D-B973-B764AFE6A515}"/>
               </a:ext>
             </a:extLst>
           </p:cNvPr>
@@ -22829,7 +22829,7 @@
           <p:cNvPr id="31" name="">
             <a:extLst xmlns:a="http://schemas.openxmlformats.org/drawingml/2006/main">
               <a:ext uri="{FF2B5EF4-FFF2-40B4-BE49-F238E27FC236}">
-                <a16:creationId xmlns:a16="http://schemas.microsoft.com/office/drawing/2014/main" id="{A04570DA-9D10-4311-B707-CFA9FCF406BF}"/>
+                <a16:creationId xmlns:a16="http://schemas.microsoft.com/office/drawing/2014/main" id="{508D889D-91FA-4E8E-B674-AFD49D0C5888}"/>
               </a:ext>
             </a:extLst>
           </p:cNvPr>
@@ -22893,7 +22893,7 @@
           <p:cNvPr id="32" name="">
             <a:extLst xmlns:a="http://schemas.openxmlformats.org/drawingml/2006/main">
               <a:ext uri="{FF2B5EF4-FFF2-40B4-BE49-F238E27FC236}">
-                <a16:creationId xmlns:a16="http://schemas.microsoft.com/office/drawing/2014/main" id="{08F0D518-C9D3-4E8B-9046-1850103F34B2}"/>
+                <a16:creationId xmlns:a16="http://schemas.microsoft.com/office/drawing/2014/main" id="{53D2CBA7-E295-4570-A22A-9C11589EA4E0}"/>
               </a:ext>
             </a:extLst>
           </p:cNvPr>
@@ -22926,7 +22926,7 @@
           <p:cNvPr id="33" name="">
             <a:extLst xmlns:a="http://schemas.openxmlformats.org/drawingml/2006/main">
               <a:ext uri="{FF2B5EF4-FFF2-40B4-BE49-F238E27FC236}">
-                <a16:creationId xmlns:a16="http://schemas.microsoft.com/office/drawing/2014/main" id="{4D1258F4-8243-499A-A79B-6AEA479D8714}"/>
+                <a16:creationId xmlns:a16="http://schemas.microsoft.com/office/drawing/2014/main" id="{2D8E8332-8DE0-4856-BB84-4E2B7240C604}"/>
               </a:ext>
             </a:extLst>
           </p:cNvPr>
@@ -22959,7 +22959,7 @@
           <p:cNvPr id="34" name="">
             <a:extLst xmlns:a="http://schemas.openxmlformats.org/drawingml/2006/main">
               <a:ext uri="{FF2B5EF4-FFF2-40B4-BE49-F238E27FC236}">
-                <a16:creationId xmlns:a16="http://schemas.microsoft.com/office/drawing/2014/main" id="{88A6CB05-C8B9-4437-B223-1F56F1016364}"/>
+                <a16:creationId xmlns:a16="http://schemas.microsoft.com/office/drawing/2014/main" id="{BBCA13AA-42CE-492E-ADE7-1D7D482FA4E8}"/>
               </a:ext>
             </a:extLst>
           </p:cNvPr>
@@ -23023,7 +23023,7 @@
           <p:cNvPr id="35" name="">
             <a:extLst xmlns:a="http://schemas.openxmlformats.org/drawingml/2006/main">
               <a:ext uri="{FF2B5EF4-FFF2-40B4-BE49-F238E27FC236}">
-                <a16:creationId xmlns:a16="http://schemas.microsoft.com/office/drawing/2014/main" id="{CB958805-2387-44AB-89E6-D8B2B07D7B93}"/>
+                <a16:creationId xmlns:a16="http://schemas.microsoft.com/office/drawing/2014/main" id="{3C7428A2-D99C-41BD-B50C-F92AF216136B}"/>
               </a:ext>
             </a:extLst>
           </p:cNvPr>
@@ -23087,7 +23087,7 @@
           <p:cNvPr id="36" name="">
             <a:extLst xmlns:a="http://schemas.openxmlformats.org/drawingml/2006/main">
               <a:ext uri="{FF2B5EF4-FFF2-40B4-BE49-F238E27FC236}">
-                <a16:creationId xmlns:a16="http://schemas.microsoft.com/office/drawing/2014/main" id="{BEF2D3C7-6A53-4A6B-A16E-07D7226DD335}"/>
+                <a16:creationId xmlns:a16="http://schemas.microsoft.com/office/drawing/2014/main" id="{90E572F7-2522-416F-ACCE-33504388F1D7}"/>
               </a:ext>
             </a:extLst>
           </p:cNvPr>
@@ -23120,7 +23120,7 @@
           <p:cNvPr id="37" name="">
             <a:extLst xmlns:a="http://schemas.openxmlformats.org/drawingml/2006/main">
               <a:ext uri="{FF2B5EF4-FFF2-40B4-BE49-F238E27FC236}">
-                <a16:creationId xmlns:a16="http://schemas.microsoft.com/office/drawing/2014/main" id="{AE935D0A-DE50-4748-991D-E8E5907EC467}"/>
+                <a16:creationId xmlns:a16="http://schemas.microsoft.com/office/drawing/2014/main" id="{E77C442A-1F61-42BF-A439-95DD102E2A85}"/>
               </a:ext>
             </a:extLst>
           </p:cNvPr>
@@ -23184,7 +23184,7 @@
           <p:cNvPr id="38" name="">
             <a:extLst xmlns:a="http://schemas.openxmlformats.org/drawingml/2006/main">
               <a:ext uri="{FF2B5EF4-FFF2-40B4-BE49-F238E27FC236}">
-                <a16:creationId xmlns:a16="http://schemas.microsoft.com/office/drawing/2014/main" id="{E202265A-3788-4F19-B060-AA2A92F542F1}"/>
+                <a16:creationId xmlns:a16="http://schemas.microsoft.com/office/drawing/2014/main" id="{BDCBDE21-5637-4DFA-BBF4-A01DA62BCAA5}"/>
               </a:ext>
             </a:extLst>
           </p:cNvPr>
@@ -23217,7 +23217,7 @@
           <p:cNvPr id="39" name="">
             <a:extLst xmlns:a="http://schemas.openxmlformats.org/drawingml/2006/main">
               <a:ext uri="{FF2B5EF4-FFF2-40B4-BE49-F238E27FC236}">
-                <a16:creationId xmlns:a16="http://schemas.microsoft.com/office/drawing/2014/main" id="{B01B628C-76ED-425A-9997-1D59040DA917}"/>
+                <a16:creationId xmlns:a16="http://schemas.microsoft.com/office/drawing/2014/main" id="{101F8462-2660-4405-A169-0E9F99952DE7}"/>
               </a:ext>
             </a:extLst>
           </p:cNvPr>
@@ -23281,7 +23281,7 @@
           <p:cNvPr id="40" name="">
             <a:extLst xmlns:a="http://schemas.openxmlformats.org/drawingml/2006/main">
               <a:ext uri="{FF2B5EF4-FFF2-40B4-BE49-F238E27FC236}">
-                <a16:creationId xmlns:a16="http://schemas.microsoft.com/office/drawing/2014/main" id="{264E0538-E6E7-4484-A1A4-9C2B0DDBF7D4}"/>
+                <a16:creationId xmlns:a16="http://schemas.microsoft.com/office/drawing/2014/main" id="{8CD1D8F5-C141-4748-9AE5-9F8FC9F3CDB3}"/>
               </a:ext>
             </a:extLst>
           </p:cNvPr>
@@ -23314,7 +23314,7 @@
           <p:cNvPr id="41" name="">
             <a:extLst xmlns:a="http://schemas.openxmlformats.org/drawingml/2006/main">
               <a:ext uri="{FF2B5EF4-FFF2-40B4-BE49-F238E27FC236}">
-                <a16:creationId xmlns:a16="http://schemas.microsoft.com/office/drawing/2014/main" id="{88C1D2FB-2FFA-4761-9A76-B40E095D4DF9}"/>
+                <a16:creationId xmlns:a16="http://schemas.microsoft.com/office/drawing/2014/main" id="{3088DC68-F12A-42B1-A19E-5EF3372B7B48}"/>
               </a:ext>
             </a:extLst>
           </p:cNvPr>
@@ -23378,7 +23378,7 @@
           <p:cNvPr id="42" name="">
             <a:extLst xmlns:a="http://schemas.openxmlformats.org/drawingml/2006/main">
               <a:ext uri="{FF2B5EF4-FFF2-40B4-BE49-F238E27FC236}">
-                <a16:creationId xmlns:a16="http://schemas.microsoft.com/office/drawing/2014/main" id="{13485D70-FAF7-4FF1-8103-FEEE78621A66}"/>
+                <a16:creationId xmlns:a16="http://schemas.microsoft.com/office/drawing/2014/main" id="{EF628E79-CEF2-493F-AB9A-0A7F6541F779}"/>
               </a:ext>
             </a:extLst>
           </p:cNvPr>
@@ -23411,7 +23411,7 @@
           <p:cNvPr id="43" name="">
             <a:extLst xmlns:a="http://schemas.openxmlformats.org/drawingml/2006/main">
               <a:ext uri="{FF2B5EF4-FFF2-40B4-BE49-F238E27FC236}">
-                <a16:creationId xmlns:a16="http://schemas.microsoft.com/office/drawing/2014/main" id="{5230DA1C-1907-44A9-A632-21267A5451AA}"/>
+                <a16:creationId xmlns:a16="http://schemas.microsoft.com/office/drawing/2014/main" id="{70446659-1DCF-4DE8-A82F-5B13C91FC521}"/>
               </a:ext>
             </a:extLst>
           </p:cNvPr>
@@ -23475,7 +23475,7 @@
           <p:cNvPr id="44" name="">
             <a:extLst xmlns:a="http://schemas.openxmlformats.org/drawingml/2006/main">
               <a:ext uri="{FF2B5EF4-FFF2-40B4-BE49-F238E27FC236}">
-                <a16:creationId xmlns:a16="http://schemas.microsoft.com/office/drawing/2014/main" id="{E8D76C94-A5C2-4C05-858C-C3DE78952B57}"/>
+                <a16:creationId xmlns:a16="http://schemas.microsoft.com/office/drawing/2014/main" id="{E0B07873-333B-4701-9E97-7B2771803497}"/>
               </a:ext>
             </a:extLst>
           </p:cNvPr>
@@ -23508,7 +23508,7 @@
           <p:cNvPr id="45" name="">
             <a:extLst xmlns:a="http://schemas.openxmlformats.org/drawingml/2006/main">
               <a:ext uri="{FF2B5EF4-FFF2-40B4-BE49-F238E27FC236}">
-                <a16:creationId xmlns:a16="http://schemas.microsoft.com/office/drawing/2014/main" id="{C69E1494-4A7E-4FAB-9443-FBE0E4B6806B}"/>
+                <a16:creationId xmlns:a16="http://schemas.microsoft.com/office/drawing/2014/main" id="{6DD47D7F-510D-44D1-9787-6317376334A8}"/>
               </a:ext>
             </a:extLst>
           </p:cNvPr>
@@ -23572,7 +23572,7 @@
           <p:cNvPr id="46" name="">
             <a:extLst xmlns:a="http://schemas.openxmlformats.org/drawingml/2006/main">
               <a:ext uri="{FF2B5EF4-FFF2-40B4-BE49-F238E27FC236}">
-                <a16:creationId xmlns:a16="http://schemas.microsoft.com/office/drawing/2014/main" id="{9A22A0C1-80F8-41AA-AC44-8A929482FA9F}"/>
+                <a16:creationId xmlns:a16="http://schemas.microsoft.com/office/drawing/2014/main" id="{A758CA92-5055-413B-B054-C49F70531E6B}"/>
               </a:ext>
             </a:extLst>
           </p:cNvPr>
@@ -23636,7 +23636,7 @@
           <p:cNvPr id="47" name="">
             <a:extLst xmlns:a="http://schemas.openxmlformats.org/drawingml/2006/main">
               <a:ext uri="{FF2B5EF4-FFF2-40B4-BE49-F238E27FC236}">
-                <a16:creationId xmlns:a16="http://schemas.microsoft.com/office/drawing/2014/main" id="{1348405E-4F56-4B61-B1F4-B83A1B073E06}"/>
+                <a16:creationId xmlns:a16="http://schemas.microsoft.com/office/drawing/2014/main" id="{29E3D4A8-CE1D-4C7C-A342-E0FC38E2CB16}"/>
               </a:ext>
             </a:extLst>
           </p:cNvPr>
@@ -23698,7 +23698,7 @@
     </p:spTree>
     <p:extLst>
       <p:ext uri="{BB962C8B-B14F-4D97-AF65-F5344CB8AC3E}">
-        <p14:creationId xmlns:p14="http://schemas.microsoft.com/office/powerpoint/2010/main" val="1447843781"/>
+        <p14:creationId xmlns:p14="http://schemas.microsoft.com/office/powerpoint/2010/main" val="535835819"/>
       </p:ext>
     </p:extLst>
   </p:cSld>
@@ -23722,7 +23722,7 @@
           <p:cNvPr id="1" name="">
             <a:extLst xmlns:a="http://schemas.openxmlformats.org/drawingml/2006/main">
               <a:ext uri="{FF2B5EF4-FFF2-40B4-BE49-F238E27FC236}">
-                <a16:creationId xmlns:a16="http://schemas.microsoft.com/office/drawing/2014/main" id="{5655059A-0C2C-4BCF-BFED-D8EC618D37BF}"/>
+                <a16:creationId xmlns:a16="http://schemas.microsoft.com/office/drawing/2014/main" id="{8E09AB3F-11C6-456E-B0AD-2A3507EFB63F}"/>
               </a:ext>
             </a:extLst>
           </p:cNvPr>
@@ -23755,7 +23755,7 @@
           <p:cNvPr id="2" name="">
             <a:extLst xmlns:a="http://schemas.openxmlformats.org/drawingml/2006/main">
               <a:ext uri="{FF2B5EF4-FFF2-40B4-BE49-F238E27FC236}">
-                <a16:creationId xmlns:a16="http://schemas.microsoft.com/office/drawing/2014/main" id="{A49D91DC-6614-4F58-BE94-0D0ACA1CB133}"/>
+                <a16:creationId xmlns:a16="http://schemas.microsoft.com/office/drawing/2014/main" id="{E0FE2C69-41FF-4BE4-8483-35400B760F81}"/>
               </a:ext>
             </a:extLst>
           </p:cNvPr>
@@ -23788,7 +23788,7 @@
           <p:cNvPr id="3" name="">
             <a:extLst xmlns:a="http://schemas.openxmlformats.org/drawingml/2006/main">
               <a:ext uri="{FF2B5EF4-FFF2-40B4-BE49-F238E27FC236}">
-                <a16:creationId xmlns:a16="http://schemas.microsoft.com/office/drawing/2014/main" id="{95992E40-A9B7-464C-AF1E-0D0CB1804196}"/>
+                <a16:creationId xmlns:a16="http://schemas.microsoft.com/office/drawing/2014/main" id="{8BD577F9-310C-4882-91DC-8EFBC8324724}"/>
               </a:ext>
             </a:extLst>
           </p:cNvPr>
@@ -23852,7 +23852,7 @@
           <p:cNvPr id="4" name="">
             <a:extLst xmlns:a="http://schemas.openxmlformats.org/drawingml/2006/main">
               <a:ext uri="{FF2B5EF4-FFF2-40B4-BE49-F238E27FC236}">
-                <a16:creationId xmlns:a16="http://schemas.microsoft.com/office/drawing/2014/main" id="{365CEC48-62D4-42ED-9C58-EDE0B43629C8}"/>
+                <a16:creationId xmlns:a16="http://schemas.microsoft.com/office/drawing/2014/main" id="{2F687FB3-154C-4E77-B8D6-3F5104551ADF}"/>
               </a:ext>
             </a:extLst>
           </p:cNvPr>
@@ -23916,7 +23916,7 @@
           <p:cNvPr id="5" name="">
             <a:extLst xmlns:a="http://schemas.openxmlformats.org/drawingml/2006/main">
               <a:ext uri="{FF2B5EF4-FFF2-40B4-BE49-F238E27FC236}">
-                <a16:creationId xmlns:a16="http://schemas.microsoft.com/office/drawing/2014/main" id="{DBE531E5-302A-4DEA-9248-AD87D4B76711}"/>
+                <a16:creationId xmlns:a16="http://schemas.microsoft.com/office/drawing/2014/main" id="{B17C4022-9F70-4D6E-9762-2597B5A6F2D1}"/>
               </a:ext>
             </a:extLst>
           </p:cNvPr>
@@ -23980,7 +23980,7 @@
           <p:cNvPr id="6" name="">
             <a:extLst xmlns:a="http://schemas.openxmlformats.org/drawingml/2006/main">
               <a:ext uri="{FF2B5EF4-FFF2-40B4-BE49-F238E27FC236}">
-                <a16:creationId xmlns:a16="http://schemas.microsoft.com/office/drawing/2014/main" id="{3BC1C163-8817-43BE-A83A-9C125DC84919}"/>
+                <a16:creationId xmlns:a16="http://schemas.microsoft.com/office/drawing/2014/main" id="{2885B4BE-B95B-495F-A946-34B6E1E60F1D}"/>
               </a:ext>
             </a:extLst>
           </p:cNvPr>
@@ -24017,7 +24017,7 @@
           <p:nvPr/>
         </p:nvPicPr>
         <p:blipFill>
-          <a:blip xmlns:r="http://schemas.openxmlformats.org/officeDocument/2006/relationships" xmlns:a="http://schemas.openxmlformats.org/drawingml/2006/main" r:embed="Ref5f16606b1e4463"/>
+          <a:blip xmlns:r="http://schemas.openxmlformats.org/officeDocument/2006/relationships" xmlns:a="http://schemas.openxmlformats.org/drawingml/2006/main" r:embed="R25d6cf23ae0d49fa"/>
           <a:stretch xmlns:a="http://schemas.openxmlformats.org/drawingml/2006/main"/>
         </p:blipFill>
         <p:spPr>
@@ -24035,7 +24035,7 @@
           <p:cNvPr id="8" name="">
             <a:extLst xmlns:a="http://schemas.openxmlformats.org/drawingml/2006/main">
               <a:ext uri="{FF2B5EF4-FFF2-40B4-BE49-F238E27FC236}">
-                <a16:creationId xmlns:a16="http://schemas.microsoft.com/office/drawing/2014/main" id="{CCD82728-A3F5-4F94-B4C4-23780044D749}"/>
+                <a16:creationId xmlns:a16="http://schemas.microsoft.com/office/drawing/2014/main" id="{3C4A7AE6-E0C3-47B4-BCB9-26FC05799A3E}"/>
               </a:ext>
             </a:extLst>
           </p:cNvPr>
@@ -24099,7 +24099,7 @@
           <p:cNvPr id="9" name="">
             <a:extLst xmlns:a="http://schemas.openxmlformats.org/drawingml/2006/main">
               <a:ext uri="{FF2B5EF4-FFF2-40B4-BE49-F238E27FC236}">
-                <a16:creationId xmlns:a16="http://schemas.microsoft.com/office/drawing/2014/main" id="{51DBC6AE-35FA-44DF-BEE4-BF81D766834E}"/>
+                <a16:creationId xmlns:a16="http://schemas.microsoft.com/office/drawing/2014/main" id="{7EF0EDB6-086C-4F2F-B604-96EA0E07142C}"/>
               </a:ext>
             </a:extLst>
           </p:cNvPr>
@@ -24132,7 +24132,7 @@
           <p:cNvPr id="10" name="">
             <a:extLst xmlns:a="http://schemas.openxmlformats.org/drawingml/2006/main">
               <a:ext uri="{FF2B5EF4-FFF2-40B4-BE49-F238E27FC236}">
-                <a16:creationId xmlns:a16="http://schemas.microsoft.com/office/drawing/2014/main" id="{3E80F48A-2A81-49F6-B68D-B0DE6308E892}"/>
+                <a16:creationId xmlns:a16="http://schemas.microsoft.com/office/drawing/2014/main" id="{1448924D-1861-41E0-97D8-00F1E9FF4B30}"/>
               </a:ext>
             </a:extLst>
           </p:cNvPr>
@@ -24196,7 +24196,7 @@
           <p:cNvPr id="11" name="">
             <a:extLst xmlns:a="http://schemas.openxmlformats.org/drawingml/2006/main">
               <a:ext uri="{FF2B5EF4-FFF2-40B4-BE49-F238E27FC236}">
-                <a16:creationId xmlns:a16="http://schemas.microsoft.com/office/drawing/2014/main" id="{7D8C6662-83FA-46A1-8D70-1143F160055D}"/>
+                <a16:creationId xmlns:a16="http://schemas.microsoft.com/office/drawing/2014/main" id="{A3ECDAA9-6BFE-41C6-8078-7DAD1771610D}"/>
               </a:ext>
             </a:extLst>
           </p:cNvPr>
@@ -24260,7 +24260,7 @@
           <p:cNvPr id="12" name="">
             <a:extLst xmlns:a="http://schemas.openxmlformats.org/drawingml/2006/main">
               <a:ext uri="{FF2B5EF4-FFF2-40B4-BE49-F238E27FC236}">
-                <a16:creationId xmlns:a16="http://schemas.microsoft.com/office/drawing/2014/main" id="{0802F73F-9A42-496C-A5C6-DF80B4B2E4F5}"/>
+                <a16:creationId xmlns:a16="http://schemas.microsoft.com/office/drawing/2014/main" id="{75E92B9F-1876-45DC-B48C-60BA64795245}"/>
               </a:ext>
             </a:extLst>
           </p:cNvPr>
@@ -24293,7 +24293,7 @@
           <p:cNvPr id="13" name="">
             <a:extLst xmlns:a="http://schemas.openxmlformats.org/drawingml/2006/main">
               <a:ext uri="{FF2B5EF4-FFF2-40B4-BE49-F238E27FC236}">
-                <a16:creationId xmlns:a16="http://schemas.microsoft.com/office/drawing/2014/main" id="{EF437AFC-F9FF-4638-AF60-AFA5D6142566}"/>
+                <a16:creationId xmlns:a16="http://schemas.microsoft.com/office/drawing/2014/main" id="{04427739-D89C-4941-9902-A984EC33B646}"/>
               </a:ext>
             </a:extLst>
           </p:cNvPr>
@@ -24347,7 +24347,7 @@
                 <a:ea typeface="Aptos Display"/>
                 <a:cs typeface="Aptos Display"/>
               </a:rPr>
-              <a:t>0.3799</a:t>
+              <a:t>0.7122</a:t>
             </a:r>
           </a:p>
         </p:txBody>
@@ -24357,7 +24357,7 @@
           <p:cNvPr id="14" name="">
             <a:extLst xmlns:a="http://schemas.openxmlformats.org/drawingml/2006/main">
               <a:ext uri="{FF2B5EF4-FFF2-40B4-BE49-F238E27FC236}">
-                <a16:creationId xmlns:a16="http://schemas.microsoft.com/office/drawing/2014/main" id="{6A72C04A-6460-4657-9B5B-8F914A866CAA}"/>
+                <a16:creationId xmlns:a16="http://schemas.microsoft.com/office/drawing/2014/main" id="{D4E9582D-5817-469D-827A-33C282D4185A}"/>
               </a:ext>
             </a:extLst>
           </p:cNvPr>
@@ -24421,7 +24421,7 @@
           <p:cNvPr id="15" name="">
             <a:extLst xmlns:a="http://schemas.openxmlformats.org/drawingml/2006/main">
               <a:ext uri="{FF2B5EF4-FFF2-40B4-BE49-F238E27FC236}">
-                <a16:creationId xmlns:a16="http://schemas.microsoft.com/office/drawing/2014/main" id="{551A4B13-D7BC-4883-B5C8-A035B8A692D4}"/>
+                <a16:creationId xmlns:a16="http://schemas.microsoft.com/office/drawing/2014/main" id="{B5E59E0E-D2F6-4DFA-B218-36EBFE55EAC4}"/>
               </a:ext>
             </a:extLst>
           </p:cNvPr>
@@ -24454,7 +24454,7 @@
           <p:cNvPr id="16" name="">
             <a:extLst xmlns:a="http://schemas.openxmlformats.org/drawingml/2006/main">
               <a:ext uri="{FF2B5EF4-FFF2-40B4-BE49-F238E27FC236}">
-                <a16:creationId xmlns:a16="http://schemas.microsoft.com/office/drawing/2014/main" id="{8C150AAB-27C4-47E3-87D5-BD2944F342A7}"/>
+                <a16:creationId xmlns:a16="http://schemas.microsoft.com/office/drawing/2014/main" id="{0A166DBF-49F7-44AB-8EE8-C284D07EAF19}"/>
               </a:ext>
             </a:extLst>
           </p:cNvPr>
@@ -24508,7 +24508,7 @@
                 <a:ea typeface="Aptos Display"/>
                 <a:cs typeface="Aptos Display"/>
               </a:rPr>
-              <a:t>0.006497</a:t>
+              <a:t>6.64e-09</a:t>
             </a:r>
           </a:p>
         </p:txBody>
@@ -24518,7 +24518,7 @@
           <p:cNvPr id="17" name="">
             <a:extLst xmlns:a="http://schemas.openxmlformats.org/drawingml/2006/main">
               <a:ext uri="{FF2B5EF4-FFF2-40B4-BE49-F238E27FC236}">
-                <a16:creationId xmlns:a16="http://schemas.microsoft.com/office/drawing/2014/main" id="{8EAF33EF-A5D9-4F61-8D19-E4F4E11AFC1B}"/>
+                <a16:creationId xmlns:a16="http://schemas.microsoft.com/office/drawing/2014/main" id="{F59C85B2-A46B-4238-8DF0-83F92E6B19BF}"/>
               </a:ext>
             </a:extLst>
           </p:cNvPr>
@@ -24582,7 +24582,7 @@
           <p:cNvPr id="18" name="">
             <a:extLst xmlns:a="http://schemas.openxmlformats.org/drawingml/2006/main">
               <a:ext uri="{FF2B5EF4-FFF2-40B4-BE49-F238E27FC236}">
-                <a16:creationId xmlns:a16="http://schemas.microsoft.com/office/drawing/2014/main" id="{74C18704-631A-4EA7-AEFF-9214202F897D}"/>
+                <a16:creationId xmlns:a16="http://schemas.microsoft.com/office/drawing/2014/main" id="{5D7857CE-630B-44C8-900A-2982BB32F486}"/>
               </a:ext>
             </a:extLst>
           </p:cNvPr>
@@ -24615,7 +24615,7 @@
           <p:cNvPr id="19" name="">
             <a:extLst xmlns:a="http://schemas.openxmlformats.org/drawingml/2006/main">
               <a:ext uri="{FF2B5EF4-FFF2-40B4-BE49-F238E27FC236}">
-                <a16:creationId xmlns:a16="http://schemas.microsoft.com/office/drawing/2014/main" id="{47E7958C-0CC0-4E84-8C8B-91BCDDD57154}"/>
+                <a16:creationId xmlns:a16="http://schemas.microsoft.com/office/drawing/2014/main" id="{CAE38951-7605-46F3-9F42-085722087E58}"/>
               </a:ext>
             </a:extLst>
           </p:cNvPr>
@@ -24679,7 +24679,7 @@
           <p:cNvPr id="20" name="">
             <a:extLst xmlns:a="http://schemas.openxmlformats.org/drawingml/2006/main">
               <a:ext uri="{FF2B5EF4-FFF2-40B4-BE49-F238E27FC236}">
-                <a16:creationId xmlns:a16="http://schemas.microsoft.com/office/drawing/2014/main" id="{7969EECE-2BEE-4329-930C-CEAF517BA82A}"/>
+                <a16:creationId xmlns:a16="http://schemas.microsoft.com/office/drawing/2014/main" id="{93A547B0-0E71-484C-8421-8B85180F77F9}"/>
               </a:ext>
             </a:extLst>
           </p:cNvPr>
@@ -24743,7 +24743,7 @@
           <p:cNvPr id="21" name="">
             <a:extLst xmlns:a="http://schemas.openxmlformats.org/drawingml/2006/main">
               <a:ext uri="{FF2B5EF4-FFF2-40B4-BE49-F238E27FC236}">
-                <a16:creationId xmlns:a16="http://schemas.microsoft.com/office/drawing/2014/main" id="{0EE0AB1A-782E-4444-86B2-E4DD6E1056E3}"/>
+                <a16:creationId xmlns:a16="http://schemas.microsoft.com/office/drawing/2014/main" id="{24649451-AE64-4E0D-A598-F8E7995FA5EE}"/>
               </a:ext>
             </a:extLst>
           </p:cNvPr>
@@ -24776,7 +24776,7 @@
           <p:cNvPr id="22" name="">
             <a:extLst xmlns:a="http://schemas.openxmlformats.org/drawingml/2006/main">
               <a:ext uri="{FF2B5EF4-FFF2-40B4-BE49-F238E27FC236}">
-                <a16:creationId xmlns:a16="http://schemas.microsoft.com/office/drawing/2014/main" id="{B0ECE886-AE21-48DA-BAAF-A0830462ED56}"/>
+                <a16:creationId xmlns:a16="http://schemas.microsoft.com/office/drawing/2014/main" id="{F184AA59-90DE-42E5-B974-DCFACF62E86F}"/>
               </a:ext>
             </a:extLst>
           </p:cNvPr>
@@ -24830,7 +24830,7 @@
                 <a:ea typeface="Aptos"/>
                 <a:cs typeface="Aptos"/>
               </a:rPr>
-              <a:t>Le score automatique suit partiellement le jugement humain.</a:t>
+              <a:t>Le score automatique suit nettement le jugement humain sur l'echantillon annote.</a:t>
             </a:r>
           </a:p>
         </p:txBody>
@@ -24840,7 +24840,7 @@
           <p:cNvPr id="23" name="">
             <a:extLst xmlns:a="http://schemas.openxmlformats.org/drawingml/2006/main">
               <a:ext uri="{FF2B5EF4-FFF2-40B4-BE49-F238E27FC236}">
-                <a16:creationId xmlns:a16="http://schemas.microsoft.com/office/drawing/2014/main" id="{BF3F1B2F-EA19-4D47-9075-D858EAABED69}"/>
+                <a16:creationId xmlns:a16="http://schemas.microsoft.com/office/drawing/2014/main" id="{AB750B00-C07F-4BD6-B2E0-8888E649D841}"/>
               </a:ext>
             </a:extLst>
           </p:cNvPr>
@@ -24873,7 +24873,7 @@
           <p:cNvPr id="24" name="">
             <a:extLst xmlns:a="http://schemas.openxmlformats.org/drawingml/2006/main">
               <a:ext uri="{FF2B5EF4-FFF2-40B4-BE49-F238E27FC236}">
-                <a16:creationId xmlns:a16="http://schemas.microsoft.com/office/drawing/2014/main" id="{AB618BBA-1979-4CB8-B6C6-FA5ABFC28797}"/>
+                <a16:creationId xmlns:a16="http://schemas.microsoft.com/office/drawing/2014/main" id="{5E3FC30A-9CB8-447B-91BE-D20445C0D92C}"/>
               </a:ext>
             </a:extLst>
           </p:cNvPr>
@@ -24927,7 +24927,7 @@
                 <a:ea typeface="Aptos"/>
                 <a:cs typeface="Aptos"/>
               </a:rPr>
-              <a:t>La corrrelation est positive et statistiquement significative.</a:t>
+              <a:t>La corrrelation est positive et statistiquement tres significative.</a:t>
             </a:r>
           </a:p>
         </p:txBody>
@@ -24937,7 +24937,7 @@
           <p:cNvPr id="25" name="">
             <a:extLst xmlns:a="http://schemas.openxmlformats.org/drawingml/2006/main">
               <a:ext uri="{FF2B5EF4-FFF2-40B4-BE49-F238E27FC236}">
-                <a16:creationId xmlns:a16="http://schemas.microsoft.com/office/drawing/2014/main" id="{61AC0C86-ED4A-47BA-9E08-0A2609B49A72}"/>
+                <a16:creationId xmlns:a16="http://schemas.microsoft.com/office/drawing/2014/main" id="{B298FB82-3517-4B29-80E4-0A52E39738CA}"/>
               </a:ext>
             </a:extLst>
           </p:cNvPr>
@@ -24970,7 +24970,7 @@
           <p:cNvPr id="26" name="">
             <a:extLst xmlns:a="http://schemas.openxmlformats.org/drawingml/2006/main">
               <a:ext uri="{FF2B5EF4-FFF2-40B4-BE49-F238E27FC236}">
-                <a16:creationId xmlns:a16="http://schemas.microsoft.com/office/drawing/2014/main" id="{A52CDCF1-0D42-4AAB-B15E-1A01F3ADFA8E}"/>
+                <a16:creationId xmlns:a16="http://schemas.microsoft.com/office/drawing/2014/main" id="{73202EFB-E030-4359-86CE-6BF2EABC6BAF}"/>
               </a:ext>
             </a:extLst>
           </p:cNvPr>
@@ -25024,7 +25024,7 @@
                 <a:ea typeface="Aptos"/>
                 <a:cs typeface="Aptos"/>
               </a:rPr>
-              <a:t>Le resultat reste modere, ce qui est coherent avec une approche zero-shot explicable.</a:t>
+              <a:t>Le resultat est fort pour un pipeline zero-shot explicable sans entrainement local.</a:t>
             </a:r>
           </a:p>
         </p:txBody>
@@ -25034,7 +25034,7 @@
           <p:cNvPr id="27" name="">
             <a:extLst xmlns:a="http://schemas.openxmlformats.org/drawingml/2006/main">
               <a:ext uri="{FF2B5EF4-FFF2-40B4-BE49-F238E27FC236}">
-                <a16:creationId xmlns:a16="http://schemas.microsoft.com/office/drawing/2014/main" id="{2ACB45BE-40F4-493E-951A-233D69D3FA90}"/>
+                <a16:creationId xmlns:a16="http://schemas.microsoft.com/office/drawing/2014/main" id="{1AC2B8AB-6710-4FC9-A89F-48D22C3BFCA8}"/>
               </a:ext>
             </a:extLst>
           </p:cNvPr>
@@ -25098,7 +25098,7 @@
           <p:cNvPr id="28" name="">
             <a:extLst xmlns:a="http://schemas.openxmlformats.org/drawingml/2006/main">
               <a:ext uri="{FF2B5EF4-FFF2-40B4-BE49-F238E27FC236}">
-                <a16:creationId xmlns:a16="http://schemas.microsoft.com/office/drawing/2014/main" id="{15D7519C-D546-400F-A115-8A9AE80F4D6E}"/>
+                <a16:creationId xmlns:a16="http://schemas.microsoft.com/office/drawing/2014/main" id="{2F6D5FF3-4C58-408A-A2AC-88D22FB5DA8C}"/>
               </a:ext>
             </a:extLst>
           </p:cNvPr>
@@ -25160,7 +25160,7 @@
     </p:spTree>
     <p:extLst>
       <p:ext uri="{BB962C8B-B14F-4D97-AF65-F5344CB8AC3E}">
-        <p14:creationId xmlns:p14="http://schemas.microsoft.com/office/powerpoint/2010/main" val="779490898"/>
+        <p14:creationId xmlns:p14="http://schemas.microsoft.com/office/powerpoint/2010/main" val="1912304405"/>
       </p:ext>
     </p:extLst>
   </p:cSld>
@@ -25184,7 +25184,7 @@
           <p:cNvPr id="1" name="">
             <a:extLst xmlns:a="http://schemas.openxmlformats.org/drawingml/2006/main">
               <a:ext uri="{FF2B5EF4-FFF2-40B4-BE49-F238E27FC236}">
-                <a16:creationId xmlns:a16="http://schemas.microsoft.com/office/drawing/2014/main" id="{B2FA84BA-857C-447F-BACD-1EA0A8F3120E}"/>
+                <a16:creationId xmlns:a16="http://schemas.microsoft.com/office/drawing/2014/main" id="{0BD082C2-AFDC-4ACB-BD54-C542F74E717D}"/>
               </a:ext>
             </a:extLst>
           </p:cNvPr>
@@ -25217,7 +25217,7 @@
           <p:cNvPr id="2" name="">
             <a:extLst xmlns:a="http://schemas.openxmlformats.org/drawingml/2006/main">
               <a:ext uri="{FF2B5EF4-FFF2-40B4-BE49-F238E27FC236}">
-                <a16:creationId xmlns:a16="http://schemas.microsoft.com/office/drawing/2014/main" id="{1EE9CF15-9F20-46F2-B4B2-32C7B4CB6CFF}"/>
+                <a16:creationId xmlns:a16="http://schemas.microsoft.com/office/drawing/2014/main" id="{37832C3E-7612-49F9-986D-754B41D9C1D4}"/>
               </a:ext>
             </a:extLst>
           </p:cNvPr>
@@ -25250,7 +25250,7 @@
           <p:cNvPr id="3" name="">
             <a:extLst xmlns:a="http://schemas.openxmlformats.org/drawingml/2006/main">
               <a:ext uri="{FF2B5EF4-FFF2-40B4-BE49-F238E27FC236}">
-                <a16:creationId xmlns:a16="http://schemas.microsoft.com/office/drawing/2014/main" id="{681FC8BB-B2E4-4697-A467-D0EC54085D0C}"/>
+                <a16:creationId xmlns:a16="http://schemas.microsoft.com/office/drawing/2014/main" id="{FECA6E74-8C7C-4EAC-B2FE-B195FC9B7988}"/>
               </a:ext>
             </a:extLst>
           </p:cNvPr>
@@ -25314,7 +25314,7 @@
           <p:cNvPr id="4" name="">
             <a:extLst xmlns:a="http://schemas.openxmlformats.org/drawingml/2006/main">
               <a:ext uri="{FF2B5EF4-FFF2-40B4-BE49-F238E27FC236}">
-                <a16:creationId xmlns:a16="http://schemas.microsoft.com/office/drawing/2014/main" id="{429E5DB8-5524-4C64-857E-E41D9E2B532E}"/>
+                <a16:creationId xmlns:a16="http://schemas.microsoft.com/office/drawing/2014/main" id="{E66205C3-443F-442F-974E-74EE7449BC2C}"/>
               </a:ext>
             </a:extLst>
           </p:cNvPr>
@@ -25378,7 +25378,7 @@
           <p:cNvPr id="5" name="">
             <a:extLst xmlns:a="http://schemas.openxmlformats.org/drawingml/2006/main">
               <a:ext uri="{FF2B5EF4-FFF2-40B4-BE49-F238E27FC236}">
-                <a16:creationId xmlns:a16="http://schemas.microsoft.com/office/drawing/2014/main" id="{8308A3A3-584E-472A-A8B0-872E75A03E5C}"/>
+                <a16:creationId xmlns:a16="http://schemas.microsoft.com/office/drawing/2014/main" id="{47FDC294-FF59-4869-9302-BCC22279FE99}"/>
               </a:ext>
             </a:extLst>
           </p:cNvPr>
@@ -25442,7 +25442,7 @@
           <p:cNvPr id="6" name="">
             <a:extLst xmlns:a="http://schemas.openxmlformats.org/drawingml/2006/main">
               <a:ext uri="{FF2B5EF4-FFF2-40B4-BE49-F238E27FC236}">
-                <a16:creationId xmlns:a16="http://schemas.microsoft.com/office/drawing/2014/main" id="{D8FE0583-7E09-43CC-85B4-623B87E9E0A1}"/>
+                <a16:creationId xmlns:a16="http://schemas.microsoft.com/office/drawing/2014/main" id="{22E93FEE-57AE-4919-98AD-BEB2C9D90FA6}"/>
               </a:ext>
             </a:extLst>
           </p:cNvPr>
@@ -25479,7 +25479,7 @@
           <p:nvPr/>
         </p:nvPicPr>
         <p:blipFill>
-          <a:blip xmlns:r="http://schemas.openxmlformats.org/officeDocument/2006/relationships" xmlns:a="http://schemas.openxmlformats.org/drawingml/2006/main" r:embed="Rfad374b5656b434a"/>
+          <a:blip xmlns:r="http://schemas.openxmlformats.org/officeDocument/2006/relationships" xmlns:a="http://schemas.openxmlformats.org/drawingml/2006/main" r:embed="R398ed248b4c64dfe"/>
           <a:stretch xmlns:a="http://schemas.openxmlformats.org/drawingml/2006/main"/>
         </p:blipFill>
         <p:spPr>
@@ -25497,7 +25497,7 @@
           <p:cNvPr id="8" name="">
             <a:extLst xmlns:a="http://schemas.openxmlformats.org/drawingml/2006/main">
               <a:ext uri="{FF2B5EF4-FFF2-40B4-BE49-F238E27FC236}">
-                <a16:creationId xmlns:a16="http://schemas.microsoft.com/office/drawing/2014/main" id="{66B5995A-85C6-4F6B-96F4-4E9DB5778D34}"/>
+                <a16:creationId xmlns:a16="http://schemas.microsoft.com/office/drawing/2014/main" id="{FE4903AB-244B-4DD7-AE94-5DE8CF36310B}"/>
               </a:ext>
             </a:extLst>
           </p:cNvPr>
@@ -25561,7 +25561,7 @@
           <p:cNvPr id="9" name="">
             <a:extLst xmlns:a="http://schemas.openxmlformats.org/drawingml/2006/main">
               <a:ext uri="{FF2B5EF4-FFF2-40B4-BE49-F238E27FC236}">
-                <a16:creationId xmlns:a16="http://schemas.microsoft.com/office/drawing/2014/main" id="{984EA1D2-6BF0-45BA-B4A3-3A16955AA3B8}"/>
+                <a16:creationId xmlns:a16="http://schemas.microsoft.com/office/drawing/2014/main" id="{33BA9D43-9193-450B-9D28-8B27FE0C8979}"/>
               </a:ext>
             </a:extLst>
           </p:cNvPr>
@@ -25594,7 +25594,7 @@
           <p:cNvPr id="10" name="">
             <a:extLst xmlns:a="http://schemas.openxmlformats.org/drawingml/2006/main">
               <a:ext uri="{FF2B5EF4-FFF2-40B4-BE49-F238E27FC236}">
-                <a16:creationId xmlns:a16="http://schemas.microsoft.com/office/drawing/2014/main" id="{BE783654-C1B8-4457-839B-7DC5DBC0E563}"/>
+                <a16:creationId xmlns:a16="http://schemas.microsoft.com/office/drawing/2014/main" id="{F62BEAFF-EEB5-4A08-8ABE-A29752CA2306}"/>
               </a:ext>
             </a:extLst>
           </p:cNvPr>
@@ -25658,7 +25658,7 @@
           <p:cNvPr id="11" name="">
             <a:extLst xmlns:a="http://schemas.openxmlformats.org/drawingml/2006/main">
               <a:ext uri="{FF2B5EF4-FFF2-40B4-BE49-F238E27FC236}">
-                <a16:creationId xmlns:a16="http://schemas.microsoft.com/office/drawing/2014/main" id="{5BBD27EE-4554-4B1C-998D-21DEF393F1F2}"/>
+                <a16:creationId xmlns:a16="http://schemas.microsoft.com/office/drawing/2014/main" id="{CAA25C99-93CE-4EBD-98F2-E0A03BB6E420}"/>
               </a:ext>
             </a:extLst>
           </p:cNvPr>
@@ -25691,7 +25691,7 @@
           <p:cNvPr id="12" name="">
             <a:extLst xmlns:a="http://schemas.openxmlformats.org/drawingml/2006/main">
               <a:ext uri="{FF2B5EF4-FFF2-40B4-BE49-F238E27FC236}">
-                <a16:creationId xmlns:a16="http://schemas.microsoft.com/office/drawing/2014/main" id="{0B5A895C-02BE-43AA-B3C3-98644566139A}"/>
+                <a16:creationId xmlns:a16="http://schemas.microsoft.com/office/drawing/2014/main" id="{CDEDAB15-1AB8-45A7-9D46-CAD2864509F6}"/>
               </a:ext>
             </a:extLst>
           </p:cNvPr>
@@ -25755,7 +25755,7 @@
           <p:cNvPr id="13" name="">
             <a:extLst xmlns:a="http://schemas.openxmlformats.org/drawingml/2006/main">
               <a:ext uri="{FF2B5EF4-FFF2-40B4-BE49-F238E27FC236}">
-                <a16:creationId xmlns:a16="http://schemas.microsoft.com/office/drawing/2014/main" id="{BFC9D731-9828-49DA-BAE3-9C7508551E23}"/>
+                <a16:creationId xmlns:a16="http://schemas.microsoft.com/office/drawing/2014/main" id="{EAF6C33B-A67B-4ACB-896D-9E3FE57E2D2B}"/>
               </a:ext>
             </a:extLst>
           </p:cNvPr>
@@ -25788,7 +25788,7 @@
           <p:cNvPr id="14" name="">
             <a:extLst xmlns:a="http://schemas.openxmlformats.org/drawingml/2006/main">
               <a:ext uri="{FF2B5EF4-FFF2-40B4-BE49-F238E27FC236}">
-                <a16:creationId xmlns:a16="http://schemas.microsoft.com/office/drawing/2014/main" id="{A5041F8F-7BEE-4E5F-9B78-88814B5EB456}"/>
+                <a16:creationId xmlns:a16="http://schemas.microsoft.com/office/drawing/2014/main" id="{C7D605CA-5E79-458C-8E85-5125D842EA96}"/>
               </a:ext>
             </a:extLst>
           </p:cNvPr>
@@ -25852,7 +25852,7 @@
           <p:cNvPr id="15" name="">
             <a:extLst xmlns:a="http://schemas.openxmlformats.org/drawingml/2006/main">
               <a:ext uri="{FF2B5EF4-FFF2-40B4-BE49-F238E27FC236}">
-                <a16:creationId xmlns:a16="http://schemas.microsoft.com/office/drawing/2014/main" id="{5071D665-7B91-4F9A-BAE6-880DA628B14F}"/>
+                <a16:creationId xmlns:a16="http://schemas.microsoft.com/office/drawing/2014/main" id="{188BB963-9A94-4B08-B2B3-9A3E8256617B}"/>
               </a:ext>
             </a:extLst>
           </p:cNvPr>
@@ -25885,7 +25885,7 @@
           <p:cNvPr id="16" name="">
             <a:extLst xmlns:a="http://schemas.openxmlformats.org/drawingml/2006/main">
               <a:ext uri="{FF2B5EF4-FFF2-40B4-BE49-F238E27FC236}">
-                <a16:creationId xmlns:a16="http://schemas.microsoft.com/office/drawing/2014/main" id="{A40AD9B3-0938-42AB-8FD6-B9F5393EF162}"/>
+                <a16:creationId xmlns:a16="http://schemas.microsoft.com/office/drawing/2014/main" id="{755B2D3A-6737-44F6-9E70-063043EFC86C}"/>
               </a:ext>
             </a:extLst>
           </p:cNvPr>
@@ -25949,7 +25949,7 @@
           <p:cNvPr id="17" name="">
             <a:extLst xmlns:a="http://schemas.openxmlformats.org/drawingml/2006/main">
               <a:ext uri="{FF2B5EF4-FFF2-40B4-BE49-F238E27FC236}">
-                <a16:creationId xmlns:a16="http://schemas.microsoft.com/office/drawing/2014/main" id="{976CA6E3-1F95-4A45-A578-3DFD072EDE07}"/>
+                <a16:creationId xmlns:a16="http://schemas.microsoft.com/office/drawing/2014/main" id="{E6825B7F-B49D-40D8-BF61-AB32C2B91275}"/>
               </a:ext>
             </a:extLst>
           </p:cNvPr>
@@ -25982,7 +25982,7 @@
           <p:cNvPr id="18" name="">
             <a:extLst xmlns:a="http://schemas.openxmlformats.org/drawingml/2006/main">
               <a:ext uri="{FF2B5EF4-FFF2-40B4-BE49-F238E27FC236}">
-                <a16:creationId xmlns:a16="http://schemas.microsoft.com/office/drawing/2014/main" id="{D5237D8B-FBF3-4520-8160-5AB00CDBB703}"/>
+                <a16:creationId xmlns:a16="http://schemas.microsoft.com/office/drawing/2014/main" id="{3733D535-953B-450E-AA3E-1A83F982F4A0}"/>
               </a:ext>
             </a:extLst>
           </p:cNvPr>
@@ -26046,7 +26046,7 @@
           <p:cNvPr id="19" name="">
             <a:extLst xmlns:a="http://schemas.openxmlformats.org/drawingml/2006/main">
               <a:ext uri="{FF2B5EF4-FFF2-40B4-BE49-F238E27FC236}">
-                <a16:creationId xmlns:a16="http://schemas.microsoft.com/office/drawing/2014/main" id="{BA2E9307-4760-401A-84A1-7D66A473B1BA}"/>
+                <a16:creationId xmlns:a16="http://schemas.microsoft.com/office/drawing/2014/main" id="{071FF167-DB90-4523-8638-05478A5B4B08}"/>
               </a:ext>
             </a:extLst>
           </p:cNvPr>
@@ -26079,7 +26079,7 @@
           <p:cNvPr id="20" name="">
             <a:extLst xmlns:a="http://schemas.openxmlformats.org/drawingml/2006/main">
               <a:ext uri="{FF2B5EF4-FFF2-40B4-BE49-F238E27FC236}">
-                <a16:creationId xmlns:a16="http://schemas.microsoft.com/office/drawing/2014/main" id="{61C46580-198E-4210-866D-E78921940A69}"/>
+                <a16:creationId xmlns:a16="http://schemas.microsoft.com/office/drawing/2014/main" id="{EA3B19B5-A459-4EF5-AC13-7909AB5C5F9F}"/>
               </a:ext>
             </a:extLst>
           </p:cNvPr>
@@ -26143,7 +26143,7 @@
           <p:cNvPr id="21" name="">
             <a:extLst xmlns:a="http://schemas.openxmlformats.org/drawingml/2006/main">
               <a:ext uri="{FF2B5EF4-FFF2-40B4-BE49-F238E27FC236}">
-                <a16:creationId xmlns:a16="http://schemas.microsoft.com/office/drawing/2014/main" id="{60F3EDD3-9F0A-40BD-A86C-77FD1D0C2DA3}"/>
+                <a16:creationId xmlns:a16="http://schemas.microsoft.com/office/drawing/2014/main" id="{7FA4EC01-AA6C-47E4-AC24-A3F37D140704}"/>
               </a:ext>
             </a:extLst>
           </p:cNvPr>
@@ -26176,7 +26176,7 @@
           <p:cNvPr id="22" name="">
             <a:extLst xmlns:a="http://schemas.openxmlformats.org/drawingml/2006/main">
               <a:ext uri="{FF2B5EF4-FFF2-40B4-BE49-F238E27FC236}">
-                <a16:creationId xmlns:a16="http://schemas.microsoft.com/office/drawing/2014/main" id="{525E80A8-1DD7-4851-9617-81C28417F30B}"/>
+                <a16:creationId xmlns:a16="http://schemas.microsoft.com/office/drawing/2014/main" id="{CFCE83CC-D668-42A8-82FA-3D79B3FF7AFD}"/>
               </a:ext>
             </a:extLst>
           </p:cNvPr>
@@ -26240,7 +26240,7 @@
           <p:cNvPr id="23" name="">
             <a:extLst xmlns:a="http://schemas.openxmlformats.org/drawingml/2006/main">
               <a:ext uri="{FF2B5EF4-FFF2-40B4-BE49-F238E27FC236}">
-                <a16:creationId xmlns:a16="http://schemas.microsoft.com/office/drawing/2014/main" id="{4F6D6867-BD6B-405F-9E0B-4FF28393D7B5}"/>
+                <a16:creationId xmlns:a16="http://schemas.microsoft.com/office/drawing/2014/main" id="{1E767517-3713-4A75-80D1-154C7A3040E0}"/>
               </a:ext>
             </a:extLst>
           </p:cNvPr>
@@ -26273,7 +26273,7 @@
           <p:cNvPr id="24" name="">
             <a:extLst xmlns:a="http://schemas.openxmlformats.org/drawingml/2006/main">
               <a:ext uri="{FF2B5EF4-FFF2-40B4-BE49-F238E27FC236}">
-                <a16:creationId xmlns:a16="http://schemas.microsoft.com/office/drawing/2014/main" id="{3A72AFCF-7CCE-4CE9-8BFA-244363180F53}"/>
+                <a16:creationId xmlns:a16="http://schemas.microsoft.com/office/drawing/2014/main" id="{5BCDC299-5D85-43B2-B85A-31ABC6B61DDC}"/>
               </a:ext>
             </a:extLst>
           </p:cNvPr>
@@ -26337,7 +26337,7 @@
           <p:cNvPr id="25" name="">
             <a:extLst xmlns:a="http://schemas.openxmlformats.org/drawingml/2006/main">
               <a:ext uri="{FF2B5EF4-FFF2-40B4-BE49-F238E27FC236}">
-                <a16:creationId xmlns:a16="http://schemas.microsoft.com/office/drawing/2014/main" id="{74E1D21A-DD41-4FD0-8300-460A6C2F0674}"/>
+                <a16:creationId xmlns:a16="http://schemas.microsoft.com/office/drawing/2014/main" id="{EB6D2CBD-2417-48A8-9DE4-A40E8FE16432}"/>
               </a:ext>
             </a:extLst>
           </p:cNvPr>
@@ -26401,7 +26401,7 @@
           <p:cNvPr id="26" name="">
             <a:extLst xmlns:a="http://schemas.openxmlformats.org/drawingml/2006/main">
               <a:ext uri="{FF2B5EF4-FFF2-40B4-BE49-F238E27FC236}">
-                <a16:creationId xmlns:a16="http://schemas.microsoft.com/office/drawing/2014/main" id="{21784D36-9780-4A2E-979C-841D823774AD}"/>
+                <a16:creationId xmlns:a16="http://schemas.microsoft.com/office/drawing/2014/main" id="{B791A95A-C138-40D0-83C1-711549C0F477}"/>
               </a:ext>
             </a:extLst>
           </p:cNvPr>
@@ -26463,7 +26463,7 @@
     </p:spTree>
     <p:extLst>
       <p:ext uri="{BB962C8B-B14F-4D97-AF65-F5344CB8AC3E}">
-        <p14:creationId xmlns:p14="http://schemas.microsoft.com/office/powerpoint/2010/main" val="2023083008"/>
+        <p14:creationId xmlns:p14="http://schemas.microsoft.com/office/powerpoint/2010/main" val="1677297691"/>
       </p:ext>
     </p:extLst>
   </p:cSld>
@@ -26487,7 +26487,7 @@
           <p:cNvPr id="1" name="">
             <a:extLst xmlns:a="http://schemas.openxmlformats.org/drawingml/2006/main">
               <a:ext uri="{FF2B5EF4-FFF2-40B4-BE49-F238E27FC236}">
-                <a16:creationId xmlns:a16="http://schemas.microsoft.com/office/drawing/2014/main" id="{59FCD6E0-EEB5-40B0-B64B-B180B6740ABC}"/>
+                <a16:creationId xmlns:a16="http://schemas.microsoft.com/office/drawing/2014/main" id="{0363A412-4B44-4AA2-B702-92ADEABBBFBC}"/>
               </a:ext>
             </a:extLst>
           </p:cNvPr>
@@ -26520,7 +26520,7 @@
           <p:cNvPr id="2" name="">
             <a:extLst xmlns:a="http://schemas.openxmlformats.org/drawingml/2006/main">
               <a:ext uri="{FF2B5EF4-FFF2-40B4-BE49-F238E27FC236}">
-                <a16:creationId xmlns:a16="http://schemas.microsoft.com/office/drawing/2014/main" id="{9CF230E4-8ADC-47BE-A926-C39B04446002}"/>
+                <a16:creationId xmlns:a16="http://schemas.microsoft.com/office/drawing/2014/main" id="{6B6275EC-69AF-4013-B419-787E60206643}"/>
               </a:ext>
             </a:extLst>
           </p:cNvPr>
@@ -26553,7 +26553,7 @@
           <p:cNvPr id="3" name="">
             <a:extLst xmlns:a="http://schemas.openxmlformats.org/drawingml/2006/main">
               <a:ext uri="{FF2B5EF4-FFF2-40B4-BE49-F238E27FC236}">
-                <a16:creationId xmlns:a16="http://schemas.microsoft.com/office/drawing/2014/main" id="{41E78127-B3D7-48EC-863B-BE8220352E98}"/>
+                <a16:creationId xmlns:a16="http://schemas.microsoft.com/office/drawing/2014/main" id="{45A48678-4C88-4CA1-9815-EC061A7663FD}"/>
               </a:ext>
             </a:extLst>
           </p:cNvPr>
@@ -26617,7 +26617,7 @@
           <p:cNvPr id="4" name="">
             <a:extLst xmlns:a="http://schemas.openxmlformats.org/drawingml/2006/main">
               <a:ext uri="{FF2B5EF4-FFF2-40B4-BE49-F238E27FC236}">
-                <a16:creationId xmlns:a16="http://schemas.microsoft.com/office/drawing/2014/main" id="{4583971D-5304-4733-AB4C-9F6890C01C7C}"/>
+                <a16:creationId xmlns:a16="http://schemas.microsoft.com/office/drawing/2014/main" id="{84301287-5904-4C53-9883-09BA41889309}"/>
               </a:ext>
             </a:extLst>
           </p:cNvPr>
@@ -26681,7 +26681,7 @@
           <p:cNvPr id="5" name="">
             <a:extLst xmlns:a="http://schemas.openxmlformats.org/drawingml/2006/main">
               <a:ext uri="{FF2B5EF4-FFF2-40B4-BE49-F238E27FC236}">
-                <a16:creationId xmlns:a16="http://schemas.microsoft.com/office/drawing/2014/main" id="{6C00AC4E-1440-40AF-8514-52EDB380DBF1}"/>
+                <a16:creationId xmlns:a16="http://schemas.microsoft.com/office/drawing/2014/main" id="{D69BD772-3A5A-4DE8-9C6F-B49563C2C131}"/>
               </a:ext>
             </a:extLst>
           </p:cNvPr>
@@ -26745,7 +26745,7 @@
           <p:cNvPr id="6" name="">
             <a:extLst xmlns:a="http://schemas.openxmlformats.org/drawingml/2006/main">
               <a:ext uri="{FF2B5EF4-FFF2-40B4-BE49-F238E27FC236}">
-                <a16:creationId xmlns:a16="http://schemas.microsoft.com/office/drawing/2014/main" id="{270D3328-09F3-4599-8C54-679FE3F3BD04}"/>
+                <a16:creationId xmlns:a16="http://schemas.microsoft.com/office/drawing/2014/main" id="{173E7E59-1D6E-4310-913E-BC25DEFC9039}"/>
               </a:ext>
             </a:extLst>
           </p:cNvPr>
@@ -26778,7 +26778,7 @@
           <p:cNvPr id="7" name="">
             <a:extLst xmlns:a="http://schemas.openxmlformats.org/drawingml/2006/main">
               <a:ext uri="{FF2B5EF4-FFF2-40B4-BE49-F238E27FC236}">
-                <a16:creationId xmlns:a16="http://schemas.microsoft.com/office/drawing/2014/main" id="{04A8301B-CAAD-4B9B-A530-62B8FAB6E20B}"/>
+                <a16:creationId xmlns:a16="http://schemas.microsoft.com/office/drawing/2014/main" id="{48084A06-E7E4-47DF-B38E-46D46B4FB9A2}"/>
               </a:ext>
             </a:extLst>
           </p:cNvPr>
@@ -26842,7 +26842,7 @@
           <p:cNvPr id="8" name="">
             <a:extLst xmlns:a="http://schemas.openxmlformats.org/drawingml/2006/main">
               <a:ext uri="{FF2B5EF4-FFF2-40B4-BE49-F238E27FC236}">
-                <a16:creationId xmlns:a16="http://schemas.microsoft.com/office/drawing/2014/main" id="{F610F7B4-1D5B-4034-B3EB-137F4CB27BE4}"/>
+                <a16:creationId xmlns:a16="http://schemas.microsoft.com/office/drawing/2014/main" id="{DF40F0FF-FAD5-4ADF-B5F0-78AAE7E687AD}"/>
               </a:ext>
             </a:extLst>
           </p:cNvPr>
@@ -26875,7 +26875,7 @@
           <p:cNvPr id="9" name="">
             <a:extLst xmlns:a="http://schemas.openxmlformats.org/drawingml/2006/main">
               <a:ext uri="{FF2B5EF4-FFF2-40B4-BE49-F238E27FC236}">
-                <a16:creationId xmlns:a16="http://schemas.microsoft.com/office/drawing/2014/main" id="{8FF8D19E-0377-4B68-9600-FCD027E35C32}"/>
+                <a16:creationId xmlns:a16="http://schemas.microsoft.com/office/drawing/2014/main" id="{CE3AFCCD-CA99-4834-9A65-270113E43469}"/>
               </a:ext>
             </a:extLst>
           </p:cNvPr>
@@ -26939,7 +26939,7 @@
           <p:cNvPr id="10" name="">
             <a:extLst xmlns:a="http://schemas.openxmlformats.org/drawingml/2006/main">
               <a:ext uri="{FF2B5EF4-FFF2-40B4-BE49-F238E27FC236}">
-                <a16:creationId xmlns:a16="http://schemas.microsoft.com/office/drawing/2014/main" id="{5EF817D6-176E-4836-B5DA-54AA2F8501DA}"/>
+                <a16:creationId xmlns:a16="http://schemas.microsoft.com/office/drawing/2014/main" id="{E6FF8AFA-4381-477E-ADDA-F4E87820C539}"/>
               </a:ext>
             </a:extLst>
           </p:cNvPr>
@@ -26972,7 +26972,7 @@
           <p:cNvPr id="11" name="">
             <a:extLst xmlns:a="http://schemas.openxmlformats.org/drawingml/2006/main">
               <a:ext uri="{FF2B5EF4-FFF2-40B4-BE49-F238E27FC236}">
-                <a16:creationId xmlns:a16="http://schemas.microsoft.com/office/drawing/2014/main" id="{77A4FE34-91D0-4011-A7BF-16909543DBFA}"/>
+                <a16:creationId xmlns:a16="http://schemas.microsoft.com/office/drawing/2014/main" id="{2BC9C37F-A0A9-42D1-A5A5-D1E9640544EB}"/>
               </a:ext>
             </a:extLst>
           </p:cNvPr>
@@ -27036,7 +27036,7 @@
           <p:cNvPr id="12" name="">
             <a:extLst xmlns:a="http://schemas.openxmlformats.org/drawingml/2006/main">
               <a:ext uri="{FF2B5EF4-FFF2-40B4-BE49-F238E27FC236}">
-                <a16:creationId xmlns:a16="http://schemas.microsoft.com/office/drawing/2014/main" id="{C11F2668-D1CC-4443-88E2-85A087905CB6}"/>
+                <a16:creationId xmlns:a16="http://schemas.microsoft.com/office/drawing/2014/main" id="{BB2D6247-6945-400C-9F01-96FBB32CF33D}"/>
               </a:ext>
             </a:extLst>
           </p:cNvPr>
@@ -27069,7 +27069,7 @@
           <p:cNvPr id="13" name="">
             <a:extLst xmlns:a="http://schemas.openxmlformats.org/drawingml/2006/main">
               <a:ext uri="{FF2B5EF4-FFF2-40B4-BE49-F238E27FC236}">
-                <a16:creationId xmlns:a16="http://schemas.microsoft.com/office/drawing/2014/main" id="{4BE1471E-D7B8-48B7-A085-367A2370006C}"/>
+                <a16:creationId xmlns:a16="http://schemas.microsoft.com/office/drawing/2014/main" id="{5C3641D4-CB19-4251-9858-F6A00D0CC6FA}"/>
               </a:ext>
             </a:extLst>
           </p:cNvPr>
@@ -27133,7 +27133,7 @@
           <p:cNvPr id="14" name="">
             <a:extLst xmlns:a="http://schemas.openxmlformats.org/drawingml/2006/main">
               <a:ext uri="{FF2B5EF4-FFF2-40B4-BE49-F238E27FC236}">
-                <a16:creationId xmlns:a16="http://schemas.microsoft.com/office/drawing/2014/main" id="{F0F35DA6-8DE1-4319-89D7-873195484E58}"/>
+                <a16:creationId xmlns:a16="http://schemas.microsoft.com/office/drawing/2014/main" id="{D0CB906F-4BF2-4F9B-BCED-4DACE6A7D230}"/>
               </a:ext>
             </a:extLst>
           </p:cNvPr>
@@ -27166,7 +27166,7 @@
           <p:cNvPr id="15" name="">
             <a:extLst xmlns:a="http://schemas.openxmlformats.org/drawingml/2006/main">
               <a:ext uri="{FF2B5EF4-FFF2-40B4-BE49-F238E27FC236}">
-                <a16:creationId xmlns:a16="http://schemas.microsoft.com/office/drawing/2014/main" id="{5C589A06-8358-458C-9097-35526C5F4451}"/>
+                <a16:creationId xmlns:a16="http://schemas.microsoft.com/office/drawing/2014/main" id="{EBA10FAE-688F-4022-AE19-97907FD11F09}"/>
               </a:ext>
             </a:extLst>
           </p:cNvPr>
@@ -27230,7 +27230,7 @@
           <p:cNvPr id="16" name="">
             <a:extLst xmlns:a="http://schemas.openxmlformats.org/drawingml/2006/main">
               <a:ext uri="{FF2B5EF4-FFF2-40B4-BE49-F238E27FC236}">
-                <a16:creationId xmlns:a16="http://schemas.microsoft.com/office/drawing/2014/main" id="{91214F29-0B58-4E8B-A11A-8B33AEAAC3D4}"/>
+                <a16:creationId xmlns:a16="http://schemas.microsoft.com/office/drawing/2014/main" id="{CA739360-863E-4D02-87A1-3E742B313756}"/>
               </a:ext>
             </a:extLst>
           </p:cNvPr>
@@ -27263,7 +27263,7 @@
           <p:cNvPr id="17" name="">
             <a:extLst xmlns:a="http://schemas.openxmlformats.org/drawingml/2006/main">
               <a:ext uri="{FF2B5EF4-FFF2-40B4-BE49-F238E27FC236}">
-                <a16:creationId xmlns:a16="http://schemas.microsoft.com/office/drawing/2014/main" id="{B82A0B22-9BF2-4D9C-84BF-A82F0BCDB088}"/>
+                <a16:creationId xmlns:a16="http://schemas.microsoft.com/office/drawing/2014/main" id="{44776262-34F2-474E-904C-3D056AEBEBE7}"/>
               </a:ext>
             </a:extLst>
           </p:cNvPr>
@@ -27327,7 +27327,7 @@
           <p:cNvPr id="18" name="">
             <a:extLst xmlns:a="http://schemas.openxmlformats.org/drawingml/2006/main">
               <a:ext uri="{FF2B5EF4-FFF2-40B4-BE49-F238E27FC236}">
-                <a16:creationId xmlns:a16="http://schemas.microsoft.com/office/drawing/2014/main" id="{8DA5AD4D-B70C-40B2-A21C-41733B7EBB84}"/>
+                <a16:creationId xmlns:a16="http://schemas.microsoft.com/office/drawing/2014/main" id="{B785D2F4-AC14-4787-9075-6CC9D80589EA}"/>
               </a:ext>
             </a:extLst>
           </p:cNvPr>
@@ -27360,7 +27360,7 @@
           <p:cNvPr id="19" name="">
             <a:extLst xmlns:a="http://schemas.openxmlformats.org/drawingml/2006/main">
               <a:ext uri="{FF2B5EF4-FFF2-40B4-BE49-F238E27FC236}">
-                <a16:creationId xmlns:a16="http://schemas.microsoft.com/office/drawing/2014/main" id="{6365FC51-3634-44D5-B967-5EE24C280156}"/>
+                <a16:creationId xmlns:a16="http://schemas.microsoft.com/office/drawing/2014/main" id="{2F1439C4-963F-4A9B-B385-5FDD731B38B7}"/>
               </a:ext>
             </a:extLst>
           </p:cNvPr>
@@ -27424,7 +27424,7 @@
           <p:cNvPr id="20" name="">
             <a:extLst xmlns:a="http://schemas.openxmlformats.org/drawingml/2006/main">
               <a:ext uri="{FF2B5EF4-FFF2-40B4-BE49-F238E27FC236}">
-                <a16:creationId xmlns:a16="http://schemas.microsoft.com/office/drawing/2014/main" id="{58AB8F44-016D-4ED8-997C-F6674A71E082}"/>
+                <a16:creationId xmlns:a16="http://schemas.microsoft.com/office/drawing/2014/main" id="{A0D54A2B-582E-45C4-8BA3-45B3BDC9BFA7}"/>
               </a:ext>
             </a:extLst>
           </p:cNvPr>
@@ -27457,7 +27457,7 @@
           <p:cNvPr id="21" name="">
             <a:extLst xmlns:a="http://schemas.openxmlformats.org/drawingml/2006/main">
               <a:ext uri="{FF2B5EF4-FFF2-40B4-BE49-F238E27FC236}">
-                <a16:creationId xmlns:a16="http://schemas.microsoft.com/office/drawing/2014/main" id="{924EEBA7-4F28-45D9-BDA6-D232FE8BD476}"/>
+                <a16:creationId xmlns:a16="http://schemas.microsoft.com/office/drawing/2014/main" id="{1F3F2375-8B15-467E-84A8-B74A64A0AEAF}"/>
               </a:ext>
             </a:extLst>
           </p:cNvPr>
@@ -27521,7 +27521,7 @@
           <p:cNvPr id="22" name="">
             <a:extLst xmlns:a="http://schemas.openxmlformats.org/drawingml/2006/main">
               <a:ext uri="{FF2B5EF4-FFF2-40B4-BE49-F238E27FC236}">
-                <a16:creationId xmlns:a16="http://schemas.microsoft.com/office/drawing/2014/main" id="{1DF0788D-76EC-4D59-82AD-665C00CFB4A3}"/>
+                <a16:creationId xmlns:a16="http://schemas.microsoft.com/office/drawing/2014/main" id="{C5E33BDE-84AD-4EE3-BA4F-7D1E4A715217}"/>
               </a:ext>
             </a:extLst>
           </p:cNvPr>
@@ -27554,7 +27554,7 @@
           <p:cNvPr id="23" name="">
             <a:extLst xmlns:a="http://schemas.openxmlformats.org/drawingml/2006/main">
               <a:ext uri="{FF2B5EF4-FFF2-40B4-BE49-F238E27FC236}">
-                <a16:creationId xmlns:a16="http://schemas.microsoft.com/office/drawing/2014/main" id="{A7EDAD3E-7CB4-4A0D-A6FF-B28FF113D017}"/>
+                <a16:creationId xmlns:a16="http://schemas.microsoft.com/office/drawing/2014/main" id="{C52E16C9-6CED-44F2-9352-3D68600BE76A}"/>
               </a:ext>
             </a:extLst>
           </p:cNvPr>
@@ -27618,7 +27618,7 @@
           <p:cNvPr id="24" name="">
             <a:extLst xmlns:a="http://schemas.openxmlformats.org/drawingml/2006/main">
               <a:ext uri="{FF2B5EF4-FFF2-40B4-BE49-F238E27FC236}">
-                <a16:creationId xmlns:a16="http://schemas.microsoft.com/office/drawing/2014/main" id="{5CF2DCA2-C954-4F82-80BC-8C5FA46F0140}"/>
+                <a16:creationId xmlns:a16="http://schemas.microsoft.com/office/drawing/2014/main" id="{F65707BD-D84D-40B5-B484-E4BDA31A0CAC}"/>
               </a:ext>
             </a:extLst>
           </p:cNvPr>
@@ -27651,7 +27651,7 @@
           <p:cNvPr id="25" name="">
             <a:extLst xmlns:a="http://schemas.openxmlformats.org/drawingml/2006/main">
               <a:ext uri="{FF2B5EF4-FFF2-40B4-BE49-F238E27FC236}">
-                <a16:creationId xmlns:a16="http://schemas.microsoft.com/office/drawing/2014/main" id="{7371E3D0-B471-4282-B100-76AD0CF2C5A9}"/>
+                <a16:creationId xmlns:a16="http://schemas.microsoft.com/office/drawing/2014/main" id="{F8C73EE4-E533-4BA7-A1C4-07BC15BA95C1}"/>
               </a:ext>
             </a:extLst>
           </p:cNvPr>
@@ -27715,7 +27715,7 @@
           <p:cNvPr id="26" name="">
             <a:extLst xmlns:a="http://schemas.openxmlformats.org/drawingml/2006/main">
               <a:ext uri="{FF2B5EF4-FFF2-40B4-BE49-F238E27FC236}">
-                <a16:creationId xmlns:a16="http://schemas.microsoft.com/office/drawing/2014/main" id="{640719AD-820A-4BE3-9C3B-4C9D23E09074}"/>
+                <a16:creationId xmlns:a16="http://schemas.microsoft.com/office/drawing/2014/main" id="{5A416AF3-DE1C-4FA3-8554-1B2675678C66}"/>
               </a:ext>
             </a:extLst>
           </p:cNvPr>
@@ -27748,7 +27748,7 @@
           <p:cNvPr id="27" name="">
             <a:extLst xmlns:a="http://schemas.openxmlformats.org/drawingml/2006/main">
               <a:ext uri="{FF2B5EF4-FFF2-40B4-BE49-F238E27FC236}">
-                <a16:creationId xmlns:a16="http://schemas.microsoft.com/office/drawing/2014/main" id="{12994BF0-E56F-4D1C-9DF3-CA3F4FE5E795}"/>
+                <a16:creationId xmlns:a16="http://schemas.microsoft.com/office/drawing/2014/main" id="{6D9B917B-3245-4465-8E21-BA154636B0AE}"/>
               </a:ext>
             </a:extLst>
           </p:cNvPr>
@@ -27812,7 +27812,7 @@
           <p:cNvPr id="28" name="">
             <a:extLst xmlns:a="http://schemas.openxmlformats.org/drawingml/2006/main">
               <a:ext uri="{FF2B5EF4-FFF2-40B4-BE49-F238E27FC236}">
-                <a16:creationId xmlns:a16="http://schemas.microsoft.com/office/drawing/2014/main" id="{8368BB8F-4FC7-4B8B-B878-3B6399AA387E}"/>
+                <a16:creationId xmlns:a16="http://schemas.microsoft.com/office/drawing/2014/main" id="{A056EDB1-0F60-4421-B397-3381EFE97D7B}"/>
               </a:ext>
             </a:extLst>
           </p:cNvPr>
@@ -27845,7 +27845,7 @@
           <p:cNvPr id="29" name="">
             <a:extLst xmlns:a="http://schemas.openxmlformats.org/drawingml/2006/main">
               <a:ext uri="{FF2B5EF4-FFF2-40B4-BE49-F238E27FC236}">
-                <a16:creationId xmlns:a16="http://schemas.microsoft.com/office/drawing/2014/main" id="{F93B2B09-E965-4C5B-BDC8-C4AFD9D0F03E}"/>
+                <a16:creationId xmlns:a16="http://schemas.microsoft.com/office/drawing/2014/main" id="{38A2FB3A-78C0-4FBA-A02A-D476E0F789C4}"/>
               </a:ext>
             </a:extLst>
           </p:cNvPr>
@@ -27909,7 +27909,7 @@
           <p:cNvPr id="30" name="">
             <a:extLst xmlns:a="http://schemas.openxmlformats.org/drawingml/2006/main">
               <a:ext uri="{FF2B5EF4-FFF2-40B4-BE49-F238E27FC236}">
-                <a16:creationId xmlns:a16="http://schemas.microsoft.com/office/drawing/2014/main" id="{E3FCD6A2-B4AA-4948-A993-568EC279704F}"/>
+                <a16:creationId xmlns:a16="http://schemas.microsoft.com/office/drawing/2014/main" id="{68D1C7D0-B13F-480D-AB7A-FAC0B176A7F9}"/>
               </a:ext>
             </a:extLst>
           </p:cNvPr>
@@ -27942,7 +27942,7 @@
           <p:cNvPr id="31" name="">
             <a:extLst xmlns:a="http://schemas.openxmlformats.org/drawingml/2006/main">
               <a:ext uri="{FF2B5EF4-FFF2-40B4-BE49-F238E27FC236}">
-                <a16:creationId xmlns:a16="http://schemas.microsoft.com/office/drawing/2014/main" id="{C6B77ED6-EF47-4E11-BC3B-346363EB9086}"/>
+                <a16:creationId xmlns:a16="http://schemas.microsoft.com/office/drawing/2014/main" id="{5EEE754F-D6FE-401B-B680-B9D6D0B7EA4F}"/>
               </a:ext>
             </a:extLst>
           </p:cNvPr>
@@ -28006,7 +28006,7 @@
           <p:cNvPr id="32" name="">
             <a:extLst xmlns:a="http://schemas.openxmlformats.org/drawingml/2006/main">
               <a:ext uri="{FF2B5EF4-FFF2-40B4-BE49-F238E27FC236}">
-                <a16:creationId xmlns:a16="http://schemas.microsoft.com/office/drawing/2014/main" id="{D2D114ED-1A80-49A7-A934-32359CE22508}"/>
+                <a16:creationId xmlns:a16="http://schemas.microsoft.com/office/drawing/2014/main" id="{EA995EE9-C98D-45EB-AAC6-D2D61B154E5D}"/>
               </a:ext>
             </a:extLst>
           </p:cNvPr>
@@ -28070,7 +28070,7 @@
           <p:cNvPr id="33" name="">
             <a:extLst xmlns:a="http://schemas.openxmlformats.org/drawingml/2006/main">
               <a:ext uri="{FF2B5EF4-FFF2-40B4-BE49-F238E27FC236}">
-                <a16:creationId xmlns:a16="http://schemas.microsoft.com/office/drawing/2014/main" id="{3D9A3C0D-C838-4AA8-90FF-42AE947DACCD}"/>
+                <a16:creationId xmlns:a16="http://schemas.microsoft.com/office/drawing/2014/main" id="{1E7BF839-77C9-4E56-9B90-37DA4F761F01}"/>
               </a:ext>
             </a:extLst>
           </p:cNvPr>
@@ -28132,7 +28132,7 @@
     </p:spTree>
     <p:extLst>
       <p:ext uri="{BB962C8B-B14F-4D97-AF65-F5344CB8AC3E}">
-        <p14:creationId xmlns:p14="http://schemas.microsoft.com/office/powerpoint/2010/main" val="161916606"/>
+        <p14:creationId xmlns:p14="http://schemas.microsoft.com/office/powerpoint/2010/main" val="1953245131"/>
       </p:ext>
     </p:extLst>
   </p:cSld>
@@ -28156,7 +28156,7 @@
           <p:cNvPr id="1" name="">
             <a:extLst xmlns:a="http://schemas.openxmlformats.org/drawingml/2006/main">
               <a:ext uri="{FF2B5EF4-FFF2-40B4-BE49-F238E27FC236}">
-                <a16:creationId xmlns:a16="http://schemas.microsoft.com/office/drawing/2014/main" id="{4B75F559-288A-494B-A697-A0E9CE842868}"/>
+                <a16:creationId xmlns:a16="http://schemas.microsoft.com/office/drawing/2014/main" id="{2F48DABF-F319-4104-8458-8EA7D110124C}"/>
               </a:ext>
             </a:extLst>
           </p:cNvPr>
@@ -28189,7 +28189,7 @@
           <p:cNvPr id="2" name="">
             <a:extLst xmlns:a="http://schemas.openxmlformats.org/drawingml/2006/main">
               <a:ext uri="{FF2B5EF4-FFF2-40B4-BE49-F238E27FC236}">
-                <a16:creationId xmlns:a16="http://schemas.microsoft.com/office/drawing/2014/main" id="{4C117748-B349-4E34-B1DD-F5CD8B862931}"/>
+                <a16:creationId xmlns:a16="http://schemas.microsoft.com/office/drawing/2014/main" id="{EBFD8C6A-4CE4-4866-B92E-976D597B1B96}"/>
               </a:ext>
             </a:extLst>
           </p:cNvPr>
@@ -28222,7 +28222,7 @@
           <p:cNvPr id="3" name="">
             <a:extLst xmlns:a="http://schemas.openxmlformats.org/drawingml/2006/main">
               <a:ext uri="{FF2B5EF4-FFF2-40B4-BE49-F238E27FC236}">
-                <a16:creationId xmlns:a16="http://schemas.microsoft.com/office/drawing/2014/main" id="{FE26ADFD-83AA-42B5-B531-312263990CC0}"/>
+                <a16:creationId xmlns:a16="http://schemas.microsoft.com/office/drawing/2014/main" id="{711ED2CB-8A0B-4568-9181-E495ECBAD4E7}"/>
               </a:ext>
             </a:extLst>
           </p:cNvPr>
@@ -28286,7 +28286,7 @@
           <p:cNvPr id="4" name="">
             <a:extLst xmlns:a="http://schemas.openxmlformats.org/drawingml/2006/main">
               <a:ext uri="{FF2B5EF4-FFF2-40B4-BE49-F238E27FC236}">
-                <a16:creationId xmlns:a16="http://schemas.microsoft.com/office/drawing/2014/main" id="{28252A2F-4A80-47DC-8F69-DCED5E2B8FB1}"/>
+                <a16:creationId xmlns:a16="http://schemas.microsoft.com/office/drawing/2014/main" id="{89A451B5-5A8B-4410-82F3-972196154C15}"/>
               </a:ext>
             </a:extLst>
           </p:cNvPr>
@@ -28350,7 +28350,7 @@
           <p:cNvPr id="5" name="">
             <a:extLst xmlns:a="http://schemas.openxmlformats.org/drawingml/2006/main">
               <a:ext uri="{FF2B5EF4-FFF2-40B4-BE49-F238E27FC236}">
-                <a16:creationId xmlns:a16="http://schemas.microsoft.com/office/drawing/2014/main" id="{CAEEA5D4-EB0F-4186-9D9F-E94397F0F807}"/>
+                <a16:creationId xmlns:a16="http://schemas.microsoft.com/office/drawing/2014/main" id="{8F10A55A-35A1-40B1-A1C1-49989A818DF1}"/>
               </a:ext>
             </a:extLst>
           </p:cNvPr>
@@ -28414,7 +28414,7 @@
           <p:cNvPr id="6" name="">
             <a:extLst xmlns:a="http://schemas.openxmlformats.org/drawingml/2006/main">
               <a:ext uri="{FF2B5EF4-FFF2-40B4-BE49-F238E27FC236}">
-                <a16:creationId xmlns:a16="http://schemas.microsoft.com/office/drawing/2014/main" id="{FCADE07B-5A16-448E-9DE2-A97C1B7AC488}"/>
+                <a16:creationId xmlns:a16="http://schemas.microsoft.com/office/drawing/2014/main" id="{860B7CD2-1FD9-46F8-B059-8DD4BADC23EF}"/>
               </a:ext>
             </a:extLst>
           </p:cNvPr>
@@ -28447,7 +28447,7 @@
           <p:cNvPr id="7" name="">
             <a:extLst xmlns:a="http://schemas.openxmlformats.org/drawingml/2006/main">
               <a:ext uri="{FF2B5EF4-FFF2-40B4-BE49-F238E27FC236}">
-                <a16:creationId xmlns:a16="http://schemas.microsoft.com/office/drawing/2014/main" id="{284ABBED-3344-4556-9B7D-CBD1C74B2AE3}"/>
+                <a16:creationId xmlns:a16="http://schemas.microsoft.com/office/drawing/2014/main" id="{99B56523-51D2-42A7-BDC4-046CB43447D1}"/>
               </a:ext>
             </a:extLst>
           </p:cNvPr>
@@ -28511,7 +28511,7 @@
           <p:cNvPr id="8" name="">
             <a:extLst xmlns:a="http://schemas.openxmlformats.org/drawingml/2006/main">
               <a:ext uri="{FF2B5EF4-FFF2-40B4-BE49-F238E27FC236}">
-                <a16:creationId xmlns:a16="http://schemas.microsoft.com/office/drawing/2014/main" id="{9997C332-BB8E-4E1A-88C8-A1823A10911E}"/>
+                <a16:creationId xmlns:a16="http://schemas.microsoft.com/office/drawing/2014/main" id="{53893A72-EF57-481A-B283-255EA6F7FB4A}"/>
               </a:ext>
             </a:extLst>
           </p:cNvPr>
@@ -28544,7 +28544,7 @@
           <p:cNvPr id="9" name="">
             <a:extLst xmlns:a="http://schemas.openxmlformats.org/drawingml/2006/main">
               <a:ext uri="{FF2B5EF4-FFF2-40B4-BE49-F238E27FC236}">
-                <a16:creationId xmlns:a16="http://schemas.microsoft.com/office/drawing/2014/main" id="{E2A20722-8469-4C0F-8763-498F8D7794E0}"/>
+                <a16:creationId xmlns:a16="http://schemas.microsoft.com/office/drawing/2014/main" id="{45B718E4-0C92-4D2B-8572-F2AA93615184}"/>
               </a:ext>
             </a:extLst>
           </p:cNvPr>
@@ -28608,7 +28608,7 @@
           <p:cNvPr id="10" name="">
             <a:extLst xmlns:a="http://schemas.openxmlformats.org/drawingml/2006/main">
               <a:ext uri="{FF2B5EF4-FFF2-40B4-BE49-F238E27FC236}">
-                <a16:creationId xmlns:a16="http://schemas.microsoft.com/office/drawing/2014/main" id="{C94FEC1B-1B72-460E-BA90-37C49C8827A9}"/>
+                <a16:creationId xmlns:a16="http://schemas.microsoft.com/office/drawing/2014/main" id="{37345806-5D57-4442-AF10-E68F272CBF51}"/>
               </a:ext>
             </a:extLst>
           </p:cNvPr>
@@ -28641,7 +28641,7 @@
           <p:cNvPr id="11" name="">
             <a:extLst xmlns:a="http://schemas.openxmlformats.org/drawingml/2006/main">
               <a:ext uri="{FF2B5EF4-FFF2-40B4-BE49-F238E27FC236}">
-                <a16:creationId xmlns:a16="http://schemas.microsoft.com/office/drawing/2014/main" id="{E16C0D18-3B09-4F0B-BCC2-3B92D00A8C19}"/>
+                <a16:creationId xmlns:a16="http://schemas.microsoft.com/office/drawing/2014/main" id="{9A5099B2-5B76-472E-8D24-BB7895C0B24C}"/>
               </a:ext>
             </a:extLst>
           </p:cNvPr>
@@ -28695,7 +28695,7 @@
                 <a:ea typeface="Aptos"/>
                 <a:cs typeface="Aptos"/>
               </a:rPr>
-              <a:t>La corrrelation humaine est significative mais reste moderee.</a:t>
+              <a:t>La corrrelation humaine est bonne, mais reste dependante du scope et du protocole.</a:t>
             </a:r>
           </a:p>
         </p:txBody>
@@ -28705,7 +28705,7 @@
           <p:cNvPr id="12" name="">
             <a:extLst xmlns:a="http://schemas.openxmlformats.org/drawingml/2006/main">
               <a:ext uri="{FF2B5EF4-FFF2-40B4-BE49-F238E27FC236}">
-                <a16:creationId xmlns:a16="http://schemas.microsoft.com/office/drawing/2014/main" id="{9590EC60-1CCB-4298-83A7-D05443A62EA6}"/>
+                <a16:creationId xmlns:a16="http://schemas.microsoft.com/office/drawing/2014/main" id="{65AC18C6-8A2A-4435-AD36-5A44C0EE0C56}"/>
               </a:ext>
             </a:extLst>
           </p:cNvPr>
@@ -28738,7 +28738,7 @@
           <p:cNvPr id="13" name="">
             <a:extLst xmlns:a="http://schemas.openxmlformats.org/drawingml/2006/main">
               <a:ext uri="{FF2B5EF4-FFF2-40B4-BE49-F238E27FC236}">
-                <a16:creationId xmlns:a16="http://schemas.microsoft.com/office/drawing/2014/main" id="{A9D52A70-5A89-4B6E-9C33-4301523ECF7A}"/>
+                <a16:creationId xmlns:a16="http://schemas.microsoft.com/office/drawing/2014/main" id="{EFAE8086-F0F6-4BFA-AC31-AC56E810CAE0}"/>
               </a:ext>
             </a:extLst>
           </p:cNvPr>
@@ -28802,7 +28802,7 @@
           <p:cNvPr id="14" name="">
             <a:extLst xmlns:a="http://schemas.openxmlformats.org/drawingml/2006/main">
               <a:ext uri="{FF2B5EF4-FFF2-40B4-BE49-F238E27FC236}">
-                <a16:creationId xmlns:a16="http://schemas.microsoft.com/office/drawing/2014/main" id="{5897604C-EE63-4033-A3F1-43B25576DDD4}"/>
+                <a16:creationId xmlns:a16="http://schemas.microsoft.com/office/drawing/2014/main" id="{111EE708-5647-47A5-9185-1D5283BD1620}"/>
               </a:ext>
             </a:extLst>
           </p:cNvPr>
@@ -28835,7 +28835,7 @@
           <p:cNvPr id="15" name="">
             <a:extLst xmlns:a="http://schemas.openxmlformats.org/drawingml/2006/main">
               <a:ext uri="{FF2B5EF4-FFF2-40B4-BE49-F238E27FC236}">
-                <a16:creationId xmlns:a16="http://schemas.microsoft.com/office/drawing/2014/main" id="{DDA55D0F-B914-403F-94B6-82C44B3AD359}"/>
+                <a16:creationId xmlns:a16="http://schemas.microsoft.com/office/drawing/2014/main" id="{7B25F5B7-D930-4894-A211-C1C1A35E38EE}"/>
               </a:ext>
             </a:extLst>
           </p:cNvPr>
@@ -28899,7 +28899,7 @@
           <p:cNvPr id="16" name="">
             <a:extLst xmlns:a="http://schemas.openxmlformats.org/drawingml/2006/main">
               <a:ext uri="{FF2B5EF4-FFF2-40B4-BE49-F238E27FC236}">
-                <a16:creationId xmlns:a16="http://schemas.microsoft.com/office/drawing/2014/main" id="{8B861951-8A48-4E48-8EEF-700A389DCB5E}"/>
+                <a16:creationId xmlns:a16="http://schemas.microsoft.com/office/drawing/2014/main" id="{2D50C4CE-5082-4003-B7E9-0ECC7A4C7C78}"/>
               </a:ext>
             </a:extLst>
           </p:cNvPr>
@@ -28963,7 +28963,7 @@
           <p:cNvPr id="17" name="">
             <a:extLst xmlns:a="http://schemas.openxmlformats.org/drawingml/2006/main">
               <a:ext uri="{FF2B5EF4-FFF2-40B4-BE49-F238E27FC236}">
-                <a16:creationId xmlns:a16="http://schemas.microsoft.com/office/drawing/2014/main" id="{103FC157-1FD1-44DE-9109-80F407847F34}"/>
+                <a16:creationId xmlns:a16="http://schemas.microsoft.com/office/drawing/2014/main" id="{632CF6B2-95A3-4121-9B5D-51E568D58764}"/>
               </a:ext>
             </a:extLst>
           </p:cNvPr>
@@ -29027,7 +29027,7 @@
           <p:cNvPr id="18" name="">
             <a:extLst xmlns:a="http://schemas.openxmlformats.org/drawingml/2006/main">
               <a:ext uri="{FF2B5EF4-FFF2-40B4-BE49-F238E27FC236}">
-                <a16:creationId xmlns:a16="http://schemas.microsoft.com/office/drawing/2014/main" id="{0D9F5943-6510-441F-9104-C7F4C60CB067}"/>
+                <a16:creationId xmlns:a16="http://schemas.microsoft.com/office/drawing/2014/main" id="{C169A843-A11A-4239-9C4B-3334BC5ADC2E}"/>
               </a:ext>
             </a:extLst>
           </p:cNvPr>
@@ -29089,7 +29089,7 @@
     </p:spTree>
     <p:extLst>
       <p:ext uri="{BB962C8B-B14F-4D97-AF65-F5344CB8AC3E}">
-        <p14:creationId xmlns:p14="http://schemas.microsoft.com/office/powerpoint/2010/main" val="192023028"/>
+        <p14:creationId xmlns:p14="http://schemas.microsoft.com/office/powerpoint/2010/main" val="1184730529"/>
       </p:ext>
     </p:extLst>
   </p:cSld>
@@ -29113,7 +29113,7 @@
           <p:cNvPr id="1" name="">
             <a:extLst xmlns:a="http://schemas.openxmlformats.org/drawingml/2006/main">
               <a:ext uri="{FF2B5EF4-FFF2-40B4-BE49-F238E27FC236}">
-                <a16:creationId xmlns:a16="http://schemas.microsoft.com/office/drawing/2014/main" id="{7FFE904D-7709-4D91-BD75-7CD6FDB43AE2}"/>
+                <a16:creationId xmlns:a16="http://schemas.microsoft.com/office/drawing/2014/main" id="{CDAB0082-AD2B-4F95-A0CD-7E2A22846C25}"/>
               </a:ext>
             </a:extLst>
           </p:cNvPr>
@@ -29146,7 +29146,7 @@
           <p:cNvPr id="2" name="">
             <a:extLst xmlns:a="http://schemas.openxmlformats.org/drawingml/2006/main">
               <a:ext uri="{FF2B5EF4-FFF2-40B4-BE49-F238E27FC236}">
-                <a16:creationId xmlns:a16="http://schemas.microsoft.com/office/drawing/2014/main" id="{33A35E1A-825F-4CCE-B5B6-7E3FCB308038}"/>
+                <a16:creationId xmlns:a16="http://schemas.microsoft.com/office/drawing/2014/main" id="{6F8D88C9-4047-4011-8B28-4764509DABA7}"/>
               </a:ext>
             </a:extLst>
           </p:cNvPr>
@@ -29179,7 +29179,7 @@
           <p:cNvPr id="3" name="">
             <a:extLst xmlns:a="http://schemas.openxmlformats.org/drawingml/2006/main">
               <a:ext uri="{FF2B5EF4-FFF2-40B4-BE49-F238E27FC236}">
-                <a16:creationId xmlns:a16="http://schemas.microsoft.com/office/drawing/2014/main" id="{AC070D69-CE6E-47FD-9994-3B49E841F755}"/>
+                <a16:creationId xmlns:a16="http://schemas.microsoft.com/office/drawing/2014/main" id="{F005FFF3-DC88-40FA-B679-739A82B491B4}"/>
               </a:ext>
             </a:extLst>
           </p:cNvPr>
@@ -29243,7 +29243,7 @@
           <p:cNvPr id="4" name="">
             <a:extLst xmlns:a="http://schemas.openxmlformats.org/drawingml/2006/main">
               <a:ext uri="{FF2B5EF4-FFF2-40B4-BE49-F238E27FC236}">
-                <a16:creationId xmlns:a16="http://schemas.microsoft.com/office/drawing/2014/main" id="{5922E2DA-30FC-4B02-A605-E435ADFFB10A}"/>
+                <a16:creationId xmlns:a16="http://schemas.microsoft.com/office/drawing/2014/main" id="{1946F4E9-EA0C-40F6-A36F-B3537AF56935}"/>
               </a:ext>
             </a:extLst>
           </p:cNvPr>
@@ -29307,7 +29307,7 @@
           <p:cNvPr id="5" name="">
             <a:extLst xmlns:a="http://schemas.openxmlformats.org/drawingml/2006/main">
               <a:ext uri="{FF2B5EF4-FFF2-40B4-BE49-F238E27FC236}">
-                <a16:creationId xmlns:a16="http://schemas.microsoft.com/office/drawing/2014/main" id="{12A4C1D0-504B-4EC6-ABA6-FB88D1880EF5}"/>
+                <a16:creationId xmlns:a16="http://schemas.microsoft.com/office/drawing/2014/main" id="{7227037B-E12F-453B-8771-15F4B938291B}"/>
               </a:ext>
             </a:extLst>
           </p:cNvPr>
@@ -29371,7 +29371,7 @@
           <p:cNvPr id="6" name="">
             <a:extLst xmlns:a="http://schemas.openxmlformats.org/drawingml/2006/main">
               <a:ext uri="{FF2B5EF4-FFF2-40B4-BE49-F238E27FC236}">
-                <a16:creationId xmlns:a16="http://schemas.microsoft.com/office/drawing/2014/main" id="{634C3CE7-5BEF-4DEC-97AE-1C149CEBAC84}"/>
+                <a16:creationId xmlns:a16="http://schemas.microsoft.com/office/drawing/2014/main" id="{475969D5-824B-4558-8E89-B1E358A577F5}"/>
               </a:ext>
             </a:extLst>
           </p:cNvPr>
@@ -29404,7 +29404,7 @@
           <p:cNvPr id="7" name="">
             <a:extLst xmlns:a="http://schemas.openxmlformats.org/drawingml/2006/main">
               <a:ext uri="{FF2B5EF4-FFF2-40B4-BE49-F238E27FC236}">
-                <a16:creationId xmlns:a16="http://schemas.microsoft.com/office/drawing/2014/main" id="{6F18FA21-D511-479E-82DF-29D114D06684}"/>
+                <a16:creationId xmlns:a16="http://schemas.microsoft.com/office/drawing/2014/main" id="{1FB847EC-F6BE-4134-8066-F79858328576}"/>
               </a:ext>
             </a:extLst>
           </p:cNvPr>
@@ -29468,7 +29468,7 @@
           <p:cNvPr id="8" name="">
             <a:extLst xmlns:a="http://schemas.openxmlformats.org/drawingml/2006/main">
               <a:ext uri="{FF2B5EF4-FFF2-40B4-BE49-F238E27FC236}">
-                <a16:creationId xmlns:a16="http://schemas.microsoft.com/office/drawing/2014/main" id="{19FC8489-B921-45F5-B40B-A59D79A11CB4}"/>
+                <a16:creationId xmlns:a16="http://schemas.microsoft.com/office/drawing/2014/main" id="{D04C1BDF-876C-4289-B574-1329C9D7B9A5}"/>
               </a:ext>
             </a:extLst>
           </p:cNvPr>
@@ -29501,7 +29501,7 @@
           <p:cNvPr id="9" name="">
             <a:extLst xmlns:a="http://schemas.openxmlformats.org/drawingml/2006/main">
               <a:ext uri="{FF2B5EF4-FFF2-40B4-BE49-F238E27FC236}">
-                <a16:creationId xmlns:a16="http://schemas.microsoft.com/office/drawing/2014/main" id="{894D9F2F-29E4-4598-9B30-E8DC69A0DBF6}"/>
+                <a16:creationId xmlns:a16="http://schemas.microsoft.com/office/drawing/2014/main" id="{F6F51EBC-81D6-4AFB-9B14-DEB21DDFBBB9}"/>
               </a:ext>
             </a:extLst>
           </p:cNvPr>
@@ -29565,7 +29565,7 @@
           <p:cNvPr id="10" name="">
             <a:extLst xmlns:a="http://schemas.openxmlformats.org/drawingml/2006/main">
               <a:ext uri="{FF2B5EF4-FFF2-40B4-BE49-F238E27FC236}">
-                <a16:creationId xmlns:a16="http://schemas.microsoft.com/office/drawing/2014/main" id="{E3DE43AB-1EAD-4973-A4AB-F16FEF2CAE4E}"/>
+                <a16:creationId xmlns:a16="http://schemas.microsoft.com/office/drawing/2014/main" id="{F45CEE70-9823-4260-89CE-486417EE1AA8}"/>
               </a:ext>
             </a:extLst>
           </p:cNvPr>
@@ -29598,7 +29598,7 @@
           <p:cNvPr id="11" name="">
             <a:extLst xmlns:a="http://schemas.openxmlformats.org/drawingml/2006/main">
               <a:ext uri="{FF2B5EF4-FFF2-40B4-BE49-F238E27FC236}">
-                <a16:creationId xmlns:a16="http://schemas.microsoft.com/office/drawing/2014/main" id="{65662E3E-C52D-4966-939E-8CC2ED6C4047}"/>
+                <a16:creationId xmlns:a16="http://schemas.microsoft.com/office/drawing/2014/main" id="{9D162800-9C4A-48A2-A2D5-07BB058AF32B}"/>
               </a:ext>
             </a:extLst>
           </p:cNvPr>
@@ -29662,7 +29662,7 @@
           <p:cNvPr id="12" name="">
             <a:extLst xmlns:a="http://schemas.openxmlformats.org/drawingml/2006/main">
               <a:ext uri="{FF2B5EF4-FFF2-40B4-BE49-F238E27FC236}">
-                <a16:creationId xmlns:a16="http://schemas.microsoft.com/office/drawing/2014/main" id="{CAD00D95-EB06-4D6A-A96B-D7880EDDADA9}"/>
+                <a16:creationId xmlns:a16="http://schemas.microsoft.com/office/drawing/2014/main" id="{C0E20B7C-7D1F-4417-8AAD-65F44BFDDBEE}"/>
               </a:ext>
             </a:extLst>
           </p:cNvPr>
@@ -29695,7 +29695,7 @@
           <p:cNvPr id="13" name="">
             <a:extLst xmlns:a="http://schemas.openxmlformats.org/drawingml/2006/main">
               <a:ext uri="{FF2B5EF4-FFF2-40B4-BE49-F238E27FC236}">
-                <a16:creationId xmlns:a16="http://schemas.microsoft.com/office/drawing/2014/main" id="{140C7EDA-3F9C-419B-B6E5-13807168A54D}"/>
+                <a16:creationId xmlns:a16="http://schemas.microsoft.com/office/drawing/2014/main" id="{D266CFCD-99E1-45CB-876B-5FB4F90DA609}"/>
               </a:ext>
             </a:extLst>
           </p:cNvPr>
@@ -29759,7 +29759,7 @@
           <p:cNvPr id="14" name="">
             <a:extLst xmlns:a="http://schemas.openxmlformats.org/drawingml/2006/main">
               <a:ext uri="{FF2B5EF4-FFF2-40B4-BE49-F238E27FC236}">
-                <a16:creationId xmlns:a16="http://schemas.microsoft.com/office/drawing/2014/main" id="{88ECE8B2-16B7-4217-B267-6595D101F880}"/>
+                <a16:creationId xmlns:a16="http://schemas.microsoft.com/office/drawing/2014/main" id="{A543B5EC-BE77-4066-8881-8E62994D8783}"/>
               </a:ext>
             </a:extLst>
           </p:cNvPr>
@@ -29792,7 +29792,7 @@
           <p:cNvPr id="15" name="">
             <a:extLst xmlns:a="http://schemas.openxmlformats.org/drawingml/2006/main">
               <a:ext uri="{FF2B5EF4-FFF2-40B4-BE49-F238E27FC236}">
-                <a16:creationId xmlns:a16="http://schemas.microsoft.com/office/drawing/2014/main" id="{C319693C-EEB3-45C3-B298-243410138270}"/>
+                <a16:creationId xmlns:a16="http://schemas.microsoft.com/office/drawing/2014/main" id="{0A24AAD1-D5F1-44B5-A8A5-D6C1141FC471}"/>
               </a:ext>
             </a:extLst>
           </p:cNvPr>
@@ -29856,7 +29856,7 @@
           <p:cNvPr id="16" name="">
             <a:extLst xmlns:a="http://schemas.openxmlformats.org/drawingml/2006/main">
               <a:ext uri="{FF2B5EF4-FFF2-40B4-BE49-F238E27FC236}">
-                <a16:creationId xmlns:a16="http://schemas.microsoft.com/office/drawing/2014/main" id="{CB9796A3-E73C-4C90-B659-00045AAB5690}"/>
+                <a16:creationId xmlns:a16="http://schemas.microsoft.com/office/drawing/2014/main" id="{2382FB2D-425C-44BB-973C-123F4A2CFABB}"/>
               </a:ext>
             </a:extLst>
           </p:cNvPr>
@@ -29889,7 +29889,7 @@
           <p:cNvPr id="17" name="">
             <a:extLst xmlns:a="http://schemas.openxmlformats.org/drawingml/2006/main">
               <a:ext uri="{FF2B5EF4-FFF2-40B4-BE49-F238E27FC236}">
-                <a16:creationId xmlns:a16="http://schemas.microsoft.com/office/drawing/2014/main" id="{2098A115-20FA-4738-9E80-04C0A84F072B}"/>
+                <a16:creationId xmlns:a16="http://schemas.microsoft.com/office/drawing/2014/main" id="{626CD3A9-E7D4-47A3-A1B0-9DE56349B682}"/>
               </a:ext>
             </a:extLst>
           </p:cNvPr>
@@ -29953,7 +29953,7 @@
           <p:cNvPr id="18" name="">
             <a:extLst xmlns:a="http://schemas.openxmlformats.org/drawingml/2006/main">
               <a:ext uri="{FF2B5EF4-FFF2-40B4-BE49-F238E27FC236}">
-                <a16:creationId xmlns:a16="http://schemas.microsoft.com/office/drawing/2014/main" id="{B9882C9C-9CB8-4C43-8484-008848F40B66}"/>
+                <a16:creationId xmlns:a16="http://schemas.microsoft.com/office/drawing/2014/main" id="{65949EC3-511E-4635-9E7E-2C6419650C83}"/>
               </a:ext>
             </a:extLst>
           </p:cNvPr>
@@ -29986,7 +29986,7 @@
           <p:cNvPr id="19" name="">
             <a:extLst xmlns:a="http://schemas.openxmlformats.org/drawingml/2006/main">
               <a:ext uri="{FF2B5EF4-FFF2-40B4-BE49-F238E27FC236}">
-                <a16:creationId xmlns:a16="http://schemas.microsoft.com/office/drawing/2014/main" id="{CB75DA6F-0EE3-44A6-8C00-0DCDE8070944}"/>
+                <a16:creationId xmlns:a16="http://schemas.microsoft.com/office/drawing/2014/main" id="{03227608-6B26-429E-8AEC-911742FF974B}"/>
               </a:ext>
             </a:extLst>
           </p:cNvPr>
@@ -30050,7 +30050,7 @@
           <p:cNvPr id="20" name="">
             <a:extLst xmlns:a="http://schemas.openxmlformats.org/drawingml/2006/main">
               <a:ext uri="{FF2B5EF4-FFF2-40B4-BE49-F238E27FC236}">
-                <a16:creationId xmlns:a16="http://schemas.microsoft.com/office/drawing/2014/main" id="{AADD1EF3-E623-42AA-9C20-FEC1BCDC0FD0}"/>
+                <a16:creationId xmlns:a16="http://schemas.microsoft.com/office/drawing/2014/main" id="{9AE8F149-5C69-423C-A50B-1C3FC064AD6D}"/>
               </a:ext>
             </a:extLst>
           </p:cNvPr>
@@ -30083,7 +30083,7 @@
           <p:cNvPr id="21" name="">
             <a:extLst xmlns:a="http://schemas.openxmlformats.org/drawingml/2006/main">
               <a:ext uri="{FF2B5EF4-FFF2-40B4-BE49-F238E27FC236}">
-                <a16:creationId xmlns:a16="http://schemas.microsoft.com/office/drawing/2014/main" id="{8E03551D-57BF-4AD1-9FBB-390DF4E419A1}"/>
+                <a16:creationId xmlns:a16="http://schemas.microsoft.com/office/drawing/2014/main" id="{09CF619D-15F4-495C-887B-CC38F39B0BBA}"/>
               </a:ext>
             </a:extLst>
           </p:cNvPr>
@@ -30147,7 +30147,7 @@
           <p:cNvPr id="22" name="">
             <a:extLst xmlns:a="http://schemas.openxmlformats.org/drawingml/2006/main">
               <a:ext uri="{FF2B5EF4-FFF2-40B4-BE49-F238E27FC236}">
-                <a16:creationId xmlns:a16="http://schemas.microsoft.com/office/drawing/2014/main" id="{6D3E4712-74EE-4BC3-9252-88D617D0D08F}"/>
+                <a16:creationId xmlns:a16="http://schemas.microsoft.com/office/drawing/2014/main" id="{EED5D831-FD4A-46D6-98A3-3FCB25CFDDED}"/>
               </a:ext>
             </a:extLst>
           </p:cNvPr>
@@ -30180,7 +30180,7 @@
           <p:cNvPr id="23" name="">
             <a:extLst xmlns:a="http://schemas.openxmlformats.org/drawingml/2006/main">
               <a:ext uri="{FF2B5EF4-FFF2-40B4-BE49-F238E27FC236}">
-                <a16:creationId xmlns:a16="http://schemas.microsoft.com/office/drawing/2014/main" id="{DD9B8C6D-8414-433C-A74E-C6FFB2B98557}"/>
+                <a16:creationId xmlns:a16="http://schemas.microsoft.com/office/drawing/2014/main" id="{DF89E4F3-7275-4C1C-8E19-A2F8F92655FE}"/>
               </a:ext>
             </a:extLst>
           </p:cNvPr>
@@ -30244,7 +30244,7 @@
           <p:cNvPr id="24" name="">
             <a:extLst xmlns:a="http://schemas.openxmlformats.org/drawingml/2006/main">
               <a:ext uri="{FF2B5EF4-FFF2-40B4-BE49-F238E27FC236}">
-                <a16:creationId xmlns:a16="http://schemas.microsoft.com/office/drawing/2014/main" id="{53A1F8E9-6EAA-4D32-97C8-2D408E18AF14}"/>
+                <a16:creationId xmlns:a16="http://schemas.microsoft.com/office/drawing/2014/main" id="{81385335-7975-4F89-AA2B-DDEAFEF5BF2C}"/>
               </a:ext>
             </a:extLst>
           </p:cNvPr>
@@ -30277,7 +30277,7 @@
           <p:cNvPr id="25" name="">
             <a:extLst xmlns:a="http://schemas.openxmlformats.org/drawingml/2006/main">
               <a:ext uri="{FF2B5EF4-FFF2-40B4-BE49-F238E27FC236}">
-                <a16:creationId xmlns:a16="http://schemas.microsoft.com/office/drawing/2014/main" id="{1822168A-958A-43D2-888C-7D6AD17CA651}"/>
+                <a16:creationId xmlns:a16="http://schemas.microsoft.com/office/drawing/2014/main" id="{BBC71A67-3CCE-4A80-81CF-C603C83E4525}"/>
               </a:ext>
             </a:extLst>
           </p:cNvPr>
@@ -30341,7 +30341,7 @@
           <p:cNvPr id="26" name="">
             <a:extLst xmlns:a="http://schemas.openxmlformats.org/drawingml/2006/main">
               <a:ext uri="{FF2B5EF4-FFF2-40B4-BE49-F238E27FC236}">
-                <a16:creationId xmlns:a16="http://schemas.microsoft.com/office/drawing/2014/main" id="{5704E226-BFBE-4F26-BB58-649E89224B09}"/>
+                <a16:creationId xmlns:a16="http://schemas.microsoft.com/office/drawing/2014/main" id="{635BFD59-3E1D-4A62-972F-473943FCB663}"/>
               </a:ext>
             </a:extLst>
           </p:cNvPr>
@@ -30374,7 +30374,7 @@
           <p:cNvPr id="27" name="">
             <a:extLst xmlns:a="http://schemas.openxmlformats.org/drawingml/2006/main">
               <a:ext uri="{FF2B5EF4-FFF2-40B4-BE49-F238E27FC236}">
-                <a16:creationId xmlns:a16="http://schemas.microsoft.com/office/drawing/2014/main" id="{8DFC4685-8E33-42AF-96DD-3B9884E45E50}"/>
+                <a16:creationId xmlns:a16="http://schemas.microsoft.com/office/drawing/2014/main" id="{12CAB30F-1BA6-4D5D-B0A2-F579C873A4E7}"/>
               </a:ext>
             </a:extLst>
           </p:cNvPr>
@@ -30438,7 +30438,7 @@
           <p:cNvPr id="28" name="">
             <a:extLst xmlns:a="http://schemas.openxmlformats.org/drawingml/2006/main">
               <a:ext uri="{FF2B5EF4-FFF2-40B4-BE49-F238E27FC236}">
-                <a16:creationId xmlns:a16="http://schemas.microsoft.com/office/drawing/2014/main" id="{3D4DE231-12B9-440E-BC4D-59EF6AD6BBDA}"/>
+                <a16:creationId xmlns:a16="http://schemas.microsoft.com/office/drawing/2014/main" id="{18F0D8AE-9004-4A69-9CB6-FE407F36370C}"/>
               </a:ext>
             </a:extLst>
           </p:cNvPr>
@@ -30471,7 +30471,7 @@
           <p:cNvPr id="29" name="">
             <a:extLst xmlns:a="http://schemas.openxmlformats.org/drawingml/2006/main">
               <a:ext uri="{FF2B5EF4-FFF2-40B4-BE49-F238E27FC236}">
-                <a16:creationId xmlns:a16="http://schemas.microsoft.com/office/drawing/2014/main" id="{BD0B7578-1D95-47B0-902B-0FF00F0F2873}"/>
+                <a16:creationId xmlns:a16="http://schemas.microsoft.com/office/drawing/2014/main" id="{732CBEB4-96FE-4E36-A375-32C8D3C642CC}"/>
               </a:ext>
             </a:extLst>
           </p:cNvPr>
@@ -30535,7 +30535,7 @@
           <p:cNvPr id="30" name="">
             <a:extLst xmlns:a="http://schemas.openxmlformats.org/drawingml/2006/main">
               <a:ext uri="{FF2B5EF4-FFF2-40B4-BE49-F238E27FC236}">
-                <a16:creationId xmlns:a16="http://schemas.microsoft.com/office/drawing/2014/main" id="{88707C72-3E01-4135-969B-1130DDC1F592}"/>
+                <a16:creationId xmlns:a16="http://schemas.microsoft.com/office/drawing/2014/main" id="{8EEB80DE-4FE7-44CA-B910-98A88BBC2911}"/>
               </a:ext>
             </a:extLst>
           </p:cNvPr>
@@ -30599,7 +30599,7 @@
           <p:cNvPr id="31" name="">
             <a:extLst xmlns:a="http://schemas.openxmlformats.org/drawingml/2006/main">
               <a:ext uri="{FF2B5EF4-FFF2-40B4-BE49-F238E27FC236}">
-                <a16:creationId xmlns:a16="http://schemas.microsoft.com/office/drawing/2014/main" id="{112A3EA2-EC8C-4A00-B00E-281117E3C1C7}"/>
+                <a16:creationId xmlns:a16="http://schemas.microsoft.com/office/drawing/2014/main" id="{4C5E7904-634B-4FA5-9863-EF20729BF365}"/>
               </a:ext>
             </a:extLst>
           </p:cNvPr>
@@ -30661,7 +30661,7 @@
     </p:spTree>
     <p:extLst>
       <p:ext uri="{BB962C8B-B14F-4D97-AF65-F5344CB8AC3E}">
-        <p14:creationId xmlns:p14="http://schemas.microsoft.com/office/powerpoint/2010/main" val="1973201901"/>
+        <p14:creationId xmlns:p14="http://schemas.microsoft.com/office/powerpoint/2010/main" val="543653668"/>
       </p:ext>
     </p:extLst>
   </p:cSld>
@@ -30685,7 +30685,7 @@
           <p:cNvPr id="1" name="">
             <a:extLst xmlns:a="http://schemas.openxmlformats.org/drawingml/2006/main">
               <a:ext uri="{FF2B5EF4-FFF2-40B4-BE49-F238E27FC236}">
-                <a16:creationId xmlns:a16="http://schemas.microsoft.com/office/drawing/2014/main" id="{3F338C53-7669-4E14-AFD0-3D1E5CDC833D}"/>
+                <a16:creationId xmlns:a16="http://schemas.microsoft.com/office/drawing/2014/main" id="{6939D325-59BF-49CC-84E8-BB35A96B0AA7}"/>
               </a:ext>
             </a:extLst>
           </p:cNvPr>
@@ -30718,7 +30718,7 @@
           <p:cNvPr id="2" name="">
             <a:extLst xmlns:a="http://schemas.openxmlformats.org/drawingml/2006/main">
               <a:ext uri="{FF2B5EF4-FFF2-40B4-BE49-F238E27FC236}">
-                <a16:creationId xmlns:a16="http://schemas.microsoft.com/office/drawing/2014/main" id="{323C6124-774B-45A1-9799-724F0841B109}"/>
+                <a16:creationId xmlns:a16="http://schemas.microsoft.com/office/drawing/2014/main" id="{AC39CB9E-0594-49BC-B7CB-9BC1D3286AF4}"/>
               </a:ext>
             </a:extLst>
           </p:cNvPr>
@@ -30751,7 +30751,7 @@
           <p:cNvPr id="3" name="">
             <a:extLst xmlns:a="http://schemas.openxmlformats.org/drawingml/2006/main">
               <a:ext uri="{FF2B5EF4-FFF2-40B4-BE49-F238E27FC236}">
-                <a16:creationId xmlns:a16="http://schemas.microsoft.com/office/drawing/2014/main" id="{8A74762F-1AEA-4619-9181-69416D86629C}"/>
+                <a16:creationId xmlns:a16="http://schemas.microsoft.com/office/drawing/2014/main" id="{16CD5C77-F9D6-4476-9462-51A2B931942A}"/>
               </a:ext>
             </a:extLst>
           </p:cNvPr>
@@ -30815,7 +30815,7 @@
           <p:cNvPr id="4" name="">
             <a:extLst xmlns:a="http://schemas.openxmlformats.org/drawingml/2006/main">
               <a:ext uri="{FF2B5EF4-FFF2-40B4-BE49-F238E27FC236}">
-                <a16:creationId xmlns:a16="http://schemas.microsoft.com/office/drawing/2014/main" id="{18804209-1F17-4B60-B2CB-B0C60AA02E06}"/>
+                <a16:creationId xmlns:a16="http://schemas.microsoft.com/office/drawing/2014/main" id="{A46B9D1E-E9F0-4E4C-985E-7879CD57AFF7}"/>
               </a:ext>
             </a:extLst>
           </p:cNvPr>
@@ -30879,7 +30879,7 @@
           <p:cNvPr id="5" name="">
             <a:extLst xmlns:a="http://schemas.openxmlformats.org/drawingml/2006/main">
               <a:ext uri="{FF2B5EF4-FFF2-40B4-BE49-F238E27FC236}">
-                <a16:creationId xmlns:a16="http://schemas.microsoft.com/office/drawing/2014/main" id="{6EC06C41-CE27-4091-B7E8-04CDB576EAB0}"/>
+                <a16:creationId xmlns:a16="http://schemas.microsoft.com/office/drawing/2014/main" id="{361B0318-1916-43F9-BB44-362D5371C22F}"/>
               </a:ext>
             </a:extLst>
           </p:cNvPr>
@@ -30943,7 +30943,7 @@
           <p:cNvPr id="6" name="">
             <a:extLst xmlns:a="http://schemas.openxmlformats.org/drawingml/2006/main">
               <a:ext uri="{FF2B5EF4-FFF2-40B4-BE49-F238E27FC236}">
-                <a16:creationId xmlns:a16="http://schemas.microsoft.com/office/drawing/2014/main" id="{5F1DDFC8-EE10-47C2-8D75-B2B343BAB09C}"/>
+                <a16:creationId xmlns:a16="http://schemas.microsoft.com/office/drawing/2014/main" id="{46C5A3A0-5B60-4736-BAE5-B1B42BDA891F}"/>
               </a:ext>
             </a:extLst>
           </p:cNvPr>
@@ -30976,7 +30976,7 @@
           <p:cNvPr id="7" name="">
             <a:extLst xmlns:a="http://schemas.openxmlformats.org/drawingml/2006/main">
               <a:ext uri="{FF2B5EF4-FFF2-40B4-BE49-F238E27FC236}">
-                <a16:creationId xmlns:a16="http://schemas.microsoft.com/office/drawing/2014/main" id="{BF804D84-9640-4FE9-9EA6-EBEF067F503A}"/>
+                <a16:creationId xmlns:a16="http://schemas.microsoft.com/office/drawing/2014/main" id="{FC6D3FC3-267A-4ECE-8CE4-C4D663AD0D49}"/>
               </a:ext>
             </a:extLst>
           </p:cNvPr>
@@ -31040,7 +31040,7 @@
           <p:cNvPr id="8" name="">
             <a:extLst xmlns:a="http://schemas.openxmlformats.org/drawingml/2006/main">
               <a:ext uri="{FF2B5EF4-FFF2-40B4-BE49-F238E27FC236}">
-                <a16:creationId xmlns:a16="http://schemas.microsoft.com/office/drawing/2014/main" id="{9A1ED43B-E52E-4B75-8008-D2E9454237A2}"/>
+                <a16:creationId xmlns:a16="http://schemas.microsoft.com/office/drawing/2014/main" id="{B3F0C3AD-082A-4B86-95FA-8A06F29C10EE}"/>
               </a:ext>
             </a:extLst>
           </p:cNvPr>
@@ -31073,7 +31073,7 @@
           <p:cNvPr id="9" name="">
             <a:extLst xmlns:a="http://schemas.openxmlformats.org/drawingml/2006/main">
               <a:ext uri="{FF2B5EF4-FFF2-40B4-BE49-F238E27FC236}">
-                <a16:creationId xmlns:a16="http://schemas.microsoft.com/office/drawing/2014/main" id="{E88728AB-7F86-4DFD-9532-D1A65A804AA2}"/>
+                <a16:creationId xmlns:a16="http://schemas.microsoft.com/office/drawing/2014/main" id="{986663CE-4A9D-4C9E-923E-6C6B43BD7D8A}"/>
               </a:ext>
             </a:extLst>
           </p:cNvPr>
@@ -31137,7 +31137,7 @@
           <p:cNvPr id="10" name="">
             <a:extLst xmlns:a="http://schemas.openxmlformats.org/drawingml/2006/main">
               <a:ext uri="{FF2B5EF4-FFF2-40B4-BE49-F238E27FC236}">
-                <a16:creationId xmlns:a16="http://schemas.microsoft.com/office/drawing/2014/main" id="{ADA43728-2C52-4268-82A1-FB3300A5C7DF}"/>
+                <a16:creationId xmlns:a16="http://schemas.microsoft.com/office/drawing/2014/main" id="{D1C08780-A314-4CE0-994E-4EE9C379AB1F}"/>
               </a:ext>
             </a:extLst>
           </p:cNvPr>
@@ -31170,7 +31170,7 @@
           <p:cNvPr id="11" name="">
             <a:extLst xmlns:a="http://schemas.openxmlformats.org/drawingml/2006/main">
               <a:ext uri="{FF2B5EF4-FFF2-40B4-BE49-F238E27FC236}">
-                <a16:creationId xmlns:a16="http://schemas.microsoft.com/office/drawing/2014/main" id="{B12812B9-1D4A-4B0E-8DCF-A0D9CB0DB23D}"/>
+                <a16:creationId xmlns:a16="http://schemas.microsoft.com/office/drawing/2014/main" id="{9294A9AA-A3EA-4594-A555-4A3FF73420D2}"/>
               </a:ext>
             </a:extLst>
           </p:cNvPr>
@@ -31234,7 +31234,7 @@
           <p:cNvPr id="12" name="">
             <a:extLst xmlns:a="http://schemas.openxmlformats.org/drawingml/2006/main">
               <a:ext uri="{FF2B5EF4-FFF2-40B4-BE49-F238E27FC236}">
-                <a16:creationId xmlns:a16="http://schemas.microsoft.com/office/drawing/2014/main" id="{308113FD-E547-495B-8C18-565CE2EF385A}"/>
+                <a16:creationId xmlns:a16="http://schemas.microsoft.com/office/drawing/2014/main" id="{359A7126-8A3B-410B-A1B9-0881726C4F88}"/>
               </a:ext>
             </a:extLst>
           </p:cNvPr>
@@ -31267,7 +31267,7 @@
           <p:cNvPr id="13" name="">
             <a:extLst xmlns:a="http://schemas.openxmlformats.org/drawingml/2006/main">
               <a:ext uri="{FF2B5EF4-FFF2-40B4-BE49-F238E27FC236}">
-                <a16:creationId xmlns:a16="http://schemas.microsoft.com/office/drawing/2014/main" id="{01E94466-10FE-4087-926B-BA90735B2CEE}"/>
+                <a16:creationId xmlns:a16="http://schemas.microsoft.com/office/drawing/2014/main" id="{66E53664-CD81-4833-B901-E7039D13B7E0}"/>
               </a:ext>
             </a:extLst>
           </p:cNvPr>
@@ -31331,7 +31331,7 @@
           <p:cNvPr id="14" name="">
             <a:extLst xmlns:a="http://schemas.openxmlformats.org/drawingml/2006/main">
               <a:ext uri="{FF2B5EF4-FFF2-40B4-BE49-F238E27FC236}">
-                <a16:creationId xmlns:a16="http://schemas.microsoft.com/office/drawing/2014/main" id="{B394C2D9-4E49-46C7-8DA6-71CB3C579143}"/>
+                <a16:creationId xmlns:a16="http://schemas.microsoft.com/office/drawing/2014/main" id="{FBE411F2-2164-42CC-A3C9-940AE4EFC900}"/>
               </a:ext>
             </a:extLst>
           </p:cNvPr>
@@ -31364,7 +31364,7 @@
           <p:cNvPr id="15" name="">
             <a:extLst xmlns:a="http://schemas.openxmlformats.org/drawingml/2006/main">
               <a:ext uri="{FF2B5EF4-FFF2-40B4-BE49-F238E27FC236}">
-                <a16:creationId xmlns:a16="http://schemas.microsoft.com/office/drawing/2014/main" id="{446BF916-6DDB-4642-8074-AE6524B37AD7}"/>
+                <a16:creationId xmlns:a16="http://schemas.microsoft.com/office/drawing/2014/main" id="{80C03157-C155-408B-87F5-2A2D4C8E3A46}"/>
               </a:ext>
             </a:extLst>
           </p:cNvPr>
@@ -31428,7 +31428,7 @@
           <p:cNvPr id="16" name="">
             <a:extLst xmlns:a="http://schemas.openxmlformats.org/drawingml/2006/main">
               <a:ext uri="{FF2B5EF4-FFF2-40B4-BE49-F238E27FC236}">
-                <a16:creationId xmlns:a16="http://schemas.microsoft.com/office/drawing/2014/main" id="{13797BBD-0A46-4687-8DDF-59E81D972F49}"/>
+                <a16:creationId xmlns:a16="http://schemas.microsoft.com/office/drawing/2014/main" id="{BC0CA445-6268-4778-8E6F-5BF81B09F652}"/>
               </a:ext>
             </a:extLst>
           </p:cNvPr>
@@ -31492,7 +31492,7 @@
           <p:cNvPr id="17" name="">
             <a:extLst xmlns:a="http://schemas.openxmlformats.org/drawingml/2006/main">
               <a:ext uri="{FF2B5EF4-FFF2-40B4-BE49-F238E27FC236}">
-                <a16:creationId xmlns:a16="http://schemas.microsoft.com/office/drawing/2014/main" id="{44867884-5370-4196-8AEA-255533DEF9FF}"/>
+                <a16:creationId xmlns:a16="http://schemas.microsoft.com/office/drawing/2014/main" id="{1ED82529-D625-4389-B9A2-1008EC05EDF8}"/>
               </a:ext>
             </a:extLst>
           </p:cNvPr>
@@ -31556,7 +31556,7 @@
           <p:cNvPr id="18" name="">
             <a:extLst xmlns:a="http://schemas.openxmlformats.org/drawingml/2006/main">
               <a:ext uri="{FF2B5EF4-FFF2-40B4-BE49-F238E27FC236}">
-                <a16:creationId xmlns:a16="http://schemas.microsoft.com/office/drawing/2014/main" id="{02362C87-8D4A-4605-85E3-1DB03D2F1854}"/>
+                <a16:creationId xmlns:a16="http://schemas.microsoft.com/office/drawing/2014/main" id="{BC9070FA-BEB5-4A22-9035-D56ECB0EC39A}"/>
               </a:ext>
             </a:extLst>
           </p:cNvPr>
@@ -31618,7 +31618,7 @@
     </p:spTree>
     <p:extLst>
       <p:ext uri="{BB962C8B-B14F-4D97-AF65-F5344CB8AC3E}">
-        <p14:creationId xmlns:p14="http://schemas.microsoft.com/office/powerpoint/2010/main" val="1899883038"/>
+        <p14:creationId xmlns:p14="http://schemas.microsoft.com/office/powerpoint/2010/main" val="1697126150"/>
       </p:ext>
     </p:extLst>
   </p:cSld>
@@ -31642,7 +31642,7 @@
           <p:cNvPr id="1" name="">
             <a:extLst xmlns:a="http://schemas.openxmlformats.org/drawingml/2006/main">
               <a:ext uri="{FF2B5EF4-FFF2-40B4-BE49-F238E27FC236}">
-                <a16:creationId xmlns:a16="http://schemas.microsoft.com/office/drawing/2014/main" id="{FE4142AC-6DE2-47DA-9DA5-7B9E7FB91888}"/>
+                <a16:creationId xmlns:a16="http://schemas.microsoft.com/office/drawing/2014/main" id="{08CC18D3-35B4-4745-8136-C889C81E794F}"/>
               </a:ext>
             </a:extLst>
           </p:cNvPr>
@@ -31675,7 +31675,7 @@
           <p:cNvPr id="2" name="">
             <a:extLst xmlns:a="http://schemas.openxmlformats.org/drawingml/2006/main">
               <a:ext uri="{FF2B5EF4-FFF2-40B4-BE49-F238E27FC236}">
-                <a16:creationId xmlns:a16="http://schemas.microsoft.com/office/drawing/2014/main" id="{1C8FD41E-690F-4023-B09D-F41B00168063}"/>
+                <a16:creationId xmlns:a16="http://schemas.microsoft.com/office/drawing/2014/main" id="{8EF06284-1B89-43A4-8FEB-C01C83139B08}"/>
               </a:ext>
             </a:extLst>
           </p:cNvPr>
@@ -31708,7 +31708,7 @@
           <p:cNvPr id="3" name="">
             <a:extLst xmlns:a="http://schemas.openxmlformats.org/drawingml/2006/main">
               <a:ext uri="{FF2B5EF4-FFF2-40B4-BE49-F238E27FC236}">
-                <a16:creationId xmlns:a16="http://schemas.microsoft.com/office/drawing/2014/main" id="{448244B9-1469-4CB5-A698-0B62A378BF4A}"/>
+                <a16:creationId xmlns:a16="http://schemas.microsoft.com/office/drawing/2014/main" id="{3D25B089-8527-4C6F-843D-8D78999664B8}"/>
               </a:ext>
             </a:extLst>
           </p:cNvPr>
@@ -31772,7 +31772,7 @@
           <p:cNvPr id="4" name="">
             <a:extLst xmlns:a="http://schemas.openxmlformats.org/drawingml/2006/main">
               <a:ext uri="{FF2B5EF4-FFF2-40B4-BE49-F238E27FC236}">
-                <a16:creationId xmlns:a16="http://schemas.microsoft.com/office/drawing/2014/main" id="{F60AD57C-9C68-450E-9E75-ED9BF6A70FB7}"/>
+                <a16:creationId xmlns:a16="http://schemas.microsoft.com/office/drawing/2014/main" id="{53DBBB9D-12D0-41A4-9CA0-A56667FECAE7}"/>
               </a:ext>
             </a:extLst>
           </p:cNvPr>
@@ -31836,7 +31836,7 @@
           <p:cNvPr id="5" name="">
             <a:extLst xmlns:a="http://schemas.openxmlformats.org/drawingml/2006/main">
               <a:ext uri="{FF2B5EF4-FFF2-40B4-BE49-F238E27FC236}">
-                <a16:creationId xmlns:a16="http://schemas.microsoft.com/office/drawing/2014/main" id="{B110DD58-6FE7-4ED2-8C5C-FE5E69E3AB41}"/>
+                <a16:creationId xmlns:a16="http://schemas.microsoft.com/office/drawing/2014/main" id="{1C2E60B0-CF9F-4680-88A0-3A780B985873}"/>
               </a:ext>
             </a:extLst>
           </p:cNvPr>
@@ -31900,7 +31900,7 @@
           <p:cNvPr id="6" name="">
             <a:extLst xmlns:a="http://schemas.openxmlformats.org/drawingml/2006/main">
               <a:ext uri="{FF2B5EF4-FFF2-40B4-BE49-F238E27FC236}">
-                <a16:creationId xmlns:a16="http://schemas.microsoft.com/office/drawing/2014/main" id="{1759CC0E-2E04-4EA6-8F4F-BE1E1CF6AAC3}"/>
+                <a16:creationId xmlns:a16="http://schemas.microsoft.com/office/drawing/2014/main" id="{822C9A01-E183-47CB-A595-D0CA99F7A01F}"/>
               </a:ext>
             </a:extLst>
           </p:cNvPr>
@@ -31933,7 +31933,7 @@
           <p:cNvPr id="7" name="">
             <a:extLst xmlns:a="http://schemas.openxmlformats.org/drawingml/2006/main">
               <a:ext uri="{FF2B5EF4-FFF2-40B4-BE49-F238E27FC236}">
-                <a16:creationId xmlns:a16="http://schemas.microsoft.com/office/drawing/2014/main" id="{A3474771-8D59-47DF-8687-63631DA7C556}"/>
+                <a16:creationId xmlns:a16="http://schemas.microsoft.com/office/drawing/2014/main" id="{0C7137A0-1316-43A5-8297-A91CE24A03E3}"/>
               </a:ext>
             </a:extLst>
           </p:cNvPr>
@@ -31997,7 +31997,7 @@
           <p:cNvPr id="8" name="">
             <a:extLst xmlns:a="http://schemas.openxmlformats.org/drawingml/2006/main">
               <a:ext uri="{FF2B5EF4-FFF2-40B4-BE49-F238E27FC236}">
-                <a16:creationId xmlns:a16="http://schemas.microsoft.com/office/drawing/2014/main" id="{8EEA00F0-F206-4E8D-AB74-F2352B95BD7B}"/>
+                <a16:creationId xmlns:a16="http://schemas.microsoft.com/office/drawing/2014/main" id="{E9A60DBB-40CE-4814-ADA6-A53E1E172E31}"/>
               </a:ext>
             </a:extLst>
           </p:cNvPr>
@@ -32030,7 +32030,7 @@
           <p:cNvPr id="9" name="">
             <a:extLst xmlns:a="http://schemas.openxmlformats.org/drawingml/2006/main">
               <a:ext uri="{FF2B5EF4-FFF2-40B4-BE49-F238E27FC236}">
-                <a16:creationId xmlns:a16="http://schemas.microsoft.com/office/drawing/2014/main" id="{D1F3EF18-9337-47A3-9DF9-B9001D9B3E0C}"/>
+                <a16:creationId xmlns:a16="http://schemas.microsoft.com/office/drawing/2014/main" id="{C7B9AB15-0B5B-45AA-B29A-B689ACF88FAB}"/>
               </a:ext>
             </a:extLst>
           </p:cNvPr>
@@ -32094,7 +32094,7 @@
           <p:cNvPr id="10" name="">
             <a:extLst xmlns:a="http://schemas.openxmlformats.org/drawingml/2006/main">
               <a:ext uri="{FF2B5EF4-FFF2-40B4-BE49-F238E27FC236}">
-                <a16:creationId xmlns:a16="http://schemas.microsoft.com/office/drawing/2014/main" id="{EBE86EB0-3328-40B5-8D2E-6DC6187C96E6}"/>
+                <a16:creationId xmlns:a16="http://schemas.microsoft.com/office/drawing/2014/main" id="{68F3B753-4B97-4518-8310-6D58CBEF2666}"/>
               </a:ext>
             </a:extLst>
           </p:cNvPr>
@@ -32127,7 +32127,7 @@
           <p:cNvPr id="11" name="">
             <a:extLst xmlns:a="http://schemas.openxmlformats.org/drawingml/2006/main">
               <a:ext uri="{FF2B5EF4-FFF2-40B4-BE49-F238E27FC236}">
-                <a16:creationId xmlns:a16="http://schemas.microsoft.com/office/drawing/2014/main" id="{F10B5A06-E52B-49B9-8BB8-21F52A4C1D93}"/>
+                <a16:creationId xmlns:a16="http://schemas.microsoft.com/office/drawing/2014/main" id="{FD5B5ECC-865F-4D24-9E87-84BA98FAA69B}"/>
               </a:ext>
             </a:extLst>
           </p:cNvPr>
@@ -32191,7 +32191,7 @@
           <p:cNvPr id="12" name="">
             <a:extLst xmlns:a="http://schemas.openxmlformats.org/drawingml/2006/main">
               <a:ext uri="{FF2B5EF4-FFF2-40B4-BE49-F238E27FC236}">
-                <a16:creationId xmlns:a16="http://schemas.microsoft.com/office/drawing/2014/main" id="{9F977A12-96F7-4A4C-A861-55575EFD7226}"/>
+                <a16:creationId xmlns:a16="http://schemas.microsoft.com/office/drawing/2014/main" id="{72BA6949-B5DE-4B2E-B9F0-FECF290500E2}"/>
               </a:ext>
             </a:extLst>
           </p:cNvPr>
@@ -32224,7 +32224,7 @@
           <p:cNvPr id="13" name="">
             <a:extLst xmlns:a="http://schemas.openxmlformats.org/drawingml/2006/main">
               <a:ext uri="{FF2B5EF4-FFF2-40B4-BE49-F238E27FC236}">
-                <a16:creationId xmlns:a16="http://schemas.microsoft.com/office/drawing/2014/main" id="{C05EFC70-B8A4-4694-A262-B98D6D7877B3}"/>
+                <a16:creationId xmlns:a16="http://schemas.microsoft.com/office/drawing/2014/main" id="{446F6033-80A9-40D5-9E62-550B85E5ABD2}"/>
               </a:ext>
             </a:extLst>
           </p:cNvPr>
@@ -32288,7 +32288,7 @@
           <p:cNvPr id="14" name="">
             <a:extLst xmlns:a="http://schemas.openxmlformats.org/drawingml/2006/main">
               <a:ext uri="{FF2B5EF4-FFF2-40B4-BE49-F238E27FC236}">
-                <a16:creationId xmlns:a16="http://schemas.microsoft.com/office/drawing/2014/main" id="{FB100AD2-D8C0-4A45-802D-3F90EB9485D9}"/>
+                <a16:creationId xmlns:a16="http://schemas.microsoft.com/office/drawing/2014/main" id="{13862605-475E-45B3-8BF2-1F90A7C22174}"/>
               </a:ext>
             </a:extLst>
           </p:cNvPr>
@@ -32321,7 +32321,7 @@
           <p:cNvPr id="15" name="">
             <a:extLst xmlns:a="http://schemas.openxmlformats.org/drawingml/2006/main">
               <a:ext uri="{FF2B5EF4-FFF2-40B4-BE49-F238E27FC236}">
-                <a16:creationId xmlns:a16="http://schemas.microsoft.com/office/drawing/2014/main" id="{2E271EA5-4430-402B-83B7-36F545AFB806}"/>
+                <a16:creationId xmlns:a16="http://schemas.microsoft.com/office/drawing/2014/main" id="{7D8C05DD-B4A9-42AC-AF96-D3A9C91A7462}"/>
               </a:ext>
             </a:extLst>
           </p:cNvPr>
@@ -32385,7 +32385,7 @@
           <p:cNvPr id="16" name="">
             <a:extLst xmlns:a="http://schemas.openxmlformats.org/drawingml/2006/main">
               <a:ext uri="{FF2B5EF4-FFF2-40B4-BE49-F238E27FC236}">
-                <a16:creationId xmlns:a16="http://schemas.microsoft.com/office/drawing/2014/main" id="{0B0E9171-64F9-4B4C-BCF2-6A2229B3AF23}"/>
+                <a16:creationId xmlns:a16="http://schemas.microsoft.com/office/drawing/2014/main" id="{FEB02F9C-61A0-4556-88EA-B345ADA15C66}"/>
               </a:ext>
             </a:extLst>
           </p:cNvPr>
@@ -32418,7 +32418,7 @@
           <p:cNvPr id="17" name="">
             <a:extLst xmlns:a="http://schemas.openxmlformats.org/drawingml/2006/main">
               <a:ext uri="{FF2B5EF4-FFF2-40B4-BE49-F238E27FC236}">
-                <a16:creationId xmlns:a16="http://schemas.microsoft.com/office/drawing/2014/main" id="{715A4C95-712D-4B0C-84A3-208D953E69C7}"/>
+                <a16:creationId xmlns:a16="http://schemas.microsoft.com/office/drawing/2014/main" id="{C86D60EB-A3D8-4892-9A09-CD04023047A5}"/>
               </a:ext>
             </a:extLst>
           </p:cNvPr>
@@ -32482,7 +32482,7 @@
           <p:cNvPr id="18" name="">
             <a:extLst xmlns:a="http://schemas.openxmlformats.org/drawingml/2006/main">
               <a:ext uri="{FF2B5EF4-FFF2-40B4-BE49-F238E27FC236}">
-                <a16:creationId xmlns:a16="http://schemas.microsoft.com/office/drawing/2014/main" id="{7FE271DD-2DE0-4F9D-AEB0-63CFDE1F70BD}"/>
+                <a16:creationId xmlns:a16="http://schemas.microsoft.com/office/drawing/2014/main" id="{51FEF84E-B86D-48BA-AB66-F225E74BE167}"/>
               </a:ext>
             </a:extLst>
           </p:cNvPr>
@@ -32515,7 +32515,7 @@
           <p:cNvPr id="19" name="">
             <a:extLst xmlns:a="http://schemas.openxmlformats.org/drawingml/2006/main">
               <a:ext uri="{FF2B5EF4-FFF2-40B4-BE49-F238E27FC236}">
-                <a16:creationId xmlns:a16="http://schemas.microsoft.com/office/drawing/2014/main" id="{7382A829-6BA7-4A49-8ADB-E65C0F7DC6EE}"/>
+                <a16:creationId xmlns:a16="http://schemas.microsoft.com/office/drawing/2014/main" id="{83D921DF-4314-45FA-A103-09AB61B88D39}"/>
               </a:ext>
             </a:extLst>
           </p:cNvPr>
@@ -32579,7 +32579,7 @@
           <p:cNvPr id="20" name="">
             <a:extLst xmlns:a="http://schemas.openxmlformats.org/drawingml/2006/main">
               <a:ext uri="{FF2B5EF4-FFF2-40B4-BE49-F238E27FC236}">
-                <a16:creationId xmlns:a16="http://schemas.microsoft.com/office/drawing/2014/main" id="{B9D65368-48F7-48C8-9BC4-F7C76F4F72BD}"/>
+                <a16:creationId xmlns:a16="http://schemas.microsoft.com/office/drawing/2014/main" id="{628A9904-F591-480D-B85D-DB9BB560C54A}"/>
               </a:ext>
             </a:extLst>
           </p:cNvPr>
@@ -32612,7 +32612,7 @@
           <p:cNvPr id="21" name="">
             <a:extLst xmlns:a="http://schemas.openxmlformats.org/drawingml/2006/main">
               <a:ext uri="{FF2B5EF4-FFF2-40B4-BE49-F238E27FC236}">
-                <a16:creationId xmlns:a16="http://schemas.microsoft.com/office/drawing/2014/main" id="{4609767C-4976-491A-888E-397913EE060D}"/>
+                <a16:creationId xmlns:a16="http://schemas.microsoft.com/office/drawing/2014/main" id="{2741A10F-4FE1-44F1-A3DA-69E45B5F50B5}"/>
               </a:ext>
             </a:extLst>
           </p:cNvPr>
@@ -32676,7 +32676,7 @@
           <p:cNvPr id="22" name="">
             <a:extLst xmlns:a="http://schemas.openxmlformats.org/drawingml/2006/main">
               <a:ext uri="{FF2B5EF4-FFF2-40B4-BE49-F238E27FC236}">
-                <a16:creationId xmlns:a16="http://schemas.microsoft.com/office/drawing/2014/main" id="{475C0C91-D294-49F8-8D3E-E9610E1740B3}"/>
+                <a16:creationId xmlns:a16="http://schemas.microsoft.com/office/drawing/2014/main" id="{63EE7BDB-FD7A-4272-99B8-ED6D0C54B1A8}"/>
               </a:ext>
             </a:extLst>
           </p:cNvPr>
@@ -32709,7 +32709,7 @@
           <p:cNvPr id="23" name="">
             <a:extLst xmlns:a="http://schemas.openxmlformats.org/drawingml/2006/main">
               <a:ext uri="{FF2B5EF4-FFF2-40B4-BE49-F238E27FC236}">
-                <a16:creationId xmlns:a16="http://schemas.microsoft.com/office/drawing/2014/main" id="{AFAD6891-182E-42DC-B56F-90F383F79450}"/>
+                <a16:creationId xmlns:a16="http://schemas.microsoft.com/office/drawing/2014/main" id="{8040337B-5C5B-4ED6-84DA-9CF8423F1062}"/>
               </a:ext>
             </a:extLst>
           </p:cNvPr>
@@ -32773,7 +32773,7 @@
           <p:cNvPr id="24" name="">
             <a:extLst xmlns:a="http://schemas.openxmlformats.org/drawingml/2006/main">
               <a:ext uri="{FF2B5EF4-FFF2-40B4-BE49-F238E27FC236}">
-                <a16:creationId xmlns:a16="http://schemas.microsoft.com/office/drawing/2014/main" id="{1EA5C61A-C241-42AF-9A78-7A3CA4FA4F2C}"/>
+                <a16:creationId xmlns:a16="http://schemas.microsoft.com/office/drawing/2014/main" id="{B1A74FCB-E3E1-4EC4-8988-1D9A01749591}"/>
               </a:ext>
             </a:extLst>
           </p:cNvPr>
@@ -32806,7 +32806,7 @@
           <p:cNvPr id="25" name="">
             <a:extLst xmlns:a="http://schemas.openxmlformats.org/drawingml/2006/main">
               <a:ext uri="{FF2B5EF4-FFF2-40B4-BE49-F238E27FC236}">
-                <a16:creationId xmlns:a16="http://schemas.microsoft.com/office/drawing/2014/main" id="{DA06FB73-C1F7-4AF9-802C-6BE16041098C}"/>
+                <a16:creationId xmlns:a16="http://schemas.microsoft.com/office/drawing/2014/main" id="{15974C3C-0C6E-415C-86AF-63BEA50DF58F}"/>
               </a:ext>
             </a:extLst>
           </p:cNvPr>
@@ -32870,7 +32870,7 @@
           <p:cNvPr id="26" name="">
             <a:extLst xmlns:a="http://schemas.openxmlformats.org/drawingml/2006/main">
               <a:ext uri="{FF2B5EF4-FFF2-40B4-BE49-F238E27FC236}">
-                <a16:creationId xmlns:a16="http://schemas.microsoft.com/office/drawing/2014/main" id="{2E1258BF-A8DC-4C39-A644-F99DE5C04F0D}"/>
+                <a16:creationId xmlns:a16="http://schemas.microsoft.com/office/drawing/2014/main" id="{1F410646-A0C7-4DE0-AB05-01D25B9173F8}"/>
               </a:ext>
             </a:extLst>
           </p:cNvPr>
@@ -32903,7 +32903,7 @@
           <p:cNvPr id="27" name="">
             <a:extLst xmlns:a="http://schemas.openxmlformats.org/drawingml/2006/main">
               <a:ext uri="{FF2B5EF4-FFF2-40B4-BE49-F238E27FC236}">
-                <a16:creationId xmlns:a16="http://schemas.microsoft.com/office/drawing/2014/main" id="{B1D8B6E9-7C45-4155-802D-1787FCDF6776}"/>
+                <a16:creationId xmlns:a16="http://schemas.microsoft.com/office/drawing/2014/main" id="{D4CB1353-A9E6-4573-B28A-E746DD681560}"/>
               </a:ext>
             </a:extLst>
           </p:cNvPr>
@@ -32967,7 +32967,7 @@
           <p:cNvPr id="28" name="">
             <a:extLst xmlns:a="http://schemas.openxmlformats.org/drawingml/2006/main">
               <a:ext uri="{FF2B5EF4-FFF2-40B4-BE49-F238E27FC236}">
-                <a16:creationId xmlns:a16="http://schemas.microsoft.com/office/drawing/2014/main" id="{C0A976E2-724F-489C-9E08-AB4778F35E1D}"/>
+                <a16:creationId xmlns:a16="http://schemas.microsoft.com/office/drawing/2014/main" id="{BEDC6DED-5780-4AA8-96A5-80C055EBAC44}"/>
               </a:ext>
             </a:extLst>
           </p:cNvPr>
@@ -33000,7 +33000,7 @@
           <p:cNvPr id="29" name="">
             <a:extLst xmlns:a="http://schemas.openxmlformats.org/drawingml/2006/main">
               <a:ext uri="{FF2B5EF4-FFF2-40B4-BE49-F238E27FC236}">
-                <a16:creationId xmlns:a16="http://schemas.microsoft.com/office/drawing/2014/main" id="{993DBA2D-B2BF-4C4F-84AA-783D83462E0E}"/>
+                <a16:creationId xmlns:a16="http://schemas.microsoft.com/office/drawing/2014/main" id="{2F75565D-A0EA-4B9D-9A9E-9801ECE525B1}"/>
               </a:ext>
             </a:extLst>
           </p:cNvPr>
@@ -33064,7 +33064,7 @@
           <p:cNvPr id="30" name="">
             <a:extLst xmlns:a="http://schemas.openxmlformats.org/drawingml/2006/main">
               <a:ext uri="{FF2B5EF4-FFF2-40B4-BE49-F238E27FC236}">
-                <a16:creationId xmlns:a16="http://schemas.microsoft.com/office/drawing/2014/main" id="{5C6BC2A4-5218-4B94-A80C-F639BB7544FF}"/>
+                <a16:creationId xmlns:a16="http://schemas.microsoft.com/office/drawing/2014/main" id="{A0533C93-D639-43C6-A87D-2A8A53BA1B86}"/>
               </a:ext>
             </a:extLst>
           </p:cNvPr>
@@ -33097,7 +33097,7 @@
           <p:cNvPr id="31" name="">
             <a:extLst xmlns:a="http://schemas.openxmlformats.org/drawingml/2006/main">
               <a:ext uri="{FF2B5EF4-FFF2-40B4-BE49-F238E27FC236}">
-                <a16:creationId xmlns:a16="http://schemas.microsoft.com/office/drawing/2014/main" id="{B2C9F3A9-918D-4517-9BF0-37F702880B53}"/>
+                <a16:creationId xmlns:a16="http://schemas.microsoft.com/office/drawing/2014/main" id="{9F99C247-F1FD-4559-A343-4BD861397A9D}"/>
               </a:ext>
             </a:extLst>
           </p:cNvPr>
@@ -33161,7 +33161,7 @@
           <p:cNvPr id="32" name="">
             <a:extLst xmlns:a="http://schemas.openxmlformats.org/drawingml/2006/main">
               <a:ext uri="{FF2B5EF4-FFF2-40B4-BE49-F238E27FC236}">
-                <a16:creationId xmlns:a16="http://schemas.microsoft.com/office/drawing/2014/main" id="{E609B926-0C9E-48AA-A31A-0029E5979CDA}"/>
+                <a16:creationId xmlns:a16="http://schemas.microsoft.com/office/drawing/2014/main" id="{E04C06EE-EE55-4EBE-A9F0-AC85549D742B}"/>
               </a:ext>
             </a:extLst>
           </p:cNvPr>
@@ -33194,7 +33194,7 @@
           <p:cNvPr id="33" name="">
             <a:extLst xmlns:a="http://schemas.openxmlformats.org/drawingml/2006/main">
               <a:ext uri="{FF2B5EF4-FFF2-40B4-BE49-F238E27FC236}">
-                <a16:creationId xmlns:a16="http://schemas.microsoft.com/office/drawing/2014/main" id="{30BAF419-7A87-44A5-8047-B17CD05FA6AD}"/>
+                <a16:creationId xmlns:a16="http://schemas.microsoft.com/office/drawing/2014/main" id="{03F5580D-E3AF-4D69-960E-8921052A7077}"/>
               </a:ext>
             </a:extLst>
           </p:cNvPr>
@@ -33258,7 +33258,7 @@
           <p:cNvPr id="34" name="">
             <a:extLst xmlns:a="http://schemas.openxmlformats.org/drawingml/2006/main">
               <a:ext uri="{FF2B5EF4-FFF2-40B4-BE49-F238E27FC236}">
-                <a16:creationId xmlns:a16="http://schemas.microsoft.com/office/drawing/2014/main" id="{57338CEC-A110-48E2-8E32-6A5E9162E33F}"/>
+                <a16:creationId xmlns:a16="http://schemas.microsoft.com/office/drawing/2014/main" id="{C993BCC3-26B3-4A16-A09C-3D116A278D03}"/>
               </a:ext>
             </a:extLst>
           </p:cNvPr>
@@ -33291,7 +33291,7 @@
           <p:cNvPr id="35" name="">
             <a:extLst xmlns:a="http://schemas.openxmlformats.org/drawingml/2006/main">
               <a:ext uri="{FF2B5EF4-FFF2-40B4-BE49-F238E27FC236}">
-                <a16:creationId xmlns:a16="http://schemas.microsoft.com/office/drawing/2014/main" id="{3852C308-BF66-4B4D-A08E-38D958066474}"/>
+                <a16:creationId xmlns:a16="http://schemas.microsoft.com/office/drawing/2014/main" id="{7494378F-CC9D-49E6-95F9-9608CC4A6A02}"/>
               </a:ext>
             </a:extLst>
           </p:cNvPr>
@@ -33355,7 +33355,7 @@
           <p:cNvPr id="36" name="">
             <a:extLst xmlns:a="http://schemas.openxmlformats.org/drawingml/2006/main">
               <a:ext uri="{FF2B5EF4-FFF2-40B4-BE49-F238E27FC236}">
-                <a16:creationId xmlns:a16="http://schemas.microsoft.com/office/drawing/2014/main" id="{ABF1709E-8E8A-4B8A-B372-B95F7633B235}"/>
+                <a16:creationId xmlns:a16="http://schemas.microsoft.com/office/drawing/2014/main" id="{7537A284-3E84-4A91-BF29-5D7CF07586EF}"/>
               </a:ext>
             </a:extLst>
           </p:cNvPr>
@@ -33419,7 +33419,7 @@
           <p:cNvPr id="37" name="">
             <a:extLst xmlns:a="http://schemas.openxmlformats.org/drawingml/2006/main">
               <a:ext uri="{FF2B5EF4-FFF2-40B4-BE49-F238E27FC236}">
-                <a16:creationId xmlns:a16="http://schemas.microsoft.com/office/drawing/2014/main" id="{F45B2741-1D65-44F8-8BAE-649BCAA5FD9B}"/>
+                <a16:creationId xmlns:a16="http://schemas.microsoft.com/office/drawing/2014/main" id="{10D87DDF-BD08-408D-B2D2-1C9F0A1AE938}"/>
               </a:ext>
             </a:extLst>
           </p:cNvPr>
@@ -33481,7 +33481,7 @@
     </p:spTree>
     <p:extLst>
       <p:ext uri="{BB962C8B-B14F-4D97-AF65-F5344CB8AC3E}">
-        <p14:creationId xmlns:p14="http://schemas.microsoft.com/office/powerpoint/2010/main" val="1156913193"/>
+        <p14:creationId xmlns:p14="http://schemas.microsoft.com/office/powerpoint/2010/main" val="1309823574"/>
       </p:ext>
     </p:extLst>
   </p:cSld>
@@ -33505,7 +33505,7 @@
           <p:cNvPr id="1" name="">
             <a:extLst xmlns:a="http://schemas.openxmlformats.org/drawingml/2006/main">
               <a:ext uri="{FF2B5EF4-FFF2-40B4-BE49-F238E27FC236}">
-                <a16:creationId xmlns:a16="http://schemas.microsoft.com/office/drawing/2014/main" id="{D8168288-BA16-4205-A7D9-3A3649FE95D7}"/>
+                <a16:creationId xmlns:a16="http://schemas.microsoft.com/office/drawing/2014/main" id="{3192F36B-BF14-4852-A3D3-9BD155210BAE}"/>
               </a:ext>
             </a:extLst>
           </p:cNvPr>
@@ -33538,7 +33538,7 @@
           <p:cNvPr id="2" name="">
             <a:extLst xmlns:a="http://schemas.openxmlformats.org/drawingml/2006/main">
               <a:ext uri="{FF2B5EF4-FFF2-40B4-BE49-F238E27FC236}">
-                <a16:creationId xmlns:a16="http://schemas.microsoft.com/office/drawing/2014/main" id="{786C1152-9422-4974-88F3-5A627AF40D3F}"/>
+                <a16:creationId xmlns:a16="http://schemas.microsoft.com/office/drawing/2014/main" id="{ACF7D1C8-B8E2-4E88-B0C5-88DDFF22B952}"/>
               </a:ext>
             </a:extLst>
           </p:cNvPr>
@@ -33571,7 +33571,7 @@
           <p:cNvPr id="3" name="">
             <a:extLst xmlns:a="http://schemas.openxmlformats.org/drawingml/2006/main">
               <a:ext uri="{FF2B5EF4-FFF2-40B4-BE49-F238E27FC236}">
-                <a16:creationId xmlns:a16="http://schemas.microsoft.com/office/drawing/2014/main" id="{562D455F-A230-4719-82C3-A482312D45DF}"/>
+                <a16:creationId xmlns:a16="http://schemas.microsoft.com/office/drawing/2014/main" id="{2E9D958D-DF6E-40A2-A029-D028A5C17D37}"/>
               </a:ext>
             </a:extLst>
           </p:cNvPr>
@@ -33635,7 +33635,7 @@
           <p:cNvPr id="4" name="">
             <a:extLst xmlns:a="http://schemas.openxmlformats.org/drawingml/2006/main">
               <a:ext uri="{FF2B5EF4-FFF2-40B4-BE49-F238E27FC236}">
-                <a16:creationId xmlns:a16="http://schemas.microsoft.com/office/drawing/2014/main" id="{BC144A7B-DF11-4701-9F9F-A84A9C7F3797}"/>
+                <a16:creationId xmlns:a16="http://schemas.microsoft.com/office/drawing/2014/main" id="{97AD543E-DCE6-4243-8E1D-F70B1AA35EAD}"/>
               </a:ext>
             </a:extLst>
           </p:cNvPr>
@@ -33699,7 +33699,7 @@
           <p:cNvPr id="5" name="">
             <a:extLst xmlns:a="http://schemas.openxmlformats.org/drawingml/2006/main">
               <a:ext uri="{FF2B5EF4-FFF2-40B4-BE49-F238E27FC236}">
-                <a16:creationId xmlns:a16="http://schemas.microsoft.com/office/drawing/2014/main" id="{68458ECF-BE48-4CC5-9F7A-0A2D896BDDA1}"/>
+                <a16:creationId xmlns:a16="http://schemas.microsoft.com/office/drawing/2014/main" id="{72F9C0CD-0377-4A09-BE7D-2AB2C80D278C}"/>
               </a:ext>
             </a:extLst>
           </p:cNvPr>
@@ -33763,7 +33763,7 @@
           <p:cNvPr id="6" name="">
             <a:extLst xmlns:a="http://schemas.openxmlformats.org/drawingml/2006/main">
               <a:ext uri="{FF2B5EF4-FFF2-40B4-BE49-F238E27FC236}">
-                <a16:creationId xmlns:a16="http://schemas.microsoft.com/office/drawing/2014/main" id="{3BF332B6-582B-4426-A9C2-C9811E0C59EE}"/>
+                <a16:creationId xmlns:a16="http://schemas.microsoft.com/office/drawing/2014/main" id="{1FAC3BC4-51F6-486A-AC57-3B847951BB44}"/>
               </a:ext>
             </a:extLst>
           </p:cNvPr>
@@ -33796,7 +33796,7 @@
           <p:cNvPr id="7" name="">
             <a:extLst xmlns:a="http://schemas.openxmlformats.org/drawingml/2006/main">
               <a:ext uri="{FF2B5EF4-FFF2-40B4-BE49-F238E27FC236}">
-                <a16:creationId xmlns:a16="http://schemas.microsoft.com/office/drawing/2014/main" id="{E490546A-9F88-4A0E-9FAC-2A9D72D82D47}"/>
+                <a16:creationId xmlns:a16="http://schemas.microsoft.com/office/drawing/2014/main" id="{4E89AA1A-2809-4D80-AB7B-4BC69AEAB71E}"/>
               </a:ext>
             </a:extLst>
           </p:cNvPr>
@@ -33860,7 +33860,7 @@
           <p:cNvPr id="8" name="">
             <a:extLst xmlns:a="http://schemas.openxmlformats.org/drawingml/2006/main">
               <a:ext uri="{FF2B5EF4-FFF2-40B4-BE49-F238E27FC236}">
-                <a16:creationId xmlns:a16="http://schemas.microsoft.com/office/drawing/2014/main" id="{D1E42E7A-1A6C-497E-9042-D6C25C301CE4}"/>
+                <a16:creationId xmlns:a16="http://schemas.microsoft.com/office/drawing/2014/main" id="{04BE9AD7-3200-4190-B56A-1D53C975681C}"/>
               </a:ext>
             </a:extLst>
           </p:cNvPr>
@@ -33893,7 +33893,7 @@
           <p:cNvPr id="9" name="">
             <a:extLst xmlns:a="http://schemas.openxmlformats.org/drawingml/2006/main">
               <a:ext uri="{FF2B5EF4-FFF2-40B4-BE49-F238E27FC236}">
-                <a16:creationId xmlns:a16="http://schemas.microsoft.com/office/drawing/2014/main" id="{EF49B10C-3554-405B-A800-21F3B7211C92}"/>
+                <a16:creationId xmlns:a16="http://schemas.microsoft.com/office/drawing/2014/main" id="{AAA41B82-2236-46D3-BF0B-A524F42CD620}"/>
               </a:ext>
             </a:extLst>
           </p:cNvPr>
@@ -33957,7 +33957,7 @@
           <p:cNvPr id="10" name="">
             <a:extLst xmlns:a="http://schemas.openxmlformats.org/drawingml/2006/main">
               <a:ext uri="{FF2B5EF4-FFF2-40B4-BE49-F238E27FC236}">
-                <a16:creationId xmlns:a16="http://schemas.microsoft.com/office/drawing/2014/main" id="{1C232CA6-0302-48BB-95ED-03BE3272A61A}"/>
+                <a16:creationId xmlns:a16="http://schemas.microsoft.com/office/drawing/2014/main" id="{CE20B90E-9015-447E-B06F-06966C747A63}"/>
               </a:ext>
             </a:extLst>
           </p:cNvPr>
@@ -33990,7 +33990,7 @@
           <p:cNvPr id="11" name="">
             <a:extLst xmlns:a="http://schemas.openxmlformats.org/drawingml/2006/main">
               <a:ext uri="{FF2B5EF4-FFF2-40B4-BE49-F238E27FC236}">
-                <a16:creationId xmlns:a16="http://schemas.microsoft.com/office/drawing/2014/main" id="{32665CDC-13B1-489F-BC4C-4CA26857DDC6}"/>
+                <a16:creationId xmlns:a16="http://schemas.microsoft.com/office/drawing/2014/main" id="{71E7D2BA-4B92-4F11-9FE3-40AAB78F57BD}"/>
               </a:ext>
             </a:extLst>
           </p:cNvPr>
@@ -34054,7 +34054,7 @@
           <p:cNvPr id="12" name="">
             <a:extLst xmlns:a="http://schemas.openxmlformats.org/drawingml/2006/main">
               <a:ext uri="{FF2B5EF4-FFF2-40B4-BE49-F238E27FC236}">
-                <a16:creationId xmlns:a16="http://schemas.microsoft.com/office/drawing/2014/main" id="{7F5C8317-58E6-4C5F-AE2B-0A93467327A3}"/>
+                <a16:creationId xmlns:a16="http://schemas.microsoft.com/office/drawing/2014/main" id="{667EA795-1B1C-40A3-8DEC-D95718745C7E}"/>
               </a:ext>
             </a:extLst>
           </p:cNvPr>
@@ -34087,7 +34087,7 @@
           <p:cNvPr id="13" name="">
             <a:extLst xmlns:a="http://schemas.openxmlformats.org/drawingml/2006/main">
               <a:ext uri="{FF2B5EF4-FFF2-40B4-BE49-F238E27FC236}">
-                <a16:creationId xmlns:a16="http://schemas.microsoft.com/office/drawing/2014/main" id="{1A7534BA-97B0-4806-834A-23483F14555C}"/>
+                <a16:creationId xmlns:a16="http://schemas.microsoft.com/office/drawing/2014/main" id="{2BDE0A9C-089B-4DB3-BC9E-CAC43C184DD6}"/>
               </a:ext>
             </a:extLst>
           </p:cNvPr>
@@ -34151,7 +34151,7 @@
           <p:cNvPr id="14" name="">
             <a:extLst xmlns:a="http://schemas.openxmlformats.org/drawingml/2006/main">
               <a:ext uri="{FF2B5EF4-FFF2-40B4-BE49-F238E27FC236}">
-                <a16:creationId xmlns:a16="http://schemas.microsoft.com/office/drawing/2014/main" id="{C8935310-4244-46BA-85A4-1AE6C8C55520}"/>
+                <a16:creationId xmlns:a16="http://schemas.microsoft.com/office/drawing/2014/main" id="{4457AB15-D149-4DF2-B6AD-E2F367DB2FFB}"/>
               </a:ext>
             </a:extLst>
           </p:cNvPr>
@@ -34184,7 +34184,7 @@
           <p:cNvPr id="15" name="">
             <a:extLst xmlns:a="http://schemas.openxmlformats.org/drawingml/2006/main">
               <a:ext uri="{FF2B5EF4-FFF2-40B4-BE49-F238E27FC236}">
-                <a16:creationId xmlns:a16="http://schemas.microsoft.com/office/drawing/2014/main" id="{CF005C1F-6C05-43DE-B228-9F2D5F38DE52}"/>
+                <a16:creationId xmlns:a16="http://schemas.microsoft.com/office/drawing/2014/main" id="{68617A60-D25D-4E63-B083-AABE7A8FE1E3}"/>
               </a:ext>
             </a:extLst>
           </p:cNvPr>
@@ -34248,7 +34248,7 @@
           <p:cNvPr id="16" name="">
             <a:extLst xmlns:a="http://schemas.openxmlformats.org/drawingml/2006/main">
               <a:ext uri="{FF2B5EF4-FFF2-40B4-BE49-F238E27FC236}">
-                <a16:creationId xmlns:a16="http://schemas.microsoft.com/office/drawing/2014/main" id="{AEC10E14-B562-412C-80D9-AC359D532B55}"/>
+                <a16:creationId xmlns:a16="http://schemas.microsoft.com/office/drawing/2014/main" id="{1BA09B9A-0952-40F7-92F1-7A3070ABAB04}"/>
               </a:ext>
             </a:extLst>
           </p:cNvPr>
@@ -34281,7 +34281,7 @@
           <p:cNvPr id="17" name="">
             <a:extLst xmlns:a="http://schemas.openxmlformats.org/drawingml/2006/main">
               <a:ext uri="{FF2B5EF4-FFF2-40B4-BE49-F238E27FC236}">
-                <a16:creationId xmlns:a16="http://schemas.microsoft.com/office/drawing/2014/main" id="{360B5364-CA85-4A38-8700-A7C7AEB42615}"/>
+                <a16:creationId xmlns:a16="http://schemas.microsoft.com/office/drawing/2014/main" id="{9AA6276C-DBC4-401C-9EE1-94342BA6397B}"/>
               </a:ext>
             </a:extLst>
           </p:cNvPr>
@@ -34345,7 +34345,7 @@
           <p:cNvPr id="18" name="">
             <a:extLst xmlns:a="http://schemas.openxmlformats.org/drawingml/2006/main">
               <a:ext uri="{FF2B5EF4-FFF2-40B4-BE49-F238E27FC236}">
-                <a16:creationId xmlns:a16="http://schemas.microsoft.com/office/drawing/2014/main" id="{DE100577-4023-47CF-BDB1-BF46ACEC5C12}"/>
+                <a16:creationId xmlns:a16="http://schemas.microsoft.com/office/drawing/2014/main" id="{CAACC69B-41AD-4BEC-BE75-6D4D82A8B0B3}"/>
               </a:ext>
             </a:extLst>
           </p:cNvPr>
@@ -34378,7 +34378,7 @@
           <p:cNvPr id="19" name="">
             <a:extLst xmlns:a="http://schemas.openxmlformats.org/drawingml/2006/main">
               <a:ext uri="{FF2B5EF4-FFF2-40B4-BE49-F238E27FC236}">
-                <a16:creationId xmlns:a16="http://schemas.microsoft.com/office/drawing/2014/main" id="{0AA790A9-E39F-454A-84A5-B050A240ADD7}"/>
+                <a16:creationId xmlns:a16="http://schemas.microsoft.com/office/drawing/2014/main" id="{86C50360-9311-48C3-88FB-756ADE62BEBD}"/>
               </a:ext>
             </a:extLst>
           </p:cNvPr>
@@ -34442,7 +34442,7 @@
           <p:cNvPr id="20" name="">
             <a:extLst xmlns:a="http://schemas.openxmlformats.org/drawingml/2006/main">
               <a:ext uri="{FF2B5EF4-FFF2-40B4-BE49-F238E27FC236}">
-                <a16:creationId xmlns:a16="http://schemas.microsoft.com/office/drawing/2014/main" id="{2E4C08C1-377D-430B-B655-A4571EF63C7C}"/>
+                <a16:creationId xmlns:a16="http://schemas.microsoft.com/office/drawing/2014/main" id="{8AF1DC63-E14F-49FF-8BA5-7B9AB9C6A52D}"/>
               </a:ext>
             </a:extLst>
           </p:cNvPr>
@@ -34475,7 +34475,7 @@
           <p:cNvPr id="21" name="">
             <a:extLst xmlns:a="http://schemas.openxmlformats.org/drawingml/2006/main">
               <a:ext uri="{FF2B5EF4-FFF2-40B4-BE49-F238E27FC236}">
-                <a16:creationId xmlns:a16="http://schemas.microsoft.com/office/drawing/2014/main" id="{71A23CC9-8502-4A1B-A64C-2A69047EB5A9}"/>
+                <a16:creationId xmlns:a16="http://schemas.microsoft.com/office/drawing/2014/main" id="{56E27408-DEE8-4F83-8443-ABB92CC12809}"/>
               </a:ext>
             </a:extLst>
           </p:cNvPr>
@@ -34539,7 +34539,7 @@
           <p:cNvPr id="22" name="">
             <a:extLst xmlns:a="http://schemas.openxmlformats.org/drawingml/2006/main">
               <a:ext uri="{FF2B5EF4-FFF2-40B4-BE49-F238E27FC236}">
-                <a16:creationId xmlns:a16="http://schemas.microsoft.com/office/drawing/2014/main" id="{8BEAAEE4-DF52-4899-AF2F-0025FC68AA72}"/>
+                <a16:creationId xmlns:a16="http://schemas.microsoft.com/office/drawing/2014/main" id="{EF7F9C57-7416-4DB3-A08F-60833D160AAD}"/>
               </a:ext>
             </a:extLst>
           </p:cNvPr>
@@ -34572,7 +34572,7 @@
           <p:cNvPr id="23" name="">
             <a:extLst xmlns:a="http://schemas.openxmlformats.org/drawingml/2006/main">
               <a:ext uri="{FF2B5EF4-FFF2-40B4-BE49-F238E27FC236}">
-                <a16:creationId xmlns:a16="http://schemas.microsoft.com/office/drawing/2014/main" id="{7D4A44FB-05E7-4E71-BFDE-118C0C2120A1}"/>
+                <a16:creationId xmlns:a16="http://schemas.microsoft.com/office/drawing/2014/main" id="{5D0A159C-ECC1-49A3-9A7D-44CA0A02BBEB}"/>
               </a:ext>
             </a:extLst>
           </p:cNvPr>
@@ -34636,7 +34636,7 @@
           <p:cNvPr id="24" name="">
             <a:extLst xmlns:a="http://schemas.openxmlformats.org/drawingml/2006/main">
               <a:ext uri="{FF2B5EF4-FFF2-40B4-BE49-F238E27FC236}">
-                <a16:creationId xmlns:a16="http://schemas.microsoft.com/office/drawing/2014/main" id="{28B74C67-A674-4313-9DB1-C683CD36DEBC}"/>
+                <a16:creationId xmlns:a16="http://schemas.microsoft.com/office/drawing/2014/main" id="{3875B7F0-5CB6-4E3D-9171-1448B543A3E4}"/>
               </a:ext>
             </a:extLst>
           </p:cNvPr>
@@ -34669,7 +34669,7 @@
           <p:cNvPr id="25" name="">
             <a:extLst xmlns:a="http://schemas.openxmlformats.org/drawingml/2006/main">
               <a:ext uri="{FF2B5EF4-FFF2-40B4-BE49-F238E27FC236}">
-                <a16:creationId xmlns:a16="http://schemas.microsoft.com/office/drawing/2014/main" id="{C84422DD-3B55-43F3-BCCC-6CB15B430F51}"/>
+                <a16:creationId xmlns:a16="http://schemas.microsoft.com/office/drawing/2014/main" id="{C98307FD-4B08-4C4F-8695-DEDA477BEE6C}"/>
               </a:ext>
             </a:extLst>
           </p:cNvPr>
@@ -34733,7 +34733,7 @@
           <p:cNvPr id="26" name="">
             <a:extLst xmlns:a="http://schemas.openxmlformats.org/drawingml/2006/main">
               <a:ext uri="{FF2B5EF4-FFF2-40B4-BE49-F238E27FC236}">
-                <a16:creationId xmlns:a16="http://schemas.microsoft.com/office/drawing/2014/main" id="{99D31520-F81F-4509-B4BB-D6C333DE4C44}"/>
+                <a16:creationId xmlns:a16="http://schemas.microsoft.com/office/drawing/2014/main" id="{E1E39370-F428-4AEF-8720-2DACEF5444CF}"/>
               </a:ext>
             </a:extLst>
           </p:cNvPr>
@@ -34766,7 +34766,7 @@
           <p:cNvPr id="27" name="">
             <a:extLst xmlns:a="http://schemas.openxmlformats.org/drawingml/2006/main">
               <a:ext uri="{FF2B5EF4-FFF2-40B4-BE49-F238E27FC236}">
-                <a16:creationId xmlns:a16="http://schemas.microsoft.com/office/drawing/2014/main" id="{E993DDDE-B045-42C3-A380-749C149C3D77}"/>
+                <a16:creationId xmlns:a16="http://schemas.microsoft.com/office/drawing/2014/main" id="{0BD83FA0-514F-49E7-B580-8E269B3782D5}"/>
               </a:ext>
             </a:extLst>
           </p:cNvPr>
@@ -34830,7 +34830,7 @@
           <p:cNvPr id="28" name="">
             <a:extLst xmlns:a="http://schemas.openxmlformats.org/drawingml/2006/main">
               <a:ext uri="{FF2B5EF4-FFF2-40B4-BE49-F238E27FC236}">
-                <a16:creationId xmlns:a16="http://schemas.microsoft.com/office/drawing/2014/main" id="{CB0E8725-44D9-4F36-BF04-C755A15826BB}"/>
+                <a16:creationId xmlns:a16="http://schemas.microsoft.com/office/drawing/2014/main" id="{85606FF4-9FBF-4700-ACCF-BC53DAFFFF03}"/>
               </a:ext>
             </a:extLst>
           </p:cNvPr>
@@ -34894,7 +34894,7 @@
           <p:cNvPr id="29" name="">
             <a:extLst xmlns:a="http://schemas.openxmlformats.org/drawingml/2006/main">
               <a:ext uri="{FF2B5EF4-FFF2-40B4-BE49-F238E27FC236}">
-                <a16:creationId xmlns:a16="http://schemas.microsoft.com/office/drawing/2014/main" id="{2AD039AF-7050-4260-96BA-A322D1AC2CA6}"/>
+                <a16:creationId xmlns:a16="http://schemas.microsoft.com/office/drawing/2014/main" id="{FEA844C2-385D-4EAF-95B9-BFFC8AEE899E}"/>
               </a:ext>
             </a:extLst>
           </p:cNvPr>
@@ -34956,7 +34956,7 @@
     </p:spTree>
     <p:extLst>
       <p:ext uri="{BB962C8B-B14F-4D97-AF65-F5344CB8AC3E}">
-        <p14:creationId xmlns:p14="http://schemas.microsoft.com/office/powerpoint/2010/main" val="652237200"/>
+        <p14:creationId xmlns:p14="http://schemas.microsoft.com/office/powerpoint/2010/main" val="1084610584"/>
       </p:ext>
     </p:extLst>
   </p:cSld>
@@ -34980,7 +34980,7 @@
           <p:cNvPr id="1" name="">
             <a:extLst xmlns:a="http://schemas.openxmlformats.org/drawingml/2006/main">
               <a:ext uri="{FF2B5EF4-FFF2-40B4-BE49-F238E27FC236}">
-                <a16:creationId xmlns:a16="http://schemas.microsoft.com/office/drawing/2014/main" id="{22C5F6A8-F112-4EA7-A792-366FFFE99462}"/>
+                <a16:creationId xmlns:a16="http://schemas.microsoft.com/office/drawing/2014/main" id="{7709B59C-018A-4D0D-B6DC-1847DE2C7EA4}"/>
               </a:ext>
             </a:extLst>
           </p:cNvPr>
@@ -35013,7 +35013,7 @@
           <p:cNvPr id="2" name="">
             <a:extLst xmlns:a="http://schemas.openxmlformats.org/drawingml/2006/main">
               <a:ext uri="{FF2B5EF4-FFF2-40B4-BE49-F238E27FC236}">
-                <a16:creationId xmlns:a16="http://schemas.microsoft.com/office/drawing/2014/main" id="{373D50FD-536B-4102-ADCF-0C6A2B8AFD89}"/>
+                <a16:creationId xmlns:a16="http://schemas.microsoft.com/office/drawing/2014/main" id="{85130BB6-3E07-444E-972E-5DFFAF2B954F}"/>
               </a:ext>
             </a:extLst>
           </p:cNvPr>
@@ -35046,7 +35046,7 @@
           <p:cNvPr id="3" name="">
             <a:extLst xmlns:a="http://schemas.openxmlformats.org/drawingml/2006/main">
               <a:ext uri="{FF2B5EF4-FFF2-40B4-BE49-F238E27FC236}">
-                <a16:creationId xmlns:a16="http://schemas.microsoft.com/office/drawing/2014/main" id="{57E9C59D-E622-4AC6-A9EF-8E709770BDBA}"/>
+                <a16:creationId xmlns:a16="http://schemas.microsoft.com/office/drawing/2014/main" id="{15644BB0-9270-471B-AC88-C06CAB4E9009}"/>
               </a:ext>
             </a:extLst>
           </p:cNvPr>
@@ -35110,7 +35110,7 @@
           <p:cNvPr id="4" name="">
             <a:extLst xmlns:a="http://schemas.openxmlformats.org/drawingml/2006/main">
               <a:ext uri="{FF2B5EF4-FFF2-40B4-BE49-F238E27FC236}">
-                <a16:creationId xmlns:a16="http://schemas.microsoft.com/office/drawing/2014/main" id="{43022E88-08D5-4184-9D22-28B796EC4E7A}"/>
+                <a16:creationId xmlns:a16="http://schemas.microsoft.com/office/drawing/2014/main" id="{1E4DC9F5-73BE-4100-84F2-5FE15B128ACC}"/>
               </a:ext>
             </a:extLst>
           </p:cNvPr>
@@ -35174,7 +35174,7 @@
           <p:cNvPr id="5" name="">
             <a:extLst xmlns:a="http://schemas.openxmlformats.org/drawingml/2006/main">
               <a:ext uri="{FF2B5EF4-FFF2-40B4-BE49-F238E27FC236}">
-                <a16:creationId xmlns:a16="http://schemas.microsoft.com/office/drawing/2014/main" id="{089EBBBD-F3B9-4555-9EAB-8AAF57CD7109}"/>
+                <a16:creationId xmlns:a16="http://schemas.microsoft.com/office/drawing/2014/main" id="{140BBCDA-9ADD-4E2C-A751-43189B0BD7BB}"/>
               </a:ext>
             </a:extLst>
           </p:cNvPr>
@@ -35238,7 +35238,7 @@
           <p:cNvPr id="6" name="">
             <a:extLst xmlns:a="http://schemas.openxmlformats.org/drawingml/2006/main">
               <a:ext uri="{FF2B5EF4-FFF2-40B4-BE49-F238E27FC236}">
-                <a16:creationId xmlns:a16="http://schemas.microsoft.com/office/drawing/2014/main" id="{26EB9DCB-2C96-4CA9-86F2-05449D62E3D4}"/>
+                <a16:creationId xmlns:a16="http://schemas.microsoft.com/office/drawing/2014/main" id="{CEE60101-CEE3-46A1-ACF6-4B72C0B4790F}"/>
               </a:ext>
             </a:extLst>
           </p:cNvPr>
@@ -35271,7 +35271,7 @@
           <p:cNvPr id="7" name="">
             <a:extLst xmlns:a="http://schemas.openxmlformats.org/drawingml/2006/main">
               <a:ext uri="{FF2B5EF4-FFF2-40B4-BE49-F238E27FC236}">
-                <a16:creationId xmlns:a16="http://schemas.microsoft.com/office/drawing/2014/main" id="{BEC3223F-AEBF-4429-A1D9-30C2ECD96E4A}"/>
+                <a16:creationId xmlns:a16="http://schemas.microsoft.com/office/drawing/2014/main" id="{13A93941-ABF8-4CF4-A316-207A634580F6}"/>
               </a:ext>
             </a:extLst>
           </p:cNvPr>
@@ -35335,7 +35335,7 @@
           <p:cNvPr id="8" name="">
             <a:extLst xmlns:a="http://schemas.openxmlformats.org/drawingml/2006/main">
               <a:ext uri="{FF2B5EF4-FFF2-40B4-BE49-F238E27FC236}">
-                <a16:creationId xmlns:a16="http://schemas.microsoft.com/office/drawing/2014/main" id="{59A4B0FC-BEB3-422E-AAFA-A1EC95E98CB1}"/>
+                <a16:creationId xmlns:a16="http://schemas.microsoft.com/office/drawing/2014/main" id="{5261B3DA-441B-4557-A061-1EAE171DC79F}"/>
               </a:ext>
             </a:extLst>
           </p:cNvPr>
@@ -35368,7 +35368,7 @@
           <p:cNvPr id="9" name="">
             <a:extLst xmlns:a="http://schemas.openxmlformats.org/drawingml/2006/main">
               <a:ext uri="{FF2B5EF4-FFF2-40B4-BE49-F238E27FC236}">
-                <a16:creationId xmlns:a16="http://schemas.microsoft.com/office/drawing/2014/main" id="{CEE237EA-F243-46BD-8BE6-DD2B41E37C63}"/>
+                <a16:creationId xmlns:a16="http://schemas.microsoft.com/office/drawing/2014/main" id="{5F142038-66AE-43E8-97E0-4315F988AC08}"/>
               </a:ext>
             </a:extLst>
           </p:cNvPr>
@@ -35432,7 +35432,7 @@
           <p:cNvPr id="10" name="">
             <a:extLst xmlns:a="http://schemas.openxmlformats.org/drawingml/2006/main">
               <a:ext uri="{FF2B5EF4-FFF2-40B4-BE49-F238E27FC236}">
-                <a16:creationId xmlns:a16="http://schemas.microsoft.com/office/drawing/2014/main" id="{36CB0DEB-BEFD-484B-B9EE-15CB8CAEDA14}"/>
+                <a16:creationId xmlns:a16="http://schemas.microsoft.com/office/drawing/2014/main" id="{17596D84-D2F7-4B9C-B041-D8EA081D80E4}"/>
               </a:ext>
             </a:extLst>
           </p:cNvPr>
@@ -35465,7 +35465,7 @@
           <p:cNvPr id="11" name="">
             <a:extLst xmlns:a="http://schemas.openxmlformats.org/drawingml/2006/main">
               <a:ext uri="{FF2B5EF4-FFF2-40B4-BE49-F238E27FC236}">
-                <a16:creationId xmlns:a16="http://schemas.microsoft.com/office/drawing/2014/main" id="{1511FC8D-FE75-470E-AB06-BABECE1FD43C}"/>
+                <a16:creationId xmlns:a16="http://schemas.microsoft.com/office/drawing/2014/main" id="{B766BB66-B2C1-4E05-A0CC-4B570DA238CC}"/>
               </a:ext>
             </a:extLst>
           </p:cNvPr>
@@ -35529,7 +35529,7 @@
           <p:cNvPr id="12" name="">
             <a:extLst xmlns:a="http://schemas.openxmlformats.org/drawingml/2006/main">
               <a:ext uri="{FF2B5EF4-FFF2-40B4-BE49-F238E27FC236}">
-                <a16:creationId xmlns:a16="http://schemas.microsoft.com/office/drawing/2014/main" id="{37F95679-DAC5-44EA-A304-3D0C34858EB2}"/>
+                <a16:creationId xmlns:a16="http://schemas.microsoft.com/office/drawing/2014/main" id="{0B747D47-48D7-4C0E-A3C5-905C47C95F50}"/>
               </a:ext>
             </a:extLst>
           </p:cNvPr>
@@ -35562,7 +35562,7 @@
           <p:cNvPr id="13" name="">
             <a:extLst xmlns:a="http://schemas.openxmlformats.org/drawingml/2006/main">
               <a:ext uri="{FF2B5EF4-FFF2-40B4-BE49-F238E27FC236}">
-                <a16:creationId xmlns:a16="http://schemas.microsoft.com/office/drawing/2014/main" id="{7912C40D-D270-49B3-A2EE-E5173B2003E5}"/>
+                <a16:creationId xmlns:a16="http://schemas.microsoft.com/office/drawing/2014/main" id="{3F2C995D-B8FB-4126-9C13-46CA186539DE}"/>
               </a:ext>
             </a:extLst>
           </p:cNvPr>
@@ -35626,7 +35626,7 @@
           <p:cNvPr id="14" name="">
             <a:extLst xmlns:a="http://schemas.openxmlformats.org/drawingml/2006/main">
               <a:ext uri="{FF2B5EF4-FFF2-40B4-BE49-F238E27FC236}">
-                <a16:creationId xmlns:a16="http://schemas.microsoft.com/office/drawing/2014/main" id="{7613F1D9-4C0C-4744-A96A-C84CFDBF502F}"/>
+                <a16:creationId xmlns:a16="http://schemas.microsoft.com/office/drawing/2014/main" id="{FD3681E8-8324-474F-8E61-9AA5CAB8B2AD}"/>
               </a:ext>
             </a:extLst>
           </p:cNvPr>
@@ -35659,7 +35659,7 @@
           <p:cNvPr id="15" name="">
             <a:extLst xmlns:a="http://schemas.openxmlformats.org/drawingml/2006/main">
               <a:ext uri="{FF2B5EF4-FFF2-40B4-BE49-F238E27FC236}">
-                <a16:creationId xmlns:a16="http://schemas.microsoft.com/office/drawing/2014/main" id="{1C0331C9-BD9B-408A-81E0-6143801585AC}"/>
+                <a16:creationId xmlns:a16="http://schemas.microsoft.com/office/drawing/2014/main" id="{30DB954E-EFF6-47C6-8088-A3DC0566C471}"/>
               </a:ext>
             </a:extLst>
           </p:cNvPr>
@@ -35723,7 +35723,7 @@
           <p:cNvPr id="16" name="">
             <a:extLst xmlns:a="http://schemas.openxmlformats.org/drawingml/2006/main">
               <a:ext uri="{FF2B5EF4-FFF2-40B4-BE49-F238E27FC236}">
-                <a16:creationId xmlns:a16="http://schemas.microsoft.com/office/drawing/2014/main" id="{47FA1BB3-3005-447A-84ED-B8091D14E459}"/>
+                <a16:creationId xmlns:a16="http://schemas.microsoft.com/office/drawing/2014/main" id="{D0FE73C6-9295-4820-9981-8D84108A6C87}"/>
               </a:ext>
             </a:extLst>
           </p:cNvPr>
@@ -35756,7 +35756,7 @@
           <p:cNvPr id="17" name="">
             <a:extLst xmlns:a="http://schemas.openxmlformats.org/drawingml/2006/main">
               <a:ext uri="{FF2B5EF4-FFF2-40B4-BE49-F238E27FC236}">
-                <a16:creationId xmlns:a16="http://schemas.microsoft.com/office/drawing/2014/main" id="{0F61453B-BD96-4DCD-B3E7-519613EEF5AE}"/>
+                <a16:creationId xmlns:a16="http://schemas.microsoft.com/office/drawing/2014/main" id="{BC4535E0-957B-42DD-91A2-7D1952401F71}"/>
               </a:ext>
             </a:extLst>
           </p:cNvPr>
@@ -35820,7 +35820,7 @@
           <p:cNvPr id="18" name="">
             <a:extLst xmlns:a="http://schemas.openxmlformats.org/drawingml/2006/main">
               <a:ext uri="{FF2B5EF4-FFF2-40B4-BE49-F238E27FC236}">
-                <a16:creationId xmlns:a16="http://schemas.microsoft.com/office/drawing/2014/main" id="{E3C4CFEA-F098-43B8-B585-EE3AB137E6ED}"/>
+                <a16:creationId xmlns:a16="http://schemas.microsoft.com/office/drawing/2014/main" id="{65294F8D-D1E5-4511-BB6F-2A45142A78C6}"/>
               </a:ext>
             </a:extLst>
           </p:cNvPr>
@@ -35853,7 +35853,7 @@
           <p:cNvPr id="19" name="">
             <a:extLst xmlns:a="http://schemas.openxmlformats.org/drawingml/2006/main">
               <a:ext uri="{FF2B5EF4-FFF2-40B4-BE49-F238E27FC236}">
-                <a16:creationId xmlns:a16="http://schemas.microsoft.com/office/drawing/2014/main" id="{FA6A9DEE-A8DE-4045-BB62-4AF8CAF3D18E}"/>
+                <a16:creationId xmlns:a16="http://schemas.microsoft.com/office/drawing/2014/main" id="{044BDF93-8695-46D3-B491-042DA2FFC6D1}"/>
               </a:ext>
             </a:extLst>
           </p:cNvPr>
@@ -35917,7 +35917,7 @@
           <p:cNvPr id="20" name="">
             <a:extLst xmlns:a="http://schemas.openxmlformats.org/drawingml/2006/main">
               <a:ext uri="{FF2B5EF4-FFF2-40B4-BE49-F238E27FC236}">
-                <a16:creationId xmlns:a16="http://schemas.microsoft.com/office/drawing/2014/main" id="{FF400A5F-636D-4D9A-A414-EF4D29708A24}"/>
+                <a16:creationId xmlns:a16="http://schemas.microsoft.com/office/drawing/2014/main" id="{52E4F337-14EB-489F-8C22-27122EAF556A}"/>
               </a:ext>
             </a:extLst>
           </p:cNvPr>
@@ -35950,7 +35950,7 @@
           <p:cNvPr id="21" name="">
             <a:extLst xmlns:a="http://schemas.openxmlformats.org/drawingml/2006/main">
               <a:ext uri="{FF2B5EF4-FFF2-40B4-BE49-F238E27FC236}">
-                <a16:creationId xmlns:a16="http://schemas.microsoft.com/office/drawing/2014/main" id="{F2E1231D-514A-4EC6-B561-A03F961B92AC}"/>
+                <a16:creationId xmlns:a16="http://schemas.microsoft.com/office/drawing/2014/main" id="{D3A00677-E953-4D7A-AB0F-9CB3761550A0}"/>
               </a:ext>
             </a:extLst>
           </p:cNvPr>
@@ -36014,7 +36014,7 @@
           <p:cNvPr id="22" name="">
             <a:extLst xmlns:a="http://schemas.openxmlformats.org/drawingml/2006/main">
               <a:ext uri="{FF2B5EF4-FFF2-40B4-BE49-F238E27FC236}">
-                <a16:creationId xmlns:a16="http://schemas.microsoft.com/office/drawing/2014/main" id="{B8C72348-71CA-48F4-A271-D82A31BE1666}"/>
+                <a16:creationId xmlns:a16="http://schemas.microsoft.com/office/drawing/2014/main" id="{4F650546-C79A-4507-B0F8-711FE144888E}"/>
               </a:ext>
             </a:extLst>
           </p:cNvPr>
@@ -36047,7 +36047,7 @@
           <p:cNvPr id="23" name="">
             <a:extLst xmlns:a="http://schemas.openxmlformats.org/drawingml/2006/main">
               <a:ext uri="{FF2B5EF4-FFF2-40B4-BE49-F238E27FC236}">
-                <a16:creationId xmlns:a16="http://schemas.microsoft.com/office/drawing/2014/main" id="{33767954-0E56-4952-9F93-8EB806114D2C}"/>
+                <a16:creationId xmlns:a16="http://schemas.microsoft.com/office/drawing/2014/main" id="{162FD31F-3A28-4A78-8107-8C1B09F03399}"/>
               </a:ext>
             </a:extLst>
           </p:cNvPr>
@@ -36111,7 +36111,7 @@
           <p:cNvPr id="24" name="">
             <a:extLst xmlns:a="http://schemas.openxmlformats.org/drawingml/2006/main">
               <a:ext uri="{FF2B5EF4-FFF2-40B4-BE49-F238E27FC236}">
-                <a16:creationId xmlns:a16="http://schemas.microsoft.com/office/drawing/2014/main" id="{B20F3E56-65AD-4417-9CB1-776613D3CF8D}"/>
+                <a16:creationId xmlns:a16="http://schemas.microsoft.com/office/drawing/2014/main" id="{126DA366-5DC3-43F4-9D6F-B8424C9BDF9C}"/>
               </a:ext>
             </a:extLst>
           </p:cNvPr>
@@ -36144,7 +36144,7 @@
           <p:cNvPr id="25" name="">
             <a:extLst xmlns:a="http://schemas.openxmlformats.org/drawingml/2006/main">
               <a:ext uri="{FF2B5EF4-FFF2-40B4-BE49-F238E27FC236}">
-                <a16:creationId xmlns:a16="http://schemas.microsoft.com/office/drawing/2014/main" id="{7057C496-0442-4BE1-BEEA-57716285B07E}"/>
+                <a16:creationId xmlns:a16="http://schemas.microsoft.com/office/drawing/2014/main" id="{F017A58A-4F48-4EAF-8352-87D56EFC64B4}"/>
               </a:ext>
             </a:extLst>
           </p:cNvPr>
@@ -36208,7 +36208,7 @@
           <p:cNvPr id="26" name="">
             <a:extLst xmlns:a="http://schemas.openxmlformats.org/drawingml/2006/main">
               <a:ext uri="{FF2B5EF4-FFF2-40B4-BE49-F238E27FC236}">
-                <a16:creationId xmlns:a16="http://schemas.microsoft.com/office/drawing/2014/main" id="{40A066E1-1793-485B-B41F-8C495501A229}"/>
+                <a16:creationId xmlns:a16="http://schemas.microsoft.com/office/drawing/2014/main" id="{3CD346B3-7CFC-4088-8271-16FDDA910998}"/>
               </a:ext>
             </a:extLst>
           </p:cNvPr>
@@ -36241,7 +36241,7 @@
           <p:cNvPr id="27" name="">
             <a:extLst xmlns:a="http://schemas.openxmlformats.org/drawingml/2006/main">
               <a:ext uri="{FF2B5EF4-FFF2-40B4-BE49-F238E27FC236}">
-                <a16:creationId xmlns:a16="http://schemas.microsoft.com/office/drawing/2014/main" id="{217DABD0-4A97-4151-92E9-7E3EB3A7F53F}"/>
+                <a16:creationId xmlns:a16="http://schemas.microsoft.com/office/drawing/2014/main" id="{DDA14706-5280-4B1B-A9A8-98DC50C8164C}"/>
               </a:ext>
             </a:extLst>
           </p:cNvPr>
@@ -36305,7 +36305,7 @@
           <p:cNvPr id="28" name="">
             <a:extLst xmlns:a="http://schemas.openxmlformats.org/drawingml/2006/main">
               <a:ext uri="{FF2B5EF4-FFF2-40B4-BE49-F238E27FC236}">
-                <a16:creationId xmlns:a16="http://schemas.microsoft.com/office/drawing/2014/main" id="{F9E5BEC5-9FD0-4CA3-A430-D70ABDE079FA}"/>
+                <a16:creationId xmlns:a16="http://schemas.microsoft.com/office/drawing/2014/main" id="{4042D9DE-0CBE-4477-89B4-EEA1F2D0A17C}"/>
               </a:ext>
             </a:extLst>
           </p:cNvPr>
@@ -36338,7 +36338,7 @@
           <p:cNvPr id="29" name="">
             <a:extLst xmlns:a="http://schemas.openxmlformats.org/drawingml/2006/main">
               <a:ext uri="{FF2B5EF4-FFF2-40B4-BE49-F238E27FC236}">
-                <a16:creationId xmlns:a16="http://schemas.microsoft.com/office/drawing/2014/main" id="{CDF2B6A7-36E5-4705-8B14-91A6D6D83AB0}"/>
+                <a16:creationId xmlns:a16="http://schemas.microsoft.com/office/drawing/2014/main" id="{A19BABF7-232E-4AB5-9D88-FDCA7C19DA1F}"/>
               </a:ext>
             </a:extLst>
           </p:cNvPr>
@@ -36402,7 +36402,7 @@
           <p:cNvPr id="30" name="">
             <a:extLst xmlns:a="http://schemas.openxmlformats.org/drawingml/2006/main">
               <a:ext uri="{FF2B5EF4-FFF2-40B4-BE49-F238E27FC236}">
-                <a16:creationId xmlns:a16="http://schemas.microsoft.com/office/drawing/2014/main" id="{82058E9A-3563-41A8-AB26-F79F4FAF89B0}"/>
+                <a16:creationId xmlns:a16="http://schemas.microsoft.com/office/drawing/2014/main" id="{FE422546-663B-47CE-BCAF-5FC25BEA513E}"/>
               </a:ext>
             </a:extLst>
           </p:cNvPr>
@@ -36466,7 +36466,7 @@
           <p:cNvPr id="31" name="">
             <a:extLst xmlns:a="http://schemas.openxmlformats.org/drawingml/2006/main">
               <a:ext uri="{FF2B5EF4-FFF2-40B4-BE49-F238E27FC236}">
-                <a16:creationId xmlns:a16="http://schemas.microsoft.com/office/drawing/2014/main" id="{8377CA3C-F458-4DA3-9E3E-BF13933CD2EC}"/>
+                <a16:creationId xmlns:a16="http://schemas.microsoft.com/office/drawing/2014/main" id="{3B4E1C3D-F29E-403F-AC7C-1ABB67124151}"/>
               </a:ext>
             </a:extLst>
           </p:cNvPr>
@@ -36528,7 +36528,7 @@
     </p:spTree>
     <p:extLst>
       <p:ext uri="{BB962C8B-B14F-4D97-AF65-F5344CB8AC3E}">
-        <p14:creationId xmlns:p14="http://schemas.microsoft.com/office/powerpoint/2010/main" val="16525765"/>
+        <p14:creationId xmlns:p14="http://schemas.microsoft.com/office/powerpoint/2010/main" val="1130706331"/>
       </p:ext>
     </p:extLst>
   </p:cSld>
@@ -36552,7 +36552,7 @@
           <p:cNvPr id="1" name="">
             <a:extLst xmlns:a="http://schemas.openxmlformats.org/drawingml/2006/main">
               <a:ext uri="{FF2B5EF4-FFF2-40B4-BE49-F238E27FC236}">
-                <a16:creationId xmlns:a16="http://schemas.microsoft.com/office/drawing/2014/main" id="{72E9E2E8-E289-470C-BB49-6FF659CDD9E3}"/>
+                <a16:creationId xmlns:a16="http://schemas.microsoft.com/office/drawing/2014/main" id="{691E4977-3C95-4D3E-9744-37A32BDE9307}"/>
               </a:ext>
             </a:extLst>
           </p:cNvPr>
@@ -36585,7 +36585,7 @@
           <p:cNvPr id="2" name="">
             <a:extLst xmlns:a="http://schemas.openxmlformats.org/drawingml/2006/main">
               <a:ext uri="{FF2B5EF4-FFF2-40B4-BE49-F238E27FC236}">
-                <a16:creationId xmlns:a16="http://schemas.microsoft.com/office/drawing/2014/main" id="{51E705E6-FC08-4C9A-9532-EFB473DDC7F5}"/>
+                <a16:creationId xmlns:a16="http://schemas.microsoft.com/office/drawing/2014/main" id="{2A8C8A1D-84C5-432C-BF89-EBB947E97876}"/>
               </a:ext>
             </a:extLst>
           </p:cNvPr>
@@ -36618,7 +36618,7 @@
           <p:cNvPr id="3" name="">
             <a:extLst xmlns:a="http://schemas.openxmlformats.org/drawingml/2006/main">
               <a:ext uri="{FF2B5EF4-FFF2-40B4-BE49-F238E27FC236}">
-                <a16:creationId xmlns:a16="http://schemas.microsoft.com/office/drawing/2014/main" id="{B68E8FFA-E90A-4EF2-822B-299E3BF38891}"/>
+                <a16:creationId xmlns:a16="http://schemas.microsoft.com/office/drawing/2014/main" id="{78A497FC-9E50-45C6-9781-C0E29453D523}"/>
               </a:ext>
             </a:extLst>
           </p:cNvPr>
@@ -36682,7 +36682,7 @@
           <p:cNvPr id="4" name="">
             <a:extLst xmlns:a="http://schemas.openxmlformats.org/drawingml/2006/main">
               <a:ext uri="{FF2B5EF4-FFF2-40B4-BE49-F238E27FC236}">
-                <a16:creationId xmlns:a16="http://schemas.microsoft.com/office/drawing/2014/main" id="{5BDCC2B7-5D0D-4DBE-BAEC-27F4276BEBC7}"/>
+                <a16:creationId xmlns:a16="http://schemas.microsoft.com/office/drawing/2014/main" id="{432D727B-74FA-4A87-ABC5-FBC45452CA6A}"/>
               </a:ext>
             </a:extLst>
           </p:cNvPr>
@@ -36746,7 +36746,7 @@
           <p:cNvPr id="5" name="">
             <a:extLst xmlns:a="http://schemas.openxmlformats.org/drawingml/2006/main">
               <a:ext uri="{FF2B5EF4-FFF2-40B4-BE49-F238E27FC236}">
-                <a16:creationId xmlns:a16="http://schemas.microsoft.com/office/drawing/2014/main" id="{45191843-3A62-4CFD-B88F-D2F8F1FAA773}"/>
+                <a16:creationId xmlns:a16="http://schemas.microsoft.com/office/drawing/2014/main" id="{DA083DF4-2551-44F1-A42E-D470A701B777}"/>
               </a:ext>
             </a:extLst>
           </p:cNvPr>
@@ -36810,7 +36810,7 @@
           <p:cNvPr id="6" name="">
             <a:extLst xmlns:a="http://schemas.openxmlformats.org/drawingml/2006/main">
               <a:ext uri="{FF2B5EF4-FFF2-40B4-BE49-F238E27FC236}">
-                <a16:creationId xmlns:a16="http://schemas.microsoft.com/office/drawing/2014/main" id="{04BA19E1-6A81-49A8-B436-A797CB804EA9}"/>
+                <a16:creationId xmlns:a16="http://schemas.microsoft.com/office/drawing/2014/main" id="{0C336CDF-51B7-48B9-8A14-45303B464F1D}"/>
               </a:ext>
             </a:extLst>
           </p:cNvPr>
@@ -36843,7 +36843,7 @@
           <p:cNvPr id="7" name="">
             <a:extLst xmlns:a="http://schemas.openxmlformats.org/drawingml/2006/main">
               <a:ext uri="{FF2B5EF4-FFF2-40B4-BE49-F238E27FC236}">
-                <a16:creationId xmlns:a16="http://schemas.microsoft.com/office/drawing/2014/main" id="{53E9FB4F-4DE3-4E8F-AAE2-D17136CF3230}"/>
+                <a16:creationId xmlns:a16="http://schemas.microsoft.com/office/drawing/2014/main" id="{D572129A-6F60-49FF-AE6D-64240F145B78}"/>
               </a:ext>
             </a:extLst>
           </p:cNvPr>
@@ -36907,7 +36907,7 @@
           <p:cNvPr id="8" name="">
             <a:extLst xmlns:a="http://schemas.openxmlformats.org/drawingml/2006/main">
               <a:ext uri="{FF2B5EF4-FFF2-40B4-BE49-F238E27FC236}">
-                <a16:creationId xmlns:a16="http://schemas.microsoft.com/office/drawing/2014/main" id="{483EFE06-BE42-44AF-AB17-F98F1D5899F9}"/>
+                <a16:creationId xmlns:a16="http://schemas.microsoft.com/office/drawing/2014/main" id="{3E3D9D10-CD5F-4CBF-80EE-CA4A38E56758}"/>
               </a:ext>
             </a:extLst>
           </p:cNvPr>
@@ -36940,7 +36940,7 @@
           <p:cNvPr id="9" name="">
             <a:extLst xmlns:a="http://schemas.openxmlformats.org/drawingml/2006/main">
               <a:ext uri="{FF2B5EF4-FFF2-40B4-BE49-F238E27FC236}">
-                <a16:creationId xmlns:a16="http://schemas.microsoft.com/office/drawing/2014/main" id="{AC1084B9-468F-46BA-848A-A302AE03FB96}"/>
+                <a16:creationId xmlns:a16="http://schemas.microsoft.com/office/drawing/2014/main" id="{C22823E6-5B85-46BA-ACB4-0717575A04D5}"/>
               </a:ext>
             </a:extLst>
           </p:cNvPr>
@@ -37004,7 +37004,7 @@
           <p:cNvPr id="10" name="">
             <a:extLst xmlns:a="http://schemas.openxmlformats.org/drawingml/2006/main">
               <a:ext uri="{FF2B5EF4-FFF2-40B4-BE49-F238E27FC236}">
-                <a16:creationId xmlns:a16="http://schemas.microsoft.com/office/drawing/2014/main" id="{BE9615EC-1479-40E6-9617-7D2E21FC124D}"/>
+                <a16:creationId xmlns:a16="http://schemas.microsoft.com/office/drawing/2014/main" id="{81B852C4-8144-4DFA-8757-99EE8F33C98B}"/>
               </a:ext>
             </a:extLst>
           </p:cNvPr>
@@ -37037,7 +37037,7 @@
           <p:cNvPr id="11" name="">
             <a:extLst xmlns:a="http://schemas.openxmlformats.org/drawingml/2006/main">
               <a:ext uri="{FF2B5EF4-FFF2-40B4-BE49-F238E27FC236}">
-                <a16:creationId xmlns:a16="http://schemas.microsoft.com/office/drawing/2014/main" id="{384526CF-AED5-465A-B853-693DA2ABF538}"/>
+                <a16:creationId xmlns:a16="http://schemas.microsoft.com/office/drawing/2014/main" id="{9F58B60D-7DF9-4133-ABF8-4A36986A7CBD}"/>
               </a:ext>
             </a:extLst>
           </p:cNvPr>
@@ -37101,7 +37101,7 @@
           <p:cNvPr id="12" name="">
             <a:extLst xmlns:a="http://schemas.openxmlformats.org/drawingml/2006/main">
               <a:ext uri="{FF2B5EF4-FFF2-40B4-BE49-F238E27FC236}">
-                <a16:creationId xmlns:a16="http://schemas.microsoft.com/office/drawing/2014/main" id="{A9515D26-F643-46ED-BC68-6FF7CC659C14}"/>
+                <a16:creationId xmlns:a16="http://schemas.microsoft.com/office/drawing/2014/main" id="{16018604-C1CD-4FAF-853E-E3C8BBA0F096}"/>
               </a:ext>
             </a:extLst>
           </p:cNvPr>
@@ -37134,7 +37134,7 @@
           <p:cNvPr id="13" name="">
             <a:extLst xmlns:a="http://schemas.openxmlformats.org/drawingml/2006/main">
               <a:ext uri="{FF2B5EF4-FFF2-40B4-BE49-F238E27FC236}">
-                <a16:creationId xmlns:a16="http://schemas.microsoft.com/office/drawing/2014/main" id="{AFA65E13-CBEB-471C-B142-0195A3EDE0DE}"/>
+                <a16:creationId xmlns:a16="http://schemas.microsoft.com/office/drawing/2014/main" id="{8B3BA1AB-2DE4-485D-A6AD-D25C70E450DF}"/>
               </a:ext>
             </a:extLst>
           </p:cNvPr>
@@ -37198,7 +37198,7 @@
           <p:cNvPr id="14" name="">
             <a:extLst xmlns:a="http://schemas.openxmlformats.org/drawingml/2006/main">
               <a:ext uri="{FF2B5EF4-FFF2-40B4-BE49-F238E27FC236}">
-                <a16:creationId xmlns:a16="http://schemas.microsoft.com/office/drawing/2014/main" id="{D1A38234-E387-4C68-AB91-53008A53E7FA}"/>
+                <a16:creationId xmlns:a16="http://schemas.microsoft.com/office/drawing/2014/main" id="{82EA54B5-7824-45BC-B684-55E24DD5AFDE}"/>
               </a:ext>
             </a:extLst>
           </p:cNvPr>
@@ -37231,7 +37231,7 @@
           <p:cNvPr id="15" name="">
             <a:extLst xmlns:a="http://schemas.openxmlformats.org/drawingml/2006/main">
               <a:ext uri="{FF2B5EF4-FFF2-40B4-BE49-F238E27FC236}">
-                <a16:creationId xmlns:a16="http://schemas.microsoft.com/office/drawing/2014/main" id="{F4FB4E9D-0097-469B-978A-1571CAE83B51}"/>
+                <a16:creationId xmlns:a16="http://schemas.microsoft.com/office/drawing/2014/main" id="{9A6993E4-8036-47D3-9DA1-5815CE1C18D5}"/>
               </a:ext>
             </a:extLst>
           </p:cNvPr>
@@ -37295,7 +37295,7 @@
           <p:cNvPr id="16" name="">
             <a:extLst xmlns:a="http://schemas.openxmlformats.org/drawingml/2006/main">
               <a:ext uri="{FF2B5EF4-FFF2-40B4-BE49-F238E27FC236}">
-                <a16:creationId xmlns:a16="http://schemas.microsoft.com/office/drawing/2014/main" id="{3F51259F-24A4-4656-B2F9-26C68C25F15C}"/>
+                <a16:creationId xmlns:a16="http://schemas.microsoft.com/office/drawing/2014/main" id="{98826A0B-8C7F-4F1D-ACBA-D0BB3D00FF00}"/>
               </a:ext>
             </a:extLst>
           </p:cNvPr>
@@ -37328,7 +37328,7 @@
           <p:cNvPr id="17" name="">
             <a:extLst xmlns:a="http://schemas.openxmlformats.org/drawingml/2006/main">
               <a:ext uri="{FF2B5EF4-FFF2-40B4-BE49-F238E27FC236}">
-                <a16:creationId xmlns:a16="http://schemas.microsoft.com/office/drawing/2014/main" id="{FE670A46-9661-49CD-A145-0A2762265515}"/>
+                <a16:creationId xmlns:a16="http://schemas.microsoft.com/office/drawing/2014/main" id="{4F384E48-4F5E-47C4-96B9-F0D238249A68}"/>
               </a:ext>
             </a:extLst>
           </p:cNvPr>
@@ -37392,7 +37392,7 @@
           <p:cNvPr id="18" name="">
             <a:extLst xmlns:a="http://schemas.openxmlformats.org/drawingml/2006/main">
               <a:ext uri="{FF2B5EF4-FFF2-40B4-BE49-F238E27FC236}">
-                <a16:creationId xmlns:a16="http://schemas.microsoft.com/office/drawing/2014/main" id="{9D748140-956B-4FC4-AA98-3DC36D84CAFC}"/>
+                <a16:creationId xmlns:a16="http://schemas.microsoft.com/office/drawing/2014/main" id="{3347221C-15DA-497E-A1B5-1F884FB651F4}"/>
               </a:ext>
             </a:extLst>
           </p:cNvPr>
@@ -37425,7 +37425,7 @@
           <p:cNvPr id="19" name="">
             <a:extLst xmlns:a="http://schemas.openxmlformats.org/drawingml/2006/main">
               <a:ext uri="{FF2B5EF4-FFF2-40B4-BE49-F238E27FC236}">
-                <a16:creationId xmlns:a16="http://schemas.microsoft.com/office/drawing/2014/main" id="{0449F8EC-5745-48C2-B965-6E7D3B45B847}"/>
+                <a16:creationId xmlns:a16="http://schemas.microsoft.com/office/drawing/2014/main" id="{9AB53BEB-A1EB-46A3-84B1-9270DE1B4E69}"/>
               </a:ext>
             </a:extLst>
           </p:cNvPr>
@@ -37489,7 +37489,7 @@
           <p:cNvPr id="20" name="">
             <a:extLst xmlns:a="http://schemas.openxmlformats.org/drawingml/2006/main">
               <a:ext uri="{FF2B5EF4-FFF2-40B4-BE49-F238E27FC236}">
-                <a16:creationId xmlns:a16="http://schemas.microsoft.com/office/drawing/2014/main" id="{3DC0F06E-CD2B-4B71-917C-F0ABDBBF13DF}"/>
+                <a16:creationId xmlns:a16="http://schemas.microsoft.com/office/drawing/2014/main" id="{3C311D5B-0180-4725-98B1-EDCB48FC7BD8}"/>
               </a:ext>
             </a:extLst>
           </p:cNvPr>
@@ -37522,7 +37522,7 @@
           <p:cNvPr id="21" name="">
             <a:extLst xmlns:a="http://schemas.openxmlformats.org/drawingml/2006/main">
               <a:ext uri="{FF2B5EF4-FFF2-40B4-BE49-F238E27FC236}">
-                <a16:creationId xmlns:a16="http://schemas.microsoft.com/office/drawing/2014/main" id="{5463868B-6239-425B-970C-E1837BE9886F}"/>
+                <a16:creationId xmlns:a16="http://schemas.microsoft.com/office/drawing/2014/main" id="{CB38482F-0A3B-4951-A8B0-C6B9893EB58C}"/>
               </a:ext>
             </a:extLst>
           </p:cNvPr>
@@ -37586,7 +37586,7 @@
           <p:cNvPr id="22" name="">
             <a:extLst xmlns:a="http://schemas.openxmlformats.org/drawingml/2006/main">
               <a:ext uri="{FF2B5EF4-FFF2-40B4-BE49-F238E27FC236}">
-                <a16:creationId xmlns:a16="http://schemas.microsoft.com/office/drawing/2014/main" id="{D01C6D43-EF2B-43C1-9B04-6FF85DDE2F12}"/>
+                <a16:creationId xmlns:a16="http://schemas.microsoft.com/office/drawing/2014/main" id="{72982421-3B4D-4758-A869-41B6AC5DBC7A}"/>
               </a:ext>
             </a:extLst>
           </p:cNvPr>
@@ -37619,7 +37619,7 @@
           <p:cNvPr id="23" name="">
             <a:extLst xmlns:a="http://schemas.openxmlformats.org/drawingml/2006/main">
               <a:ext uri="{FF2B5EF4-FFF2-40B4-BE49-F238E27FC236}">
-                <a16:creationId xmlns:a16="http://schemas.microsoft.com/office/drawing/2014/main" id="{4211F7EE-B927-4E61-A817-B32402E2E035}"/>
+                <a16:creationId xmlns:a16="http://schemas.microsoft.com/office/drawing/2014/main" id="{F2EFFDC3-834B-4004-937F-DBC49C2E580A}"/>
               </a:ext>
             </a:extLst>
           </p:cNvPr>
@@ -37683,7 +37683,7 @@
           <p:cNvPr id="24" name="">
             <a:extLst xmlns:a="http://schemas.openxmlformats.org/drawingml/2006/main">
               <a:ext uri="{FF2B5EF4-FFF2-40B4-BE49-F238E27FC236}">
-                <a16:creationId xmlns:a16="http://schemas.microsoft.com/office/drawing/2014/main" id="{3AB1236F-A35E-43D1-87A4-97A8633F681F}"/>
+                <a16:creationId xmlns:a16="http://schemas.microsoft.com/office/drawing/2014/main" id="{A72230CA-F1CA-4A8F-A1F9-50DB0F4A09CA}"/>
               </a:ext>
             </a:extLst>
           </p:cNvPr>
@@ -37716,7 +37716,7 @@
           <p:cNvPr id="25" name="">
             <a:extLst xmlns:a="http://schemas.openxmlformats.org/drawingml/2006/main">
               <a:ext uri="{FF2B5EF4-FFF2-40B4-BE49-F238E27FC236}">
-                <a16:creationId xmlns:a16="http://schemas.microsoft.com/office/drawing/2014/main" id="{4B2D9EA3-5FE6-4C32-A2D7-2D6748B16C48}"/>
+                <a16:creationId xmlns:a16="http://schemas.microsoft.com/office/drawing/2014/main" id="{F4A016D7-2370-4767-8CD2-B44A56B49490}"/>
               </a:ext>
             </a:extLst>
           </p:cNvPr>
@@ -37780,7 +37780,7 @@
           <p:cNvPr id="26" name="">
             <a:extLst xmlns:a="http://schemas.openxmlformats.org/drawingml/2006/main">
               <a:ext uri="{FF2B5EF4-FFF2-40B4-BE49-F238E27FC236}">
-                <a16:creationId xmlns:a16="http://schemas.microsoft.com/office/drawing/2014/main" id="{0C3FFDDB-4420-40FD-A4B9-00A07E421D7C}"/>
+                <a16:creationId xmlns:a16="http://schemas.microsoft.com/office/drawing/2014/main" id="{3DC15CC0-BB21-420E-9D80-468F34F2D79A}"/>
               </a:ext>
             </a:extLst>
           </p:cNvPr>
@@ -37844,7 +37844,7 @@
           <p:cNvPr id="27" name="">
             <a:extLst xmlns:a="http://schemas.openxmlformats.org/drawingml/2006/main">
               <a:ext uri="{FF2B5EF4-FFF2-40B4-BE49-F238E27FC236}">
-                <a16:creationId xmlns:a16="http://schemas.microsoft.com/office/drawing/2014/main" id="{9468165D-3806-4F4F-88C1-7A5A092A0957}"/>
+                <a16:creationId xmlns:a16="http://schemas.microsoft.com/office/drawing/2014/main" id="{360C513F-5BE2-4608-B3C3-FCE6F8FF903E}"/>
               </a:ext>
             </a:extLst>
           </p:cNvPr>
@@ -37906,7 +37906,7 @@
     </p:spTree>
     <p:extLst>
       <p:ext uri="{BB962C8B-B14F-4D97-AF65-F5344CB8AC3E}">
-        <p14:creationId xmlns:p14="http://schemas.microsoft.com/office/powerpoint/2010/main" val="1403755754"/>
+        <p14:creationId xmlns:p14="http://schemas.microsoft.com/office/powerpoint/2010/main" val="1204936327"/>
       </p:ext>
     </p:extLst>
   </p:cSld>
@@ -37930,7 +37930,7 @@
           <p:cNvPr id="1" name="">
             <a:extLst xmlns:a="http://schemas.openxmlformats.org/drawingml/2006/main">
               <a:ext uri="{FF2B5EF4-FFF2-40B4-BE49-F238E27FC236}">
-                <a16:creationId xmlns:a16="http://schemas.microsoft.com/office/drawing/2014/main" id="{3B6243B8-BCDA-4763-B925-F94801A3A13E}"/>
+                <a16:creationId xmlns:a16="http://schemas.microsoft.com/office/drawing/2014/main" id="{0510AB0D-87CE-4E90-A1E2-74F50FCC2017}"/>
               </a:ext>
             </a:extLst>
           </p:cNvPr>
@@ -37963,7 +37963,7 @@
           <p:cNvPr id="2" name="">
             <a:extLst xmlns:a="http://schemas.openxmlformats.org/drawingml/2006/main">
               <a:ext uri="{FF2B5EF4-FFF2-40B4-BE49-F238E27FC236}">
-                <a16:creationId xmlns:a16="http://schemas.microsoft.com/office/drawing/2014/main" id="{392A09D3-EA5B-41C3-89F0-CDE74114F170}"/>
+                <a16:creationId xmlns:a16="http://schemas.microsoft.com/office/drawing/2014/main" id="{AB95AD6A-F70F-4EF4-BF55-F661A1FB57DE}"/>
               </a:ext>
             </a:extLst>
           </p:cNvPr>
@@ -37996,7 +37996,7 @@
           <p:cNvPr id="3" name="">
             <a:extLst xmlns:a="http://schemas.openxmlformats.org/drawingml/2006/main">
               <a:ext uri="{FF2B5EF4-FFF2-40B4-BE49-F238E27FC236}">
-                <a16:creationId xmlns:a16="http://schemas.microsoft.com/office/drawing/2014/main" id="{55C789DE-05D2-42D9-AA27-DA505EE3C665}"/>
+                <a16:creationId xmlns:a16="http://schemas.microsoft.com/office/drawing/2014/main" id="{DC3C713D-9C62-4C10-A865-4AAA8034341C}"/>
               </a:ext>
             </a:extLst>
           </p:cNvPr>
@@ -38060,7 +38060,7 @@
           <p:cNvPr id="4" name="">
             <a:extLst xmlns:a="http://schemas.openxmlformats.org/drawingml/2006/main">
               <a:ext uri="{FF2B5EF4-FFF2-40B4-BE49-F238E27FC236}">
-                <a16:creationId xmlns:a16="http://schemas.microsoft.com/office/drawing/2014/main" id="{82CEAF27-CC67-4284-A941-98AB502B672B}"/>
+                <a16:creationId xmlns:a16="http://schemas.microsoft.com/office/drawing/2014/main" id="{201781CE-72AD-4713-93C9-511B36FBCCF5}"/>
               </a:ext>
             </a:extLst>
           </p:cNvPr>
@@ -38124,7 +38124,7 @@
           <p:cNvPr id="5" name="">
             <a:extLst xmlns:a="http://schemas.openxmlformats.org/drawingml/2006/main">
               <a:ext uri="{FF2B5EF4-FFF2-40B4-BE49-F238E27FC236}">
-                <a16:creationId xmlns:a16="http://schemas.microsoft.com/office/drawing/2014/main" id="{69B08268-AC4D-4276-906A-FF4D64955420}"/>
+                <a16:creationId xmlns:a16="http://schemas.microsoft.com/office/drawing/2014/main" id="{AFD689E7-841A-4C0E-94F7-F55A6A7E57B0}"/>
               </a:ext>
             </a:extLst>
           </p:cNvPr>
@@ -38188,7 +38188,7 @@
           <p:cNvPr id="6" name="">
             <a:extLst xmlns:a="http://schemas.openxmlformats.org/drawingml/2006/main">
               <a:ext uri="{FF2B5EF4-FFF2-40B4-BE49-F238E27FC236}">
-                <a16:creationId xmlns:a16="http://schemas.microsoft.com/office/drawing/2014/main" id="{697DCC9E-9594-40A3-BB23-8F68EDE9D637}"/>
+                <a16:creationId xmlns:a16="http://schemas.microsoft.com/office/drawing/2014/main" id="{7C9A9520-7567-4E10-BD53-70B83993CEEB}"/>
               </a:ext>
             </a:extLst>
           </p:cNvPr>
@@ -38221,7 +38221,7 @@
           <p:cNvPr id="7" name="">
             <a:extLst xmlns:a="http://schemas.openxmlformats.org/drawingml/2006/main">
               <a:ext uri="{FF2B5EF4-FFF2-40B4-BE49-F238E27FC236}">
-                <a16:creationId xmlns:a16="http://schemas.microsoft.com/office/drawing/2014/main" id="{3D53E178-DF30-4C71-9C47-62880B6AF114}"/>
+                <a16:creationId xmlns:a16="http://schemas.microsoft.com/office/drawing/2014/main" id="{110FBC25-EB3C-4328-87BC-4E300E935982}"/>
               </a:ext>
             </a:extLst>
           </p:cNvPr>
@@ -38285,7 +38285,7 @@
           <p:cNvPr id="8" name="">
             <a:extLst xmlns:a="http://schemas.openxmlformats.org/drawingml/2006/main">
               <a:ext uri="{FF2B5EF4-FFF2-40B4-BE49-F238E27FC236}">
-                <a16:creationId xmlns:a16="http://schemas.microsoft.com/office/drawing/2014/main" id="{E1957822-A9A8-4B79-A732-78AA302BE5D8}"/>
+                <a16:creationId xmlns:a16="http://schemas.microsoft.com/office/drawing/2014/main" id="{933A5BBE-D4AA-41A4-A9DF-4E0D22A03FB0}"/>
               </a:ext>
             </a:extLst>
           </p:cNvPr>
@@ -38318,7 +38318,7 @@
           <p:cNvPr id="9" name="">
             <a:extLst xmlns:a="http://schemas.openxmlformats.org/drawingml/2006/main">
               <a:ext uri="{FF2B5EF4-FFF2-40B4-BE49-F238E27FC236}">
-                <a16:creationId xmlns:a16="http://schemas.microsoft.com/office/drawing/2014/main" id="{C6760987-E34A-4181-B78D-C466475B6620}"/>
+                <a16:creationId xmlns:a16="http://schemas.microsoft.com/office/drawing/2014/main" id="{A3A5D4D4-AE0E-4E52-B5A5-EA2B1C049C08}"/>
               </a:ext>
             </a:extLst>
           </p:cNvPr>
@@ -38382,7 +38382,7 @@
           <p:cNvPr id="10" name="">
             <a:extLst xmlns:a="http://schemas.openxmlformats.org/drawingml/2006/main">
               <a:ext uri="{FF2B5EF4-FFF2-40B4-BE49-F238E27FC236}">
-                <a16:creationId xmlns:a16="http://schemas.microsoft.com/office/drawing/2014/main" id="{9DE70946-3076-4A8B-A588-89BE4E54D6B3}"/>
+                <a16:creationId xmlns:a16="http://schemas.microsoft.com/office/drawing/2014/main" id="{F07D3F52-ECB3-41C8-8417-1486DB85FD32}"/>
               </a:ext>
             </a:extLst>
           </p:cNvPr>
@@ -38415,7 +38415,7 @@
           <p:cNvPr id="11" name="">
             <a:extLst xmlns:a="http://schemas.openxmlformats.org/drawingml/2006/main">
               <a:ext uri="{FF2B5EF4-FFF2-40B4-BE49-F238E27FC236}">
-                <a16:creationId xmlns:a16="http://schemas.microsoft.com/office/drawing/2014/main" id="{9BED706C-824A-44B1-9F00-222335051B92}"/>
+                <a16:creationId xmlns:a16="http://schemas.microsoft.com/office/drawing/2014/main" id="{B7A751E8-981B-469C-8569-2E8CEAECE295}"/>
               </a:ext>
             </a:extLst>
           </p:cNvPr>
@@ -38479,7 +38479,7 @@
           <p:cNvPr id="12" name="">
             <a:extLst xmlns:a="http://schemas.openxmlformats.org/drawingml/2006/main">
               <a:ext uri="{FF2B5EF4-FFF2-40B4-BE49-F238E27FC236}">
-                <a16:creationId xmlns:a16="http://schemas.microsoft.com/office/drawing/2014/main" id="{07C38B13-364B-4FCE-897E-3856E817021C}"/>
+                <a16:creationId xmlns:a16="http://schemas.microsoft.com/office/drawing/2014/main" id="{C0185325-18BD-4D6C-A2F8-8CB32A1B7FF2}"/>
               </a:ext>
             </a:extLst>
           </p:cNvPr>
@@ -38512,7 +38512,7 @@
           <p:cNvPr id="13" name="">
             <a:extLst xmlns:a="http://schemas.openxmlformats.org/drawingml/2006/main">
               <a:ext uri="{FF2B5EF4-FFF2-40B4-BE49-F238E27FC236}">
-                <a16:creationId xmlns:a16="http://schemas.microsoft.com/office/drawing/2014/main" id="{00522133-8D8F-486C-B61D-4D5D21CBCA4E}"/>
+                <a16:creationId xmlns:a16="http://schemas.microsoft.com/office/drawing/2014/main" id="{B04B057D-6A98-43E0-A58E-F7BA5FEBEE20}"/>
               </a:ext>
             </a:extLst>
           </p:cNvPr>
@@ -38576,7 +38576,7 @@
           <p:cNvPr id="14" name="">
             <a:extLst xmlns:a="http://schemas.openxmlformats.org/drawingml/2006/main">
               <a:ext uri="{FF2B5EF4-FFF2-40B4-BE49-F238E27FC236}">
-                <a16:creationId xmlns:a16="http://schemas.microsoft.com/office/drawing/2014/main" id="{C87DED81-436F-414A-9669-1B88E6067DA2}"/>
+                <a16:creationId xmlns:a16="http://schemas.microsoft.com/office/drawing/2014/main" id="{C29B75FD-C449-495D-843C-8A928FA46E9C}"/>
               </a:ext>
             </a:extLst>
           </p:cNvPr>
@@ -38609,7 +38609,7 @@
           <p:cNvPr id="15" name="">
             <a:extLst xmlns:a="http://schemas.openxmlformats.org/drawingml/2006/main">
               <a:ext uri="{FF2B5EF4-FFF2-40B4-BE49-F238E27FC236}">
-                <a16:creationId xmlns:a16="http://schemas.microsoft.com/office/drawing/2014/main" id="{A1D9A6CB-6C90-4DAE-9C65-5A1089B154E7}"/>
+                <a16:creationId xmlns:a16="http://schemas.microsoft.com/office/drawing/2014/main" id="{F7CEE8E5-2CE4-482A-9765-52B1BC2A50C5}"/>
               </a:ext>
             </a:extLst>
           </p:cNvPr>
@@ -38673,7 +38673,7 @@
           <p:cNvPr id="16" name="">
             <a:extLst xmlns:a="http://schemas.openxmlformats.org/drawingml/2006/main">
               <a:ext uri="{FF2B5EF4-FFF2-40B4-BE49-F238E27FC236}">
-                <a16:creationId xmlns:a16="http://schemas.microsoft.com/office/drawing/2014/main" id="{B87733D2-3D91-4F31-B10F-00DAB901F317}"/>
+                <a16:creationId xmlns:a16="http://schemas.microsoft.com/office/drawing/2014/main" id="{ABCC0909-549D-476A-A434-1DBDAFEB8127}"/>
               </a:ext>
             </a:extLst>
           </p:cNvPr>
@@ -38706,7 +38706,7 @@
           <p:cNvPr id="17" name="">
             <a:extLst xmlns:a="http://schemas.openxmlformats.org/drawingml/2006/main">
               <a:ext uri="{FF2B5EF4-FFF2-40B4-BE49-F238E27FC236}">
-                <a16:creationId xmlns:a16="http://schemas.microsoft.com/office/drawing/2014/main" id="{C6B691F3-AD45-4723-BB56-2568138AF91E}"/>
+                <a16:creationId xmlns:a16="http://schemas.microsoft.com/office/drawing/2014/main" id="{D88C9D00-AF07-4AE5-AE23-6BFB2569EB10}"/>
               </a:ext>
             </a:extLst>
           </p:cNvPr>
@@ -38770,7 +38770,7 @@
           <p:cNvPr id="18" name="">
             <a:extLst xmlns:a="http://schemas.openxmlformats.org/drawingml/2006/main">
               <a:ext uri="{FF2B5EF4-FFF2-40B4-BE49-F238E27FC236}">
-                <a16:creationId xmlns:a16="http://schemas.microsoft.com/office/drawing/2014/main" id="{252C6F90-694B-47EB-9186-05A68A409C04}"/>
+                <a16:creationId xmlns:a16="http://schemas.microsoft.com/office/drawing/2014/main" id="{66E1832D-FB5E-4BFC-934A-32F8E7704BA0}"/>
               </a:ext>
             </a:extLst>
           </p:cNvPr>
@@ -38803,7 +38803,7 @@
           <p:cNvPr id="19" name="">
             <a:extLst xmlns:a="http://schemas.openxmlformats.org/drawingml/2006/main">
               <a:ext uri="{FF2B5EF4-FFF2-40B4-BE49-F238E27FC236}">
-                <a16:creationId xmlns:a16="http://schemas.microsoft.com/office/drawing/2014/main" id="{283D86A1-8904-4317-9358-63EC6902EAF3}"/>
+                <a16:creationId xmlns:a16="http://schemas.microsoft.com/office/drawing/2014/main" id="{AB5DB104-3A8C-4A91-A4AB-92F5E9935A69}"/>
               </a:ext>
             </a:extLst>
           </p:cNvPr>
@@ -38867,7 +38867,7 @@
           <p:cNvPr id="20" name="">
             <a:extLst xmlns:a="http://schemas.openxmlformats.org/drawingml/2006/main">
               <a:ext uri="{FF2B5EF4-FFF2-40B4-BE49-F238E27FC236}">
-                <a16:creationId xmlns:a16="http://schemas.microsoft.com/office/drawing/2014/main" id="{0F63FB4B-A08F-4FEF-9BE2-9FB2F94CB051}"/>
+                <a16:creationId xmlns:a16="http://schemas.microsoft.com/office/drawing/2014/main" id="{E753ABC5-FC8C-49C9-A3C3-363E511B4C96}"/>
               </a:ext>
             </a:extLst>
           </p:cNvPr>
@@ -38900,7 +38900,7 @@
           <p:cNvPr id="21" name="">
             <a:extLst xmlns:a="http://schemas.openxmlformats.org/drawingml/2006/main">
               <a:ext uri="{FF2B5EF4-FFF2-40B4-BE49-F238E27FC236}">
-                <a16:creationId xmlns:a16="http://schemas.microsoft.com/office/drawing/2014/main" id="{18CB074F-383B-47AE-A82E-C3D81AD6BC9C}"/>
+                <a16:creationId xmlns:a16="http://schemas.microsoft.com/office/drawing/2014/main" id="{40F802A5-304B-4DD0-A6A1-09C322343409}"/>
               </a:ext>
             </a:extLst>
           </p:cNvPr>
@@ -38964,7 +38964,7 @@
           <p:cNvPr id="22" name="">
             <a:extLst xmlns:a="http://schemas.openxmlformats.org/drawingml/2006/main">
               <a:ext uri="{FF2B5EF4-FFF2-40B4-BE49-F238E27FC236}">
-                <a16:creationId xmlns:a16="http://schemas.microsoft.com/office/drawing/2014/main" id="{4494BC01-62DE-4C8B-864C-86915405D1F9}"/>
+                <a16:creationId xmlns:a16="http://schemas.microsoft.com/office/drawing/2014/main" id="{1BD94C32-0BF1-4384-B91D-A04C15BB617C}"/>
               </a:ext>
             </a:extLst>
           </p:cNvPr>
@@ -38997,7 +38997,7 @@
           <p:cNvPr id="23" name="">
             <a:extLst xmlns:a="http://schemas.openxmlformats.org/drawingml/2006/main">
               <a:ext uri="{FF2B5EF4-FFF2-40B4-BE49-F238E27FC236}">
-                <a16:creationId xmlns:a16="http://schemas.microsoft.com/office/drawing/2014/main" id="{FD47C3F7-A73C-4B55-9186-BF852481DAFD}"/>
+                <a16:creationId xmlns:a16="http://schemas.microsoft.com/office/drawing/2014/main" id="{C393D429-753F-48C0-A86A-427FBFA600D5}"/>
               </a:ext>
             </a:extLst>
           </p:cNvPr>
@@ -39061,7 +39061,7 @@
           <p:cNvPr id="24" name="">
             <a:extLst xmlns:a="http://schemas.openxmlformats.org/drawingml/2006/main">
               <a:ext uri="{FF2B5EF4-FFF2-40B4-BE49-F238E27FC236}">
-                <a16:creationId xmlns:a16="http://schemas.microsoft.com/office/drawing/2014/main" id="{2E25325F-8FCB-437B-9429-FF2C7CDDB936}"/>
+                <a16:creationId xmlns:a16="http://schemas.microsoft.com/office/drawing/2014/main" id="{CD540658-6423-400E-8ADA-12CD87F1A030}"/>
               </a:ext>
             </a:extLst>
           </p:cNvPr>
@@ -39094,7 +39094,7 @@
           <p:cNvPr id="25" name="">
             <a:extLst xmlns:a="http://schemas.openxmlformats.org/drawingml/2006/main">
               <a:ext uri="{FF2B5EF4-FFF2-40B4-BE49-F238E27FC236}">
-                <a16:creationId xmlns:a16="http://schemas.microsoft.com/office/drawing/2014/main" id="{6E5CB8B0-CF79-4B51-A708-1E3D609319DB}"/>
+                <a16:creationId xmlns:a16="http://schemas.microsoft.com/office/drawing/2014/main" id="{26109336-C68C-4C08-B92D-7EA121A1419C}"/>
               </a:ext>
             </a:extLst>
           </p:cNvPr>
@@ -39158,7 +39158,7 @@
           <p:cNvPr id="26" name="">
             <a:extLst xmlns:a="http://schemas.openxmlformats.org/drawingml/2006/main">
               <a:ext uri="{FF2B5EF4-FFF2-40B4-BE49-F238E27FC236}">
-                <a16:creationId xmlns:a16="http://schemas.microsoft.com/office/drawing/2014/main" id="{22862697-A013-4408-B592-76373DB19C47}"/>
+                <a16:creationId xmlns:a16="http://schemas.microsoft.com/office/drawing/2014/main" id="{EBC2CAE8-6366-411B-A88C-089E34D3F8D4}"/>
               </a:ext>
             </a:extLst>
           </p:cNvPr>
@@ -39222,7 +39222,7 @@
           <p:cNvPr id="27" name="">
             <a:extLst xmlns:a="http://schemas.openxmlformats.org/drawingml/2006/main">
               <a:ext uri="{FF2B5EF4-FFF2-40B4-BE49-F238E27FC236}">
-                <a16:creationId xmlns:a16="http://schemas.microsoft.com/office/drawing/2014/main" id="{27BA15AF-82F6-4F1F-8784-E11C93FF9EDB}"/>
+                <a16:creationId xmlns:a16="http://schemas.microsoft.com/office/drawing/2014/main" id="{80464B0F-F11C-4BA9-BB45-4F5FA98C1EB2}"/>
               </a:ext>
             </a:extLst>
           </p:cNvPr>
@@ -39284,7 +39284,7 @@
     </p:spTree>
     <p:extLst>
       <p:ext uri="{BB962C8B-B14F-4D97-AF65-F5344CB8AC3E}">
-        <p14:creationId xmlns:p14="http://schemas.microsoft.com/office/powerpoint/2010/main" val="3861926"/>
+        <p14:creationId xmlns:p14="http://schemas.microsoft.com/office/powerpoint/2010/main" val="1915211500"/>
       </p:ext>
     </p:extLst>
   </p:cSld>
@@ -39308,7 +39308,7 @@
           <p:cNvPr id="1" name="">
             <a:extLst xmlns:a="http://schemas.openxmlformats.org/drawingml/2006/main">
               <a:ext uri="{FF2B5EF4-FFF2-40B4-BE49-F238E27FC236}">
-                <a16:creationId xmlns:a16="http://schemas.microsoft.com/office/drawing/2014/main" id="{ED30D828-D5DE-410A-BE8A-DD723FE92900}"/>
+                <a16:creationId xmlns:a16="http://schemas.microsoft.com/office/drawing/2014/main" id="{83ECF763-22E7-48A0-9CE9-AE36FCE0B19A}"/>
               </a:ext>
             </a:extLst>
           </p:cNvPr>
@@ -39341,7 +39341,7 @@
           <p:cNvPr id="2" name="">
             <a:extLst xmlns:a="http://schemas.openxmlformats.org/drawingml/2006/main">
               <a:ext uri="{FF2B5EF4-FFF2-40B4-BE49-F238E27FC236}">
-                <a16:creationId xmlns:a16="http://schemas.microsoft.com/office/drawing/2014/main" id="{98C60A22-3EF5-45CA-AB94-A08DC8E88463}"/>
+                <a16:creationId xmlns:a16="http://schemas.microsoft.com/office/drawing/2014/main" id="{D8E1815A-9A12-40F7-80B3-66EAAF34435A}"/>
               </a:ext>
             </a:extLst>
           </p:cNvPr>
@@ -39374,7 +39374,7 @@
           <p:cNvPr id="3" name="">
             <a:extLst xmlns:a="http://schemas.openxmlformats.org/drawingml/2006/main">
               <a:ext uri="{FF2B5EF4-FFF2-40B4-BE49-F238E27FC236}">
-                <a16:creationId xmlns:a16="http://schemas.microsoft.com/office/drawing/2014/main" id="{07739026-C1DE-4C96-8276-D59A305D3ADE}"/>
+                <a16:creationId xmlns:a16="http://schemas.microsoft.com/office/drawing/2014/main" id="{48476D6A-AFC9-4B3E-B624-9D25347A3214}"/>
               </a:ext>
             </a:extLst>
           </p:cNvPr>
@@ -39438,7 +39438,7 @@
           <p:cNvPr id="4" name="">
             <a:extLst xmlns:a="http://schemas.openxmlformats.org/drawingml/2006/main">
               <a:ext uri="{FF2B5EF4-FFF2-40B4-BE49-F238E27FC236}">
-                <a16:creationId xmlns:a16="http://schemas.microsoft.com/office/drawing/2014/main" id="{5204E339-2CA8-465C-A310-F2768A4A76EB}"/>
+                <a16:creationId xmlns:a16="http://schemas.microsoft.com/office/drawing/2014/main" id="{72062E47-8EA2-4D47-A7D2-769A5D8C845C}"/>
               </a:ext>
             </a:extLst>
           </p:cNvPr>
@@ -39502,7 +39502,7 @@
           <p:cNvPr id="5" name="">
             <a:extLst xmlns:a="http://schemas.openxmlformats.org/drawingml/2006/main">
               <a:ext uri="{FF2B5EF4-FFF2-40B4-BE49-F238E27FC236}">
-                <a16:creationId xmlns:a16="http://schemas.microsoft.com/office/drawing/2014/main" id="{728190AF-8AEB-4100-9534-C9AA63AD40B3}"/>
+                <a16:creationId xmlns:a16="http://schemas.microsoft.com/office/drawing/2014/main" id="{40685B3D-08D1-495A-9C9E-98D3D6355C75}"/>
               </a:ext>
             </a:extLst>
           </p:cNvPr>
@@ -39566,7 +39566,7 @@
           <p:cNvPr id="6" name="">
             <a:extLst xmlns:a="http://schemas.openxmlformats.org/drawingml/2006/main">
               <a:ext uri="{FF2B5EF4-FFF2-40B4-BE49-F238E27FC236}">
-                <a16:creationId xmlns:a16="http://schemas.microsoft.com/office/drawing/2014/main" id="{3EAAB8C9-4F5B-44E8-998B-8CF8DF7D2528}"/>
+                <a16:creationId xmlns:a16="http://schemas.microsoft.com/office/drawing/2014/main" id="{0E231184-5A36-4AA2-86C9-FABC486C455E}"/>
               </a:ext>
             </a:extLst>
           </p:cNvPr>
@@ -39599,7 +39599,7 @@
           <p:cNvPr id="7" name="">
             <a:extLst xmlns:a="http://schemas.openxmlformats.org/drawingml/2006/main">
               <a:ext uri="{FF2B5EF4-FFF2-40B4-BE49-F238E27FC236}">
-                <a16:creationId xmlns:a16="http://schemas.microsoft.com/office/drawing/2014/main" id="{49226110-1EC6-4EEE-B38C-CA3A4662F15C}"/>
+                <a16:creationId xmlns:a16="http://schemas.microsoft.com/office/drawing/2014/main" id="{5D8545D2-41B0-4305-B9D1-A20CE7B95C04}"/>
               </a:ext>
             </a:extLst>
           </p:cNvPr>
@@ -39663,7 +39663,7 @@
           <p:cNvPr id="8" name="">
             <a:extLst xmlns:a="http://schemas.openxmlformats.org/drawingml/2006/main">
               <a:ext uri="{FF2B5EF4-FFF2-40B4-BE49-F238E27FC236}">
-                <a16:creationId xmlns:a16="http://schemas.microsoft.com/office/drawing/2014/main" id="{3F16DB12-2AC4-477F-8F08-CE39BC33CE9D}"/>
+                <a16:creationId xmlns:a16="http://schemas.microsoft.com/office/drawing/2014/main" id="{B908E3A7-C282-4318-976A-9376E330249C}"/>
               </a:ext>
             </a:extLst>
           </p:cNvPr>
@@ -39773,7 +39773,7 @@
           <p:cNvPr id="9" name="">
             <a:extLst xmlns:a="http://schemas.openxmlformats.org/drawingml/2006/main">
               <a:ext uri="{FF2B5EF4-FFF2-40B4-BE49-F238E27FC236}">
-                <a16:creationId xmlns:a16="http://schemas.microsoft.com/office/drawing/2014/main" id="{381A21E9-E63E-4510-925E-41050E4ACA10}"/>
+                <a16:creationId xmlns:a16="http://schemas.microsoft.com/office/drawing/2014/main" id="{8D461A32-AB98-41FE-AA88-57C4D4E4AD85}"/>
               </a:ext>
             </a:extLst>
           </p:cNvPr>
@@ -39806,7 +39806,7 @@
           <p:cNvPr id="10" name="">
             <a:extLst xmlns:a="http://schemas.openxmlformats.org/drawingml/2006/main">
               <a:ext uri="{FF2B5EF4-FFF2-40B4-BE49-F238E27FC236}">
-                <a16:creationId xmlns:a16="http://schemas.microsoft.com/office/drawing/2014/main" id="{B6F9376C-0165-490D-B22C-1F949BE2BAAE}"/>
+                <a16:creationId xmlns:a16="http://schemas.microsoft.com/office/drawing/2014/main" id="{95E8CAF3-C627-4EB6-9795-910C46E28150}"/>
               </a:ext>
             </a:extLst>
           </p:cNvPr>
@@ -39870,7 +39870,7 @@
           <p:cNvPr id="11" name="">
             <a:extLst xmlns:a="http://schemas.openxmlformats.org/drawingml/2006/main">
               <a:ext uri="{FF2B5EF4-FFF2-40B4-BE49-F238E27FC236}">
-                <a16:creationId xmlns:a16="http://schemas.microsoft.com/office/drawing/2014/main" id="{FB4467D0-6547-42F9-B995-A376D53539EC}"/>
+                <a16:creationId xmlns:a16="http://schemas.microsoft.com/office/drawing/2014/main" id="{FC10B240-495E-4092-ABF3-7D40BF3037D9}"/>
               </a:ext>
             </a:extLst>
           </p:cNvPr>
@@ -39980,7 +39980,7 @@
           <p:cNvPr id="12" name="">
             <a:extLst xmlns:a="http://schemas.openxmlformats.org/drawingml/2006/main">
               <a:ext uri="{FF2B5EF4-FFF2-40B4-BE49-F238E27FC236}">
-                <a16:creationId xmlns:a16="http://schemas.microsoft.com/office/drawing/2014/main" id="{FC5E05B1-9D2E-49F1-94C8-1B71DD389978}"/>
+                <a16:creationId xmlns:a16="http://schemas.microsoft.com/office/drawing/2014/main" id="{E4F1B13A-87C2-4280-A9C2-500A88F15E03}"/>
               </a:ext>
             </a:extLst>
           </p:cNvPr>
@@ -40013,7 +40013,7 @@
           <p:cNvPr id="13" name="">
             <a:extLst xmlns:a="http://schemas.openxmlformats.org/drawingml/2006/main">
               <a:ext uri="{FF2B5EF4-FFF2-40B4-BE49-F238E27FC236}">
-                <a16:creationId xmlns:a16="http://schemas.microsoft.com/office/drawing/2014/main" id="{1CC4639C-9B8C-4FCD-9999-0633925CC91A}"/>
+                <a16:creationId xmlns:a16="http://schemas.microsoft.com/office/drawing/2014/main" id="{E59D0C35-6965-4609-963A-A56A1A71D0E2}"/>
               </a:ext>
             </a:extLst>
           </p:cNvPr>
@@ -40077,7 +40077,7 @@
           <p:cNvPr id="14" name="">
             <a:extLst xmlns:a="http://schemas.openxmlformats.org/drawingml/2006/main">
               <a:ext uri="{FF2B5EF4-FFF2-40B4-BE49-F238E27FC236}">
-                <a16:creationId xmlns:a16="http://schemas.microsoft.com/office/drawing/2014/main" id="{6D815280-B83B-44C4-9758-1F4157F90670}"/>
+                <a16:creationId xmlns:a16="http://schemas.microsoft.com/office/drawing/2014/main" id="{A9241C3A-07C7-42C4-B67F-44D9526A16CD}"/>
               </a:ext>
             </a:extLst>
           </p:cNvPr>
@@ -40187,7 +40187,7 @@
           <p:cNvPr id="15" name="">
             <a:extLst xmlns:a="http://schemas.openxmlformats.org/drawingml/2006/main">
               <a:ext uri="{FF2B5EF4-FFF2-40B4-BE49-F238E27FC236}">
-                <a16:creationId xmlns:a16="http://schemas.microsoft.com/office/drawing/2014/main" id="{55F6DCB5-8B3B-4AF2-8A1C-23962E4559C0}"/>
+                <a16:creationId xmlns:a16="http://schemas.microsoft.com/office/drawing/2014/main" id="{19528953-9A2D-41F5-99CE-548C49C4CDE8}"/>
               </a:ext>
             </a:extLst>
           </p:cNvPr>
@@ -40220,7 +40220,7 @@
           <p:cNvPr id="16" name="">
             <a:extLst xmlns:a="http://schemas.openxmlformats.org/drawingml/2006/main">
               <a:ext uri="{FF2B5EF4-FFF2-40B4-BE49-F238E27FC236}">
-                <a16:creationId xmlns:a16="http://schemas.microsoft.com/office/drawing/2014/main" id="{169BEF6D-1EE7-4028-AD32-84B4976EDCA9}"/>
+                <a16:creationId xmlns:a16="http://schemas.microsoft.com/office/drawing/2014/main" id="{AFD9804D-7E51-465A-9AF6-3C1DE541ADFD}"/>
               </a:ext>
             </a:extLst>
           </p:cNvPr>
@@ -40284,7 +40284,7 @@
           <p:cNvPr id="17" name="">
             <a:extLst xmlns:a="http://schemas.openxmlformats.org/drawingml/2006/main">
               <a:ext uri="{FF2B5EF4-FFF2-40B4-BE49-F238E27FC236}">
-                <a16:creationId xmlns:a16="http://schemas.microsoft.com/office/drawing/2014/main" id="{4691CEB0-F1A2-4018-956D-C68D1362330A}"/>
+                <a16:creationId xmlns:a16="http://schemas.microsoft.com/office/drawing/2014/main" id="{97127E67-5A4B-44B9-AF95-111A2928D672}"/>
               </a:ext>
             </a:extLst>
           </p:cNvPr>
@@ -40394,7 +40394,7 @@
           <p:cNvPr id="18" name="">
             <a:extLst xmlns:a="http://schemas.openxmlformats.org/drawingml/2006/main">
               <a:ext uri="{FF2B5EF4-FFF2-40B4-BE49-F238E27FC236}">
-                <a16:creationId xmlns:a16="http://schemas.microsoft.com/office/drawing/2014/main" id="{14021AE4-37B8-458B-9E7B-BF8A7CB513FC}"/>
+                <a16:creationId xmlns:a16="http://schemas.microsoft.com/office/drawing/2014/main" id="{24E0FBAE-8DDD-45A3-89F6-B3DF2116F416}"/>
               </a:ext>
             </a:extLst>
           </p:cNvPr>
@@ -40427,7 +40427,7 @@
           <p:cNvPr id="19" name="">
             <a:extLst xmlns:a="http://schemas.openxmlformats.org/drawingml/2006/main">
               <a:ext uri="{FF2B5EF4-FFF2-40B4-BE49-F238E27FC236}">
-                <a16:creationId xmlns:a16="http://schemas.microsoft.com/office/drawing/2014/main" id="{F7FB1318-765C-45EA-89D3-F86233991712}"/>
+                <a16:creationId xmlns:a16="http://schemas.microsoft.com/office/drawing/2014/main" id="{DC2D6F81-B462-4249-A62C-6BA3C5AA629B}"/>
               </a:ext>
             </a:extLst>
           </p:cNvPr>
@@ -40491,7 +40491,7 @@
           <p:cNvPr id="20" name="">
             <a:extLst xmlns:a="http://schemas.openxmlformats.org/drawingml/2006/main">
               <a:ext uri="{FF2B5EF4-FFF2-40B4-BE49-F238E27FC236}">
-                <a16:creationId xmlns:a16="http://schemas.microsoft.com/office/drawing/2014/main" id="{98D267F9-715A-4DDE-A5A5-DA661D07E8F5}"/>
+                <a16:creationId xmlns:a16="http://schemas.microsoft.com/office/drawing/2014/main" id="{14863A3C-215D-4579-BC80-7920CCE00F19}"/>
               </a:ext>
             </a:extLst>
           </p:cNvPr>
@@ -40647,7 +40647,7 @@
           <p:cNvPr id="21" name="">
             <a:extLst xmlns:a="http://schemas.openxmlformats.org/drawingml/2006/main">
               <a:ext uri="{FF2B5EF4-FFF2-40B4-BE49-F238E27FC236}">
-                <a16:creationId xmlns:a16="http://schemas.microsoft.com/office/drawing/2014/main" id="{BC33C56C-9362-40FB-994A-DF785C73388F}"/>
+                <a16:creationId xmlns:a16="http://schemas.microsoft.com/office/drawing/2014/main" id="{770F8955-6059-4A35-90FF-7C0A2DB09400}"/>
               </a:ext>
             </a:extLst>
           </p:cNvPr>
@@ -40680,7 +40680,7 @@
           <p:cNvPr id="22" name="">
             <a:extLst xmlns:a="http://schemas.openxmlformats.org/drawingml/2006/main">
               <a:ext uri="{FF2B5EF4-FFF2-40B4-BE49-F238E27FC236}">
-                <a16:creationId xmlns:a16="http://schemas.microsoft.com/office/drawing/2014/main" id="{12A30A9B-9474-47D7-896F-0C93393999D5}"/>
+                <a16:creationId xmlns:a16="http://schemas.microsoft.com/office/drawing/2014/main" id="{53F98A34-5E79-42D4-A629-4B9EFA1AB414}"/>
               </a:ext>
             </a:extLst>
           </p:cNvPr>
@@ -40713,7 +40713,7 @@
           <p:cNvPr id="23" name="">
             <a:extLst xmlns:a="http://schemas.openxmlformats.org/drawingml/2006/main">
               <a:ext uri="{FF2B5EF4-FFF2-40B4-BE49-F238E27FC236}">
-                <a16:creationId xmlns:a16="http://schemas.microsoft.com/office/drawing/2014/main" id="{0FAA1D5C-4501-48A0-8DCD-9B00C4412E49}"/>
+                <a16:creationId xmlns:a16="http://schemas.microsoft.com/office/drawing/2014/main" id="{62133DA0-5950-4F4D-B840-469F517C03E8}"/>
               </a:ext>
             </a:extLst>
           </p:cNvPr>
@@ -40746,7 +40746,7 @@
           <p:cNvPr id="24" name="">
             <a:extLst xmlns:a="http://schemas.openxmlformats.org/drawingml/2006/main">
               <a:ext uri="{FF2B5EF4-FFF2-40B4-BE49-F238E27FC236}">
-                <a16:creationId xmlns:a16="http://schemas.microsoft.com/office/drawing/2014/main" id="{6EE77715-1966-40ED-B0E7-4F08DC674DBC}"/>
+                <a16:creationId xmlns:a16="http://schemas.microsoft.com/office/drawing/2014/main" id="{79FFCC05-8445-45C3-9443-B57B778A201A}"/>
               </a:ext>
             </a:extLst>
           </p:cNvPr>
@@ -40779,7 +40779,7 @@
           <p:cNvPr id="25" name="">
             <a:extLst xmlns:a="http://schemas.openxmlformats.org/drawingml/2006/main">
               <a:ext uri="{FF2B5EF4-FFF2-40B4-BE49-F238E27FC236}">
-                <a16:creationId xmlns:a16="http://schemas.microsoft.com/office/drawing/2014/main" id="{F32D1115-77C8-4FD8-9EFB-2828441C8FC1}"/>
+                <a16:creationId xmlns:a16="http://schemas.microsoft.com/office/drawing/2014/main" id="{99DB7FCE-511C-49B0-B469-0FF23115346A}"/>
               </a:ext>
             </a:extLst>
           </p:cNvPr>
@@ -40812,7 +40812,7 @@
           <p:cNvPr id="26" name="">
             <a:extLst xmlns:a="http://schemas.openxmlformats.org/drawingml/2006/main">
               <a:ext uri="{FF2B5EF4-FFF2-40B4-BE49-F238E27FC236}">
-                <a16:creationId xmlns:a16="http://schemas.microsoft.com/office/drawing/2014/main" id="{CD4F1ECF-DEA9-4E75-819E-C7379BB58A3C}"/>
+                <a16:creationId xmlns:a16="http://schemas.microsoft.com/office/drawing/2014/main" id="{7DAE8F9D-D6E3-4C78-9062-0AF29E46B623}"/>
               </a:ext>
             </a:extLst>
           </p:cNvPr>
@@ -40845,7 +40845,7 @@
           <p:cNvPr id="27" name="">
             <a:extLst xmlns:a="http://schemas.openxmlformats.org/drawingml/2006/main">
               <a:ext uri="{FF2B5EF4-FFF2-40B4-BE49-F238E27FC236}">
-                <a16:creationId xmlns:a16="http://schemas.microsoft.com/office/drawing/2014/main" id="{98D30250-1E63-41BA-A6E8-D905D7909122}"/>
+                <a16:creationId xmlns:a16="http://schemas.microsoft.com/office/drawing/2014/main" id="{461B47F8-53D2-4FCD-8E15-9D6D6946C94E}"/>
               </a:ext>
             </a:extLst>
           </p:cNvPr>
@@ -40878,7 +40878,7 @@
           <p:cNvPr id="28" name="">
             <a:extLst xmlns:a="http://schemas.openxmlformats.org/drawingml/2006/main">
               <a:ext uri="{FF2B5EF4-FFF2-40B4-BE49-F238E27FC236}">
-                <a16:creationId xmlns:a16="http://schemas.microsoft.com/office/drawing/2014/main" id="{A5100174-4EF7-4788-9AFF-FFCE8A503AD2}"/>
+                <a16:creationId xmlns:a16="http://schemas.microsoft.com/office/drawing/2014/main" id="{104051D4-54C9-4ECE-A035-64E6BA3255BC}"/>
               </a:ext>
             </a:extLst>
           </p:cNvPr>
@@ -40911,7 +40911,7 @@
           <p:cNvPr id="29" name="">
             <a:extLst xmlns:a="http://schemas.openxmlformats.org/drawingml/2006/main">
               <a:ext uri="{FF2B5EF4-FFF2-40B4-BE49-F238E27FC236}">
-                <a16:creationId xmlns:a16="http://schemas.microsoft.com/office/drawing/2014/main" id="{72DB858A-EE03-4474-8E1F-EC30F8474299}"/>
+                <a16:creationId xmlns:a16="http://schemas.microsoft.com/office/drawing/2014/main" id="{4041CE4B-C63D-4D0F-BD68-1D99D778565A}"/>
               </a:ext>
             </a:extLst>
           </p:cNvPr>
@@ -40975,7 +40975,7 @@
           <p:cNvPr id="30" name="">
             <a:extLst xmlns:a="http://schemas.openxmlformats.org/drawingml/2006/main">
               <a:ext uri="{FF2B5EF4-FFF2-40B4-BE49-F238E27FC236}">
-                <a16:creationId xmlns:a16="http://schemas.microsoft.com/office/drawing/2014/main" id="{B6B15166-7D3B-4A44-8CC6-E6040A372D3D}"/>
+                <a16:creationId xmlns:a16="http://schemas.microsoft.com/office/drawing/2014/main" id="{7C44A791-726E-4D09-BC80-164EA8BFD82A}"/>
               </a:ext>
             </a:extLst>
           </p:cNvPr>
@@ -41039,7 +41039,7 @@
           <p:cNvPr id="31" name="">
             <a:extLst xmlns:a="http://schemas.openxmlformats.org/drawingml/2006/main">
               <a:ext uri="{FF2B5EF4-FFF2-40B4-BE49-F238E27FC236}">
-                <a16:creationId xmlns:a16="http://schemas.microsoft.com/office/drawing/2014/main" id="{88C18ABA-D6FC-48BE-9140-09AC1A02792F}"/>
+                <a16:creationId xmlns:a16="http://schemas.microsoft.com/office/drawing/2014/main" id="{F2F16094-AC1F-4AFD-8B9A-51D6FBAECA7A}"/>
               </a:ext>
             </a:extLst>
           </p:cNvPr>
@@ -41101,7 +41101,7 @@
     </p:spTree>
     <p:extLst>
       <p:ext uri="{BB962C8B-B14F-4D97-AF65-F5344CB8AC3E}">
-        <p14:creationId xmlns:p14="http://schemas.microsoft.com/office/powerpoint/2010/main" val="706054898"/>
+        <p14:creationId xmlns:p14="http://schemas.microsoft.com/office/powerpoint/2010/main" val="1828669105"/>
       </p:ext>
     </p:extLst>
   </p:cSld>
@@ -41125,7 +41125,7 @@
           <p:cNvPr id="1" name="">
             <a:extLst xmlns:a="http://schemas.openxmlformats.org/drawingml/2006/main">
               <a:ext uri="{FF2B5EF4-FFF2-40B4-BE49-F238E27FC236}">
-                <a16:creationId xmlns:a16="http://schemas.microsoft.com/office/drawing/2014/main" id="{CEFD59F6-ECC1-4AF0-8F59-79DA8DA89D14}"/>
+                <a16:creationId xmlns:a16="http://schemas.microsoft.com/office/drawing/2014/main" id="{C47464B0-1A16-4AE5-B5DB-D23CF1B47D1B}"/>
               </a:ext>
             </a:extLst>
           </p:cNvPr>
@@ -41158,7 +41158,7 @@
           <p:cNvPr id="2" name="">
             <a:extLst xmlns:a="http://schemas.openxmlformats.org/drawingml/2006/main">
               <a:ext uri="{FF2B5EF4-FFF2-40B4-BE49-F238E27FC236}">
-                <a16:creationId xmlns:a16="http://schemas.microsoft.com/office/drawing/2014/main" id="{C156687D-C08F-4FBF-989D-145ED9EDA4A4}"/>
+                <a16:creationId xmlns:a16="http://schemas.microsoft.com/office/drawing/2014/main" id="{28F380BF-1D39-47CF-9A8E-BEDE644AED05}"/>
               </a:ext>
             </a:extLst>
           </p:cNvPr>
@@ -41191,7 +41191,7 @@
           <p:cNvPr id="3" name="">
             <a:extLst xmlns:a="http://schemas.openxmlformats.org/drawingml/2006/main">
               <a:ext uri="{FF2B5EF4-FFF2-40B4-BE49-F238E27FC236}">
-                <a16:creationId xmlns:a16="http://schemas.microsoft.com/office/drawing/2014/main" id="{377B0E43-ABC2-4AD2-96C5-30914F37F12D}"/>
+                <a16:creationId xmlns:a16="http://schemas.microsoft.com/office/drawing/2014/main" id="{13BB46BF-446C-40E4-9973-389A3C1600F4}"/>
               </a:ext>
             </a:extLst>
           </p:cNvPr>
@@ -41255,7 +41255,7 @@
           <p:cNvPr id="4" name="">
             <a:extLst xmlns:a="http://schemas.openxmlformats.org/drawingml/2006/main">
               <a:ext uri="{FF2B5EF4-FFF2-40B4-BE49-F238E27FC236}">
-                <a16:creationId xmlns:a16="http://schemas.microsoft.com/office/drawing/2014/main" id="{3CA7E761-5403-4063-96B1-D57625245668}"/>
+                <a16:creationId xmlns:a16="http://schemas.microsoft.com/office/drawing/2014/main" id="{C0962A17-E16E-4631-BF9E-B5CA02CB32B6}"/>
               </a:ext>
             </a:extLst>
           </p:cNvPr>
@@ -41319,7 +41319,7 @@
           <p:cNvPr id="5" name="">
             <a:extLst xmlns:a="http://schemas.openxmlformats.org/drawingml/2006/main">
               <a:ext uri="{FF2B5EF4-FFF2-40B4-BE49-F238E27FC236}">
-                <a16:creationId xmlns:a16="http://schemas.microsoft.com/office/drawing/2014/main" id="{5420E1F1-9ECE-4659-B35F-9EB51DE67CFF}"/>
+                <a16:creationId xmlns:a16="http://schemas.microsoft.com/office/drawing/2014/main" id="{7727C460-AD6C-4284-AD9C-80BB2A6EB6DD}"/>
               </a:ext>
             </a:extLst>
           </p:cNvPr>
@@ -41383,7 +41383,7 @@
           <p:cNvPr id="6" name="">
             <a:extLst xmlns:a="http://schemas.openxmlformats.org/drawingml/2006/main">
               <a:ext uri="{FF2B5EF4-FFF2-40B4-BE49-F238E27FC236}">
-                <a16:creationId xmlns:a16="http://schemas.microsoft.com/office/drawing/2014/main" id="{0430BD2A-E9D2-4196-B849-1F8A9783A94A}"/>
+                <a16:creationId xmlns:a16="http://schemas.microsoft.com/office/drawing/2014/main" id="{D617BA2D-B012-41D4-9216-545F96C2C43B}"/>
               </a:ext>
             </a:extLst>
           </p:cNvPr>
@@ -41416,7 +41416,7 @@
           <p:cNvPr id="7" name="">
             <a:extLst xmlns:a="http://schemas.openxmlformats.org/drawingml/2006/main">
               <a:ext uri="{FF2B5EF4-FFF2-40B4-BE49-F238E27FC236}">
-                <a16:creationId xmlns:a16="http://schemas.microsoft.com/office/drawing/2014/main" id="{B22B85D8-D7B1-4E71-9DD6-D16A430F015F}"/>
+                <a16:creationId xmlns:a16="http://schemas.microsoft.com/office/drawing/2014/main" id="{1FF34D5F-D424-401C-B73A-E64A89D60AC0}"/>
               </a:ext>
             </a:extLst>
           </p:cNvPr>
@@ -41480,7 +41480,7 @@
           <p:cNvPr id="8" name="">
             <a:extLst xmlns:a="http://schemas.openxmlformats.org/drawingml/2006/main">
               <a:ext uri="{FF2B5EF4-FFF2-40B4-BE49-F238E27FC236}">
-                <a16:creationId xmlns:a16="http://schemas.microsoft.com/office/drawing/2014/main" id="{C19C7E58-F690-4F88-9510-DE40AA8217C2}"/>
+                <a16:creationId xmlns:a16="http://schemas.microsoft.com/office/drawing/2014/main" id="{4E352BD5-D762-44CE-87E7-96DA0FA212C6}"/>
               </a:ext>
             </a:extLst>
           </p:cNvPr>
@@ -41513,7 +41513,7 @@
           <p:cNvPr id="9" name="">
             <a:extLst xmlns:a="http://schemas.openxmlformats.org/drawingml/2006/main">
               <a:ext uri="{FF2B5EF4-FFF2-40B4-BE49-F238E27FC236}">
-                <a16:creationId xmlns:a16="http://schemas.microsoft.com/office/drawing/2014/main" id="{805A9446-BF17-4A4D-93EA-7EE108EDCAC9}"/>
+                <a16:creationId xmlns:a16="http://schemas.microsoft.com/office/drawing/2014/main" id="{3460CFCD-50B3-4C9C-A0DD-7A77F13B6018}"/>
               </a:ext>
             </a:extLst>
           </p:cNvPr>
@@ -41577,7 +41577,7 @@
           <p:cNvPr id="10" name="">
             <a:extLst xmlns:a="http://schemas.openxmlformats.org/drawingml/2006/main">
               <a:ext uri="{FF2B5EF4-FFF2-40B4-BE49-F238E27FC236}">
-                <a16:creationId xmlns:a16="http://schemas.microsoft.com/office/drawing/2014/main" id="{E92A28CC-A6DC-428E-B79B-2CAE59515C41}"/>
+                <a16:creationId xmlns:a16="http://schemas.microsoft.com/office/drawing/2014/main" id="{D4A2FB24-A230-43EA-A3BD-5C3C7343228C}"/>
               </a:ext>
             </a:extLst>
           </p:cNvPr>
@@ -41610,7 +41610,7 @@
           <p:cNvPr id="11" name="">
             <a:extLst xmlns:a="http://schemas.openxmlformats.org/drawingml/2006/main">
               <a:ext uri="{FF2B5EF4-FFF2-40B4-BE49-F238E27FC236}">
-                <a16:creationId xmlns:a16="http://schemas.microsoft.com/office/drawing/2014/main" id="{FC7C67ED-820B-487F-99F9-3C15AEDDF2E3}"/>
+                <a16:creationId xmlns:a16="http://schemas.microsoft.com/office/drawing/2014/main" id="{D5526367-9281-480B-B0FB-3C0255CD3751}"/>
               </a:ext>
             </a:extLst>
           </p:cNvPr>
@@ -41674,7 +41674,7 @@
           <p:cNvPr id="12" name="">
             <a:extLst xmlns:a="http://schemas.openxmlformats.org/drawingml/2006/main">
               <a:ext uri="{FF2B5EF4-FFF2-40B4-BE49-F238E27FC236}">
-                <a16:creationId xmlns:a16="http://schemas.microsoft.com/office/drawing/2014/main" id="{F6E13699-6DE1-4FE9-A04D-640539697183}"/>
+                <a16:creationId xmlns:a16="http://schemas.microsoft.com/office/drawing/2014/main" id="{9B70817C-6DD1-49FE-B45B-64486F04D67A}"/>
               </a:ext>
             </a:extLst>
           </p:cNvPr>
@@ -41707,7 +41707,7 @@
           <p:cNvPr id="13" name="">
             <a:extLst xmlns:a="http://schemas.openxmlformats.org/drawingml/2006/main">
               <a:ext uri="{FF2B5EF4-FFF2-40B4-BE49-F238E27FC236}">
-                <a16:creationId xmlns:a16="http://schemas.microsoft.com/office/drawing/2014/main" id="{05C51B3A-A4AA-4D4B-859D-F2B5F263FDF0}"/>
+                <a16:creationId xmlns:a16="http://schemas.microsoft.com/office/drawing/2014/main" id="{D81A5167-C52B-4062-BE64-18CEE708E499}"/>
               </a:ext>
             </a:extLst>
           </p:cNvPr>
@@ -41771,7 +41771,7 @@
           <p:cNvPr id="14" name="">
             <a:extLst xmlns:a="http://schemas.openxmlformats.org/drawingml/2006/main">
               <a:ext uri="{FF2B5EF4-FFF2-40B4-BE49-F238E27FC236}">
-                <a16:creationId xmlns:a16="http://schemas.microsoft.com/office/drawing/2014/main" id="{AC17CF66-2B61-4632-AD58-131EC697FE58}"/>
+                <a16:creationId xmlns:a16="http://schemas.microsoft.com/office/drawing/2014/main" id="{3478A032-2006-4083-8BD8-1960B9A48B9F}"/>
               </a:ext>
             </a:extLst>
           </p:cNvPr>
@@ -41804,7 +41804,7 @@
           <p:cNvPr id="15" name="">
             <a:extLst xmlns:a="http://schemas.openxmlformats.org/drawingml/2006/main">
               <a:ext uri="{FF2B5EF4-FFF2-40B4-BE49-F238E27FC236}">
-                <a16:creationId xmlns:a16="http://schemas.microsoft.com/office/drawing/2014/main" id="{1D9288D9-C497-4C81-B964-0597144D5C49}"/>
+                <a16:creationId xmlns:a16="http://schemas.microsoft.com/office/drawing/2014/main" id="{34506918-28C5-4891-927C-136DED1B1CFB}"/>
               </a:ext>
             </a:extLst>
           </p:cNvPr>
@@ -41868,7 +41868,7 @@
           <p:cNvPr id="16" name="">
             <a:extLst xmlns:a="http://schemas.openxmlformats.org/drawingml/2006/main">
               <a:ext uri="{FF2B5EF4-FFF2-40B4-BE49-F238E27FC236}">
-                <a16:creationId xmlns:a16="http://schemas.microsoft.com/office/drawing/2014/main" id="{30137334-E4F3-4C7D-B0BD-B0D06B569EE7}"/>
+                <a16:creationId xmlns:a16="http://schemas.microsoft.com/office/drawing/2014/main" id="{A06DE22A-2613-4853-9F61-D25BA0A7AE41}"/>
               </a:ext>
             </a:extLst>
           </p:cNvPr>
@@ -41901,7 +41901,7 @@
           <p:cNvPr id="17" name="">
             <a:extLst xmlns:a="http://schemas.openxmlformats.org/drawingml/2006/main">
               <a:ext uri="{FF2B5EF4-FFF2-40B4-BE49-F238E27FC236}">
-                <a16:creationId xmlns:a16="http://schemas.microsoft.com/office/drawing/2014/main" id="{5B38897F-7117-4481-9C6A-C44DAC5F0576}"/>
+                <a16:creationId xmlns:a16="http://schemas.microsoft.com/office/drawing/2014/main" id="{F408A882-9BCB-4B2C-AA85-99E5BDD01411}"/>
               </a:ext>
             </a:extLst>
           </p:cNvPr>
@@ -41965,7 +41965,7 @@
           <p:cNvPr id="18" name="">
             <a:extLst xmlns:a="http://schemas.openxmlformats.org/drawingml/2006/main">
               <a:ext uri="{FF2B5EF4-FFF2-40B4-BE49-F238E27FC236}">
-                <a16:creationId xmlns:a16="http://schemas.microsoft.com/office/drawing/2014/main" id="{2F0E7F10-41CC-4E02-86AD-F6BADD01D4E5}"/>
+                <a16:creationId xmlns:a16="http://schemas.microsoft.com/office/drawing/2014/main" id="{145B27FA-055E-4CB7-B8E2-C8AB628EFDCA}"/>
               </a:ext>
             </a:extLst>
           </p:cNvPr>
@@ -41998,7 +41998,7 @@
           <p:cNvPr id="19" name="">
             <a:extLst xmlns:a="http://schemas.openxmlformats.org/drawingml/2006/main">
               <a:ext uri="{FF2B5EF4-FFF2-40B4-BE49-F238E27FC236}">
-                <a16:creationId xmlns:a16="http://schemas.microsoft.com/office/drawing/2014/main" id="{463CA773-C503-4F93-BAF9-1FB4C6A8C14A}"/>
+                <a16:creationId xmlns:a16="http://schemas.microsoft.com/office/drawing/2014/main" id="{7D8C37D9-14B1-47C4-AE13-05D139EB8154}"/>
               </a:ext>
             </a:extLst>
           </p:cNvPr>
@@ -42062,7 +42062,7 @@
           <p:cNvPr id="20" name="">
             <a:extLst xmlns:a="http://schemas.openxmlformats.org/drawingml/2006/main">
               <a:ext uri="{FF2B5EF4-FFF2-40B4-BE49-F238E27FC236}">
-                <a16:creationId xmlns:a16="http://schemas.microsoft.com/office/drawing/2014/main" id="{729A2D8A-C091-4207-9CC2-058378AA46A9}"/>
+                <a16:creationId xmlns:a16="http://schemas.microsoft.com/office/drawing/2014/main" id="{1A334179-2ABF-4E99-B8F7-1AD481CABB17}"/>
               </a:ext>
             </a:extLst>
           </p:cNvPr>
@@ -42095,7 +42095,7 @@
           <p:cNvPr id="21" name="">
             <a:extLst xmlns:a="http://schemas.openxmlformats.org/drawingml/2006/main">
               <a:ext uri="{FF2B5EF4-FFF2-40B4-BE49-F238E27FC236}">
-                <a16:creationId xmlns:a16="http://schemas.microsoft.com/office/drawing/2014/main" id="{63F247C3-D27B-4CE9-AA39-065D1B4DAFBC}"/>
+                <a16:creationId xmlns:a16="http://schemas.microsoft.com/office/drawing/2014/main" id="{786B7DC3-0ADD-45E3-9024-71942A08E372}"/>
               </a:ext>
             </a:extLst>
           </p:cNvPr>
@@ -42159,7 +42159,7 @@
           <p:cNvPr id="22" name="">
             <a:extLst xmlns:a="http://schemas.openxmlformats.org/drawingml/2006/main">
               <a:ext uri="{FF2B5EF4-FFF2-40B4-BE49-F238E27FC236}">
-                <a16:creationId xmlns:a16="http://schemas.microsoft.com/office/drawing/2014/main" id="{9611C608-DA30-4EBB-84E9-81F065100B92}"/>
+                <a16:creationId xmlns:a16="http://schemas.microsoft.com/office/drawing/2014/main" id="{EAC39051-1BCD-49AF-9594-E78B2F03CA98}"/>
               </a:ext>
             </a:extLst>
           </p:cNvPr>
@@ -42192,7 +42192,7 @@
           <p:cNvPr id="23" name="">
             <a:extLst xmlns:a="http://schemas.openxmlformats.org/drawingml/2006/main">
               <a:ext uri="{FF2B5EF4-FFF2-40B4-BE49-F238E27FC236}">
-                <a16:creationId xmlns:a16="http://schemas.microsoft.com/office/drawing/2014/main" id="{A837D278-61C7-435B-BCB9-DE3D655DC9C3}"/>
+                <a16:creationId xmlns:a16="http://schemas.microsoft.com/office/drawing/2014/main" id="{1B15D15D-303C-4062-ABB0-6380EFAD081C}"/>
               </a:ext>
             </a:extLst>
           </p:cNvPr>
@@ -42256,7 +42256,7 @@
           <p:cNvPr id="24" name="">
             <a:extLst xmlns:a="http://schemas.openxmlformats.org/drawingml/2006/main">
               <a:ext uri="{FF2B5EF4-FFF2-40B4-BE49-F238E27FC236}">
-                <a16:creationId xmlns:a16="http://schemas.microsoft.com/office/drawing/2014/main" id="{4DCA16EF-E4A7-46B2-BA5C-C37F87EDD39D}"/>
+                <a16:creationId xmlns:a16="http://schemas.microsoft.com/office/drawing/2014/main" id="{E4EC41DF-09A8-48A9-AF5D-96BA8AD49B73}"/>
               </a:ext>
             </a:extLst>
           </p:cNvPr>
@@ -42289,7 +42289,7 @@
           <p:cNvPr id="25" name="">
             <a:extLst xmlns:a="http://schemas.openxmlformats.org/drawingml/2006/main">
               <a:ext uri="{FF2B5EF4-FFF2-40B4-BE49-F238E27FC236}">
-                <a16:creationId xmlns:a16="http://schemas.microsoft.com/office/drawing/2014/main" id="{2B26C2D4-256D-4A83-B4BD-4E6A5300697D}"/>
+                <a16:creationId xmlns:a16="http://schemas.microsoft.com/office/drawing/2014/main" id="{C8D0C763-093D-4B38-BFBE-D3A447540C53}"/>
               </a:ext>
             </a:extLst>
           </p:cNvPr>
@@ -42353,7 +42353,7 @@
           <p:cNvPr id="26" name="">
             <a:extLst xmlns:a="http://schemas.openxmlformats.org/drawingml/2006/main">
               <a:ext uri="{FF2B5EF4-FFF2-40B4-BE49-F238E27FC236}">
-                <a16:creationId xmlns:a16="http://schemas.microsoft.com/office/drawing/2014/main" id="{96A79968-9A6F-40E7-A872-6849B9750F16}"/>
+                <a16:creationId xmlns:a16="http://schemas.microsoft.com/office/drawing/2014/main" id="{A81D066A-97D3-43CB-BD41-2533A673FF95}"/>
               </a:ext>
             </a:extLst>
           </p:cNvPr>
@@ -42386,7 +42386,7 @@
           <p:cNvPr id="27" name="">
             <a:extLst xmlns:a="http://schemas.openxmlformats.org/drawingml/2006/main">
               <a:ext uri="{FF2B5EF4-FFF2-40B4-BE49-F238E27FC236}">
-                <a16:creationId xmlns:a16="http://schemas.microsoft.com/office/drawing/2014/main" id="{28FBC496-B302-4048-B60A-93114836BDF5}"/>
+                <a16:creationId xmlns:a16="http://schemas.microsoft.com/office/drawing/2014/main" id="{53921DAD-4DA9-4066-8CF2-E7D5203B0031}"/>
               </a:ext>
             </a:extLst>
           </p:cNvPr>
@@ -42450,7 +42450,7 @@
           <p:cNvPr id="28" name="">
             <a:extLst xmlns:a="http://schemas.openxmlformats.org/drawingml/2006/main">
               <a:ext uri="{FF2B5EF4-FFF2-40B4-BE49-F238E27FC236}">
-                <a16:creationId xmlns:a16="http://schemas.microsoft.com/office/drawing/2014/main" id="{2BD75B01-DF48-4AC6-A96F-70C5087A675C}"/>
+                <a16:creationId xmlns:a16="http://schemas.microsoft.com/office/drawing/2014/main" id="{5254C472-C323-45D9-9CDB-3DAF9A69CB6D}"/>
               </a:ext>
             </a:extLst>
           </p:cNvPr>
@@ -42483,7 +42483,7 @@
           <p:cNvPr id="29" name="">
             <a:extLst xmlns:a="http://schemas.openxmlformats.org/drawingml/2006/main">
               <a:ext uri="{FF2B5EF4-FFF2-40B4-BE49-F238E27FC236}">
-                <a16:creationId xmlns:a16="http://schemas.microsoft.com/office/drawing/2014/main" id="{35A4C757-AA57-4A38-B155-7375598DB6BE}"/>
+                <a16:creationId xmlns:a16="http://schemas.microsoft.com/office/drawing/2014/main" id="{16076BD7-6C0F-43E1-A684-EEC1DDB845CD}"/>
               </a:ext>
             </a:extLst>
           </p:cNvPr>
@@ -42547,7 +42547,7 @@
           <p:cNvPr id="30" name="">
             <a:extLst xmlns:a="http://schemas.openxmlformats.org/drawingml/2006/main">
               <a:ext uri="{FF2B5EF4-FFF2-40B4-BE49-F238E27FC236}">
-                <a16:creationId xmlns:a16="http://schemas.microsoft.com/office/drawing/2014/main" id="{D512A368-2ACB-4B04-B771-79D0C8ED9254}"/>
+                <a16:creationId xmlns:a16="http://schemas.microsoft.com/office/drawing/2014/main" id="{6DEA903C-6FE7-40BA-888F-E0969F36244A}"/>
               </a:ext>
             </a:extLst>
           </p:cNvPr>
@@ -42580,7 +42580,7 @@
           <p:cNvPr id="31" name="">
             <a:extLst xmlns:a="http://schemas.openxmlformats.org/drawingml/2006/main">
               <a:ext uri="{FF2B5EF4-FFF2-40B4-BE49-F238E27FC236}">
-                <a16:creationId xmlns:a16="http://schemas.microsoft.com/office/drawing/2014/main" id="{FEBF2E64-C499-4C90-94AE-ADCFDE1D8207}"/>
+                <a16:creationId xmlns:a16="http://schemas.microsoft.com/office/drawing/2014/main" id="{400E84FB-B645-4882-81EA-C9ED18532CFF}"/>
               </a:ext>
             </a:extLst>
           </p:cNvPr>
@@ -42644,7 +42644,7 @@
           <p:cNvPr id="32" name="">
             <a:extLst xmlns:a="http://schemas.openxmlformats.org/drawingml/2006/main">
               <a:ext uri="{FF2B5EF4-FFF2-40B4-BE49-F238E27FC236}">
-                <a16:creationId xmlns:a16="http://schemas.microsoft.com/office/drawing/2014/main" id="{11A56E87-2A47-4602-A8EE-712F6BF2AE1A}"/>
+                <a16:creationId xmlns:a16="http://schemas.microsoft.com/office/drawing/2014/main" id="{39AF60B3-F5B5-4200-B2D6-6E9C6A21C731}"/>
               </a:ext>
             </a:extLst>
           </p:cNvPr>
@@ -42677,7 +42677,7 @@
           <p:cNvPr id="33" name="">
             <a:extLst xmlns:a="http://schemas.openxmlformats.org/drawingml/2006/main">
               <a:ext uri="{FF2B5EF4-FFF2-40B4-BE49-F238E27FC236}">
-                <a16:creationId xmlns:a16="http://schemas.microsoft.com/office/drawing/2014/main" id="{97B0063F-EE18-484C-B77A-9DA81191D48F}"/>
+                <a16:creationId xmlns:a16="http://schemas.microsoft.com/office/drawing/2014/main" id="{8B5E2CD4-2790-4AD8-95D1-301834F20641}"/>
               </a:ext>
             </a:extLst>
           </p:cNvPr>
@@ -42741,7 +42741,7 @@
           <p:cNvPr id="34" name="">
             <a:extLst xmlns:a="http://schemas.openxmlformats.org/drawingml/2006/main">
               <a:ext uri="{FF2B5EF4-FFF2-40B4-BE49-F238E27FC236}">
-                <a16:creationId xmlns:a16="http://schemas.microsoft.com/office/drawing/2014/main" id="{DC366ABA-12EA-45F2-A11E-08801C888E3F}"/>
+                <a16:creationId xmlns:a16="http://schemas.microsoft.com/office/drawing/2014/main" id="{CB0C57DD-FE94-47EF-8925-5C5D680615CC}"/>
               </a:ext>
             </a:extLst>
           </p:cNvPr>
@@ -42774,7 +42774,7 @@
           <p:cNvPr id="35" name="">
             <a:extLst xmlns:a="http://schemas.openxmlformats.org/drawingml/2006/main">
               <a:ext uri="{FF2B5EF4-FFF2-40B4-BE49-F238E27FC236}">
-                <a16:creationId xmlns:a16="http://schemas.microsoft.com/office/drawing/2014/main" id="{1D8F0DAC-93FE-4E1D-B73C-56678C380B5B}"/>
+                <a16:creationId xmlns:a16="http://schemas.microsoft.com/office/drawing/2014/main" id="{880643CB-9B1B-440A-9134-3F58AD306618}"/>
               </a:ext>
             </a:extLst>
           </p:cNvPr>
@@ -42838,7 +42838,7 @@
           <p:cNvPr id="36" name="">
             <a:extLst xmlns:a="http://schemas.openxmlformats.org/drawingml/2006/main">
               <a:ext uri="{FF2B5EF4-FFF2-40B4-BE49-F238E27FC236}">
-                <a16:creationId xmlns:a16="http://schemas.microsoft.com/office/drawing/2014/main" id="{1B9C6203-96B0-404E-8715-97445118C6E5}"/>
+                <a16:creationId xmlns:a16="http://schemas.microsoft.com/office/drawing/2014/main" id="{ABB52E2E-81A5-4BE1-9795-73EF8B6AFE87}"/>
               </a:ext>
             </a:extLst>
           </p:cNvPr>
@@ -42902,7 +42902,7 @@
           <p:cNvPr id="37" name="">
             <a:extLst xmlns:a="http://schemas.openxmlformats.org/drawingml/2006/main">
               <a:ext uri="{FF2B5EF4-FFF2-40B4-BE49-F238E27FC236}">
-                <a16:creationId xmlns:a16="http://schemas.microsoft.com/office/drawing/2014/main" id="{77F8D24E-77E5-4952-B836-820B59408DAB}"/>
+                <a16:creationId xmlns:a16="http://schemas.microsoft.com/office/drawing/2014/main" id="{D95DEDD8-85B0-4B3F-9E23-F9B44C36F751}"/>
               </a:ext>
             </a:extLst>
           </p:cNvPr>
@@ -42964,7 +42964,7 @@
     </p:spTree>
     <p:extLst>
       <p:ext uri="{BB962C8B-B14F-4D97-AF65-F5344CB8AC3E}">
-        <p14:creationId xmlns:p14="http://schemas.microsoft.com/office/powerpoint/2010/main" val="472306283"/>
+        <p14:creationId xmlns:p14="http://schemas.microsoft.com/office/powerpoint/2010/main" val="705850985"/>
       </p:ext>
     </p:extLst>
   </p:cSld>
